--- a/slides/Flli_Ferrari_Market_Strategy_v5.pptx
+++ b/slides/Flli_Ferrari_Market_Strategy_v5.pptx
@@ -14117,7 +14117,7 @@
                 <a:ea typeface="Arial" pitchFamily="34" charset="-122"/>
                 <a:cs typeface="Arial" pitchFamily="34" charset="-120"/>
               </a:rPr>
-              <a:t>Medium (1/2): F.lli Ferrari costs less than all 9 top models of Sany Palfinger, Amco Veba and XCMG</a:t>
+              <a:t>Medium: F.lli Ferrari costs less than 1 of 9 models from Sany Palfinger, Amco Veba and XCMG</a:t>
             </a:r>
             <a:endParaRPr lang="en-US" sz="1800" dirty="0"/>
           </a:p>
@@ -15361,7 +15361,7 @@
                 <a:ea typeface="Arial" pitchFamily="34" charset="-122"/>
                 <a:cs typeface="Arial" pitchFamily="34" charset="-120"/>
               </a:rPr>
-              <a:t>Rp 200.000.000</a:t>
+              <a:t>Rp 520.000.000</a:t>
             </a:r>
             <a:endParaRPr lang="en-US" sz="950" dirty="0"/>
           </a:p>
@@ -15378,7 +15378,7 @@
                 <a:ea typeface="Arial" pitchFamily="34" charset="-122"/>
                 <a:cs typeface="Arial" pitchFamily="34" charset="-120"/>
               </a:rPr>
-              <a:t>68% cheaper</a:t>
+              <a:t>16% cheaper</a:t>
             </a:r>
             <a:endParaRPr lang="en-US" sz="950" dirty="0"/>
           </a:p>
@@ -15559,11 +15559,11 @@
             <a:avLst/>
           </a:prstGeom>
           <a:solidFill>
-            <a:srgbClr val="12301F"/>
+            <a:srgbClr val="3A0E14"/>
           </a:solidFill>
           <a:ln w="12700">
             <a:solidFill>
-              <a:srgbClr val="2FBF71"/>
+              <a:srgbClr val="3A0E14"/>
             </a:solidFill>
             <a:prstDash val="solid"/>
           </a:ln>
@@ -15659,7 +15659,7 @@
                 <a:ea typeface="Arial" pitchFamily="34" charset="-122"/>
                 <a:cs typeface="Arial" pitchFamily="34" charset="-120"/>
               </a:rPr>
-              <a:t>Rp 200.000.000</a:t>
+              <a:t>Rp 520.000.000</a:t>
             </a:r>
             <a:endParaRPr lang="en-US" sz="950" dirty="0"/>
           </a:p>
@@ -15670,13 +15670,13 @@
             <a:r>
               <a:rPr lang="en-US" sz="850" b="1" dirty="0">
                 <a:solidFill>
-                  <a:srgbClr val="2FBF71"/>
-                </a:solidFill>
-                <a:latin typeface="Arial" pitchFamily="34" charset="0"/>
-                <a:ea typeface="Arial" pitchFamily="34" charset="-122"/>
-                <a:cs typeface="Arial" pitchFamily="34" charset="-120"/>
-              </a:rPr>
-              <a:t>60% cheaper</a:t>
+                  <a:srgbClr val="FF8A8F"/>
+                </a:solidFill>
+                <a:latin typeface="Arial" pitchFamily="34" charset="0"/>
+                <a:ea typeface="Arial" pitchFamily="34" charset="-122"/>
+                <a:cs typeface="Arial" pitchFamily="34" charset="-120"/>
+              </a:rPr>
+              <a:t>5% higher</a:t>
             </a:r>
             <a:endParaRPr lang="en-US" sz="950" dirty="0"/>
           </a:p>
@@ -15938,11 +15938,11 @@
             <a:avLst/>
           </a:prstGeom>
           <a:solidFill>
-            <a:srgbClr val="12301F"/>
+            <a:srgbClr val="3A0E14"/>
           </a:solidFill>
           <a:ln w="12700">
             <a:solidFill>
-              <a:srgbClr val="2FBF71"/>
+              <a:srgbClr val="3A0E14"/>
             </a:solidFill>
             <a:prstDash val="solid"/>
           </a:ln>
@@ -16038,7 +16038,7 @@
                 <a:ea typeface="Arial" pitchFamily="34" charset="-122"/>
                 <a:cs typeface="Arial" pitchFamily="34" charset="-120"/>
               </a:rPr>
-              <a:t>Rp 230.000.000</a:t>
+              <a:t>Rp 1.120.000.000</a:t>
             </a:r>
             <a:endParaRPr lang="en-US" sz="950" dirty="0"/>
           </a:p>
@@ -16049,13 +16049,13 @@
             <a:r>
               <a:rPr lang="en-US" sz="850" b="1" dirty="0">
                 <a:solidFill>
-                  <a:srgbClr val="2FBF71"/>
-                </a:solidFill>
-                <a:latin typeface="Arial" pitchFamily="34" charset="0"/>
-                <a:ea typeface="Arial" pitchFamily="34" charset="-122"/>
-                <a:cs typeface="Arial" pitchFamily="34" charset="-120"/>
-              </a:rPr>
-              <a:t>48% cheaper</a:t>
+                  <a:srgbClr val="FF8A8F"/>
+                </a:solidFill>
+                <a:latin typeface="Arial" pitchFamily="34" charset="0"/>
+                <a:ea typeface="Arial" pitchFamily="34" charset="-122"/>
+                <a:cs typeface="Arial" pitchFamily="34" charset="-120"/>
+              </a:rPr>
+              <a:t>154% higher</a:t>
             </a:r>
             <a:endParaRPr lang="en-US" sz="950" dirty="0"/>
           </a:p>
@@ -16236,11 +16236,11 @@
             <a:avLst/>
           </a:prstGeom>
           <a:solidFill>
-            <a:srgbClr val="12301F"/>
+            <a:srgbClr val="3A0E14"/>
           </a:solidFill>
           <a:ln w="12700">
             <a:solidFill>
-              <a:srgbClr val="2FBF71"/>
+              <a:srgbClr val="3A0E14"/>
             </a:solidFill>
             <a:prstDash val="solid"/>
           </a:ln>
@@ -16336,7 +16336,7 @@
                 <a:ea typeface="Arial" pitchFamily="34" charset="-122"/>
                 <a:cs typeface="Arial" pitchFamily="34" charset="-120"/>
               </a:rPr>
-              <a:t>Rp 230.000.000</a:t>
+              <a:t>Rp 1.120.000.000</a:t>
             </a:r>
             <a:endParaRPr lang="en-US" sz="950" dirty="0"/>
           </a:p>
@@ -16347,13 +16347,13 @@
             <a:r>
               <a:rPr lang="en-US" sz="850" b="1" dirty="0">
                 <a:solidFill>
-                  <a:srgbClr val="2FBF71"/>
-                </a:solidFill>
-                <a:latin typeface="Arial" pitchFamily="34" charset="0"/>
-                <a:ea typeface="Arial" pitchFamily="34" charset="-122"/>
-                <a:cs typeface="Arial" pitchFamily="34" charset="-120"/>
-              </a:rPr>
-              <a:t>72% cheaper</a:t>
+                  <a:srgbClr val="FF8A8F"/>
+                </a:solidFill>
+                <a:latin typeface="Arial" pitchFamily="34" charset="0"/>
+                <a:ea typeface="Arial" pitchFamily="34" charset="-122"/>
+                <a:cs typeface="Arial" pitchFamily="34" charset="-120"/>
+              </a:rPr>
+              <a:t>35% higher</a:t>
             </a:r>
             <a:endParaRPr lang="en-US" sz="950" dirty="0"/>
           </a:p>
@@ -16534,11 +16534,11 @@
             <a:avLst/>
           </a:prstGeom>
           <a:solidFill>
-            <a:srgbClr val="12301F"/>
+            <a:srgbClr val="3A0E14"/>
           </a:solidFill>
           <a:ln w="12700">
             <a:solidFill>
-              <a:srgbClr val="2FBF71"/>
+              <a:srgbClr val="3A0E14"/>
             </a:solidFill>
             <a:prstDash val="solid"/>
           </a:ln>
@@ -16617,7 +16617,7 @@
                 <a:ea typeface="Arial" pitchFamily="34" charset="-122"/>
                 <a:cs typeface="Arial" pitchFamily="34" charset="-120"/>
               </a:rPr>
-              <a:t>Rp 230.000.000</a:t>
+              <a:t>Rp 1.120.000.000</a:t>
             </a:r>
             <a:endParaRPr lang="en-US" sz="800" dirty="0"/>
           </a:p>
@@ -16628,13 +16628,13 @@
             <a:r>
               <a:rPr lang="en-US" sz="700" b="1" dirty="0">
                 <a:solidFill>
-                  <a:srgbClr val="2FBF71"/>
-                </a:solidFill>
-                <a:latin typeface="Arial" pitchFamily="34" charset="0"/>
-                <a:ea typeface="Arial" pitchFamily="34" charset="-122"/>
-                <a:cs typeface="Arial" pitchFamily="34" charset="-120"/>
-              </a:rPr>
-              <a:t>67% cheaper</a:t>
+                  <a:srgbClr val="FF8A8F"/>
+                </a:solidFill>
+                <a:latin typeface="Arial" pitchFamily="34" charset="0"/>
+                <a:ea typeface="Arial" pitchFamily="34" charset="-122"/>
+                <a:cs typeface="Arial" pitchFamily="34" charset="-120"/>
+              </a:rPr>
+              <a:t>62% higher</a:t>
             </a:r>
             <a:endParaRPr lang="en-US" sz="800" dirty="0"/>
           </a:p>
@@ -16760,6 +16760,1333 @@
           <a:xfrm>
             <a:off x="10055352" y="3439287"/>
             <a:ext cx="1658112" cy="378333"/>
+          </a:xfrm>
+          <a:prstGeom prst="rect">
+            <a:avLst/>
+          </a:prstGeom>
+          <a:solidFill>
+            <a:srgbClr val="3A0E14"/>
+          </a:solidFill>
+          <a:ln w="12700">
+            <a:solidFill>
+              <a:srgbClr val="3A0E14"/>
+            </a:solidFill>
+            <a:prstDash val="solid"/>
+          </a:ln>
+        </p:spPr>
+      </p:sp>
+      <p:pic>
+        <p:nvPicPr>
+          <p:cNvPr id="75" name="Image 14" descr="assets/photo_fbr350r.jpg">    </p:cNvPr>
+          <p:cNvPicPr>
+            <a:picLocks noChangeAspect="1"/>
+          </p:cNvPicPr>
+          <p:nvPr/>
+        </p:nvPicPr>
+        <p:blipFill>
+          <a:blip r:embed="rId15"/>
+          <a:srcRect l="0" r="0" t="0" b="0"/>
+          <a:stretch/>
+        </p:blipFill>
+        <p:spPr>
+          <a:xfrm>
+            <a:off x="10101072" y="3466719"/>
+            <a:ext cx="478860" cy="360045"/>
+          </a:xfrm>
+          <a:prstGeom prst="rect">
+            <a:avLst/>
+          </a:prstGeom>
+        </p:spPr>
+      </p:pic>
+      <p:sp>
+        <p:nvSpPr>
+          <p:cNvPr id="76" name="Text 59"/>
+          <p:cNvSpPr txBox="1"/>
+          <p:nvPr/>
+        </p:nvSpPr>
+        <p:spPr>
+          <a:xfrm>
+            <a:off x="10634796" y="3439287"/>
+            <a:ext cx="1087812" cy="414909"/>
+          </a:xfrm>
+          <a:prstGeom prst="rect">
+            <a:avLst/>
+          </a:prstGeom>
+          <a:noFill/>
+          <a:ln/>
+        </p:spPr>
+        <p:txBody>
+          <a:bodyPr wrap="square" lIns="0" tIns="0" rIns="0" bIns="0" rtlCol="0" anchor="ctr"/>
+          <a:lstStyle/>
+          <a:p>
+            <a:pPr indent="0" marL="0">
+              <a:buNone/>
+            </a:pPr>
+            <a:r>
+              <a:rPr lang="en-US" sz="800" b="1" dirty="0">
+                <a:solidFill>
+                  <a:srgbClr val="FFFFFF"/>
+                </a:solidFill>
+                <a:latin typeface="Arial" pitchFamily="34" charset="0"/>
+                <a:ea typeface="Arial" pitchFamily="34" charset="-122"/>
+                <a:cs typeface="Arial" pitchFamily="34" charset="-120"/>
+              </a:rPr>
+              <a:t>FBR350R A4</a:t>
+            </a:r>
+            <a:endParaRPr lang="en-US" sz="800" dirty="0"/>
+          </a:p>
+          <a:p>
+            <a:pPr indent="0" marL="0">
+              <a:buNone/>
+            </a:pPr>
+            <a:r>
+              <a:rPr lang="en-US" sz="700" dirty="0">
+                <a:solidFill>
+                  <a:srgbClr val="FFFFFF"/>
+                </a:solidFill>
+                <a:latin typeface="Arial" pitchFamily="34" charset="0"/>
+                <a:ea typeface="Arial" pitchFamily="34" charset="-122"/>
+                <a:cs typeface="Arial" pitchFamily="34" charset="-120"/>
+              </a:rPr>
+              <a:t>Rp 1.120.000.000</a:t>
+            </a:r>
+            <a:endParaRPr lang="en-US" sz="800" dirty="0"/>
+          </a:p>
+          <a:p>
+            <a:pPr indent="0" marL="0">
+              <a:buNone/>
+            </a:pPr>
+            <a:r>
+              <a:rPr lang="en-US" sz="700" b="1" dirty="0">
+                <a:solidFill>
+                  <a:srgbClr val="FF8A8F"/>
+                </a:solidFill>
+                <a:latin typeface="Arial" pitchFamily="34" charset="0"/>
+                <a:ea typeface="Arial" pitchFamily="34" charset="-122"/>
+                <a:cs typeface="Arial" pitchFamily="34" charset="-120"/>
+              </a:rPr>
+              <a:t>105% higher</a:t>
+            </a:r>
+            <a:endParaRPr lang="en-US" sz="800" dirty="0"/>
+          </a:p>
+        </p:txBody>
+      </p:sp>
+      <p:sp>
+        <p:nvSpPr>
+          <p:cNvPr id="77" name="Shape 60"/>
+          <p:cNvSpPr/>
+          <p:nvPr/>
+        </p:nvSpPr>
+        <p:spPr>
+          <a:xfrm>
+            <a:off x="411480" y="3918204"/>
+            <a:ext cx="832104" cy="939546"/>
+          </a:xfrm>
+          <a:prstGeom prst="rect">
+            <a:avLst/>
+          </a:prstGeom>
+          <a:solidFill>
+            <a:srgbClr val="161D25"/>
+          </a:solidFill>
+          <a:ln w="12700">
+            <a:solidFill>
+              <a:srgbClr val="161D25"/>
+            </a:solidFill>
+            <a:prstDash val="solid"/>
+          </a:ln>
+        </p:spPr>
+      </p:sp>
+      <p:sp>
+        <p:nvSpPr>
+          <p:cNvPr id="78" name="Text 61"/>
+          <p:cNvSpPr txBox="1"/>
+          <p:nvPr/>
+        </p:nvSpPr>
+        <p:spPr>
+          <a:xfrm>
+            <a:off x="411480" y="3918204"/>
+            <a:ext cx="832104" cy="939546"/>
+          </a:xfrm>
+          <a:prstGeom prst="rect">
+            <a:avLst/>
+          </a:prstGeom>
+          <a:noFill/>
+          <a:ln/>
+        </p:spPr>
+        <p:txBody>
+          <a:bodyPr wrap="square" lIns="0" tIns="0" rIns="0" bIns="0" rtlCol="0" anchor="ctr"/>
+          <a:lstStyle/>
+          <a:p>
+            <a:pPr algn="ctr" indent="0" marL="0">
+              <a:buNone/>
+            </a:pPr>
+            <a:r>
+              <a:rPr lang="en-US" sz="1200" b="1" dirty="0">
+                <a:solidFill>
+                  <a:srgbClr val="F2A33A"/>
+                </a:solidFill>
+                <a:latin typeface="Arial" pitchFamily="34" charset="0"/>
+                <a:ea typeface="Arial" pitchFamily="34" charset="-122"/>
+                <a:cs typeface="Arial" pitchFamily="34" charset="-120"/>
+              </a:rPr>
+              <a:t>&gt;35–40 tm</a:t>
+            </a:r>
+            <a:endParaRPr lang="en-US" sz="1200" dirty="0"/>
+          </a:p>
+          <a:p>
+            <a:pPr algn="ctr" indent="0" marL="0">
+              <a:buNone/>
+            </a:pPr>
+            <a:r>
+              <a:rPr lang="en-US" sz="850" dirty="0">
+                <a:solidFill>
+                  <a:srgbClr val="9AA6B2"/>
+                </a:solidFill>
+                <a:latin typeface="Arial" pitchFamily="34" charset="0"/>
+                <a:ea typeface="Arial" pitchFamily="34" charset="-122"/>
+                <a:cs typeface="Arial" pitchFamily="34" charset="-120"/>
+              </a:rPr>
+              <a:t>66 units</a:t>
+            </a:r>
+            <a:endParaRPr lang="en-US" sz="1200" dirty="0"/>
+          </a:p>
+        </p:txBody>
+      </p:sp>
+      <p:sp>
+        <p:nvSpPr>
+          <p:cNvPr id="79" name="Shape 62"/>
+          <p:cNvSpPr/>
+          <p:nvPr/>
+        </p:nvSpPr>
+        <p:spPr>
+          <a:xfrm>
+            <a:off x="1280160" y="3918204"/>
+            <a:ext cx="1712976" cy="939546"/>
+          </a:xfrm>
+          <a:prstGeom prst="rect">
+            <a:avLst/>
+          </a:prstGeom>
+          <a:solidFill>
+            <a:srgbClr val="161D25"/>
+          </a:solidFill>
+          <a:ln w="12700">
+            <a:solidFill>
+              <a:srgbClr val="161D25"/>
+            </a:solidFill>
+            <a:prstDash val="solid"/>
+          </a:ln>
+        </p:spPr>
+      </p:sp>
+      <p:sp>
+        <p:nvSpPr>
+          <p:cNvPr id="80" name="Shape 63"/>
+          <p:cNvSpPr/>
+          <p:nvPr/>
+        </p:nvSpPr>
+        <p:spPr>
+          <a:xfrm>
+            <a:off x="3029712" y="3918204"/>
+            <a:ext cx="1712976" cy="939546"/>
+          </a:xfrm>
+          <a:prstGeom prst="rect">
+            <a:avLst/>
+          </a:prstGeom>
+          <a:solidFill>
+            <a:srgbClr val="161D25"/>
+          </a:solidFill>
+          <a:ln w="12700">
+            <a:solidFill>
+              <a:srgbClr val="161D25"/>
+            </a:solidFill>
+            <a:prstDash val="solid"/>
+          </a:ln>
+        </p:spPr>
+      </p:sp>
+      <p:pic>
+        <p:nvPicPr>
+          <p:cNvPr id="81" name="Image 15" descr="assets/photo_spk36080.jpg">    </p:cNvPr>
+          <p:cNvPicPr>
+            <a:picLocks noChangeAspect="1"/>
+          </p:cNvPicPr>
+          <p:nvPr/>
+        </p:nvPicPr>
+        <p:blipFill>
+          <a:blip r:embed="rId16"/>
+          <a:srcRect l="0" r="0" t="0" b="0"/>
+          <a:stretch/>
+        </p:blipFill>
+        <p:spPr>
+          <a:xfrm>
+            <a:off x="1335024" y="3973068"/>
+            <a:ext cx="664830" cy="829818"/>
+          </a:xfrm>
+          <a:prstGeom prst="rect">
+            <a:avLst/>
+          </a:prstGeom>
+        </p:spPr>
+      </p:pic>
+      <p:sp>
+        <p:nvSpPr>
+          <p:cNvPr id="82" name="Text 64"/>
+          <p:cNvSpPr txBox="1"/>
+          <p:nvPr/>
+        </p:nvSpPr>
+        <p:spPr>
+          <a:xfrm>
+            <a:off x="2063862" y="3945636"/>
+            <a:ext cx="920130" cy="884682"/>
+          </a:xfrm>
+          <a:prstGeom prst="rect">
+            <a:avLst/>
+          </a:prstGeom>
+          <a:noFill/>
+          <a:ln/>
+        </p:spPr>
+        <p:txBody>
+          <a:bodyPr wrap="square" lIns="0" tIns="0" rIns="0" bIns="0" rtlCol="0" anchor="ctr"/>
+          <a:lstStyle/>
+          <a:p>
+            <a:pPr indent="0" marL="0">
+              <a:buNone/>
+            </a:pPr>
+            <a:r>
+              <a:rPr lang="en-US" sz="850" b="1" dirty="0">
+                <a:solidFill>
+                  <a:srgbClr val="F2A33A"/>
+                </a:solidFill>
+                <a:latin typeface="Arial" pitchFamily="34" charset="0"/>
+                <a:ea typeface="Arial" pitchFamily="34" charset="-122"/>
+                <a:cs typeface="Arial" pitchFamily="34" charset="-120"/>
+              </a:rPr>
+              <a:t>#1 </a:t>
+            </a:r>
+            <a:pPr indent="0" marL="0">
+              <a:buNone/>
+            </a:pPr>
+            <a:r>
+              <a:rPr lang="en-US" sz="950" b="1" dirty="0">
+                <a:solidFill>
+                  <a:srgbClr val="EEF1F4"/>
+                </a:solidFill>
+                <a:latin typeface="Arial" pitchFamily="34" charset="0"/>
+                <a:ea typeface="Arial" pitchFamily="34" charset="-122"/>
+                <a:cs typeface="Arial" pitchFamily="34" charset="-120"/>
+              </a:rPr>
+              <a:t>SPK36080</a:t>
+            </a:r>
+            <a:endParaRPr lang="en-US" sz="850" dirty="0"/>
+          </a:p>
+          <a:p>
+            <a:pPr indent="0" marL="0">
+              <a:buNone/>
+            </a:pPr>
+            <a:r>
+              <a:rPr lang="en-US" sz="800" dirty="0">
+                <a:solidFill>
+                  <a:srgbClr val="9AA6B2"/>
+                </a:solidFill>
+                <a:latin typeface="Arial" pitchFamily="34" charset="0"/>
+                <a:ea typeface="Arial" pitchFamily="34" charset="-122"/>
+                <a:cs typeface="Arial" pitchFamily="34" charset="-120"/>
+              </a:rPr>
+              <a:t>36 tm · 34 units</a:t>
+            </a:r>
+            <a:endParaRPr lang="en-US" sz="850" dirty="0"/>
+          </a:p>
+          <a:p>
+            <a:pPr indent="0" marL="0">
+              <a:buNone/>
+            </a:pPr>
+            <a:r>
+              <a:rPr lang="en-US" sz="850" dirty="0">
+                <a:solidFill>
+                  <a:srgbClr val="EEF1F4"/>
+                </a:solidFill>
+                <a:latin typeface="Arial" pitchFamily="34" charset="0"/>
+                <a:ea typeface="Arial" pitchFamily="34" charset="-122"/>
+                <a:cs typeface="Arial" pitchFamily="34" charset="-120"/>
+              </a:rPr>
+              <a:t>Rp 490.000.000</a:t>
+            </a:r>
+            <a:endParaRPr lang="en-US" sz="850" dirty="0"/>
+          </a:p>
+        </p:txBody>
+      </p:sp>
+      <p:sp>
+        <p:nvSpPr>
+          <p:cNvPr id="83" name="Shape 65"/>
+          <p:cNvSpPr/>
+          <p:nvPr/>
+        </p:nvSpPr>
+        <p:spPr>
+          <a:xfrm>
+            <a:off x="3057144" y="3945636"/>
+            <a:ext cx="1658112" cy="848106"/>
+          </a:xfrm>
+          <a:prstGeom prst="rect">
+            <a:avLst/>
+          </a:prstGeom>
+          <a:solidFill>
+            <a:srgbClr val="3A0E14"/>
+          </a:solidFill>
+          <a:ln w="12700">
+            <a:solidFill>
+              <a:srgbClr val="3A0E14"/>
+            </a:solidFill>
+            <a:prstDash val="solid"/>
+          </a:ln>
+        </p:spPr>
+      </p:sp>
+      <p:pic>
+        <p:nvPicPr>
+          <p:cNvPr id="84" name="Image 16" descr="assets/photo_7441c.jpg">    </p:cNvPr>
+          <p:cNvPicPr>
+            <a:picLocks noChangeAspect="1"/>
+          </p:cNvPicPr>
+          <p:nvPr/>
+        </p:nvPicPr>
+        <p:blipFill>
+          <a:blip r:embed="rId17"/>
+          <a:srcRect l="0" r="0" t="0" b="0"/>
+          <a:stretch/>
+        </p:blipFill>
+        <p:spPr>
+          <a:xfrm>
+            <a:off x="3102864" y="3973068"/>
+            <a:ext cx="664830" cy="829818"/>
+          </a:xfrm>
+          <a:prstGeom prst="rect">
+            <a:avLst/>
+          </a:prstGeom>
+        </p:spPr>
+      </p:pic>
+      <p:sp>
+        <p:nvSpPr>
+          <p:cNvPr id="85" name="Text 66"/>
+          <p:cNvSpPr txBox="1"/>
+          <p:nvPr/>
+        </p:nvSpPr>
+        <p:spPr>
+          <a:xfrm>
+            <a:off x="3822558" y="3945636"/>
+            <a:ext cx="901842" cy="884682"/>
+          </a:xfrm>
+          <a:prstGeom prst="rect">
+            <a:avLst/>
+          </a:prstGeom>
+          <a:noFill/>
+          <a:ln/>
+        </p:spPr>
+        <p:txBody>
+          <a:bodyPr wrap="square" lIns="0" tIns="0" rIns="0" bIns="0" rtlCol="0" anchor="ctr"/>
+          <a:lstStyle/>
+          <a:p>
+            <a:pPr indent="0" marL="0">
+              <a:buNone/>
+            </a:pPr>
+            <a:r>
+              <a:rPr lang="en-US" sz="950" b="1" dirty="0">
+                <a:solidFill>
+                  <a:srgbClr val="FFFFFF"/>
+                </a:solidFill>
+                <a:latin typeface="Arial" pitchFamily="34" charset="0"/>
+                <a:ea typeface="Arial" pitchFamily="34" charset="-122"/>
+                <a:cs typeface="Arial" pitchFamily="34" charset="-120"/>
+              </a:rPr>
+              <a:t>7441C</a:t>
+            </a:r>
+            <a:endParaRPr lang="en-US" sz="950" dirty="0"/>
+          </a:p>
+          <a:p>
+            <a:pPr indent="0" marL="0">
+              <a:buNone/>
+            </a:pPr>
+            <a:r>
+              <a:rPr lang="en-US" sz="800" dirty="0">
+                <a:solidFill>
+                  <a:srgbClr val="9AA6B2"/>
+                </a:solidFill>
+                <a:latin typeface="Arial" pitchFamily="34" charset="0"/>
+                <a:ea typeface="Arial" pitchFamily="34" charset="-122"/>
+                <a:cs typeface="Arial" pitchFamily="34" charset="-120"/>
+              </a:rPr>
+              <a:t>37.7 tm</a:t>
+            </a:r>
+            <a:endParaRPr lang="en-US" sz="950" dirty="0"/>
+          </a:p>
+          <a:p>
+            <a:pPr indent="0" marL="0">
+              <a:buNone/>
+            </a:pPr>
+            <a:r>
+              <a:rPr lang="en-US" sz="850" dirty="0">
+                <a:solidFill>
+                  <a:srgbClr val="FFFFFF"/>
+                </a:solidFill>
+                <a:latin typeface="Arial" pitchFamily="34" charset="0"/>
+                <a:ea typeface="Arial" pitchFamily="34" charset="-122"/>
+                <a:cs typeface="Arial" pitchFamily="34" charset="-120"/>
+              </a:rPr>
+              <a:t>Rp 1.280.000.000 (est.)</a:t>
+            </a:r>
+            <a:endParaRPr lang="en-US" sz="950" dirty="0"/>
+          </a:p>
+          <a:p>
+            <a:pPr indent="0" marL="0">
+              <a:buNone/>
+            </a:pPr>
+            <a:r>
+              <a:rPr lang="en-US" sz="850" b="1" dirty="0">
+                <a:solidFill>
+                  <a:srgbClr val="FF8A8F"/>
+                </a:solidFill>
+                <a:latin typeface="Arial" pitchFamily="34" charset="0"/>
+                <a:ea typeface="Arial" pitchFamily="34" charset="-122"/>
+                <a:cs typeface="Arial" pitchFamily="34" charset="-120"/>
+              </a:rPr>
+              <a:t>161% higher</a:t>
+            </a:r>
+            <a:endParaRPr lang="en-US" sz="950" dirty="0"/>
+          </a:p>
+        </p:txBody>
+      </p:sp>
+      <p:sp>
+        <p:nvSpPr>
+          <p:cNvPr id="86" name="Shape 67"/>
+          <p:cNvSpPr/>
+          <p:nvPr/>
+        </p:nvSpPr>
+        <p:spPr>
+          <a:xfrm>
+            <a:off x="4779264" y="3918204"/>
+            <a:ext cx="1712976" cy="939546"/>
+          </a:xfrm>
+          <a:prstGeom prst="rect">
+            <a:avLst/>
+          </a:prstGeom>
+          <a:solidFill>
+            <a:srgbClr val="161D25"/>
+          </a:solidFill>
+          <a:ln w="12700">
+            <a:solidFill>
+              <a:srgbClr val="161D25"/>
+            </a:solidFill>
+            <a:prstDash val="solid"/>
+          </a:ln>
+        </p:spPr>
+      </p:sp>
+      <p:sp>
+        <p:nvSpPr>
+          <p:cNvPr id="87" name="Shape 68"/>
+          <p:cNvSpPr/>
+          <p:nvPr/>
+        </p:nvSpPr>
+        <p:spPr>
+          <a:xfrm>
+            <a:off x="6528816" y="3918204"/>
+            <a:ext cx="1712976" cy="939546"/>
+          </a:xfrm>
+          <a:prstGeom prst="rect">
+            <a:avLst/>
+          </a:prstGeom>
+          <a:solidFill>
+            <a:srgbClr val="161D25"/>
+          </a:solidFill>
+          <a:ln w="12700">
+            <a:solidFill>
+              <a:srgbClr val="161D25"/>
+            </a:solidFill>
+            <a:prstDash val="solid"/>
+          </a:ln>
+        </p:spPr>
+      </p:sp>
+      <p:sp>
+        <p:nvSpPr>
+          <p:cNvPr id="88" name="Shape 69"/>
+          <p:cNvSpPr/>
+          <p:nvPr/>
+        </p:nvSpPr>
+        <p:spPr>
+          <a:xfrm>
+            <a:off x="8278368" y="3918204"/>
+            <a:ext cx="1712976" cy="939546"/>
+          </a:xfrm>
+          <a:prstGeom prst="rect">
+            <a:avLst/>
+          </a:prstGeom>
+          <a:solidFill>
+            <a:srgbClr val="161D25"/>
+          </a:solidFill>
+          <a:ln w="12700">
+            <a:solidFill>
+              <a:srgbClr val="161D25"/>
+            </a:solidFill>
+            <a:prstDash val="solid"/>
+          </a:ln>
+        </p:spPr>
+      </p:sp>
+      <p:sp>
+        <p:nvSpPr>
+          <p:cNvPr id="89" name="Shape 70"/>
+          <p:cNvSpPr/>
+          <p:nvPr/>
+        </p:nvSpPr>
+        <p:spPr>
+          <a:xfrm>
+            <a:off x="10027920" y="3918204"/>
+            <a:ext cx="1712976" cy="939546"/>
+          </a:xfrm>
+          <a:prstGeom prst="rect">
+            <a:avLst/>
+          </a:prstGeom>
+          <a:solidFill>
+            <a:srgbClr val="161D25"/>
+          </a:solidFill>
+          <a:ln w="12700">
+            <a:solidFill>
+              <a:srgbClr val="161D25"/>
+            </a:solidFill>
+            <a:prstDash val="solid"/>
+          </a:ln>
+        </p:spPr>
+      </p:sp>
+      <p:sp>
+        <p:nvSpPr>
+          <p:cNvPr id="90" name="Shape 71"/>
+          <p:cNvSpPr/>
+          <p:nvPr/>
+        </p:nvSpPr>
+        <p:spPr>
+          <a:xfrm>
+            <a:off x="411480" y="4894326"/>
+            <a:ext cx="832104" cy="939546"/>
+          </a:xfrm>
+          <a:prstGeom prst="rect">
+            <a:avLst/>
+          </a:prstGeom>
+          <a:solidFill>
+            <a:srgbClr val="161D25"/>
+          </a:solidFill>
+          <a:ln w="12700">
+            <a:solidFill>
+              <a:srgbClr val="161D25"/>
+            </a:solidFill>
+            <a:prstDash val="solid"/>
+          </a:ln>
+        </p:spPr>
+      </p:sp>
+      <p:sp>
+        <p:nvSpPr>
+          <p:cNvPr id="91" name="Text 72"/>
+          <p:cNvSpPr txBox="1"/>
+          <p:nvPr/>
+        </p:nvSpPr>
+        <p:spPr>
+          <a:xfrm>
+            <a:off x="411480" y="4894326"/>
+            <a:ext cx="832104" cy="939546"/>
+          </a:xfrm>
+          <a:prstGeom prst="rect">
+            <a:avLst/>
+          </a:prstGeom>
+          <a:noFill/>
+          <a:ln/>
+        </p:spPr>
+        <p:txBody>
+          <a:bodyPr wrap="square" lIns="0" tIns="0" rIns="0" bIns="0" rtlCol="0" anchor="ctr"/>
+          <a:lstStyle/>
+          <a:p>
+            <a:pPr algn="ctr" indent="0" marL="0">
+              <a:buNone/>
+            </a:pPr>
+            <a:r>
+              <a:rPr lang="en-US" sz="1200" b="1" dirty="0">
+                <a:solidFill>
+                  <a:srgbClr val="F2A33A"/>
+                </a:solidFill>
+                <a:latin typeface="Arial" pitchFamily="34" charset="0"/>
+                <a:ea typeface="Arial" pitchFamily="34" charset="-122"/>
+                <a:cs typeface="Arial" pitchFamily="34" charset="-120"/>
+              </a:rPr>
+              <a:t>&gt;40–45 tm</a:t>
+            </a:r>
+            <a:endParaRPr lang="en-US" sz="1200" dirty="0"/>
+          </a:p>
+          <a:p>
+            <a:pPr algn="ctr" indent="0" marL="0">
+              <a:buNone/>
+            </a:pPr>
+            <a:r>
+              <a:rPr lang="en-US" sz="850" dirty="0">
+                <a:solidFill>
+                  <a:srgbClr val="9AA6B2"/>
+                </a:solidFill>
+                <a:latin typeface="Arial" pitchFamily="34" charset="0"/>
+                <a:ea typeface="Arial" pitchFamily="34" charset="-122"/>
+                <a:cs typeface="Arial" pitchFamily="34" charset="-120"/>
+              </a:rPr>
+              <a:t>23 units</a:t>
+            </a:r>
+            <a:endParaRPr lang="en-US" sz="1200" dirty="0"/>
+          </a:p>
+        </p:txBody>
+      </p:sp>
+      <p:sp>
+        <p:nvSpPr>
+          <p:cNvPr id="92" name="Shape 73"/>
+          <p:cNvSpPr/>
+          <p:nvPr/>
+        </p:nvSpPr>
+        <p:spPr>
+          <a:xfrm>
+            <a:off x="1280160" y="4894326"/>
+            <a:ext cx="1712976" cy="939546"/>
+          </a:xfrm>
+          <a:prstGeom prst="rect">
+            <a:avLst/>
+          </a:prstGeom>
+          <a:solidFill>
+            <a:srgbClr val="161D25"/>
+          </a:solidFill>
+          <a:ln w="12700">
+            <a:solidFill>
+              <a:srgbClr val="161D25"/>
+            </a:solidFill>
+            <a:prstDash val="solid"/>
+          </a:ln>
+        </p:spPr>
+      </p:sp>
+      <p:sp>
+        <p:nvSpPr>
+          <p:cNvPr id="93" name="Shape 74"/>
+          <p:cNvSpPr/>
+          <p:nvPr/>
+        </p:nvSpPr>
+        <p:spPr>
+          <a:xfrm>
+            <a:off x="3029712" y="4894326"/>
+            <a:ext cx="1712976" cy="939546"/>
+          </a:xfrm>
+          <a:prstGeom prst="rect">
+            <a:avLst/>
+          </a:prstGeom>
+          <a:solidFill>
+            <a:srgbClr val="161D25"/>
+          </a:solidFill>
+          <a:ln w="12700">
+            <a:solidFill>
+              <a:srgbClr val="161D25"/>
+            </a:solidFill>
+            <a:prstDash val="solid"/>
+          </a:ln>
+        </p:spPr>
+      </p:sp>
+      <p:pic>
+        <p:nvPicPr>
+          <p:cNvPr id="94" name="Image 17" descr="assets/photo_spk42502.jpg">    </p:cNvPr>
+          <p:cNvPicPr>
+            <a:picLocks noChangeAspect="1"/>
+          </p:cNvPicPr>
+          <p:nvPr/>
+        </p:nvPicPr>
+        <p:blipFill>
+          <a:blip r:embed="rId18"/>
+          <a:srcRect l="0" r="0" t="0" b="0"/>
+          <a:stretch/>
+        </p:blipFill>
+        <p:spPr>
+          <a:xfrm>
+            <a:off x="1335024" y="4949190"/>
+            <a:ext cx="664830" cy="829818"/>
+          </a:xfrm>
+          <a:prstGeom prst="rect">
+            <a:avLst/>
+          </a:prstGeom>
+        </p:spPr>
+      </p:pic>
+      <p:sp>
+        <p:nvSpPr>
+          <p:cNvPr id="95" name="Text 75"/>
+          <p:cNvSpPr txBox="1"/>
+          <p:nvPr/>
+        </p:nvSpPr>
+        <p:spPr>
+          <a:xfrm>
+            <a:off x="2063862" y="4921758"/>
+            <a:ext cx="920130" cy="884682"/>
+          </a:xfrm>
+          <a:prstGeom prst="rect">
+            <a:avLst/>
+          </a:prstGeom>
+          <a:noFill/>
+          <a:ln/>
+        </p:spPr>
+        <p:txBody>
+          <a:bodyPr wrap="square" lIns="0" tIns="0" rIns="0" bIns="0" rtlCol="0" anchor="ctr"/>
+          <a:lstStyle/>
+          <a:p>
+            <a:pPr indent="0" marL="0">
+              <a:buNone/>
+            </a:pPr>
+            <a:r>
+              <a:rPr lang="en-US" sz="850" b="1" dirty="0">
+                <a:solidFill>
+                  <a:srgbClr val="F2A33A"/>
+                </a:solidFill>
+                <a:latin typeface="Arial" pitchFamily="34" charset="0"/>
+                <a:ea typeface="Arial" pitchFamily="34" charset="-122"/>
+                <a:cs typeface="Arial" pitchFamily="34" charset="-120"/>
+              </a:rPr>
+              <a:t>#3 </a:t>
+            </a:r>
+            <a:pPr indent="0" marL="0">
+              <a:buNone/>
+            </a:pPr>
+            <a:r>
+              <a:rPr lang="en-US" sz="950" b="1" dirty="0">
+                <a:solidFill>
+                  <a:srgbClr val="EEF1F4"/>
+                </a:solidFill>
+                <a:latin typeface="Arial" pitchFamily="34" charset="0"/>
+                <a:ea typeface="Arial" pitchFamily="34" charset="-122"/>
+                <a:cs typeface="Arial" pitchFamily="34" charset="-120"/>
+              </a:rPr>
+              <a:t>SPK42502</a:t>
+            </a:r>
+            <a:endParaRPr lang="en-US" sz="850" dirty="0"/>
+          </a:p>
+          <a:p>
+            <a:pPr indent="0" marL="0">
+              <a:buNone/>
+            </a:pPr>
+            <a:r>
+              <a:rPr lang="en-US" sz="800" dirty="0">
+                <a:solidFill>
+                  <a:srgbClr val="9AA6B2"/>
+                </a:solidFill>
+                <a:latin typeface="Arial" pitchFamily="34" charset="0"/>
+                <a:ea typeface="Arial" pitchFamily="34" charset="-122"/>
+                <a:cs typeface="Arial" pitchFamily="34" charset="-120"/>
+              </a:rPr>
+              <a:t>42.5 tm · 18 units</a:t>
+            </a:r>
+            <a:endParaRPr lang="en-US" sz="850" dirty="0"/>
+          </a:p>
+          <a:p>
+            <a:pPr indent="0" marL="0">
+              <a:buNone/>
+            </a:pPr>
+            <a:r>
+              <a:rPr lang="en-US" sz="850" dirty="0">
+                <a:solidFill>
+                  <a:srgbClr val="EEF1F4"/>
+                </a:solidFill>
+                <a:latin typeface="Arial" pitchFamily="34" charset="0"/>
+                <a:ea typeface="Arial" pitchFamily="34" charset="-122"/>
+                <a:cs typeface="Arial" pitchFamily="34" charset="-120"/>
+              </a:rPr>
+              <a:t>Rp 790.000.000</a:t>
+            </a:r>
+            <a:endParaRPr lang="en-US" sz="850" dirty="0"/>
+          </a:p>
+        </p:txBody>
+      </p:sp>
+      <p:sp>
+        <p:nvSpPr>
+          <p:cNvPr id="96" name="Shape 76"/>
+          <p:cNvSpPr/>
+          <p:nvPr/>
+        </p:nvSpPr>
+        <p:spPr>
+          <a:xfrm>
+            <a:off x="3057144" y="4921758"/>
+            <a:ext cx="1658112" cy="848106"/>
+          </a:xfrm>
+          <a:prstGeom prst="rect">
+            <a:avLst/>
+          </a:prstGeom>
+          <a:solidFill>
+            <a:srgbClr val="3A0E14"/>
+          </a:solidFill>
+          <a:ln w="12700">
+            <a:solidFill>
+              <a:srgbClr val="3A0E14"/>
+            </a:solidFill>
+            <a:prstDash val="solid"/>
+          </a:ln>
+        </p:spPr>
+      </p:sp>
+      <p:pic>
+        <p:nvPicPr>
+          <p:cNvPr id="97" name="Image 18" descr="assets/photo_746r.jpg">    </p:cNvPr>
+          <p:cNvPicPr>
+            <a:picLocks noChangeAspect="1"/>
+          </p:cNvPicPr>
+          <p:nvPr/>
+        </p:nvPicPr>
+        <p:blipFill>
+          <a:blip r:embed="rId19"/>
+          <a:srcRect l="0" r="0" t="0" b="0"/>
+          <a:stretch/>
+        </p:blipFill>
+        <p:spPr>
+          <a:xfrm>
+            <a:off x="3102864" y="4949190"/>
+            <a:ext cx="664830" cy="829818"/>
+          </a:xfrm>
+          <a:prstGeom prst="rect">
+            <a:avLst/>
+          </a:prstGeom>
+        </p:spPr>
+      </p:pic>
+      <p:sp>
+        <p:nvSpPr>
+          <p:cNvPr id="98" name="Text 77"/>
+          <p:cNvSpPr txBox="1"/>
+          <p:nvPr/>
+        </p:nvSpPr>
+        <p:spPr>
+          <a:xfrm>
+            <a:off x="3822558" y="4921758"/>
+            <a:ext cx="901842" cy="884682"/>
+          </a:xfrm>
+          <a:prstGeom prst="rect">
+            <a:avLst/>
+          </a:prstGeom>
+          <a:noFill/>
+          <a:ln/>
+        </p:spPr>
+        <p:txBody>
+          <a:bodyPr wrap="square" lIns="0" tIns="0" rIns="0" bIns="0" rtlCol="0" anchor="ctr"/>
+          <a:lstStyle/>
+          <a:p>
+            <a:pPr indent="0" marL="0">
+              <a:buNone/>
+            </a:pPr>
+            <a:r>
+              <a:rPr lang="en-US" sz="950" b="1" dirty="0">
+                <a:solidFill>
+                  <a:srgbClr val="FFFFFF"/>
+                </a:solidFill>
+                <a:latin typeface="Arial" pitchFamily="34" charset="0"/>
+                <a:ea typeface="Arial" pitchFamily="34" charset="-122"/>
+                <a:cs typeface="Arial" pitchFamily="34" charset="-120"/>
+              </a:rPr>
+              <a:t>746 A4</a:t>
+            </a:r>
+            <a:endParaRPr lang="en-US" sz="950" dirty="0"/>
+          </a:p>
+          <a:p>
+            <a:pPr indent="0" marL="0">
+              <a:buNone/>
+            </a:pPr>
+            <a:r>
+              <a:rPr lang="en-US" sz="800" dirty="0">
+                <a:solidFill>
+                  <a:srgbClr val="9AA6B2"/>
+                </a:solidFill>
+                <a:latin typeface="Arial" pitchFamily="34" charset="0"/>
+                <a:ea typeface="Arial" pitchFamily="34" charset="-122"/>
+                <a:cs typeface="Arial" pitchFamily="34" charset="-120"/>
+              </a:rPr>
+              <a:t>43.4 tm</a:t>
+            </a:r>
+            <a:endParaRPr lang="en-US" sz="950" dirty="0"/>
+          </a:p>
+          <a:p>
+            <a:pPr indent="0" marL="0">
+              <a:buNone/>
+            </a:pPr>
+            <a:r>
+              <a:rPr lang="en-US" sz="850" dirty="0">
+                <a:solidFill>
+                  <a:srgbClr val="FFFFFF"/>
+                </a:solidFill>
+                <a:latin typeface="Arial" pitchFamily="34" charset="0"/>
+                <a:ea typeface="Arial" pitchFamily="34" charset="-122"/>
+                <a:cs typeface="Arial" pitchFamily="34" charset="-120"/>
+              </a:rPr>
+              <a:t>Rp 1.460.000.000</a:t>
+            </a:r>
+            <a:endParaRPr lang="en-US" sz="950" dirty="0"/>
+          </a:p>
+          <a:p>
+            <a:pPr indent="0" marL="0">
+              <a:buNone/>
+            </a:pPr>
+            <a:r>
+              <a:rPr lang="en-US" sz="850" b="1" dirty="0">
+                <a:solidFill>
+                  <a:srgbClr val="FF8A8F"/>
+                </a:solidFill>
+                <a:latin typeface="Arial" pitchFamily="34" charset="0"/>
+                <a:ea typeface="Arial" pitchFamily="34" charset="-122"/>
+                <a:cs typeface="Arial" pitchFamily="34" charset="-120"/>
+              </a:rPr>
+              <a:t>86% higher</a:t>
+            </a:r>
+            <a:endParaRPr lang="en-US" sz="950" dirty="0"/>
+          </a:p>
+        </p:txBody>
+      </p:sp>
+      <p:sp>
+        <p:nvSpPr>
+          <p:cNvPr id="99" name="Shape 78"/>
+          <p:cNvSpPr/>
+          <p:nvPr/>
+        </p:nvSpPr>
+        <p:spPr>
+          <a:xfrm>
+            <a:off x="4779264" y="4894326"/>
+            <a:ext cx="1712976" cy="939546"/>
+          </a:xfrm>
+          <a:prstGeom prst="rect">
+            <a:avLst/>
+          </a:prstGeom>
+          <a:solidFill>
+            <a:srgbClr val="161D25"/>
+          </a:solidFill>
+          <a:ln w="12700">
+            <a:solidFill>
+              <a:srgbClr val="161D25"/>
+            </a:solidFill>
+            <a:prstDash val="solid"/>
+          </a:ln>
+        </p:spPr>
+      </p:sp>
+      <p:sp>
+        <p:nvSpPr>
+          <p:cNvPr id="100" name="Shape 79"/>
+          <p:cNvSpPr/>
+          <p:nvPr/>
+        </p:nvSpPr>
+        <p:spPr>
+          <a:xfrm>
+            <a:off x="6528816" y="4894326"/>
+            <a:ext cx="1712976" cy="939546"/>
+          </a:xfrm>
+          <a:prstGeom prst="rect">
+            <a:avLst/>
+          </a:prstGeom>
+          <a:solidFill>
+            <a:srgbClr val="161D25"/>
+          </a:solidFill>
+          <a:ln w="12700">
+            <a:solidFill>
+              <a:srgbClr val="161D25"/>
+            </a:solidFill>
+            <a:prstDash val="solid"/>
+          </a:ln>
+        </p:spPr>
+      </p:sp>
+      <p:pic>
+        <p:nvPicPr>
+          <p:cNvPr id="101" name="Image 19" descr="assets/photo_v946b.jpg">    </p:cNvPr>
+          <p:cNvPicPr>
+            <a:picLocks noChangeAspect="1"/>
+          </p:cNvPicPr>
+          <p:nvPr/>
+        </p:nvPicPr>
+        <p:blipFill>
+          <a:blip r:embed="rId20"/>
+          <a:srcRect l="0" r="0" t="0" b="0"/>
+          <a:stretch/>
+        </p:blipFill>
+        <p:spPr>
+          <a:xfrm>
+            <a:off x="4834128" y="4949190"/>
+            <a:ext cx="664830" cy="829818"/>
+          </a:xfrm>
+          <a:prstGeom prst="rect">
+            <a:avLst/>
+          </a:prstGeom>
+        </p:spPr>
+      </p:pic>
+      <p:sp>
+        <p:nvSpPr>
+          <p:cNvPr id="102" name="Text 80"/>
+          <p:cNvSpPr txBox="1"/>
+          <p:nvPr/>
+        </p:nvSpPr>
+        <p:spPr>
+          <a:xfrm>
+            <a:off x="5562966" y="4921758"/>
+            <a:ext cx="920130" cy="884682"/>
+          </a:xfrm>
+          <a:prstGeom prst="rect">
+            <a:avLst/>
+          </a:prstGeom>
+          <a:noFill/>
+          <a:ln/>
+        </p:spPr>
+        <p:txBody>
+          <a:bodyPr wrap="square" lIns="0" tIns="0" rIns="0" bIns="0" rtlCol="0" anchor="ctr"/>
+          <a:lstStyle/>
+          <a:p>
+            <a:pPr indent="0" marL="0">
+              <a:buNone/>
+            </a:pPr>
+            <a:r>
+              <a:rPr lang="en-US" sz="850" b="1" dirty="0">
+                <a:solidFill>
+                  <a:srgbClr val="F2A33A"/>
+                </a:solidFill>
+                <a:latin typeface="Arial" pitchFamily="34" charset="0"/>
+                <a:ea typeface="Arial" pitchFamily="34" charset="-122"/>
+                <a:cs typeface="Arial" pitchFamily="34" charset="-120"/>
+              </a:rPr>
+              <a:t>#3 </a:t>
+            </a:r>
+            <a:pPr indent="0" marL="0">
+              <a:buNone/>
+            </a:pPr>
+            <a:r>
+              <a:rPr lang="en-US" sz="950" b="1" dirty="0">
+                <a:solidFill>
+                  <a:srgbClr val="EEF1F4"/>
+                </a:solidFill>
+                <a:latin typeface="Arial" pitchFamily="34" charset="0"/>
+                <a:ea typeface="Arial" pitchFamily="34" charset="-122"/>
+                <a:cs typeface="Arial" pitchFamily="34" charset="-120"/>
+              </a:rPr>
+              <a:t>V946B</a:t>
+            </a:r>
+            <a:endParaRPr lang="en-US" sz="850" dirty="0"/>
+          </a:p>
+          <a:p>
+            <a:pPr indent="0" marL="0">
+              <a:buNone/>
+            </a:pPr>
+            <a:r>
+              <a:rPr lang="en-US" sz="800" dirty="0">
+                <a:solidFill>
+                  <a:srgbClr val="9AA6B2"/>
+                </a:solidFill>
+                <a:latin typeface="Arial" pitchFamily="34" charset="0"/>
+                <a:ea typeface="Arial" pitchFamily="34" charset="-122"/>
+                <a:cs typeface="Arial" pitchFamily="34" charset="-120"/>
+              </a:rPr>
+              <a:t>44.2 tm · 1 unit</a:t>
+            </a:r>
+            <a:endParaRPr lang="en-US" sz="850" dirty="0"/>
+          </a:p>
+          <a:p>
+            <a:pPr indent="0" marL="0">
+              <a:buNone/>
+            </a:pPr>
+            <a:r>
+              <a:rPr lang="en-US" sz="850" dirty="0">
+                <a:solidFill>
+                  <a:srgbClr val="EEF1F4"/>
+                </a:solidFill>
+                <a:latin typeface="Arial" pitchFamily="34" charset="0"/>
+                <a:ea typeface="Arial" pitchFamily="34" charset="-122"/>
+                <a:cs typeface="Arial" pitchFamily="34" charset="-120"/>
+              </a:rPr>
+              <a:t>Rp 1.270.000.000</a:t>
+            </a:r>
+            <a:endParaRPr lang="en-US" sz="850" dirty="0"/>
+          </a:p>
+        </p:txBody>
+      </p:sp>
+      <p:sp>
+        <p:nvSpPr>
+          <p:cNvPr id="103" name="Shape 81"/>
+          <p:cNvSpPr/>
+          <p:nvPr/>
+        </p:nvSpPr>
+        <p:spPr>
+          <a:xfrm>
+            <a:off x="6556248" y="4921758"/>
+            <a:ext cx="1658112" cy="848106"/>
+          </a:xfrm>
+          <a:prstGeom prst="rect">
+            <a:avLst/>
+          </a:prstGeom>
+          <a:solidFill>
+            <a:srgbClr val="3A0E14"/>
+          </a:solidFill>
+          <a:ln w="12700">
+            <a:solidFill>
+              <a:srgbClr val="3A0E14"/>
+            </a:solidFill>
+            <a:prstDash val="solid"/>
+          </a:ln>
+        </p:spPr>
+      </p:sp>
+      <p:pic>
+        <p:nvPicPr>
+          <p:cNvPr id="104" name="Image 20" descr="assets/photo_749r.jpg">    </p:cNvPr>
+          <p:cNvPicPr>
+            <a:picLocks noChangeAspect="1"/>
+          </p:cNvPicPr>
+          <p:nvPr/>
+        </p:nvPicPr>
+        <p:blipFill>
+          <a:blip r:embed="rId21"/>
+          <a:srcRect l="0" r="0" t="0" b="0"/>
+          <a:stretch/>
+        </p:blipFill>
+        <p:spPr>
+          <a:xfrm>
+            <a:off x="6601968" y="4949190"/>
+            <a:ext cx="664830" cy="829818"/>
+          </a:xfrm>
+          <a:prstGeom prst="rect">
+            <a:avLst/>
+          </a:prstGeom>
+        </p:spPr>
+      </p:pic>
+      <p:sp>
+        <p:nvSpPr>
+          <p:cNvPr id="105" name="Text 82"/>
+          <p:cNvSpPr txBox="1"/>
+          <p:nvPr/>
+        </p:nvSpPr>
+        <p:spPr>
+          <a:xfrm>
+            <a:off x="7321662" y="4921758"/>
+            <a:ext cx="901842" cy="884682"/>
+          </a:xfrm>
+          <a:prstGeom prst="rect">
+            <a:avLst/>
+          </a:prstGeom>
+          <a:noFill/>
+          <a:ln/>
+        </p:spPr>
+        <p:txBody>
+          <a:bodyPr wrap="square" lIns="0" tIns="0" rIns="0" bIns="0" rtlCol="0" anchor="ctr"/>
+          <a:lstStyle/>
+          <a:p>
+            <a:pPr indent="0" marL="0">
+              <a:buNone/>
+            </a:pPr>
+            <a:r>
+              <a:rPr lang="en-US" sz="950" b="1" dirty="0">
+                <a:solidFill>
+                  <a:srgbClr val="FFFFFF"/>
+                </a:solidFill>
+                <a:latin typeface="Arial" pitchFamily="34" charset="0"/>
+                <a:ea typeface="Arial" pitchFamily="34" charset="-122"/>
+                <a:cs typeface="Arial" pitchFamily="34" charset="-120"/>
+              </a:rPr>
+              <a:t>749R A4</a:t>
+            </a:r>
+            <a:endParaRPr lang="en-US" sz="950" dirty="0"/>
+          </a:p>
+          <a:p>
+            <a:pPr indent="0" marL="0">
+              <a:buNone/>
+            </a:pPr>
+            <a:r>
+              <a:rPr lang="en-US" sz="800" dirty="0">
+                <a:solidFill>
+                  <a:srgbClr val="9AA6B2"/>
+                </a:solidFill>
+                <a:latin typeface="Arial" pitchFamily="34" charset="0"/>
+                <a:ea typeface="Arial" pitchFamily="34" charset="-122"/>
+                <a:cs typeface="Arial" pitchFamily="34" charset="-120"/>
+              </a:rPr>
+              <a:t>44.7 tm</a:t>
+            </a:r>
+            <a:endParaRPr lang="en-US" sz="950" dirty="0"/>
+          </a:p>
+          <a:p>
+            <a:pPr indent="0" marL="0">
+              <a:buNone/>
+            </a:pPr>
+            <a:r>
+              <a:rPr lang="en-US" sz="850" dirty="0">
+                <a:solidFill>
+                  <a:srgbClr val="FFFFFF"/>
+                </a:solidFill>
+                <a:latin typeface="Arial" pitchFamily="34" charset="0"/>
+                <a:ea typeface="Arial" pitchFamily="34" charset="-122"/>
+                <a:cs typeface="Arial" pitchFamily="34" charset="-120"/>
+              </a:rPr>
+              <a:t>Rp 1.740.000.000</a:t>
+            </a:r>
+            <a:endParaRPr lang="en-US" sz="950" dirty="0"/>
+          </a:p>
+          <a:p>
+            <a:pPr indent="0" marL="0">
+              <a:buNone/>
+            </a:pPr>
+            <a:r>
+              <a:rPr lang="en-US" sz="850" b="1" dirty="0">
+                <a:solidFill>
+                  <a:srgbClr val="FF8A8F"/>
+                </a:solidFill>
+                <a:latin typeface="Arial" pitchFamily="34" charset="0"/>
+                <a:ea typeface="Arial" pitchFamily="34" charset="-122"/>
+                <a:cs typeface="Arial" pitchFamily="34" charset="-120"/>
+              </a:rPr>
+              <a:t>37% higher</a:t>
+            </a:r>
+            <a:endParaRPr lang="en-US" sz="950" dirty="0"/>
+          </a:p>
+        </p:txBody>
+      </p:sp>
+      <p:sp>
+        <p:nvSpPr>
+          <p:cNvPr id="106" name="Shape 83"/>
+          <p:cNvSpPr/>
+          <p:nvPr/>
+        </p:nvSpPr>
+        <p:spPr>
+          <a:xfrm>
+            <a:off x="8278368" y="4894326"/>
+            <a:ext cx="1712976" cy="939546"/>
+          </a:xfrm>
+          <a:prstGeom prst="rect">
+            <a:avLst/>
+          </a:prstGeom>
+          <a:solidFill>
+            <a:srgbClr val="161D25"/>
+          </a:solidFill>
+          <a:ln w="12700">
+            <a:solidFill>
+              <a:srgbClr val="161D25"/>
+            </a:solidFill>
+            <a:prstDash val="solid"/>
+          </a:ln>
+        </p:spPr>
+      </p:sp>
+      <p:sp>
+        <p:nvSpPr>
+          <p:cNvPr id="107" name="Shape 84"/>
+          <p:cNvSpPr/>
+          <p:nvPr/>
+        </p:nvSpPr>
+        <p:spPr>
+          <a:xfrm>
+            <a:off x="10027920" y="4894326"/>
+            <a:ext cx="1712976" cy="939546"/>
+          </a:xfrm>
+          <a:prstGeom prst="rect">
+            <a:avLst/>
+          </a:prstGeom>
+          <a:solidFill>
+            <a:srgbClr val="161D25"/>
+          </a:solidFill>
+          <a:ln w="12700">
+            <a:solidFill>
+              <a:srgbClr val="161D25"/>
+            </a:solidFill>
+            <a:prstDash val="solid"/>
+          </a:ln>
+        </p:spPr>
+      </p:sp>
+      <p:sp>
+        <p:nvSpPr>
+          <p:cNvPr id="108" name="Shape 85"/>
+          <p:cNvSpPr/>
+          <p:nvPr/>
+        </p:nvSpPr>
+        <p:spPr>
+          <a:xfrm>
+            <a:off x="411480" y="5943600"/>
+            <a:ext cx="182880" cy="128016"/>
           </a:xfrm>
           <a:prstGeom prst="rect">
             <a:avLst/>
@@ -16775,1333 +18102,6 @@
           </a:ln>
         </p:spPr>
       </p:sp>
-      <p:pic>
-        <p:nvPicPr>
-          <p:cNvPr id="75" name="Image 14" descr="assets/photo_fbr350r.jpg">    </p:cNvPr>
-          <p:cNvPicPr>
-            <a:picLocks noChangeAspect="1"/>
-          </p:cNvPicPr>
-          <p:nvPr/>
-        </p:nvPicPr>
-        <p:blipFill>
-          <a:blip r:embed="rId15"/>
-          <a:srcRect l="0" r="0" t="0" b="0"/>
-          <a:stretch/>
-        </p:blipFill>
-        <p:spPr>
-          <a:xfrm>
-            <a:off x="10101072" y="3466719"/>
-            <a:ext cx="478860" cy="360045"/>
-          </a:xfrm>
-          <a:prstGeom prst="rect">
-            <a:avLst/>
-          </a:prstGeom>
-        </p:spPr>
-      </p:pic>
-      <p:sp>
-        <p:nvSpPr>
-          <p:cNvPr id="76" name="Text 59"/>
-          <p:cNvSpPr txBox="1"/>
-          <p:nvPr/>
-        </p:nvSpPr>
-        <p:spPr>
-          <a:xfrm>
-            <a:off x="10634796" y="3439287"/>
-            <a:ext cx="1087812" cy="414909"/>
-          </a:xfrm>
-          <a:prstGeom prst="rect">
-            <a:avLst/>
-          </a:prstGeom>
-          <a:noFill/>
-          <a:ln/>
-        </p:spPr>
-        <p:txBody>
-          <a:bodyPr wrap="square" lIns="0" tIns="0" rIns="0" bIns="0" rtlCol="0" anchor="ctr"/>
-          <a:lstStyle/>
-          <a:p>
-            <a:pPr indent="0" marL="0">
-              <a:buNone/>
-            </a:pPr>
-            <a:r>
-              <a:rPr lang="en-US" sz="800" b="1" dirty="0">
-                <a:solidFill>
-                  <a:srgbClr val="FFFFFF"/>
-                </a:solidFill>
-                <a:latin typeface="Arial" pitchFamily="34" charset="0"/>
-                <a:ea typeface="Arial" pitchFamily="34" charset="-122"/>
-                <a:cs typeface="Arial" pitchFamily="34" charset="-120"/>
-              </a:rPr>
-              <a:t>FBR350R A4</a:t>
-            </a:r>
-            <a:endParaRPr lang="en-US" sz="800" dirty="0"/>
-          </a:p>
-          <a:p>
-            <a:pPr indent="0" marL="0">
-              <a:buNone/>
-            </a:pPr>
-            <a:r>
-              <a:rPr lang="en-US" sz="700" dirty="0">
-                <a:solidFill>
-                  <a:srgbClr val="FFFFFF"/>
-                </a:solidFill>
-                <a:latin typeface="Arial" pitchFamily="34" charset="0"/>
-                <a:ea typeface="Arial" pitchFamily="34" charset="-122"/>
-                <a:cs typeface="Arial" pitchFamily="34" charset="-120"/>
-              </a:rPr>
-              <a:t>Rp 230.000.000</a:t>
-            </a:r>
-            <a:endParaRPr lang="en-US" sz="800" dirty="0"/>
-          </a:p>
-          <a:p>
-            <a:pPr indent="0" marL="0">
-              <a:buNone/>
-            </a:pPr>
-            <a:r>
-              <a:rPr lang="en-US" sz="700" b="1" dirty="0">
-                <a:solidFill>
-                  <a:srgbClr val="2FBF71"/>
-                </a:solidFill>
-                <a:latin typeface="Arial" pitchFamily="34" charset="0"/>
-                <a:ea typeface="Arial" pitchFamily="34" charset="-122"/>
-                <a:cs typeface="Arial" pitchFamily="34" charset="-120"/>
-              </a:rPr>
-              <a:t>58% cheaper</a:t>
-            </a:r>
-            <a:endParaRPr lang="en-US" sz="800" dirty="0"/>
-          </a:p>
-        </p:txBody>
-      </p:sp>
-      <p:sp>
-        <p:nvSpPr>
-          <p:cNvPr id="77" name="Shape 60"/>
-          <p:cNvSpPr/>
-          <p:nvPr/>
-        </p:nvSpPr>
-        <p:spPr>
-          <a:xfrm>
-            <a:off x="411480" y="3918204"/>
-            <a:ext cx="832104" cy="939546"/>
-          </a:xfrm>
-          <a:prstGeom prst="rect">
-            <a:avLst/>
-          </a:prstGeom>
-          <a:solidFill>
-            <a:srgbClr val="161D25"/>
-          </a:solidFill>
-          <a:ln w="12700">
-            <a:solidFill>
-              <a:srgbClr val="161D25"/>
-            </a:solidFill>
-            <a:prstDash val="solid"/>
-          </a:ln>
-        </p:spPr>
-      </p:sp>
-      <p:sp>
-        <p:nvSpPr>
-          <p:cNvPr id="78" name="Text 61"/>
-          <p:cNvSpPr txBox="1"/>
-          <p:nvPr/>
-        </p:nvSpPr>
-        <p:spPr>
-          <a:xfrm>
-            <a:off x="411480" y="3918204"/>
-            <a:ext cx="832104" cy="939546"/>
-          </a:xfrm>
-          <a:prstGeom prst="rect">
-            <a:avLst/>
-          </a:prstGeom>
-          <a:noFill/>
-          <a:ln/>
-        </p:spPr>
-        <p:txBody>
-          <a:bodyPr wrap="square" lIns="0" tIns="0" rIns="0" bIns="0" rtlCol="0" anchor="ctr"/>
-          <a:lstStyle/>
-          <a:p>
-            <a:pPr algn="ctr" indent="0" marL="0">
-              <a:buNone/>
-            </a:pPr>
-            <a:r>
-              <a:rPr lang="en-US" sz="1200" b="1" dirty="0">
-                <a:solidFill>
-                  <a:srgbClr val="F2A33A"/>
-                </a:solidFill>
-                <a:latin typeface="Arial" pitchFamily="34" charset="0"/>
-                <a:ea typeface="Arial" pitchFamily="34" charset="-122"/>
-                <a:cs typeface="Arial" pitchFamily="34" charset="-120"/>
-              </a:rPr>
-              <a:t>&gt;35–40 tm</a:t>
-            </a:r>
-            <a:endParaRPr lang="en-US" sz="1200" dirty="0"/>
-          </a:p>
-          <a:p>
-            <a:pPr algn="ctr" indent="0" marL="0">
-              <a:buNone/>
-            </a:pPr>
-            <a:r>
-              <a:rPr lang="en-US" sz="850" dirty="0">
-                <a:solidFill>
-                  <a:srgbClr val="9AA6B2"/>
-                </a:solidFill>
-                <a:latin typeface="Arial" pitchFamily="34" charset="0"/>
-                <a:ea typeface="Arial" pitchFamily="34" charset="-122"/>
-                <a:cs typeface="Arial" pitchFamily="34" charset="-120"/>
-              </a:rPr>
-              <a:t>66 units</a:t>
-            </a:r>
-            <a:endParaRPr lang="en-US" sz="1200" dirty="0"/>
-          </a:p>
-        </p:txBody>
-      </p:sp>
-      <p:sp>
-        <p:nvSpPr>
-          <p:cNvPr id="79" name="Shape 62"/>
-          <p:cNvSpPr/>
-          <p:nvPr/>
-        </p:nvSpPr>
-        <p:spPr>
-          <a:xfrm>
-            <a:off x="1280160" y="3918204"/>
-            <a:ext cx="1712976" cy="939546"/>
-          </a:xfrm>
-          <a:prstGeom prst="rect">
-            <a:avLst/>
-          </a:prstGeom>
-          <a:solidFill>
-            <a:srgbClr val="161D25"/>
-          </a:solidFill>
-          <a:ln w="12700">
-            <a:solidFill>
-              <a:srgbClr val="161D25"/>
-            </a:solidFill>
-            <a:prstDash val="solid"/>
-          </a:ln>
-        </p:spPr>
-      </p:sp>
-      <p:sp>
-        <p:nvSpPr>
-          <p:cNvPr id="80" name="Shape 63"/>
-          <p:cNvSpPr/>
-          <p:nvPr/>
-        </p:nvSpPr>
-        <p:spPr>
-          <a:xfrm>
-            <a:off x="3029712" y="3918204"/>
-            <a:ext cx="1712976" cy="939546"/>
-          </a:xfrm>
-          <a:prstGeom prst="rect">
-            <a:avLst/>
-          </a:prstGeom>
-          <a:solidFill>
-            <a:srgbClr val="161D25"/>
-          </a:solidFill>
-          <a:ln w="12700">
-            <a:solidFill>
-              <a:srgbClr val="161D25"/>
-            </a:solidFill>
-            <a:prstDash val="solid"/>
-          </a:ln>
-        </p:spPr>
-      </p:sp>
-      <p:pic>
-        <p:nvPicPr>
-          <p:cNvPr id="81" name="Image 15" descr="assets/photo_spk36080.jpg">    </p:cNvPr>
-          <p:cNvPicPr>
-            <a:picLocks noChangeAspect="1"/>
-          </p:cNvPicPr>
-          <p:nvPr/>
-        </p:nvPicPr>
-        <p:blipFill>
-          <a:blip r:embed="rId16"/>
-          <a:srcRect l="0" r="0" t="0" b="0"/>
-          <a:stretch/>
-        </p:blipFill>
-        <p:spPr>
-          <a:xfrm>
-            <a:off x="1335024" y="3973068"/>
-            <a:ext cx="664830" cy="829818"/>
-          </a:xfrm>
-          <a:prstGeom prst="rect">
-            <a:avLst/>
-          </a:prstGeom>
-        </p:spPr>
-      </p:pic>
-      <p:sp>
-        <p:nvSpPr>
-          <p:cNvPr id="82" name="Text 64"/>
-          <p:cNvSpPr txBox="1"/>
-          <p:nvPr/>
-        </p:nvSpPr>
-        <p:spPr>
-          <a:xfrm>
-            <a:off x="2063862" y="3945636"/>
-            <a:ext cx="920130" cy="884682"/>
-          </a:xfrm>
-          <a:prstGeom prst="rect">
-            <a:avLst/>
-          </a:prstGeom>
-          <a:noFill/>
-          <a:ln/>
-        </p:spPr>
-        <p:txBody>
-          <a:bodyPr wrap="square" lIns="0" tIns="0" rIns="0" bIns="0" rtlCol="0" anchor="ctr"/>
-          <a:lstStyle/>
-          <a:p>
-            <a:pPr indent="0" marL="0">
-              <a:buNone/>
-            </a:pPr>
-            <a:r>
-              <a:rPr lang="en-US" sz="850" b="1" dirty="0">
-                <a:solidFill>
-                  <a:srgbClr val="F2A33A"/>
-                </a:solidFill>
-                <a:latin typeface="Arial" pitchFamily="34" charset="0"/>
-                <a:ea typeface="Arial" pitchFamily="34" charset="-122"/>
-                <a:cs typeface="Arial" pitchFamily="34" charset="-120"/>
-              </a:rPr>
-              <a:t>#1 </a:t>
-            </a:r>
-            <a:pPr indent="0" marL="0">
-              <a:buNone/>
-            </a:pPr>
-            <a:r>
-              <a:rPr lang="en-US" sz="950" b="1" dirty="0">
-                <a:solidFill>
-                  <a:srgbClr val="EEF1F4"/>
-                </a:solidFill>
-                <a:latin typeface="Arial" pitchFamily="34" charset="0"/>
-                <a:ea typeface="Arial" pitchFamily="34" charset="-122"/>
-                <a:cs typeface="Arial" pitchFamily="34" charset="-120"/>
-              </a:rPr>
-              <a:t>SPK36080</a:t>
-            </a:r>
-            <a:endParaRPr lang="en-US" sz="850" dirty="0"/>
-          </a:p>
-          <a:p>
-            <a:pPr indent="0" marL="0">
-              <a:buNone/>
-            </a:pPr>
-            <a:r>
-              <a:rPr lang="en-US" sz="800" dirty="0">
-                <a:solidFill>
-                  <a:srgbClr val="9AA6B2"/>
-                </a:solidFill>
-                <a:latin typeface="Arial" pitchFamily="34" charset="0"/>
-                <a:ea typeface="Arial" pitchFamily="34" charset="-122"/>
-                <a:cs typeface="Arial" pitchFamily="34" charset="-120"/>
-              </a:rPr>
-              <a:t>36 tm · 34 units</a:t>
-            </a:r>
-            <a:endParaRPr lang="en-US" sz="850" dirty="0"/>
-          </a:p>
-          <a:p>
-            <a:pPr indent="0" marL="0">
-              <a:buNone/>
-            </a:pPr>
-            <a:r>
-              <a:rPr lang="en-US" sz="850" dirty="0">
-                <a:solidFill>
-                  <a:srgbClr val="EEF1F4"/>
-                </a:solidFill>
-                <a:latin typeface="Arial" pitchFamily="34" charset="0"/>
-                <a:ea typeface="Arial" pitchFamily="34" charset="-122"/>
-                <a:cs typeface="Arial" pitchFamily="34" charset="-120"/>
-              </a:rPr>
-              <a:t>Rp 490.000.000</a:t>
-            </a:r>
-            <a:endParaRPr lang="en-US" sz="850" dirty="0"/>
-          </a:p>
-        </p:txBody>
-      </p:sp>
-      <p:sp>
-        <p:nvSpPr>
-          <p:cNvPr id="83" name="Shape 65"/>
-          <p:cNvSpPr/>
-          <p:nvPr/>
-        </p:nvSpPr>
-        <p:spPr>
-          <a:xfrm>
-            <a:off x="3057144" y="3945636"/>
-            <a:ext cx="1658112" cy="848106"/>
-          </a:xfrm>
-          <a:prstGeom prst="rect">
-            <a:avLst/>
-          </a:prstGeom>
-          <a:solidFill>
-            <a:srgbClr val="12301F"/>
-          </a:solidFill>
-          <a:ln w="12700">
-            <a:solidFill>
-              <a:srgbClr val="2FBF71"/>
-            </a:solidFill>
-            <a:prstDash val="solid"/>
-          </a:ln>
-        </p:spPr>
-      </p:sp>
-      <p:pic>
-        <p:nvPicPr>
-          <p:cNvPr id="84" name="Image 16" descr="assets/photo_7441c.jpg">    </p:cNvPr>
-          <p:cNvPicPr>
-            <a:picLocks noChangeAspect="1"/>
-          </p:cNvPicPr>
-          <p:nvPr/>
-        </p:nvPicPr>
-        <p:blipFill>
-          <a:blip r:embed="rId17"/>
-          <a:srcRect l="0" r="0" t="0" b="0"/>
-          <a:stretch/>
-        </p:blipFill>
-        <p:spPr>
-          <a:xfrm>
-            <a:off x="3102864" y="3973068"/>
-            <a:ext cx="664830" cy="829818"/>
-          </a:xfrm>
-          <a:prstGeom prst="rect">
-            <a:avLst/>
-          </a:prstGeom>
-        </p:spPr>
-      </p:pic>
-      <p:sp>
-        <p:nvSpPr>
-          <p:cNvPr id="85" name="Text 66"/>
-          <p:cNvSpPr txBox="1"/>
-          <p:nvPr/>
-        </p:nvSpPr>
-        <p:spPr>
-          <a:xfrm>
-            <a:off x="3822558" y="3945636"/>
-            <a:ext cx="901842" cy="884682"/>
-          </a:xfrm>
-          <a:prstGeom prst="rect">
-            <a:avLst/>
-          </a:prstGeom>
-          <a:noFill/>
-          <a:ln/>
-        </p:spPr>
-        <p:txBody>
-          <a:bodyPr wrap="square" lIns="0" tIns="0" rIns="0" bIns="0" rtlCol="0" anchor="ctr"/>
-          <a:lstStyle/>
-          <a:p>
-            <a:pPr indent="0" marL="0">
-              <a:buNone/>
-            </a:pPr>
-            <a:r>
-              <a:rPr lang="en-US" sz="950" b="1" dirty="0">
-                <a:solidFill>
-                  <a:srgbClr val="FFFFFF"/>
-                </a:solidFill>
-                <a:latin typeface="Arial" pitchFamily="34" charset="0"/>
-                <a:ea typeface="Arial" pitchFamily="34" charset="-122"/>
-                <a:cs typeface="Arial" pitchFamily="34" charset="-120"/>
-              </a:rPr>
-              <a:t>7441C</a:t>
-            </a:r>
-            <a:endParaRPr lang="en-US" sz="950" dirty="0"/>
-          </a:p>
-          <a:p>
-            <a:pPr indent="0" marL="0">
-              <a:buNone/>
-            </a:pPr>
-            <a:r>
-              <a:rPr lang="en-US" sz="800" dirty="0">
-                <a:solidFill>
-                  <a:srgbClr val="9AA6B2"/>
-                </a:solidFill>
-                <a:latin typeface="Arial" pitchFamily="34" charset="0"/>
-                <a:ea typeface="Arial" pitchFamily="34" charset="-122"/>
-                <a:cs typeface="Arial" pitchFamily="34" charset="-120"/>
-              </a:rPr>
-              <a:t>37.7 tm</a:t>
-            </a:r>
-            <a:endParaRPr lang="en-US" sz="950" dirty="0"/>
-          </a:p>
-          <a:p>
-            <a:pPr indent="0" marL="0">
-              <a:buNone/>
-            </a:pPr>
-            <a:r>
-              <a:rPr lang="en-US" sz="850" dirty="0">
-                <a:solidFill>
-                  <a:srgbClr val="FFFFFF"/>
-                </a:solidFill>
-                <a:latin typeface="Arial" pitchFamily="34" charset="0"/>
-                <a:ea typeface="Arial" pitchFamily="34" charset="-122"/>
-                <a:cs typeface="Arial" pitchFamily="34" charset="-120"/>
-              </a:rPr>
-              <a:t>Rp 240.000.000 (est.)</a:t>
-            </a:r>
-            <a:endParaRPr lang="en-US" sz="950" dirty="0"/>
-          </a:p>
-          <a:p>
-            <a:pPr indent="0" marL="0">
-              <a:buNone/>
-            </a:pPr>
-            <a:r>
-              <a:rPr lang="en-US" sz="850" b="1" dirty="0">
-                <a:solidFill>
-                  <a:srgbClr val="2FBF71"/>
-                </a:solidFill>
-                <a:latin typeface="Arial" pitchFamily="34" charset="0"/>
-                <a:ea typeface="Arial" pitchFamily="34" charset="-122"/>
-                <a:cs typeface="Arial" pitchFamily="34" charset="-120"/>
-              </a:rPr>
-              <a:t>51% cheaper</a:t>
-            </a:r>
-            <a:endParaRPr lang="en-US" sz="950" dirty="0"/>
-          </a:p>
-        </p:txBody>
-      </p:sp>
-      <p:sp>
-        <p:nvSpPr>
-          <p:cNvPr id="86" name="Shape 67"/>
-          <p:cNvSpPr/>
-          <p:nvPr/>
-        </p:nvSpPr>
-        <p:spPr>
-          <a:xfrm>
-            <a:off x="4779264" y="3918204"/>
-            <a:ext cx="1712976" cy="939546"/>
-          </a:xfrm>
-          <a:prstGeom prst="rect">
-            <a:avLst/>
-          </a:prstGeom>
-          <a:solidFill>
-            <a:srgbClr val="161D25"/>
-          </a:solidFill>
-          <a:ln w="12700">
-            <a:solidFill>
-              <a:srgbClr val="161D25"/>
-            </a:solidFill>
-            <a:prstDash val="solid"/>
-          </a:ln>
-        </p:spPr>
-      </p:sp>
-      <p:sp>
-        <p:nvSpPr>
-          <p:cNvPr id="87" name="Shape 68"/>
-          <p:cNvSpPr/>
-          <p:nvPr/>
-        </p:nvSpPr>
-        <p:spPr>
-          <a:xfrm>
-            <a:off x="6528816" y="3918204"/>
-            <a:ext cx="1712976" cy="939546"/>
-          </a:xfrm>
-          <a:prstGeom prst="rect">
-            <a:avLst/>
-          </a:prstGeom>
-          <a:solidFill>
-            <a:srgbClr val="161D25"/>
-          </a:solidFill>
-          <a:ln w="12700">
-            <a:solidFill>
-              <a:srgbClr val="161D25"/>
-            </a:solidFill>
-            <a:prstDash val="solid"/>
-          </a:ln>
-        </p:spPr>
-      </p:sp>
-      <p:sp>
-        <p:nvSpPr>
-          <p:cNvPr id="88" name="Shape 69"/>
-          <p:cNvSpPr/>
-          <p:nvPr/>
-        </p:nvSpPr>
-        <p:spPr>
-          <a:xfrm>
-            <a:off x="8278368" y="3918204"/>
-            <a:ext cx="1712976" cy="939546"/>
-          </a:xfrm>
-          <a:prstGeom prst="rect">
-            <a:avLst/>
-          </a:prstGeom>
-          <a:solidFill>
-            <a:srgbClr val="161D25"/>
-          </a:solidFill>
-          <a:ln w="12700">
-            <a:solidFill>
-              <a:srgbClr val="161D25"/>
-            </a:solidFill>
-            <a:prstDash val="solid"/>
-          </a:ln>
-        </p:spPr>
-      </p:sp>
-      <p:sp>
-        <p:nvSpPr>
-          <p:cNvPr id="89" name="Shape 70"/>
-          <p:cNvSpPr/>
-          <p:nvPr/>
-        </p:nvSpPr>
-        <p:spPr>
-          <a:xfrm>
-            <a:off x="10027920" y="3918204"/>
-            <a:ext cx="1712976" cy="939546"/>
-          </a:xfrm>
-          <a:prstGeom prst="rect">
-            <a:avLst/>
-          </a:prstGeom>
-          <a:solidFill>
-            <a:srgbClr val="161D25"/>
-          </a:solidFill>
-          <a:ln w="12700">
-            <a:solidFill>
-              <a:srgbClr val="161D25"/>
-            </a:solidFill>
-            <a:prstDash val="solid"/>
-          </a:ln>
-        </p:spPr>
-      </p:sp>
-      <p:sp>
-        <p:nvSpPr>
-          <p:cNvPr id="90" name="Shape 71"/>
-          <p:cNvSpPr/>
-          <p:nvPr/>
-        </p:nvSpPr>
-        <p:spPr>
-          <a:xfrm>
-            <a:off x="411480" y="4894326"/>
-            <a:ext cx="832104" cy="939546"/>
-          </a:xfrm>
-          <a:prstGeom prst="rect">
-            <a:avLst/>
-          </a:prstGeom>
-          <a:solidFill>
-            <a:srgbClr val="161D25"/>
-          </a:solidFill>
-          <a:ln w="12700">
-            <a:solidFill>
-              <a:srgbClr val="161D25"/>
-            </a:solidFill>
-            <a:prstDash val="solid"/>
-          </a:ln>
-        </p:spPr>
-      </p:sp>
-      <p:sp>
-        <p:nvSpPr>
-          <p:cNvPr id="91" name="Text 72"/>
-          <p:cNvSpPr txBox="1"/>
-          <p:nvPr/>
-        </p:nvSpPr>
-        <p:spPr>
-          <a:xfrm>
-            <a:off x="411480" y="4894326"/>
-            <a:ext cx="832104" cy="939546"/>
-          </a:xfrm>
-          <a:prstGeom prst="rect">
-            <a:avLst/>
-          </a:prstGeom>
-          <a:noFill/>
-          <a:ln/>
-        </p:spPr>
-        <p:txBody>
-          <a:bodyPr wrap="square" lIns="0" tIns="0" rIns="0" bIns="0" rtlCol="0" anchor="ctr"/>
-          <a:lstStyle/>
-          <a:p>
-            <a:pPr algn="ctr" indent="0" marL="0">
-              <a:buNone/>
-            </a:pPr>
-            <a:r>
-              <a:rPr lang="en-US" sz="1200" b="1" dirty="0">
-                <a:solidFill>
-                  <a:srgbClr val="F2A33A"/>
-                </a:solidFill>
-                <a:latin typeface="Arial" pitchFamily="34" charset="0"/>
-                <a:ea typeface="Arial" pitchFamily="34" charset="-122"/>
-                <a:cs typeface="Arial" pitchFamily="34" charset="-120"/>
-              </a:rPr>
-              <a:t>&gt;40–45 tm</a:t>
-            </a:r>
-            <a:endParaRPr lang="en-US" sz="1200" dirty="0"/>
-          </a:p>
-          <a:p>
-            <a:pPr algn="ctr" indent="0" marL="0">
-              <a:buNone/>
-            </a:pPr>
-            <a:r>
-              <a:rPr lang="en-US" sz="850" dirty="0">
-                <a:solidFill>
-                  <a:srgbClr val="9AA6B2"/>
-                </a:solidFill>
-                <a:latin typeface="Arial" pitchFamily="34" charset="0"/>
-                <a:ea typeface="Arial" pitchFamily="34" charset="-122"/>
-                <a:cs typeface="Arial" pitchFamily="34" charset="-120"/>
-              </a:rPr>
-              <a:t>23 units</a:t>
-            </a:r>
-            <a:endParaRPr lang="en-US" sz="1200" dirty="0"/>
-          </a:p>
-        </p:txBody>
-      </p:sp>
-      <p:sp>
-        <p:nvSpPr>
-          <p:cNvPr id="92" name="Shape 73"/>
-          <p:cNvSpPr/>
-          <p:nvPr/>
-        </p:nvSpPr>
-        <p:spPr>
-          <a:xfrm>
-            <a:off x="1280160" y="4894326"/>
-            <a:ext cx="1712976" cy="939546"/>
-          </a:xfrm>
-          <a:prstGeom prst="rect">
-            <a:avLst/>
-          </a:prstGeom>
-          <a:solidFill>
-            <a:srgbClr val="161D25"/>
-          </a:solidFill>
-          <a:ln w="12700">
-            <a:solidFill>
-              <a:srgbClr val="161D25"/>
-            </a:solidFill>
-            <a:prstDash val="solid"/>
-          </a:ln>
-        </p:spPr>
-      </p:sp>
-      <p:sp>
-        <p:nvSpPr>
-          <p:cNvPr id="93" name="Shape 74"/>
-          <p:cNvSpPr/>
-          <p:nvPr/>
-        </p:nvSpPr>
-        <p:spPr>
-          <a:xfrm>
-            <a:off x="3029712" y="4894326"/>
-            <a:ext cx="1712976" cy="939546"/>
-          </a:xfrm>
-          <a:prstGeom prst="rect">
-            <a:avLst/>
-          </a:prstGeom>
-          <a:solidFill>
-            <a:srgbClr val="161D25"/>
-          </a:solidFill>
-          <a:ln w="12700">
-            <a:solidFill>
-              <a:srgbClr val="161D25"/>
-            </a:solidFill>
-            <a:prstDash val="solid"/>
-          </a:ln>
-        </p:spPr>
-      </p:sp>
-      <p:pic>
-        <p:nvPicPr>
-          <p:cNvPr id="94" name="Image 17" descr="assets/photo_spk42502.jpg">    </p:cNvPr>
-          <p:cNvPicPr>
-            <a:picLocks noChangeAspect="1"/>
-          </p:cNvPicPr>
-          <p:nvPr/>
-        </p:nvPicPr>
-        <p:blipFill>
-          <a:blip r:embed="rId18"/>
-          <a:srcRect l="0" r="0" t="0" b="0"/>
-          <a:stretch/>
-        </p:blipFill>
-        <p:spPr>
-          <a:xfrm>
-            <a:off x="1335024" y="4949190"/>
-            <a:ext cx="664830" cy="829818"/>
-          </a:xfrm>
-          <a:prstGeom prst="rect">
-            <a:avLst/>
-          </a:prstGeom>
-        </p:spPr>
-      </p:pic>
-      <p:sp>
-        <p:nvSpPr>
-          <p:cNvPr id="95" name="Text 75"/>
-          <p:cNvSpPr txBox="1"/>
-          <p:nvPr/>
-        </p:nvSpPr>
-        <p:spPr>
-          <a:xfrm>
-            <a:off x="2063862" y="4921758"/>
-            <a:ext cx="920130" cy="884682"/>
-          </a:xfrm>
-          <a:prstGeom prst="rect">
-            <a:avLst/>
-          </a:prstGeom>
-          <a:noFill/>
-          <a:ln/>
-        </p:spPr>
-        <p:txBody>
-          <a:bodyPr wrap="square" lIns="0" tIns="0" rIns="0" bIns="0" rtlCol="0" anchor="ctr"/>
-          <a:lstStyle/>
-          <a:p>
-            <a:pPr indent="0" marL="0">
-              <a:buNone/>
-            </a:pPr>
-            <a:r>
-              <a:rPr lang="en-US" sz="850" b="1" dirty="0">
-                <a:solidFill>
-                  <a:srgbClr val="F2A33A"/>
-                </a:solidFill>
-                <a:latin typeface="Arial" pitchFamily="34" charset="0"/>
-                <a:ea typeface="Arial" pitchFamily="34" charset="-122"/>
-                <a:cs typeface="Arial" pitchFamily="34" charset="-120"/>
-              </a:rPr>
-              <a:t>#3 </a:t>
-            </a:r>
-            <a:pPr indent="0" marL="0">
-              <a:buNone/>
-            </a:pPr>
-            <a:r>
-              <a:rPr lang="en-US" sz="950" b="1" dirty="0">
-                <a:solidFill>
-                  <a:srgbClr val="EEF1F4"/>
-                </a:solidFill>
-                <a:latin typeface="Arial" pitchFamily="34" charset="0"/>
-                <a:ea typeface="Arial" pitchFamily="34" charset="-122"/>
-                <a:cs typeface="Arial" pitchFamily="34" charset="-120"/>
-              </a:rPr>
-              <a:t>SPK42502</a:t>
-            </a:r>
-            <a:endParaRPr lang="en-US" sz="850" dirty="0"/>
-          </a:p>
-          <a:p>
-            <a:pPr indent="0" marL="0">
-              <a:buNone/>
-            </a:pPr>
-            <a:r>
-              <a:rPr lang="en-US" sz="800" dirty="0">
-                <a:solidFill>
-                  <a:srgbClr val="9AA6B2"/>
-                </a:solidFill>
-                <a:latin typeface="Arial" pitchFamily="34" charset="0"/>
-                <a:ea typeface="Arial" pitchFamily="34" charset="-122"/>
-                <a:cs typeface="Arial" pitchFamily="34" charset="-120"/>
-              </a:rPr>
-              <a:t>42.5 tm · 18 units</a:t>
-            </a:r>
-            <a:endParaRPr lang="en-US" sz="850" dirty="0"/>
-          </a:p>
-          <a:p>
-            <a:pPr indent="0" marL="0">
-              <a:buNone/>
-            </a:pPr>
-            <a:r>
-              <a:rPr lang="en-US" sz="850" dirty="0">
-                <a:solidFill>
-                  <a:srgbClr val="EEF1F4"/>
-                </a:solidFill>
-                <a:latin typeface="Arial" pitchFamily="34" charset="0"/>
-                <a:ea typeface="Arial" pitchFamily="34" charset="-122"/>
-                <a:cs typeface="Arial" pitchFamily="34" charset="-120"/>
-              </a:rPr>
-              <a:t>Rp 790.000.000</a:t>
-            </a:r>
-            <a:endParaRPr lang="en-US" sz="850" dirty="0"/>
-          </a:p>
-        </p:txBody>
-      </p:sp>
-      <p:sp>
-        <p:nvSpPr>
-          <p:cNvPr id="96" name="Shape 76"/>
-          <p:cNvSpPr/>
-          <p:nvPr/>
-        </p:nvSpPr>
-        <p:spPr>
-          <a:xfrm>
-            <a:off x="3057144" y="4921758"/>
-            <a:ext cx="1658112" cy="848106"/>
-          </a:xfrm>
-          <a:prstGeom prst="rect">
-            <a:avLst/>
-          </a:prstGeom>
-          <a:solidFill>
-            <a:srgbClr val="12301F"/>
-          </a:solidFill>
-          <a:ln w="12700">
-            <a:solidFill>
-              <a:srgbClr val="2FBF71"/>
-            </a:solidFill>
-            <a:prstDash val="solid"/>
-          </a:ln>
-        </p:spPr>
-      </p:sp>
-      <p:pic>
-        <p:nvPicPr>
-          <p:cNvPr id="97" name="Image 18" descr="assets/photo_746r.jpg">    </p:cNvPr>
-          <p:cNvPicPr>
-            <a:picLocks noChangeAspect="1"/>
-          </p:cNvPicPr>
-          <p:nvPr/>
-        </p:nvPicPr>
-        <p:blipFill>
-          <a:blip r:embed="rId19"/>
-          <a:srcRect l="0" r="0" t="0" b="0"/>
-          <a:stretch/>
-        </p:blipFill>
-        <p:spPr>
-          <a:xfrm>
-            <a:off x="3102864" y="4949190"/>
-            <a:ext cx="664830" cy="829818"/>
-          </a:xfrm>
-          <a:prstGeom prst="rect">
-            <a:avLst/>
-          </a:prstGeom>
-        </p:spPr>
-      </p:pic>
-      <p:sp>
-        <p:nvSpPr>
-          <p:cNvPr id="98" name="Text 77"/>
-          <p:cNvSpPr txBox="1"/>
-          <p:nvPr/>
-        </p:nvSpPr>
-        <p:spPr>
-          <a:xfrm>
-            <a:off x="3822558" y="4921758"/>
-            <a:ext cx="901842" cy="884682"/>
-          </a:xfrm>
-          <a:prstGeom prst="rect">
-            <a:avLst/>
-          </a:prstGeom>
-          <a:noFill/>
-          <a:ln/>
-        </p:spPr>
-        <p:txBody>
-          <a:bodyPr wrap="square" lIns="0" tIns="0" rIns="0" bIns="0" rtlCol="0" anchor="ctr"/>
-          <a:lstStyle/>
-          <a:p>
-            <a:pPr indent="0" marL="0">
-              <a:buNone/>
-            </a:pPr>
-            <a:r>
-              <a:rPr lang="en-US" sz="950" b="1" dirty="0">
-                <a:solidFill>
-                  <a:srgbClr val="FFFFFF"/>
-                </a:solidFill>
-                <a:latin typeface="Arial" pitchFamily="34" charset="0"/>
-                <a:ea typeface="Arial" pitchFamily="34" charset="-122"/>
-                <a:cs typeface="Arial" pitchFamily="34" charset="-120"/>
-              </a:rPr>
-              <a:t>746 A4</a:t>
-            </a:r>
-            <a:endParaRPr lang="en-US" sz="950" dirty="0"/>
-          </a:p>
-          <a:p>
-            <a:pPr indent="0" marL="0">
-              <a:buNone/>
-            </a:pPr>
-            <a:r>
-              <a:rPr lang="en-US" sz="800" dirty="0">
-                <a:solidFill>
-                  <a:srgbClr val="9AA6B2"/>
-                </a:solidFill>
-                <a:latin typeface="Arial" pitchFamily="34" charset="0"/>
-                <a:ea typeface="Arial" pitchFamily="34" charset="-122"/>
-                <a:cs typeface="Arial" pitchFamily="34" charset="-120"/>
-              </a:rPr>
-              <a:t>43.4 tm</a:t>
-            </a:r>
-            <a:endParaRPr lang="en-US" sz="950" dirty="0"/>
-          </a:p>
-          <a:p>
-            <a:pPr indent="0" marL="0">
-              <a:buNone/>
-            </a:pPr>
-            <a:r>
-              <a:rPr lang="en-US" sz="850" dirty="0">
-                <a:solidFill>
-                  <a:srgbClr val="FFFFFF"/>
-                </a:solidFill>
-                <a:latin typeface="Arial" pitchFamily="34" charset="0"/>
-                <a:ea typeface="Arial" pitchFamily="34" charset="-122"/>
-                <a:cs typeface="Arial" pitchFamily="34" charset="-120"/>
-              </a:rPr>
-              <a:t>Rp 250.000.000</a:t>
-            </a:r>
-            <a:endParaRPr lang="en-US" sz="950" dirty="0"/>
-          </a:p>
-          <a:p>
-            <a:pPr indent="0" marL="0">
-              <a:buNone/>
-            </a:pPr>
-            <a:r>
-              <a:rPr lang="en-US" sz="850" b="1" dirty="0">
-                <a:solidFill>
-                  <a:srgbClr val="2FBF71"/>
-                </a:solidFill>
-                <a:latin typeface="Arial" pitchFamily="34" charset="0"/>
-                <a:ea typeface="Arial" pitchFamily="34" charset="-122"/>
-                <a:cs typeface="Arial" pitchFamily="34" charset="-120"/>
-              </a:rPr>
-              <a:t>68% cheaper</a:t>
-            </a:r>
-            <a:endParaRPr lang="en-US" sz="950" dirty="0"/>
-          </a:p>
-        </p:txBody>
-      </p:sp>
-      <p:sp>
-        <p:nvSpPr>
-          <p:cNvPr id="99" name="Shape 78"/>
-          <p:cNvSpPr/>
-          <p:nvPr/>
-        </p:nvSpPr>
-        <p:spPr>
-          <a:xfrm>
-            <a:off x="4779264" y="4894326"/>
-            <a:ext cx="1712976" cy="939546"/>
-          </a:xfrm>
-          <a:prstGeom prst="rect">
-            <a:avLst/>
-          </a:prstGeom>
-          <a:solidFill>
-            <a:srgbClr val="161D25"/>
-          </a:solidFill>
-          <a:ln w="12700">
-            <a:solidFill>
-              <a:srgbClr val="161D25"/>
-            </a:solidFill>
-            <a:prstDash val="solid"/>
-          </a:ln>
-        </p:spPr>
-      </p:sp>
-      <p:sp>
-        <p:nvSpPr>
-          <p:cNvPr id="100" name="Shape 79"/>
-          <p:cNvSpPr/>
-          <p:nvPr/>
-        </p:nvSpPr>
-        <p:spPr>
-          <a:xfrm>
-            <a:off x="6528816" y="4894326"/>
-            <a:ext cx="1712976" cy="939546"/>
-          </a:xfrm>
-          <a:prstGeom prst="rect">
-            <a:avLst/>
-          </a:prstGeom>
-          <a:solidFill>
-            <a:srgbClr val="161D25"/>
-          </a:solidFill>
-          <a:ln w="12700">
-            <a:solidFill>
-              <a:srgbClr val="161D25"/>
-            </a:solidFill>
-            <a:prstDash val="solid"/>
-          </a:ln>
-        </p:spPr>
-      </p:sp>
-      <p:pic>
-        <p:nvPicPr>
-          <p:cNvPr id="101" name="Image 19" descr="assets/photo_v946b.jpg">    </p:cNvPr>
-          <p:cNvPicPr>
-            <a:picLocks noChangeAspect="1"/>
-          </p:cNvPicPr>
-          <p:nvPr/>
-        </p:nvPicPr>
-        <p:blipFill>
-          <a:blip r:embed="rId20"/>
-          <a:srcRect l="0" r="0" t="0" b="0"/>
-          <a:stretch/>
-        </p:blipFill>
-        <p:spPr>
-          <a:xfrm>
-            <a:off x="4834128" y="4949190"/>
-            <a:ext cx="664830" cy="829818"/>
-          </a:xfrm>
-          <a:prstGeom prst="rect">
-            <a:avLst/>
-          </a:prstGeom>
-        </p:spPr>
-      </p:pic>
-      <p:sp>
-        <p:nvSpPr>
-          <p:cNvPr id="102" name="Text 80"/>
-          <p:cNvSpPr txBox="1"/>
-          <p:nvPr/>
-        </p:nvSpPr>
-        <p:spPr>
-          <a:xfrm>
-            <a:off x="5562966" y="4921758"/>
-            <a:ext cx="920130" cy="884682"/>
-          </a:xfrm>
-          <a:prstGeom prst="rect">
-            <a:avLst/>
-          </a:prstGeom>
-          <a:noFill/>
-          <a:ln/>
-        </p:spPr>
-        <p:txBody>
-          <a:bodyPr wrap="square" lIns="0" tIns="0" rIns="0" bIns="0" rtlCol="0" anchor="ctr"/>
-          <a:lstStyle/>
-          <a:p>
-            <a:pPr indent="0" marL="0">
-              <a:buNone/>
-            </a:pPr>
-            <a:r>
-              <a:rPr lang="en-US" sz="850" b="1" dirty="0">
-                <a:solidFill>
-                  <a:srgbClr val="F2A33A"/>
-                </a:solidFill>
-                <a:latin typeface="Arial" pitchFamily="34" charset="0"/>
-                <a:ea typeface="Arial" pitchFamily="34" charset="-122"/>
-                <a:cs typeface="Arial" pitchFamily="34" charset="-120"/>
-              </a:rPr>
-              <a:t>#3 </a:t>
-            </a:r>
-            <a:pPr indent="0" marL="0">
-              <a:buNone/>
-            </a:pPr>
-            <a:r>
-              <a:rPr lang="en-US" sz="950" b="1" dirty="0">
-                <a:solidFill>
-                  <a:srgbClr val="EEF1F4"/>
-                </a:solidFill>
-                <a:latin typeface="Arial" pitchFamily="34" charset="0"/>
-                <a:ea typeface="Arial" pitchFamily="34" charset="-122"/>
-                <a:cs typeface="Arial" pitchFamily="34" charset="-120"/>
-              </a:rPr>
-              <a:t>V946B</a:t>
-            </a:r>
-            <a:endParaRPr lang="en-US" sz="850" dirty="0"/>
-          </a:p>
-          <a:p>
-            <a:pPr indent="0" marL="0">
-              <a:buNone/>
-            </a:pPr>
-            <a:r>
-              <a:rPr lang="en-US" sz="800" dirty="0">
-                <a:solidFill>
-                  <a:srgbClr val="9AA6B2"/>
-                </a:solidFill>
-                <a:latin typeface="Arial" pitchFamily="34" charset="0"/>
-                <a:ea typeface="Arial" pitchFamily="34" charset="-122"/>
-                <a:cs typeface="Arial" pitchFamily="34" charset="-120"/>
-              </a:rPr>
-              <a:t>44.2 tm · 1 unit</a:t>
-            </a:r>
-            <a:endParaRPr lang="en-US" sz="850" dirty="0"/>
-          </a:p>
-          <a:p>
-            <a:pPr indent="0" marL="0">
-              <a:buNone/>
-            </a:pPr>
-            <a:r>
-              <a:rPr lang="en-US" sz="850" dirty="0">
-                <a:solidFill>
-                  <a:srgbClr val="EEF1F4"/>
-                </a:solidFill>
-                <a:latin typeface="Arial" pitchFamily="34" charset="0"/>
-                <a:ea typeface="Arial" pitchFamily="34" charset="-122"/>
-                <a:cs typeface="Arial" pitchFamily="34" charset="-120"/>
-              </a:rPr>
-              <a:t>Rp 1.270.000.000</a:t>
-            </a:r>
-            <a:endParaRPr lang="en-US" sz="850" dirty="0"/>
-          </a:p>
-        </p:txBody>
-      </p:sp>
-      <p:sp>
-        <p:nvSpPr>
-          <p:cNvPr id="103" name="Shape 81"/>
-          <p:cNvSpPr/>
-          <p:nvPr/>
-        </p:nvSpPr>
-        <p:spPr>
-          <a:xfrm>
-            <a:off x="6556248" y="4921758"/>
-            <a:ext cx="1658112" cy="848106"/>
-          </a:xfrm>
-          <a:prstGeom prst="rect">
-            <a:avLst/>
-          </a:prstGeom>
-          <a:solidFill>
-            <a:srgbClr val="12301F"/>
-          </a:solidFill>
-          <a:ln w="12700">
-            <a:solidFill>
-              <a:srgbClr val="2FBF71"/>
-            </a:solidFill>
-            <a:prstDash val="solid"/>
-          </a:ln>
-        </p:spPr>
-      </p:sp>
-      <p:pic>
-        <p:nvPicPr>
-          <p:cNvPr id="104" name="Image 20" descr="assets/photo_749r.jpg">    </p:cNvPr>
-          <p:cNvPicPr>
-            <a:picLocks noChangeAspect="1"/>
-          </p:cNvPicPr>
-          <p:nvPr/>
-        </p:nvPicPr>
-        <p:blipFill>
-          <a:blip r:embed="rId21"/>
-          <a:srcRect l="0" r="0" t="0" b="0"/>
-          <a:stretch/>
-        </p:blipFill>
-        <p:spPr>
-          <a:xfrm>
-            <a:off x="6601968" y="4949190"/>
-            <a:ext cx="664830" cy="829818"/>
-          </a:xfrm>
-          <a:prstGeom prst="rect">
-            <a:avLst/>
-          </a:prstGeom>
-        </p:spPr>
-      </p:pic>
-      <p:sp>
-        <p:nvSpPr>
-          <p:cNvPr id="105" name="Text 82"/>
-          <p:cNvSpPr txBox="1"/>
-          <p:nvPr/>
-        </p:nvSpPr>
-        <p:spPr>
-          <a:xfrm>
-            <a:off x="7321662" y="4921758"/>
-            <a:ext cx="901842" cy="884682"/>
-          </a:xfrm>
-          <a:prstGeom prst="rect">
-            <a:avLst/>
-          </a:prstGeom>
-          <a:noFill/>
-          <a:ln/>
-        </p:spPr>
-        <p:txBody>
-          <a:bodyPr wrap="square" lIns="0" tIns="0" rIns="0" bIns="0" rtlCol="0" anchor="ctr"/>
-          <a:lstStyle/>
-          <a:p>
-            <a:pPr indent="0" marL="0">
-              <a:buNone/>
-            </a:pPr>
-            <a:r>
-              <a:rPr lang="en-US" sz="950" b="1" dirty="0">
-                <a:solidFill>
-                  <a:srgbClr val="FFFFFF"/>
-                </a:solidFill>
-                <a:latin typeface="Arial" pitchFamily="34" charset="0"/>
-                <a:ea typeface="Arial" pitchFamily="34" charset="-122"/>
-                <a:cs typeface="Arial" pitchFamily="34" charset="-120"/>
-              </a:rPr>
-              <a:t>749R A4</a:t>
-            </a:r>
-            <a:endParaRPr lang="en-US" sz="950" dirty="0"/>
-          </a:p>
-          <a:p>
-            <a:pPr indent="0" marL="0">
-              <a:buNone/>
-            </a:pPr>
-            <a:r>
-              <a:rPr lang="en-US" sz="800" dirty="0">
-                <a:solidFill>
-                  <a:srgbClr val="9AA6B2"/>
-                </a:solidFill>
-                <a:latin typeface="Arial" pitchFamily="34" charset="0"/>
-                <a:ea typeface="Arial" pitchFamily="34" charset="-122"/>
-                <a:cs typeface="Arial" pitchFamily="34" charset="-120"/>
-              </a:rPr>
-              <a:t>44.7 tm</a:t>
-            </a:r>
-            <a:endParaRPr lang="en-US" sz="950" dirty="0"/>
-          </a:p>
-          <a:p>
-            <a:pPr indent="0" marL="0">
-              <a:buNone/>
-            </a:pPr>
-            <a:r>
-              <a:rPr lang="en-US" sz="850" dirty="0">
-                <a:solidFill>
-                  <a:srgbClr val="FFFFFF"/>
-                </a:solidFill>
-                <a:latin typeface="Arial" pitchFamily="34" charset="0"/>
-                <a:ea typeface="Arial" pitchFamily="34" charset="-122"/>
-                <a:cs typeface="Arial" pitchFamily="34" charset="-120"/>
-              </a:rPr>
-              <a:t>Rp 260.000.000</a:t>
-            </a:r>
-            <a:endParaRPr lang="en-US" sz="950" dirty="0"/>
-          </a:p>
-          <a:p>
-            <a:pPr indent="0" marL="0">
-              <a:buNone/>
-            </a:pPr>
-            <a:r>
-              <a:rPr lang="en-US" sz="850" b="1" dirty="0">
-                <a:solidFill>
-                  <a:srgbClr val="2FBF71"/>
-                </a:solidFill>
-                <a:latin typeface="Arial" pitchFamily="34" charset="0"/>
-                <a:ea typeface="Arial" pitchFamily="34" charset="-122"/>
-                <a:cs typeface="Arial" pitchFamily="34" charset="-120"/>
-              </a:rPr>
-              <a:t>79% cheaper</a:t>
-            </a:r>
-            <a:endParaRPr lang="en-US" sz="950" dirty="0"/>
-          </a:p>
-        </p:txBody>
-      </p:sp>
-      <p:sp>
-        <p:nvSpPr>
-          <p:cNvPr id="106" name="Shape 83"/>
-          <p:cNvSpPr/>
-          <p:nvPr/>
-        </p:nvSpPr>
-        <p:spPr>
-          <a:xfrm>
-            <a:off x="8278368" y="4894326"/>
-            <a:ext cx="1712976" cy="939546"/>
-          </a:xfrm>
-          <a:prstGeom prst="rect">
-            <a:avLst/>
-          </a:prstGeom>
-          <a:solidFill>
-            <a:srgbClr val="161D25"/>
-          </a:solidFill>
-          <a:ln w="12700">
-            <a:solidFill>
-              <a:srgbClr val="161D25"/>
-            </a:solidFill>
-            <a:prstDash val="solid"/>
-          </a:ln>
-        </p:spPr>
-      </p:sp>
-      <p:sp>
-        <p:nvSpPr>
-          <p:cNvPr id="107" name="Shape 84"/>
-          <p:cNvSpPr/>
-          <p:nvPr/>
-        </p:nvSpPr>
-        <p:spPr>
-          <a:xfrm>
-            <a:off x="10027920" y="4894326"/>
-            <a:ext cx="1712976" cy="939546"/>
-          </a:xfrm>
-          <a:prstGeom prst="rect">
-            <a:avLst/>
-          </a:prstGeom>
-          <a:solidFill>
-            <a:srgbClr val="161D25"/>
-          </a:solidFill>
-          <a:ln w="12700">
-            <a:solidFill>
-              <a:srgbClr val="161D25"/>
-            </a:solidFill>
-            <a:prstDash val="solid"/>
-          </a:ln>
-        </p:spPr>
-      </p:sp>
-      <p:sp>
-        <p:nvSpPr>
-          <p:cNvPr id="108" name="Shape 85"/>
-          <p:cNvSpPr/>
-          <p:nvPr/>
-        </p:nvSpPr>
-        <p:spPr>
-          <a:xfrm>
-            <a:off x="411480" y="5943600"/>
-            <a:ext cx="182880" cy="128016"/>
-          </a:xfrm>
-          <a:prstGeom prst="rect">
-            <a:avLst/>
-          </a:prstGeom>
-          <a:solidFill>
-            <a:srgbClr val="12301F"/>
-          </a:solidFill>
-          <a:ln w="12700">
-            <a:solidFill>
-              <a:srgbClr val="2FBF71"/>
-            </a:solidFill>
-            <a:prstDash val="solid"/>
-          </a:ln>
-        </p:spPr>
-      </p:sp>
       <p:sp>
         <p:nvSpPr>
           <p:cNvPr id="109" name="Text 86"/>
@@ -18277,7 +18277,7 @@
                 <a:ea typeface="Arial" pitchFamily="34" charset="-122"/>
                 <a:cs typeface="Arial" pitchFamily="34" charset="-120"/>
               </a:rPr>
-              <a:t>Source: Indonesia import records, HS 84269100 + 84264900, Jan 2023 – 14 Aug 2026; truck-mounted knuckle boom cranes only, Zoomlion and Hyva excluded. Competitors: average import unit price, Jan 2023 – 14 Aug 2026, × Rp 17.803/USD (JISDOR 23 Sep 2026) + import duty (0% China – ACFTA; 5% Europe, assumed) + PPN 11% + PPh 22 2.5% = import cost before distributor margin. F.lli Ferrari: crane price from the TSP price list (column K minus column J) less the TSP margin of 13.6%, so both sides are at import-cost level. 7441C = estimate. Prices rounded to Rp 10.000.000.</a:t>
+              <a:t>Source: Indonesia import records, HS 84269100 + 84264900, Jan 2023 – 14 Aug 2026; truck-mounted knuckle boom cranes only, Zoomlion and Hyva excluded. Competitors: average import unit price, Jan 2023 – 14 Aug 2026, × Rp 17.803/USD (JISDOR 23 Sep 2026) + import duty (0% China – ACFTA; 5% Europe, assumed) + PPN 11% + PPh 22 2.5% = import cost before distributor margin. F.lli Ferrari: crane price from the TSP price list Rev1, June 2026 (column K minus column J), less the TSP margin of 13.6%, so both sides are at import-cost level. 7441C = estimate between FBR350R A4 and 746 A4. Prices rounded to Rp 10.000.000.</a:t>
             </a:r>
             <a:endParaRPr lang="en-US" sz="750" dirty="0"/>
           </a:p>
@@ -18387,7 +18387,7 @@
                 <a:ea typeface="Arial" pitchFamily="34" charset="-122"/>
                 <a:cs typeface="Arial" pitchFamily="34" charset="-120"/>
               </a:rPr>
-              <a:t>Medium (2/2): F.lli Ferrari costs less than all 5 top models of Palfinger and Hiab</a:t>
+              <a:t>Medium: F.lli Ferrari costs less than 1 of 5 models from Palfinger and Hiab</a:t>
             </a:r>
             <a:endParaRPr lang="en-US" sz="1800" dirty="0"/>
           </a:p>
@@ -19498,11 +19498,11 @@
             <a:avLst/>
           </a:prstGeom>
           <a:solidFill>
-            <a:srgbClr val="12301F"/>
+            <a:srgbClr val="3A0E14"/>
           </a:solidFill>
           <a:ln w="12700">
             <a:solidFill>
-              <a:srgbClr val="2FBF71"/>
+              <a:srgbClr val="3A0E14"/>
             </a:solidFill>
             <a:prstDash val="solid"/>
           </a:ln>
@@ -19598,7 +19598,7 @@
                 <a:ea typeface="Arial" pitchFamily="34" charset="-122"/>
                 <a:cs typeface="Arial" pitchFamily="34" charset="-120"/>
               </a:rPr>
-              <a:t>Rp 230.000.000</a:t>
+              <a:t>Rp 1.120.000.000</a:t>
             </a:r>
             <a:endParaRPr lang="en-US" sz="950" dirty="0"/>
           </a:p>
@@ -19609,13 +19609,13 @@
             <a:r>
               <a:rPr lang="en-US" sz="850" b="1" dirty="0">
                 <a:solidFill>
-                  <a:srgbClr val="2FBF71"/>
-                </a:solidFill>
-                <a:latin typeface="Arial" pitchFamily="34" charset="0"/>
-                <a:ea typeface="Arial" pitchFamily="34" charset="-122"/>
-                <a:cs typeface="Arial" pitchFamily="34" charset="-120"/>
-              </a:rPr>
-              <a:t>78% cheaper</a:t>
+                  <a:srgbClr val="FF8A8F"/>
+                </a:solidFill>
+                <a:latin typeface="Arial" pitchFamily="34" charset="0"/>
+                <a:ea typeface="Arial" pitchFamily="34" charset="-122"/>
+                <a:cs typeface="Arial" pitchFamily="34" charset="-120"/>
+              </a:rPr>
+              <a:t>7% higher</a:t>
             </a:r>
             <a:endParaRPr lang="en-US" sz="950" dirty="0"/>
           </a:p>
@@ -19796,11 +19796,11 @@
             <a:avLst/>
           </a:prstGeom>
           <a:solidFill>
-            <a:srgbClr val="12301F"/>
+            <a:srgbClr val="3A0E14"/>
           </a:solidFill>
           <a:ln w="12700">
             <a:solidFill>
-              <a:srgbClr val="2FBF71"/>
+              <a:srgbClr val="3A0E14"/>
             </a:solidFill>
             <a:prstDash val="solid"/>
           </a:ln>
@@ -19879,7 +19879,7 @@
                 <a:ea typeface="Arial" pitchFamily="34" charset="-122"/>
                 <a:cs typeface="Arial" pitchFamily="34" charset="-120"/>
               </a:rPr>
-              <a:t>Rp 230.000.000</a:t>
+              <a:t>Rp 1.120.000.000</a:t>
             </a:r>
             <a:endParaRPr lang="en-US" sz="800" dirty="0"/>
           </a:p>
@@ -19890,13 +19890,13 @@
             <a:r>
               <a:rPr lang="en-US" sz="700" b="1" dirty="0">
                 <a:solidFill>
-                  <a:srgbClr val="2FBF71"/>
-                </a:solidFill>
-                <a:latin typeface="Arial" pitchFamily="34" charset="0"/>
-                <a:ea typeface="Arial" pitchFamily="34" charset="-122"/>
-                <a:cs typeface="Arial" pitchFamily="34" charset="-120"/>
-              </a:rPr>
-              <a:t>75% cheaper</a:t>
+                  <a:srgbClr val="FF8A8F"/>
+                </a:solidFill>
+                <a:latin typeface="Arial" pitchFamily="34" charset="0"/>
+                <a:ea typeface="Arial" pitchFamily="34" charset="-122"/>
+                <a:cs typeface="Arial" pitchFamily="34" charset="-120"/>
+              </a:rPr>
+              <a:t>24% higher</a:t>
             </a:r>
             <a:endParaRPr lang="en-US" sz="800" dirty="0"/>
           </a:p>
@@ -20022,6 +20022,368 @@
           <a:xfrm>
             <a:off x="9180576" y="3439287"/>
             <a:ext cx="2532888" cy="378333"/>
+          </a:xfrm>
+          <a:prstGeom prst="rect">
+            <a:avLst/>
+          </a:prstGeom>
+          <a:solidFill>
+            <a:srgbClr val="3A0E14"/>
+          </a:solidFill>
+          <a:ln w="12700">
+            <a:solidFill>
+              <a:srgbClr val="3A0E14"/>
+            </a:solidFill>
+            <a:prstDash val="solid"/>
+          </a:ln>
+        </p:spPr>
+      </p:sp>
+      <p:pic>
+        <p:nvPicPr>
+          <p:cNvPr id="50" name="Image 6" descr="assets/photo_fbr350r.jpg">    </p:cNvPr>
+          <p:cNvPicPr>
+            <a:picLocks noChangeAspect="1"/>
+          </p:cNvPicPr>
+          <p:nvPr/>
+        </p:nvPicPr>
+        <p:blipFill>
+          <a:blip r:embed="rId7"/>
+          <a:srcRect l="0" r="0" t="0" b="0"/>
+          <a:stretch/>
+        </p:blipFill>
+        <p:spPr>
+          <a:xfrm>
+            <a:off x="9226296" y="3466719"/>
+            <a:ext cx="478860" cy="360045"/>
+          </a:xfrm>
+          <a:prstGeom prst="rect">
+            <a:avLst/>
+          </a:prstGeom>
+        </p:spPr>
+      </p:pic>
+      <p:sp>
+        <p:nvSpPr>
+          <p:cNvPr id="51" name="Text 42"/>
+          <p:cNvSpPr txBox="1"/>
+          <p:nvPr/>
+        </p:nvSpPr>
+        <p:spPr>
+          <a:xfrm>
+            <a:off x="9760020" y="3439287"/>
+            <a:ext cx="1962588" cy="414909"/>
+          </a:xfrm>
+          <a:prstGeom prst="rect">
+            <a:avLst/>
+          </a:prstGeom>
+          <a:noFill/>
+          <a:ln/>
+        </p:spPr>
+        <p:txBody>
+          <a:bodyPr wrap="square" lIns="0" tIns="0" rIns="0" bIns="0" rtlCol="0" anchor="ctr"/>
+          <a:lstStyle/>
+          <a:p>
+            <a:pPr indent="0" marL="0">
+              <a:buNone/>
+            </a:pPr>
+            <a:r>
+              <a:rPr lang="en-US" sz="800" b="1" dirty="0">
+                <a:solidFill>
+                  <a:srgbClr val="FFFFFF"/>
+                </a:solidFill>
+                <a:latin typeface="Arial" pitchFamily="34" charset="0"/>
+                <a:ea typeface="Arial" pitchFamily="34" charset="-122"/>
+                <a:cs typeface="Arial" pitchFamily="34" charset="-120"/>
+              </a:rPr>
+              <a:t>FBR350R A4</a:t>
+            </a:r>
+            <a:endParaRPr lang="en-US" sz="800" dirty="0"/>
+          </a:p>
+          <a:p>
+            <a:pPr indent="0" marL="0">
+              <a:buNone/>
+            </a:pPr>
+            <a:r>
+              <a:rPr lang="en-US" sz="700" dirty="0">
+                <a:solidFill>
+                  <a:srgbClr val="FFFFFF"/>
+                </a:solidFill>
+                <a:latin typeface="Arial" pitchFamily="34" charset="0"/>
+                <a:ea typeface="Arial" pitchFamily="34" charset="-122"/>
+                <a:cs typeface="Arial" pitchFamily="34" charset="-120"/>
+              </a:rPr>
+              <a:t>Rp 1.120.000.000</a:t>
+            </a:r>
+            <a:endParaRPr lang="en-US" sz="800" dirty="0"/>
+          </a:p>
+          <a:p>
+            <a:pPr indent="0" marL="0">
+              <a:buNone/>
+            </a:pPr>
+            <a:r>
+              <a:rPr lang="en-US" sz="700" b="1" dirty="0">
+                <a:solidFill>
+                  <a:srgbClr val="FF8A8F"/>
+                </a:solidFill>
+                <a:latin typeface="Arial" pitchFamily="34" charset="0"/>
+                <a:ea typeface="Arial" pitchFamily="34" charset="-122"/>
+                <a:cs typeface="Arial" pitchFamily="34" charset="-120"/>
+              </a:rPr>
+              <a:t>1% higher</a:t>
+            </a:r>
+            <a:endParaRPr lang="en-US" sz="800" dirty="0"/>
+          </a:p>
+        </p:txBody>
+      </p:sp>
+      <p:sp>
+        <p:nvSpPr>
+          <p:cNvPr id="52" name="Shape 43"/>
+          <p:cNvSpPr/>
+          <p:nvPr/>
+        </p:nvSpPr>
+        <p:spPr>
+          <a:xfrm>
+            <a:off x="411480" y="3918204"/>
+            <a:ext cx="832104" cy="939546"/>
+          </a:xfrm>
+          <a:prstGeom prst="rect">
+            <a:avLst/>
+          </a:prstGeom>
+          <a:solidFill>
+            <a:srgbClr val="161D25"/>
+          </a:solidFill>
+          <a:ln w="12700">
+            <a:solidFill>
+              <a:srgbClr val="161D25"/>
+            </a:solidFill>
+            <a:prstDash val="solid"/>
+          </a:ln>
+        </p:spPr>
+      </p:sp>
+      <p:sp>
+        <p:nvSpPr>
+          <p:cNvPr id="53" name="Text 44"/>
+          <p:cNvSpPr txBox="1"/>
+          <p:nvPr/>
+        </p:nvSpPr>
+        <p:spPr>
+          <a:xfrm>
+            <a:off x="411480" y="3918204"/>
+            <a:ext cx="832104" cy="939546"/>
+          </a:xfrm>
+          <a:prstGeom prst="rect">
+            <a:avLst/>
+          </a:prstGeom>
+          <a:noFill/>
+          <a:ln/>
+        </p:spPr>
+        <p:txBody>
+          <a:bodyPr wrap="square" lIns="0" tIns="0" rIns="0" bIns="0" rtlCol="0" anchor="ctr"/>
+          <a:lstStyle/>
+          <a:p>
+            <a:pPr algn="ctr" indent="0" marL="0">
+              <a:buNone/>
+            </a:pPr>
+            <a:r>
+              <a:rPr lang="en-US" sz="1200" b="1" dirty="0">
+                <a:solidFill>
+                  <a:srgbClr val="F2A33A"/>
+                </a:solidFill>
+                <a:latin typeface="Arial" pitchFamily="34" charset="0"/>
+                <a:ea typeface="Arial" pitchFamily="34" charset="-122"/>
+                <a:cs typeface="Arial" pitchFamily="34" charset="-120"/>
+              </a:rPr>
+              <a:t>&gt;35–40 tm</a:t>
+            </a:r>
+            <a:endParaRPr lang="en-US" sz="1200" dirty="0"/>
+          </a:p>
+          <a:p>
+            <a:pPr algn="ctr" indent="0" marL="0">
+              <a:buNone/>
+            </a:pPr>
+            <a:r>
+              <a:rPr lang="en-US" sz="850" dirty="0">
+                <a:solidFill>
+                  <a:srgbClr val="9AA6B2"/>
+                </a:solidFill>
+                <a:latin typeface="Arial" pitchFamily="34" charset="0"/>
+                <a:ea typeface="Arial" pitchFamily="34" charset="-122"/>
+                <a:cs typeface="Arial" pitchFamily="34" charset="-120"/>
+              </a:rPr>
+              <a:t>66 units</a:t>
+            </a:r>
+            <a:endParaRPr lang="en-US" sz="1200" dirty="0"/>
+          </a:p>
+        </p:txBody>
+      </p:sp>
+      <p:sp>
+        <p:nvSpPr>
+          <p:cNvPr id="54" name="Shape 45"/>
+          <p:cNvSpPr/>
+          <p:nvPr/>
+        </p:nvSpPr>
+        <p:spPr>
+          <a:xfrm>
+            <a:off x="1280160" y="3918204"/>
+            <a:ext cx="2587752" cy="939546"/>
+          </a:xfrm>
+          <a:prstGeom prst="rect">
+            <a:avLst/>
+          </a:prstGeom>
+          <a:solidFill>
+            <a:srgbClr val="161D25"/>
+          </a:solidFill>
+          <a:ln w="12700">
+            <a:solidFill>
+              <a:srgbClr val="161D25"/>
+            </a:solidFill>
+            <a:prstDash val="solid"/>
+          </a:ln>
+        </p:spPr>
+      </p:sp>
+      <p:sp>
+        <p:nvSpPr>
+          <p:cNvPr id="55" name="Shape 46"/>
+          <p:cNvSpPr/>
+          <p:nvPr/>
+        </p:nvSpPr>
+        <p:spPr>
+          <a:xfrm>
+            <a:off x="3904488" y="3918204"/>
+            <a:ext cx="2587752" cy="939546"/>
+          </a:xfrm>
+          <a:prstGeom prst="rect">
+            <a:avLst/>
+          </a:prstGeom>
+          <a:solidFill>
+            <a:srgbClr val="161D25"/>
+          </a:solidFill>
+          <a:ln w="12700">
+            <a:solidFill>
+              <a:srgbClr val="161D25"/>
+            </a:solidFill>
+            <a:prstDash val="solid"/>
+          </a:ln>
+        </p:spPr>
+      </p:sp>
+      <p:pic>
+        <p:nvPicPr>
+          <p:cNvPr id="56" name="Image 7" descr="assets/photo_pk41002.jpg">    </p:cNvPr>
+          <p:cNvPicPr>
+            <a:picLocks noChangeAspect="1"/>
+          </p:cNvPicPr>
+          <p:nvPr/>
+        </p:nvPicPr>
+        <p:blipFill>
+          <a:blip r:embed="rId8"/>
+          <a:srcRect l="0" r="0" t="0" b="0"/>
+          <a:stretch/>
+        </p:blipFill>
+        <p:spPr>
+          <a:xfrm>
+            <a:off x="1335024" y="3973068"/>
+            <a:ext cx="997245" cy="829818"/>
+          </a:xfrm>
+          <a:prstGeom prst="rect">
+            <a:avLst/>
+          </a:prstGeom>
+        </p:spPr>
+      </p:pic>
+      <p:sp>
+        <p:nvSpPr>
+          <p:cNvPr id="57" name="Text 47"/>
+          <p:cNvSpPr txBox="1"/>
+          <p:nvPr/>
+        </p:nvSpPr>
+        <p:spPr>
+          <a:xfrm>
+            <a:off x="2396277" y="3945636"/>
+            <a:ext cx="1462491" cy="884682"/>
+          </a:xfrm>
+          <a:prstGeom prst="rect">
+            <a:avLst/>
+          </a:prstGeom>
+          <a:noFill/>
+          <a:ln/>
+        </p:spPr>
+        <p:txBody>
+          <a:bodyPr wrap="square" lIns="0" tIns="0" rIns="0" bIns="0" rtlCol="0" anchor="ctr"/>
+          <a:lstStyle/>
+          <a:p>
+            <a:pPr indent="0" marL="0">
+              <a:buNone/>
+            </a:pPr>
+            <a:r>
+              <a:rPr lang="en-US" sz="850" b="1" dirty="0">
+                <a:solidFill>
+                  <a:srgbClr val="F2A33A"/>
+                </a:solidFill>
+                <a:latin typeface="Arial" pitchFamily="34" charset="0"/>
+                <a:ea typeface="Arial" pitchFamily="34" charset="-122"/>
+                <a:cs typeface="Arial" pitchFamily="34" charset="-120"/>
+              </a:rPr>
+              <a:t>#1 </a:t>
+            </a:r>
+            <a:pPr indent="0" marL="0">
+              <a:buNone/>
+            </a:pPr>
+            <a:r>
+              <a:rPr lang="en-US" sz="950" b="1" dirty="0">
+                <a:solidFill>
+                  <a:srgbClr val="EEF1F4"/>
+                </a:solidFill>
+                <a:latin typeface="Arial" pitchFamily="34" charset="0"/>
+                <a:ea typeface="Arial" pitchFamily="34" charset="-122"/>
+                <a:cs typeface="Arial" pitchFamily="34" charset="-120"/>
+              </a:rPr>
+              <a:t>PK 41002</a:t>
+            </a:r>
+            <a:endParaRPr lang="en-US" sz="850" dirty="0"/>
+          </a:p>
+          <a:p>
+            <a:pPr indent="0" marL="0">
+              <a:buNone/>
+            </a:pPr>
+            <a:r>
+              <a:rPr lang="en-US" sz="800" dirty="0">
+                <a:solidFill>
+                  <a:srgbClr val="9AA6B2"/>
+                </a:solidFill>
+                <a:latin typeface="Arial" pitchFamily="34" charset="0"/>
+                <a:ea typeface="Arial" pitchFamily="34" charset="-122"/>
+                <a:cs typeface="Arial" pitchFamily="34" charset="-120"/>
+              </a:rPr>
+              <a:t>38.4 tm · 21 units</a:t>
+            </a:r>
+            <a:endParaRPr lang="en-US" sz="850" dirty="0"/>
+          </a:p>
+          <a:p>
+            <a:pPr indent="0" marL="0">
+              <a:buNone/>
+            </a:pPr>
+            <a:r>
+              <a:rPr lang="en-US" sz="850" dirty="0">
+                <a:solidFill>
+                  <a:srgbClr val="EEF1F4"/>
+                </a:solidFill>
+                <a:latin typeface="Arial" pitchFamily="34" charset="0"/>
+                <a:ea typeface="Arial" pitchFamily="34" charset="-122"/>
+                <a:cs typeface="Arial" pitchFamily="34" charset="-120"/>
+              </a:rPr>
+              <a:t>Rp 1.310.000.000</a:t>
+            </a:r>
+            <a:endParaRPr lang="en-US" sz="850" dirty="0"/>
+          </a:p>
+        </p:txBody>
+      </p:sp>
+      <p:sp>
+        <p:nvSpPr>
+          <p:cNvPr id="58" name="Shape 48"/>
+          <p:cNvSpPr/>
+          <p:nvPr/>
+        </p:nvSpPr>
+        <p:spPr>
+          <a:xfrm>
+            <a:off x="3931920" y="3945636"/>
+            <a:ext cx="2532888" cy="848106"/>
           </a:xfrm>
           <a:prstGeom prst="rect">
             <a:avLst/>
@@ -20039,21 +20401,21 @@
       </p:sp>
       <p:pic>
         <p:nvPicPr>
-          <p:cNvPr id="50" name="Image 6" descr="assets/photo_fbr350r.jpg">    </p:cNvPr>
+          <p:cNvPr id="59" name="Image 8" descr="assets/photo_7441c.jpg">    </p:cNvPr>
           <p:cNvPicPr>
             <a:picLocks noChangeAspect="1"/>
           </p:cNvPicPr>
           <p:nvPr/>
         </p:nvPicPr>
         <p:blipFill>
-          <a:blip r:embed="rId7"/>
+          <a:blip r:embed="rId9"/>
           <a:srcRect l="0" r="0" t="0" b="0"/>
           <a:stretch/>
         </p:blipFill>
         <p:spPr>
           <a:xfrm>
-            <a:off x="9226296" y="3466719"/>
-            <a:ext cx="478860" cy="360045"/>
+            <a:off x="3977640" y="3973068"/>
+            <a:ext cx="997245" cy="829818"/>
           </a:xfrm>
           <a:prstGeom prst="rect">
             <a:avLst/>
@@ -20062,14 +20424,14 @@
       </p:pic>
       <p:sp>
         <p:nvSpPr>
-          <p:cNvPr id="51" name="Text 42"/>
+          <p:cNvPr id="60" name="Text 49"/>
           <p:cNvSpPr txBox="1"/>
           <p:nvPr/>
         </p:nvSpPr>
         <p:spPr>
           <a:xfrm>
-            <a:off x="9760020" y="3439287"/>
-            <a:ext cx="1962588" cy="414909"/>
+            <a:off x="5029749" y="3945636"/>
+            <a:ext cx="1444203" cy="884682"/>
           </a:xfrm>
           <a:prstGeom prst="rect">
             <a:avLst/>
@@ -20085,7 +20447,7 @@
               <a:buNone/>
             </a:pPr>
             <a:r>
-              <a:rPr lang="en-US" sz="800" b="1" dirty="0">
+              <a:rPr lang="en-US" sz="950" b="1" dirty="0">
                 <a:solidFill>
                   <a:srgbClr val="FFFFFF"/>
                 </a:solidFill>
@@ -20093,16 +20455,33 @@
                 <a:ea typeface="Arial" pitchFamily="34" charset="-122"/>
                 <a:cs typeface="Arial" pitchFamily="34" charset="-120"/>
               </a:rPr>
-              <a:t>FBR350R A4</a:t>
-            </a:r>
-            <a:endParaRPr lang="en-US" sz="800" dirty="0"/>
+              <a:t>7441C</a:t>
+            </a:r>
+            <a:endParaRPr lang="en-US" sz="950" dirty="0"/>
           </a:p>
           <a:p>
             <a:pPr indent="0" marL="0">
               <a:buNone/>
             </a:pPr>
             <a:r>
-              <a:rPr lang="en-US" sz="700" dirty="0">
+              <a:rPr lang="en-US" sz="800" dirty="0">
+                <a:solidFill>
+                  <a:srgbClr val="9AA6B2"/>
+                </a:solidFill>
+                <a:latin typeface="Arial" pitchFamily="34" charset="0"/>
+                <a:ea typeface="Arial" pitchFamily="34" charset="-122"/>
+                <a:cs typeface="Arial" pitchFamily="34" charset="-120"/>
+              </a:rPr>
+              <a:t>37.7 tm</a:t>
+            </a:r>
+            <a:endParaRPr lang="en-US" sz="950" dirty="0"/>
+          </a:p>
+          <a:p>
+            <a:pPr indent="0" marL="0">
+              <a:buNone/>
+            </a:pPr>
+            <a:r>
+              <a:rPr lang="en-US" sz="850" dirty="0">
                 <a:solidFill>
                   <a:srgbClr val="FFFFFF"/>
                 </a:solidFill>
@@ -20110,16 +20489,16 @@
                 <a:ea typeface="Arial" pitchFamily="34" charset="-122"/>
                 <a:cs typeface="Arial" pitchFamily="34" charset="-120"/>
               </a:rPr>
-              <a:t>Rp 230.000.000</a:t>
-            </a:r>
-            <a:endParaRPr lang="en-US" sz="800" dirty="0"/>
+              <a:t>Rp 1.280.000.000 (est.)</a:t>
+            </a:r>
+            <a:endParaRPr lang="en-US" sz="950" dirty="0"/>
           </a:p>
           <a:p>
             <a:pPr indent="0" marL="0">
               <a:buNone/>
             </a:pPr>
             <a:r>
-              <a:rPr lang="en-US" sz="700" b="1" dirty="0">
+              <a:rPr lang="en-US" sz="850" b="1" dirty="0">
                 <a:solidFill>
                   <a:srgbClr val="2FBF71"/>
                 </a:solidFill>
@@ -20127,22 +20506,22 @@
                 <a:ea typeface="Arial" pitchFamily="34" charset="-122"/>
                 <a:cs typeface="Arial" pitchFamily="34" charset="-120"/>
               </a:rPr>
-              <a:t>79% cheaper</a:t>
-            </a:r>
-            <a:endParaRPr lang="en-US" sz="800" dirty="0"/>
+              <a:t>3% cheaper</a:t>
+            </a:r>
+            <a:endParaRPr lang="en-US" sz="950" dirty="0"/>
           </a:p>
         </p:txBody>
       </p:sp>
       <p:sp>
         <p:nvSpPr>
-          <p:cNvPr id="52" name="Shape 43"/>
+          <p:cNvPr id="61" name="Shape 50"/>
           <p:cNvSpPr/>
           <p:nvPr/>
         </p:nvSpPr>
         <p:spPr>
           <a:xfrm>
-            <a:off x="411480" y="3918204"/>
-            <a:ext cx="832104" cy="939546"/>
+            <a:off x="6528816" y="3918204"/>
+            <a:ext cx="2587752" cy="939546"/>
           </a:xfrm>
           <a:prstGeom prst="rect">
             <a:avLst/>
@@ -20160,69 +20539,13 @@
       </p:sp>
       <p:sp>
         <p:nvSpPr>
-          <p:cNvPr id="53" name="Text 44"/>
-          <p:cNvSpPr txBox="1"/>
-          <p:nvPr/>
-        </p:nvSpPr>
-        <p:spPr>
-          <a:xfrm>
-            <a:off x="411480" y="3918204"/>
-            <a:ext cx="832104" cy="939546"/>
-          </a:xfrm>
-          <a:prstGeom prst="rect">
-            <a:avLst/>
-          </a:prstGeom>
-          <a:noFill/>
-          <a:ln/>
-        </p:spPr>
-        <p:txBody>
-          <a:bodyPr wrap="square" lIns="0" tIns="0" rIns="0" bIns="0" rtlCol="0" anchor="ctr"/>
-          <a:lstStyle/>
-          <a:p>
-            <a:pPr algn="ctr" indent="0" marL="0">
-              <a:buNone/>
-            </a:pPr>
-            <a:r>
-              <a:rPr lang="en-US" sz="1200" b="1" dirty="0">
-                <a:solidFill>
-                  <a:srgbClr val="F2A33A"/>
-                </a:solidFill>
-                <a:latin typeface="Arial" pitchFamily="34" charset="0"/>
-                <a:ea typeface="Arial" pitchFamily="34" charset="-122"/>
-                <a:cs typeface="Arial" pitchFamily="34" charset="-120"/>
-              </a:rPr>
-              <a:t>&gt;35–40 tm</a:t>
-            </a:r>
-            <a:endParaRPr lang="en-US" sz="1200" dirty="0"/>
-          </a:p>
-          <a:p>
-            <a:pPr algn="ctr" indent="0" marL="0">
-              <a:buNone/>
-            </a:pPr>
-            <a:r>
-              <a:rPr lang="en-US" sz="850" dirty="0">
-                <a:solidFill>
-                  <a:srgbClr val="9AA6B2"/>
-                </a:solidFill>
-                <a:latin typeface="Arial" pitchFamily="34" charset="0"/>
-                <a:ea typeface="Arial" pitchFamily="34" charset="-122"/>
-                <a:cs typeface="Arial" pitchFamily="34" charset="-120"/>
-              </a:rPr>
-              <a:t>66 units</a:t>
-            </a:r>
-            <a:endParaRPr lang="en-US" sz="1200" dirty="0"/>
-          </a:p>
-        </p:txBody>
-      </p:sp>
-      <p:sp>
-        <p:nvSpPr>
-          <p:cNvPr id="54" name="Shape 45"/>
+          <p:cNvPr id="62" name="Shape 51"/>
           <p:cNvSpPr/>
           <p:nvPr/>
         </p:nvSpPr>
         <p:spPr>
           <a:xfrm>
-            <a:off x="1280160" y="3918204"/>
+            <a:off x="9153144" y="3918204"/>
             <a:ext cx="2587752" cy="939546"/>
           </a:xfrm>
           <a:prstGeom prst="rect">
@@ -20241,14 +20564,14 @@
       </p:sp>
       <p:sp>
         <p:nvSpPr>
-          <p:cNvPr id="55" name="Shape 46"/>
+          <p:cNvPr id="63" name="Shape 52"/>
           <p:cNvSpPr/>
           <p:nvPr/>
         </p:nvSpPr>
         <p:spPr>
           <a:xfrm>
-            <a:off x="3904488" y="3918204"/>
-            <a:ext cx="2587752" cy="939546"/>
+            <a:off x="411480" y="4894326"/>
+            <a:ext cx="832104" cy="939546"/>
           </a:xfrm>
           <a:prstGeom prst="rect">
             <a:avLst/>
@@ -20264,22 +20587,178 @@
           </a:ln>
         </p:spPr>
       </p:sp>
+      <p:sp>
+        <p:nvSpPr>
+          <p:cNvPr id="64" name="Text 53"/>
+          <p:cNvSpPr txBox="1"/>
+          <p:nvPr/>
+        </p:nvSpPr>
+        <p:spPr>
+          <a:xfrm>
+            <a:off x="411480" y="4894326"/>
+            <a:ext cx="832104" cy="939546"/>
+          </a:xfrm>
+          <a:prstGeom prst="rect">
+            <a:avLst/>
+          </a:prstGeom>
+          <a:noFill/>
+          <a:ln/>
+        </p:spPr>
+        <p:txBody>
+          <a:bodyPr wrap="square" lIns="0" tIns="0" rIns="0" bIns="0" rtlCol="0" anchor="ctr"/>
+          <a:lstStyle/>
+          <a:p>
+            <a:pPr algn="ctr" indent="0" marL="0">
+              <a:buNone/>
+            </a:pPr>
+            <a:r>
+              <a:rPr lang="en-US" sz="1200" b="1" dirty="0">
+                <a:solidFill>
+                  <a:srgbClr val="F2A33A"/>
+                </a:solidFill>
+                <a:latin typeface="Arial" pitchFamily="34" charset="0"/>
+                <a:ea typeface="Arial" pitchFamily="34" charset="-122"/>
+                <a:cs typeface="Arial" pitchFamily="34" charset="-120"/>
+              </a:rPr>
+              <a:t>&gt;40–45 tm</a:t>
+            </a:r>
+            <a:endParaRPr lang="en-US" sz="1200" dirty="0"/>
+          </a:p>
+          <a:p>
+            <a:pPr algn="ctr" indent="0" marL="0">
+              <a:buNone/>
+            </a:pPr>
+            <a:r>
+              <a:rPr lang="en-US" sz="850" dirty="0">
+                <a:solidFill>
+                  <a:srgbClr val="9AA6B2"/>
+                </a:solidFill>
+                <a:latin typeface="Arial" pitchFamily="34" charset="0"/>
+                <a:ea typeface="Arial" pitchFamily="34" charset="-122"/>
+                <a:cs typeface="Arial" pitchFamily="34" charset="-120"/>
+              </a:rPr>
+              <a:t>23 units</a:t>
+            </a:r>
+            <a:endParaRPr lang="en-US" sz="1200" dirty="0"/>
+          </a:p>
+        </p:txBody>
+      </p:sp>
+      <p:sp>
+        <p:nvSpPr>
+          <p:cNvPr id="65" name="Shape 54"/>
+          <p:cNvSpPr/>
+          <p:nvPr/>
+        </p:nvSpPr>
+        <p:spPr>
+          <a:xfrm>
+            <a:off x="1280160" y="4894326"/>
+            <a:ext cx="2587752" cy="939546"/>
+          </a:xfrm>
+          <a:prstGeom prst="rect">
+            <a:avLst/>
+          </a:prstGeom>
+          <a:solidFill>
+            <a:srgbClr val="161D25"/>
+          </a:solidFill>
+          <a:ln w="12700">
+            <a:solidFill>
+              <a:srgbClr val="161D25"/>
+            </a:solidFill>
+            <a:prstDash val="solid"/>
+          </a:ln>
+        </p:spPr>
+      </p:sp>
+      <p:sp>
+        <p:nvSpPr>
+          <p:cNvPr id="66" name="Shape 55"/>
+          <p:cNvSpPr/>
+          <p:nvPr/>
+        </p:nvSpPr>
+        <p:spPr>
+          <a:xfrm>
+            <a:off x="3904488" y="4894326"/>
+            <a:ext cx="2587752" cy="939546"/>
+          </a:xfrm>
+          <a:prstGeom prst="rect">
+            <a:avLst/>
+          </a:prstGeom>
+          <a:solidFill>
+            <a:srgbClr val="161D25"/>
+          </a:solidFill>
+          <a:ln w="12700">
+            <a:solidFill>
+              <a:srgbClr val="161D25"/>
+            </a:solidFill>
+            <a:prstDash val="solid"/>
+          </a:ln>
+        </p:spPr>
+      </p:sp>
+      <p:sp>
+        <p:nvSpPr>
+          <p:cNvPr id="67" name="Shape 56"/>
+          <p:cNvSpPr/>
+          <p:nvPr/>
+        </p:nvSpPr>
+        <p:spPr>
+          <a:xfrm>
+            <a:off x="6528816" y="4894326"/>
+            <a:ext cx="2587752" cy="939546"/>
+          </a:xfrm>
+          <a:prstGeom prst="rect">
+            <a:avLst/>
+          </a:prstGeom>
+          <a:solidFill>
+            <a:srgbClr val="161D25"/>
+          </a:solidFill>
+          <a:ln w="12700">
+            <a:solidFill>
+              <a:srgbClr val="161D25"/>
+            </a:solidFill>
+            <a:prstDash val="solid"/>
+          </a:ln>
+        </p:spPr>
+      </p:sp>
+      <p:sp>
+        <p:nvSpPr>
+          <p:cNvPr id="68" name="Shape 57"/>
+          <p:cNvSpPr/>
+          <p:nvPr/>
+        </p:nvSpPr>
+        <p:spPr>
+          <a:xfrm>
+            <a:off x="9153144" y="4894326"/>
+            <a:ext cx="2587752" cy="939546"/>
+          </a:xfrm>
+          <a:prstGeom prst="rect">
+            <a:avLst/>
+          </a:prstGeom>
+          <a:solidFill>
+            <a:srgbClr val="161D25"/>
+          </a:solidFill>
+          <a:ln w="12700">
+            <a:solidFill>
+              <a:srgbClr val="161D25"/>
+            </a:solidFill>
+            <a:prstDash val="solid"/>
+          </a:ln>
+        </p:spPr>
+      </p:sp>
       <p:pic>
         <p:nvPicPr>
-          <p:cNvPr id="56" name="Image 7" descr="assets/photo_pk41002.jpg">    </p:cNvPr>
+          <p:cNvPr id="69" name="Image 9" descr="assets/photo_477ep5.jpg">    </p:cNvPr>
           <p:cNvPicPr>
             <a:picLocks noChangeAspect="1"/>
           </p:cNvPicPr>
           <p:nvPr/>
         </p:nvPicPr>
         <p:blipFill>
-          <a:blip r:embed="rId8"/>
+          <a:blip r:embed="rId10"/>
           <a:srcRect l="0" r="0" t="0" b="0"/>
           <a:stretch/>
         </p:blipFill>
         <p:spPr>
           <a:xfrm>
-            <a:off x="1335024" y="3973068"/>
+            <a:off x="6583680" y="4949190"/>
             <a:ext cx="997245" cy="829818"/>
           </a:xfrm>
           <a:prstGeom prst="rect">
@@ -20289,13 +20768,13 @@
       </p:pic>
       <p:sp>
         <p:nvSpPr>
-          <p:cNvPr id="57" name="Text 47"/>
+          <p:cNvPr id="70" name="Text 58"/>
           <p:cNvSpPr txBox="1"/>
           <p:nvPr/>
         </p:nvSpPr>
         <p:spPr>
           <a:xfrm>
-            <a:off x="2396277" y="3945636"/>
+            <a:off x="7644933" y="4921758"/>
             <a:ext cx="1462491" cy="884682"/>
           </a:xfrm>
           <a:prstGeom prst="rect">
@@ -20320,7 +20799,7 @@
                 <a:ea typeface="Arial" pitchFamily="34" charset="-122"/>
                 <a:cs typeface="Arial" pitchFamily="34" charset="-120"/>
               </a:rPr>
-              <a:t>#1 </a:t>
+              <a:t>#2 </a:t>
             </a:r>
             <a:pPr indent="0" marL="0">
               <a:buNone/>
@@ -20334,7 +20813,7 @@
                 <a:ea typeface="Arial" pitchFamily="34" charset="-122"/>
                 <a:cs typeface="Arial" pitchFamily="34" charset="-120"/>
               </a:rPr>
-              <a:t>PK 41002</a:t>
+              <a:t>477 EP-5</a:t>
             </a:r>
             <a:endParaRPr lang="en-US" sz="850" dirty="0"/>
           </a:p>
@@ -20351,7 +20830,7 @@
                 <a:ea typeface="Arial" pitchFamily="34" charset="-122"/>
                 <a:cs typeface="Arial" pitchFamily="34" charset="-120"/>
               </a:rPr>
-              <a:t>38.4 tm · 21 units</a:t>
+              <a:t>42 tm · 4 units</a:t>
             </a:r>
             <a:endParaRPr lang="en-US" sz="850" dirty="0"/>
           </a:p>
@@ -20368,7 +20847,7 @@
                 <a:ea typeface="Arial" pitchFamily="34" charset="-122"/>
                 <a:cs typeface="Arial" pitchFamily="34" charset="-120"/>
               </a:rPr>
-              <a:t>Rp 1.310.000.000</a:t>
+              <a:t>Rp 560.000.000</a:t>
             </a:r>
             <a:endParaRPr lang="en-US" sz="850" dirty="0"/>
           </a:p>
@@ -20376,14 +20855,152 @@
       </p:sp>
       <p:sp>
         <p:nvSpPr>
-          <p:cNvPr id="58" name="Shape 48"/>
+          <p:cNvPr id="71" name="Shape 59"/>
           <p:cNvSpPr/>
           <p:nvPr/>
         </p:nvSpPr>
         <p:spPr>
           <a:xfrm>
-            <a:off x="3931920" y="3945636"/>
+            <a:off x="9180576" y="4921758"/>
             <a:ext cx="2532888" cy="848106"/>
+          </a:xfrm>
+          <a:prstGeom prst="rect">
+            <a:avLst/>
+          </a:prstGeom>
+          <a:solidFill>
+            <a:srgbClr val="3A0E14"/>
+          </a:solidFill>
+          <a:ln w="12700">
+            <a:solidFill>
+              <a:srgbClr val="3A0E14"/>
+            </a:solidFill>
+            <a:prstDash val="solid"/>
+          </a:ln>
+        </p:spPr>
+      </p:sp>
+      <p:pic>
+        <p:nvPicPr>
+          <p:cNvPr id="72" name="Image 10" descr="assets/photo_746r.jpg">    </p:cNvPr>
+          <p:cNvPicPr>
+            <a:picLocks noChangeAspect="1"/>
+          </p:cNvPicPr>
+          <p:nvPr/>
+        </p:nvPicPr>
+        <p:blipFill>
+          <a:blip r:embed="rId11"/>
+          <a:srcRect l="0" r="0" t="0" b="0"/>
+          <a:stretch/>
+        </p:blipFill>
+        <p:spPr>
+          <a:xfrm>
+            <a:off x="9226296" y="4949190"/>
+            <a:ext cx="997245" cy="829818"/>
+          </a:xfrm>
+          <a:prstGeom prst="rect">
+            <a:avLst/>
+          </a:prstGeom>
+        </p:spPr>
+      </p:pic>
+      <p:sp>
+        <p:nvSpPr>
+          <p:cNvPr id="73" name="Text 60"/>
+          <p:cNvSpPr txBox="1"/>
+          <p:nvPr/>
+        </p:nvSpPr>
+        <p:spPr>
+          <a:xfrm>
+            <a:off x="10278405" y="4921758"/>
+            <a:ext cx="1444203" cy="884682"/>
+          </a:xfrm>
+          <a:prstGeom prst="rect">
+            <a:avLst/>
+          </a:prstGeom>
+          <a:noFill/>
+          <a:ln/>
+        </p:spPr>
+        <p:txBody>
+          <a:bodyPr wrap="square" lIns="0" tIns="0" rIns="0" bIns="0" rtlCol="0" anchor="ctr"/>
+          <a:lstStyle/>
+          <a:p>
+            <a:pPr indent="0" marL="0">
+              <a:buNone/>
+            </a:pPr>
+            <a:r>
+              <a:rPr lang="en-US" sz="950" b="1" dirty="0">
+                <a:solidFill>
+                  <a:srgbClr val="FFFFFF"/>
+                </a:solidFill>
+                <a:latin typeface="Arial" pitchFamily="34" charset="0"/>
+                <a:ea typeface="Arial" pitchFamily="34" charset="-122"/>
+                <a:cs typeface="Arial" pitchFamily="34" charset="-120"/>
+              </a:rPr>
+              <a:t>746 A4</a:t>
+            </a:r>
+            <a:endParaRPr lang="en-US" sz="950" dirty="0"/>
+          </a:p>
+          <a:p>
+            <a:pPr indent="0" marL="0">
+              <a:buNone/>
+            </a:pPr>
+            <a:r>
+              <a:rPr lang="en-US" sz="800" dirty="0">
+                <a:solidFill>
+                  <a:srgbClr val="9AA6B2"/>
+                </a:solidFill>
+                <a:latin typeface="Arial" pitchFamily="34" charset="0"/>
+                <a:ea typeface="Arial" pitchFamily="34" charset="-122"/>
+                <a:cs typeface="Arial" pitchFamily="34" charset="-120"/>
+              </a:rPr>
+              <a:t>43.4 tm</a:t>
+            </a:r>
+            <a:endParaRPr lang="en-US" sz="950" dirty="0"/>
+          </a:p>
+          <a:p>
+            <a:pPr indent="0" marL="0">
+              <a:buNone/>
+            </a:pPr>
+            <a:r>
+              <a:rPr lang="en-US" sz="850" dirty="0">
+                <a:solidFill>
+                  <a:srgbClr val="FFFFFF"/>
+                </a:solidFill>
+                <a:latin typeface="Arial" pitchFamily="34" charset="0"/>
+                <a:ea typeface="Arial" pitchFamily="34" charset="-122"/>
+                <a:cs typeface="Arial" pitchFamily="34" charset="-120"/>
+              </a:rPr>
+              <a:t>Rp 1.460.000.000</a:t>
+            </a:r>
+            <a:endParaRPr lang="en-US" sz="950" dirty="0"/>
+          </a:p>
+          <a:p>
+            <a:pPr indent="0" marL="0">
+              <a:buNone/>
+            </a:pPr>
+            <a:r>
+              <a:rPr lang="en-US" sz="850" b="1" dirty="0">
+                <a:solidFill>
+                  <a:srgbClr val="FF8A8F"/>
+                </a:solidFill>
+                <a:latin typeface="Arial" pitchFamily="34" charset="0"/>
+                <a:ea typeface="Arial" pitchFamily="34" charset="-122"/>
+                <a:cs typeface="Arial" pitchFamily="34" charset="-120"/>
+              </a:rPr>
+              <a:t>160% higher</a:t>
+            </a:r>
+            <a:endParaRPr lang="en-US" sz="950" dirty="0"/>
+          </a:p>
+        </p:txBody>
+      </p:sp>
+      <p:sp>
+        <p:nvSpPr>
+          <p:cNvPr id="74" name="Shape 61"/>
+          <p:cNvSpPr/>
+          <p:nvPr/>
+        </p:nvSpPr>
+        <p:spPr>
+          <a:xfrm>
+            <a:off x="411480" y="5943600"/>
+            <a:ext cx="182880" cy="128016"/>
           </a:xfrm>
           <a:prstGeom prst="rect">
             <a:avLst/>
@@ -20399,623 +21016,6 @@
           </a:ln>
         </p:spPr>
       </p:sp>
-      <p:pic>
-        <p:nvPicPr>
-          <p:cNvPr id="59" name="Image 8" descr="assets/photo_7441c.jpg">    </p:cNvPr>
-          <p:cNvPicPr>
-            <a:picLocks noChangeAspect="1"/>
-          </p:cNvPicPr>
-          <p:nvPr/>
-        </p:nvPicPr>
-        <p:blipFill>
-          <a:blip r:embed="rId9"/>
-          <a:srcRect l="0" r="0" t="0" b="0"/>
-          <a:stretch/>
-        </p:blipFill>
-        <p:spPr>
-          <a:xfrm>
-            <a:off x="3977640" y="3973068"/>
-            <a:ext cx="997245" cy="829818"/>
-          </a:xfrm>
-          <a:prstGeom prst="rect">
-            <a:avLst/>
-          </a:prstGeom>
-        </p:spPr>
-      </p:pic>
-      <p:sp>
-        <p:nvSpPr>
-          <p:cNvPr id="60" name="Text 49"/>
-          <p:cNvSpPr txBox="1"/>
-          <p:nvPr/>
-        </p:nvSpPr>
-        <p:spPr>
-          <a:xfrm>
-            <a:off x="5029749" y="3945636"/>
-            <a:ext cx="1444203" cy="884682"/>
-          </a:xfrm>
-          <a:prstGeom prst="rect">
-            <a:avLst/>
-          </a:prstGeom>
-          <a:noFill/>
-          <a:ln/>
-        </p:spPr>
-        <p:txBody>
-          <a:bodyPr wrap="square" lIns="0" tIns="0" rIns="0" bIns="0" rtlCol="0" anchor="ctr"/>
-          <a:lstStyle/>
-          <a:p>
-            <a:pPr indent="0" marL="0">
-              <a:buNone/>
-            </a:pPr>
-            <a:r>
-              <a:rPr lang="en-US" sz="950" b="1" dirty="0">
-                <a:solidFill>
-                  <a:srgbClr val="FFFFFF"/>
-                </a:solidFill>
-                <a:latin typeface="Arial" pitchFamily="34" charset="0"/>
-                <a:ea typeface="Arial" pitchFamily="34" charset="-122"/>
-                <a:cs typeface="Arial" pitchFamily="34" charset="-120"/>
-              </a:rPr>
-              <a:t>7441C</a:t>
-            </a:r>
-            <a:endParaRPr lang="en-US" sz="950" dirty="0"/>
-          </a:p>
-          <a:p>
-            <a:pPr indent="0" marL="0">
-              <a:buNone/>
-            </a:pPr>
-            <a:r>
-              <a:rPr lang="en-US" sz="800" dirty="0">
-                <a:solidFill>
-                  <a:srgbClr val="9AA6B2"/>
-                </a:solidFill>
-                <a:latin typeface="Arial" pitchFamily="34" charset="0"/>
-                <a:ea typeface="Arial" pitchFamily="34" charset="-122"/>
-                <a:cs typeface="Arial" pitchFamily="34" charset="-120"/>
-              </a:rPr>
-              <a:t>37.7 tm</a:t>
-            </a:r>
-            <a:endParaRPr lang="en-US" sz="950" dirty="0"/>
-          </a:p>
-          <a:p>
-            <a:pPr indent="0" marL="0">
-              <a:buNone/>
-            </a:pPr>
-            <a:r>
-              <a:rPr lang="en-US" sz="850" dirty="0">
-                <a:solidFill>
-                  <a:srgbClr val="FFFFFF"/>
-                </a:solidFill>
-                <a:latin typeface="Arial" pitchFamily="34" charset="0"/>
-                <a:ea typeface="Arial" pitchFamily="34" charset="-122"/>
-                <a:cs typeface="Arial" pitchFamily="34" charset="-120"/>
-              </a:rPr>
-              <a:t>Rp 240.000.000 (est.)</a:t>
-            </a:r>
-            <a:endParaRPr lang="en-US" sz="950" dirty="0"/>
-          </a:p>
-          <a:p>
-            <a:pPr indent="0" marL="0">
-              <a:buNone/>
-            </a:pPr>
-            <a:r>
-              <a:rPr lang="en-US" sz="850" b="1" dirty="0">
-                <a:solidFill>
-                  <a:srgbClr val="2FBF71"/>
-                </a:solidFill>
-                <a:latin typeface="Arial" pitchFamily="34" charset="0"/>
-                <a:ea typeface="Arial" pitchFamily="34" charset="-122"/>
-                <a:cs typeface="Arial" pitchFamily="34" charset="-120"/>
-              </a:rPr>
-              <a:t>82% cheaper</a:t>
-            </a:r>
-            <a:endParaRPr lang="en-US" sz="950" dirty="0"/>
-          </a:p>
-        </p:txBody>
-      </p:sp>
-      <p:sp>
-        <p:nvSpPr>
-          <p:cNvPr id="61" name="Shape 50"/>
-          <p:cNvSpPr/>
-          <p:nvPr/>
-        </p:nvSpPr>
-        <p:spPr>
-          <a:xfrm>
-            <a:off x="6528816" y="3918204"/>
-            <a:ext cx="2587752" cy="939546"/>
-          </a:xfrm>
-          <a:prstGeom prst="rect">
-            <a:avLst/>
-          </a:prstGeom>
-          <a:solidFill>
-            <a:srgbClr val="161D25"/>
-          </a:solidFill>
-          <a:ln w="12700">
-            <a:solidFill>
-              <a:srgbClr val="161D25"/>
-            </a:solidFill>
-            <a:prstDash val="solid"/>
-          </a:ln>
-        </p:spPr>
-      </p:sp>
-      <p:sp>
-        <p:nvSpPr>
-          <p:cNvPr id="62" name="Shape 51"/>
-          <p:cNvSpPr/>
-          <p:nvPr/>
-        </p:nvSpPr>
-        <p:spPr>
-          <a:xfrm>
-            <a:off x="9153144" y="3918204"/>
-            <a:ext cx="2587752" cy="939546"/>
-          </a:xfrm>
-          <a:prstGeom prst="rect">
-            <a:avLst/>
-          </a:prstGeom>
-          <a:solidFill>
-            <a:srgbClr val="161D25"/>
-          </a:solidFill>
-          <a:ln w="12700">
-            <a:solidFill>
-              <a:srgbClr val="161D25"/>
-            </a:solidFill>
-            <a:prstDash val="solid"/>
-          </a:ln>
-        </p:spPr>
-      </p:sp>
-      <p:sp>
-        <p:nvSpPr>
-          <p:cNvPr id="63" name="Shape 52"/>
-          <p:cNvSpPr/>
-          <p:nvPr/>
-        </p:nvSpPr>
-        <p:spPr>
-          <a:xfrm>
-            <a:off x="411480" y="4894326"/>
-            <a:ext cx="832104" cy="939546"/>
-          </a:xfrm>
-          <a:prstGeom prst="rect">
-            <a:avLst/>
-          </a:prstGeom>
-          <a:solidFill>
-            <a:srgbClr val="161D25"/>
-          </a:solidFill>
-          <a:ln w="12700">
-            <a:solidFill>
-              <a:srgbClr val="161D25"/>
-            </a:solidFill>
-            <a:prstDash val="solid"/>
-          </a:ln>
-        </p:spPr>
-      </p:sp>
-      <p:sp>
-        <p:nvSpPr>
-          <p:cNvPr id="64" name="Text 53"/>
-          <p:cNvSpPr txBox="1"/>
-          <p:nvPr/>
-        </p:nvSpPr>
-        <p:spPr>
-          <a:xfrm>
-            <a:off x="411480" y="4894326"/>
-            <a:ext cx="832104" cy="939546"/>
-          </a:xfrm>
-          <a:prstGeom prst="rect">
-            <a:avLst/>
-          </a:prstGeom>
-          <a:noFill/>
-          <a:ln/>
-        </p:spPr>
-        <p:txBody>
-          <a:bodyPr wrap="square" lIns="0" tIns="0" rIns="0" bIns="0" rtlCol="0" anchor="ctr"/>
-          <a:lstStyle/>
-          <a:p>
-            <a:pPr algn="ctr" indent="0" marL="0">
-              <a:buNone/>
-            </a:pPr>
-            <a:r>
-              <a:rPr lang="en-US" sz="1200" b="1" dirty="0">
-                <a:solidFill>
-                  <a:srgbClr val="F2A33A"/>
-                </a:solidFill>
-                <a:latin typeface="Arial" pitchFamily="34" charset="0"/>
-                <a:ea typeface="Arial" pitchFamily="34" charset="-122"/>
-                <a:cs typeface="Arial" pitchFamily="34" charset="-120"/>
-              </a:rPr>
-              <a:t>&gt;40–45 tm</a:t>
-            </a:r>
-            <a:endParaRPr lang="en-US" sz="1200" dirty="0"/>
-          </a:p>
-          <a:p>
-            <a:pPr algn="ctr" indent="0" marL="0">
-              <a:buNone/>
-            </a:pPr>
-            <a:r>
-              <a:rPr lang="en-US" sz="850" dirty="0">
-                <a:solidFill>
-                  <a:srgbClr val="9AA6B2"/>
-                </a:solidFill>
-                <a:latin typeface="Arial" pitchFamily="34" charset="0"/>
-                <a:ea typeface="Arial" pitchFamily="34" charset="-122"/>
-                <a:cs typeface="Arial" pitchFamily="34" charset="-120"/>
-              </a:rPr>
-              <a:t>23 units</a:t>
-            </a:r>
-            <a:endParaRPr lang="en-US" sz="1200" dirty="0"/>
-          </a:p>
-        </p:txBody>
-      </p:sp>
-      <p:sp>
-        <p:nvSpPr>
-          <p:cNvPr id="65" name="Shape 54"/>
-          <p:cNvSpPr/>
-          <p:nvPr/>
-        </p:nvSpPr>
-        <p:spPr>
-          <a:xfrm>
-            <a:off x="1280160" y="4894326"/>
-            <a:ext cx="2587752" cy="939546"/>
-          </a:xfrm>
-          <a:prstGeom prst="rect">
-            <a:avLst/>
-          </a:prstGeom>
-          <a:solidFill>
-            <a:srgbClr val="161D25"/>
-          </a:solidFill>
-          <a:ln w="12700">
-            <a:solidFill>
-              <a:srgbClr val="161D25"/>
-            </a:solidFill>
-            <a:prstDash val="solid"/>
-          </a:ln>
-        </p:spPr>
-      </p:sp>
-      <p:sp>
-        <p:nvSpPr>
-          <p:cNvPr id="66" name="Shape 55"/>
-          <p:cNvSpPr/>
-          <p:nvPr/>
-        </p:nvSpPr>
-        <p:spPr>
-          <a:xfrm>
-            <a:off x="3904488" y="4894326"/>
-            <a:ext cx="2587752" cy="939546"/>
-          </a:xfrm>
-          <a:prstGeom prst="rect">
-            <a:avLst/>
-          </a:prstGeom>
-          <a:solidFill>
-            <a:srgbClr val="161D25"/>
-          </a:solidFill>
-          <a:ln w="12700">
-            <a:solidFill>
-              <a:srgbClr val="161D25"/>
-            </a:solidFill>
-            <a:prstDash val="solid"/>
-          </a:ln>
-        </p:spPr>
-      </p:sp>
-      <p:sp>
-        <p:nvSpPr>
-          <p:cNvPr id="67" name="Shape 56"/>
-          <p:cNvSpPr/>
-          <p:nvPr/>
-        </p:nvSpPr>
-        <p:spPr>
-          <a:xfrm>
-            <a:off x="6528816" y="4894326"/>
-            <a:ext cx="2587752" cy="939546"/>
-          </a:xfrm>
-          <a:prstGeom prst="rect">
-            <a:avLst/>
-          </a:prstGeom>
-          <a:solidFill>
-            <a:srgbClr val="161D25"/>
-          </a:solidFill>
-          <a:ln w="12700">
-            <a:solidFill>
-              <a:srgbClr val="161D25"/>
-            </a:solidFill>
-            <a:prstDash val="solid"/>
-          </a:ln>
-        </p:spPr>
-      </p:sp>
-      <p:sp>
-        <p:nvSpPr>
-          <p:cNvPr id="68" name="Shape 57"/>
-          <p:cNvSpPr/>
-          <p:nvPr/>
-        </p:nvSpPr>
-        <p:spPr>
-          <a:xfrm>
-            <a:off x="9153144" y="4894326"/>
-            <a:ext cx="2587752" cy="939546"/>
-          </a:xfrm>
-          <a:prstGeom prst="rect">
-            <a:avLst/>
-          </a:prstGeom>
-          <a:solidFill>
-            <a:srgbClr val="161D25"/>
-          </a:solidFill>
-          <a:ln w="12700">
-            <a:solidFill>
-              <a:srgbClr val="161D25"/>
-            </a:solidFill>
-            <a:prstDash val="solid"/>
-          </a:ln>
-        </p:spPr>
-      </p:sp>
-      <p:pic>
-        <p:nvPicPr>
-          <p:cNvPr id="69" name="Image 9" descr="assets/photo_477ep5.jpg">    </p:cNvPr>
-          <p:cNvPicPr>
-            <a:picLocks noChangeAspect="1"/>
-          </p:cNvPicPr>
-          <p:nvPr/>
-        </p:nvPicPr>
-        <p:blipFill>
-          <a:blip r:embed="rId10"/>
-          <a:srcRect l="0" r="0" t="0" b="0"/>
-          <a:stretch/>
-        </p:blipFill>
-        <p:spPr>
-          <a:xfrm>
-            <a:off x="6583680" y="4949190"/>
-            <a:ext cx="997245" cy="829818"/>
-          </a:xfrm>
-          <a:prstGeom prst="rect">
-            <a:avLst/>
-          </a:prstGeom>
-        </p:spPr>
-      </p:pic>
-      <p:sp>
-        <p:nvSpPr>
-          <p:cNvPr id="70" name="Text 58"/>
-          <p:cNvSpPr txBox="1"/>
-          <p:nvPr/>
-        </p:nvSpPr>
-        <p:spPr>
-          <a:xfrm>
-            <a:off x="7644933" y="4921758"/>
-            <a:ext cx="1462491" cy="884682"/>
-          </a:xfrm>
-          <a:prstGeom prst="rect">
-            <a:avLst/>
-          </a:prstGeom>
-          <a:noFill/>
-          <a:ln/>
-        </p:spPr>
-        <p:txBody>
-          <a:bodyPr wrap="square" lIns="0" tIns="0" rIns="0" bIns="0" rtlCol="0" anchor="ctr"/>
-          <a:lstStyle/>
-          <a:p>
-            <a:pPr indent="0" marL="0">
-              <a:buNone/>
-            </a:pPr>
-            <a:r>
-              <a:rPr lang="en-US" sz="850" b="1" dirty="0">
-                <a:solidFill>
-                  <a:srgbClr val="F2A33A"/>
-                </a:solidFill>
-                <a:latin typeface="Arial" pitchFamily="34" charset="0"/>
-                <a:ea typeface="Arial" pitchFamily="34" charset="-122"/>
-                <a:cs typeface="Arial" pitchFamily="34" charset="-120"/>
-              </a:rPr>
-              <a:t>#2 </a:t>
-            </a:r>
-            <a:pPr indent="0" marL="0">
-              <a:buNone/>
-            </a:pPr>
-            <a:r>
-              <a:rPr lang="en-US" sz="950" b="1" dirty="0">
-                <a:solidFill>
-                  <a:srgbClr val="EEF1F4"/>
-                </a:solidFill>
-                <a:latin typeface="Arial" pitchFamily="34" charset="0"/>
-                <a:ea typeface="Arial" pitchFamily="34" charset="-122"/>
-                <a:cs typeface="Arial" pitchFamily="34" charset="-120"/>
-              </a:rPr>
-              <a:t>477 EP-5</a:t>
-            </a:r>
-            <a:endParaRPr lang="en-US" sz="850" dirty="0"/>
-          </a:p>
-          <a:p>
-            <a:pPr indent="0" marL="0">
-              <a:buNone/>
-            </a:pPr>
-            <a:r>
-              <a:rPr lang="en-US" sz="800" dirty="0">
-                <a:solidFill>
-                  <a:srgbClr val="9AA6B2"/>
-                </a:solidFill>
-                <a:latin typeface="Arial" pitchFamily="34" charset="0"/>
-                <a:ea typeface="Arial" pitchFamily="34" charset="-122"/>
-                <a:cs typeface="Arial" pitchFamily="34" charset="-120"/>
-              </a:rPr>
-              <a:t>42 tm · 4 units</a:t>
-            </a:r>
-            <a:endParaRPr lang="en-US" sz="850" dirty="0"/>
-          </a:p>
-          <a:p>
-            <a:pPr indent="0" marL="0">
-              <a:buNone/>
-            </a:pPr>
-            <a:r>
-              <a:rPr lang="en-US" sz="850" dirty="0">
-                <a:solidFill>
-                  <a:srgbClr val="EEF1F4"/>
-                </a:solidFill>
-                <a:latin typeface="Arial" pitchFamily="34" charset="0"/>
-                <a:ea typeface="Arial" pitchFamily="34" charset="-122"/>
-                <a:cs typeface="Arial" pitchFamily="34" charset="-120"/>
-              </a:rPr>
-              <a:t>Rp 560.000.000</a:t>
-            </a:r>
-            <a:endParaRPr lang="en-US" sz="850" dirty="0"/>
-          </a:p>
-        </p:txBody>
-      </p:sp>
-      <p:sp>
-        <p:nvSpPr>
-          <p:cNvPr id="71" name="Shape 59"/>
-          <p:cNvSpPr/>
-          <p:nvPr/>
-        </p:nvSpPr>
-        <p:spPr>
-          <a:xfrm>
-            <a:off x="9180576" y="4921758"/>
-            <a:ext cx="2532888" cy="848106"/>
-          </a:xfrm>
-          <a:prstGeom prst="rect">
-            <a:avLst/>
-          </a:prstGeom>
-          <a:solidFill>
-            <a:srgbClr val="12301F"/>
-          </a:solidFill>
-          <a:ln w="12700">
-            <a:solidFill>
-              <a:srgbClr val="2FBF71"/>
-            </a:solidFill>
-            <a:prstDash val="solid"/>
-          </a:ln>
-        </p:spPr>
-      </p:sp>
-      <p:pic>
-        <p:nvPicPr>
-          <p:cNvPr id="72" name="Image 10" descr="assets/photo_746r.jpg">    </p:cNvPr>
-          <p:cNvPicPr>
-            <a:picLocks noChangeAspect="1"/>
-          </p:cNvPicPr>
-          <p:nvPr/>
-        </p:nvPicPr>
-        <p:blipFill>
-          <a:blip r:embed="rId11"/>
-          <a:srcRect l="0" r="0" t="0" b="0"/>
-          <a:stretch/>
-        </p:blipFill>
-        <p:spPr>
-          <a:xfrm>
-            <a:off x="9226296" y="4949190"/>
-            <a:ext cx="997245" cy="829818"/>
-          </a:xfrm>
-          <a:prstGeom prst="rect">
-            <a:avLst/>
-          </a:prstGeom>
-        </p:spPr>
-      </p:pic>
-      <p:sp>
-        <p:nvSpPr>
-          <p:cNvPr id="73" name="Text 60"/>
-          <p:cNvSpPr txBox="1"/>
-          <p:nvPr/>
-        </p:nvSpPr>
-        <p:spPr>
-          <a:xfrm>
-            <a:off x="10278405" y="4921758"/>
-            <a:ext cx="1444203" cy="884682"/>
-          </a:xfrm>
-          <a:prstGeom prst="rect">
-            <a:avLst/>
-          </a:prstGeom>
-          <a:noFill/>
-          <a:ln/>
-        </p:spPr>
-        <p:txBody>
-          <a:bodyPr wrap="square" lIns="0" tIns="0" rIns="0" bIns="0" rtlCol="0" anchor="ctr"/>
-          <a:lstStyle/>
-          <a:p>
-            <a:pPr indent="0" marL="0">
-              <a:buNone/>
-            </a:pPr>
-            <a:r>
-              <a:rPr lang="en-US" sz="950" b="1" dirty="0">
-                <a:solidFill>
-                  <a:srgbClr val="FFFFFF"/>
-                </a:solidFill>
-                <a:latin typeface="Arial" pitchFamily="34" charset="0"/>
-                <a:ea typeface="Arial" pitchFamily="34" charset="-122"/>
-                <a:cs typeface="Arial" pitchFamily="34" charset="-120"/>
-              </a:rPr>
-              <a:t>746 A4</a:t>
-            </a:r>
-            <a:endParaRPr lang="en-US" sz="950" dirty="0"/>
-          </a:p>
-          <a:p>
-            <a:pPr indent="0" marL="0">
-              <a:buNone/>
-            </a:pPr>
-            <a:r>
-              <a:rPr lang="en-US" sz="800" dirty="0">
-                <a:solidFill>
-                  <a:srgbClr val="9AA6B2"/>
-                </a:solidFill>
-                <a:latin typeface="Arial" pitchFamily="34" charset="0"/>
-                <a:ea typeface="Arial" pitchFamily="34" charset="-122"/>
-                <a:cs typeface="Arial" pitchFamily="34" charset="-120"/>
-              </a:rPr>
-              <a:t>43.4 tm</a:t>
-            </a:r>
-            <a:endParaRPr lang="en-US" sz="950" dirty="0"/>
-          </a:p>
-          <a:p>
-            <a:pPr indent="0" marL="0">
-              <a:buNone/>
-            </a:pPr>
-            <a:r>
-              <a:rPr lang="en-US" sz="850" dirty="0">
-                <a:solidFill>
-                  <a:srgbClr val="FFFFFF"/>
-                </a:solidFill>
-                <a:latin typeface="Arial" pitchFamily="34" charset="0"/>
-                <a:ea typeface="Arial" pitchFamily="34" charset="-122"/>
-                <a:cs typeface="Arial" pitchFamily="34" charset="-120"/>
-              </a:rPr>
-              <a:t>Rp 250.000.000</a:t>
-            </a:r>
-            <a:endParaRPr lang="en-US" sz="950" dirty="0"/>
-          </a:p>
-          <a:p>
-            <a:pPr indent="0" marL="0">
-              <a:buNone/>
-            </a:pPr>
-            <a:r>
-              <a:rPr lang="en-US" sz="850" b="1" dirty="0">
-                <a:solidFill>
-                  <a:srgbClr val="2FBF71"/>
-                </a:solidFill>
-                <a:latin typeface="Arial" pitchFamily="34" charset="0"/>
-                <a:ea typeface="Arial" pitchFamily="34" charset="-122"/>
-                <a:cs typeface="Arial" pitchFamily="34" charset="-120"/>
-              </a:rPr>
-              <a:t>56% cheaper</a:t>
-            </a:r>
-            <a:endParaRPr lang="en-US" sz="950" dirty="0"/>
-          </a:p>
-        </p:txBody>
-      </p:sp>
-      <p:sp>
-        <p:nvSpPr>
-          <p:cNvPr id="74" name="Shape 61"/>
-          <p:cNvSpPr/>
-          <p:nvPr/>
-        </p:nvSpPr>
-        <p:spPr>
-          <a:xfrm>
-            <a:off x="411480" y="5943600"/>
-            <a:ext cx="182880" cy="128016"/>
-          </a:xfrm>
-          <a:prstGeom prst="rect">
-            <a:avLst/>
-          </a:prstGeom>
-          <a:solidFill>
-            <a:srgbClr val="12301F"/>
-          </a:solidFill>
-          <a:ln w="12700">
-            <a:solidFill>
-              <a:srgbClr val="2FBF71"/>
-            </a:solidFill>
-            <a:prstDash val="solid"/>
-          </a:ln>
-        </p:spPr>
-      </p:sp>
       <p:sp>
         <p:nvSpPr>
           <p:cNvPr id="75" name="Text 62"/>
@@ -21191,7 +21191,7 @@
                 <a:ea typeface="Arial" pitchFamily="34" charset="-122"/>
                 <a:cs typeface="Arial" pitchFamily="34" charset="-120"/>
               </a:rPr>
-              <a:t>Source: Indonesia import records, HS 84269100 + 84264900, Jan 2023 – 14 Aug 2026; truck-mounted knuckle boom cranes only, Zoomlion and Hyva excluded. Competitors: average import unit price, Jan 2023 – 14 Aug 2026, × Rp 17.803/USD (JISDOR 23 Sep 2026) + import duty (0% China – ACFTA; 5% Europe, assumed) + PPN 11% + PPh 22 2.5% = import cost before distributor margin. F.lli Ferrari: crane price from the TSP price list (column K minus column J) less the TSP margin of 13.6%, so both sides are at import-cost level. 7441C = estimate. Prices rounded to Rp 10.000.000.</a:t>
+              <a:t>Source: Indonesia import records, HS 84269100 + 84264900, Jan 2023 – 14 Aug 2026; truck-mounted knuckle boom cranes only, Zoomlion and Hyva excluded. Competitors: average import unit price, Jan 2023 – 14 Aug 2026, × Rp 17.803/USD (JISDOR 23 Sep 2026) + import duty (0% China – ACFTA; 5% Europe, assumed) + PPN 11% + PPh 22 2.5% = import cost before distributor margin. F.lli Ferrari: crane price from the TSP price list Rev1, June 2026 (column K minus column J), less the TSP margin of 13.6%, so both sides are at import-cost level. 7441C = estimate between FBR350R A4 and 746 A4. Prices rounded to Rp 10.000.000.</a:t>
             </a:r>
             <a:endParaRPr lang="en-US" sz="750" dirty="0"/>
           </a:p>
@@ -21301,7 +21301,7 @@
                 <a:ea typeface="Arial" pitchFamily="34" charset="-122"/>
                 <a:cs typeface="Arial" pitchFamily="34" charset="-120"/>
               </a:rPr>
-              <a:t>Heavy (1/2): F.lli Ferrari costs less than all 7 top models of Palfinger, Amco Veba and XCMG</a:t>
+              <a:t>Heavy: F.lli Ferrari costs less than 4 of 7 models from Palfinger, Amco Veba and XCMG</a:t>
             </a:r>
             <a:endParaRPr lang="en-US" sz="1800" dirty="0"/>
           </a:p>
@@ -22545,7 +22545,7 @@
                 <a:ea typeface="Arial" pitchFamily="34" charset="-122"/>
                 <a:cs typeface="Arial" pitchFamily="34" charset="-120"/>
               </a:rPr>
-              <a:t>Rp 250.000.000</a:t>
+              <a:t>Rp 1.390.000.000</a:t>
             </a:r>
             <a:endParaRPr lang="en-US" sz="950" dirty="0"/>
           </a:p>
@@ -22562,7 +22562,7 @@
                 <a:ea typeface="Arial" pitchFamily="34" charset="-122"/>
                 <a:cs typeface="Arial" pitchFamily="34" charset="-120"/>
               </a:rPr>
-              <a:t>87% cheaper</a:t>
+              <a:t>26% cheaper</a:t>
             </a:r>
             <a:endParaRPr lang="en-US" sz="950" dirty="0"/>
           </a:p>
@@ -22743,11 +22743,11 @@
             <a:avLst/>
           </a:prstGeom>
           <a:solidFill>
-            <a:srgbClr val="12301F"/>
+            <a:srgbClr val="3A0E14"/>
           </a:solidFill>
           <a:ln w="12700">
             <a:solidFill>
-              <a:srgbClr val="2FBF71"/>
+              <a:srgbClr val="3A0E14"/>
             </a:solidFill>
             <a:prstDash val="solid"/>
           </a:ln>
@@ -22843,7 +22843,7 @@
                 <a:ea typeface="Arial" pitchFamily="34" charset="-122"/>
                 <a:cs typeface="Arial" pitchFamily="34" charset="-120"/>
               </a:rPr>
-              <a:t>Rp 250.000.000</a:t>
+              <a:t>Rp 1.390.000.000</a:t>
             </a:r>
             <a:endParaRPr lang="en-US" sz="950" dirty="0"/>
           </a:p>
@@ -22854,13 +22854,13 @@
             <a:r>
               <a:rPr lang="en-US" sz="850" b="1" dirty="0">
                 <a:solidFill>
-                  <a:srgbClr val="2FBF71"/>
-                </a:solidFill>
-                <a:latin typeface="Arial" pitchFamily="34" charset="0"/>
-                <a:ea typeface="Arial" pitchFamily="34" charset="-122"/>
-                <a:cs typeface="Arial" pitchFamily="34" charset="-120"/>
-              </a:rPr>
-              <a:t>70% cheaper</a:t>
+                  <a:srgbClr val="FF8A8F"/>
+                </a:solidFill>
+                <a:latin typeface="Arial" pitchFamily="34" charset="0"/>
+                <a:ea typeface="Arial" pitchFamily="34" charset="-122"/>
+                <a:cs typeface="Arial" pitchFamily="34" charset="-120"/>
+              </a:rPr>
+              <a:t>72% higher</a:t>
             </a:r>
             <a:endParaRPr lang="en-US" sz="950" dirty="0"/>
           </a:p>
@@ -23222,7 +23222,7 @@
                 <a:ea typeface="Arial" pitchFamily="34" charset="-122"/>
                 <a:cs typeface="Arial" pitchFamily="34" charset="-120"/>
               </a:rPr>
-              <a:t>Rp 250.000.000</a:t>
+              <a:t>Rp 1.390.000.000</a:t>
             </a:r>
             <a:endParaRPr lang="en-US" sz="950" dirty="0"/>
           </a:p>
@@ -23239,7 +23239,7 @@
                 <a:ea typeface="Arial" pitchFamily="34" charset="-122"/>
                 <a:cs typeface="Arial" pitchFamily="34" charset="-120"/>
               </a:rPr>
-              <a:t>85% cheaper</a:t>
+              <a:t>14% cheaper</a:t>
             </a:r>
             <a:endParaRPr lang="en-US" sz="950" dirty="0"/>
           </a:p>
@@ -23684,7 +23684,7 @@
                 <a:ea typeface="Arial" pitchFamily="34" charset="-122"/>
                 <a:cs typeface="Arial" pitchFamily="34" charset="-120"/>
               </a:rPr>
-              <a:t>Rp 280.000.000</a:t>
+              <a:t>Rp 2.090.000.000</a:t>
             </a:r>
             <a:endParaRPr lang="en-US" sz="800" dirty="0"/>
           </a:p>
@@ -23701,7 +23701,7 @@
                 <a:ea typeface="Arial" pitchFamily="34" charset="-122"/>
                 <a:cs typeface="Arial" pitchFamily="34" charset="-120"/>
               </a:rPr>
-              <a:t>88% cheaper</a:t>
+              <a:t>8% cheaper</a:t>
             </a:r>
             <a:endParaRPr lang="en-US" sz="800" dirty="0"/>
           </a:p>
@@ -23915,7 +23915,7 @@
                 <a:ea typeface="Arial" pitchFamily="34" charset="-122"/>
                 <a:cs typeface="Arial" pitchFamily="34" charset="-120"/>
               </a:rPr>
-              <a:t>Rp 280.000.000</a:t>
+              <a:t>Rp 2.090.000.000</a:t>
             </a:r>
             <a:endParaRPr lang="en-US" sz="800" dirty="0"/>
           </a:p>
@@ -23932,7 +23932,7 @@
                 <a:ea typeface="Arial" pitchFamily="34" charset="-122"/>
                 <a:cs typeface="Arial" pitchFamily="34" charset="-120"/>
               </a:rPr>
-              <a:t>87% cheaper</a:t>
+              <a:t>6% cheaper</a:t>
             </a:r>
             <a:endParaRPr lang="en-US" sz="800" dirty="0"/>
           </a:p>
@@ -24163,11 +24163,11 @@
             <a:avLst/>
           </a:prstGeom>
           <a:solidFill>
-            <a:srgbClr val="12301F"/>
+            <a:srgbClr val="3A0E14"/>
           </a:solidFill>
           <a:ln w="12700">
             <a:solidFill>
-              <a:srgbClr val="2FBF71"/>
+              <a:srgbClr val="3A0E14"/>
             </a:solidFill>
             <a:prstDash val="solid"/>
           </a:ln>
@@ -24246,7 +24246,7 @@
                 <a:ea typeface="Arial" pitchFamily="34" charset="-122"/>
                 <a:cs typeface="Arial" pitchFamily="34" charset="-120"/>
               </a:rPr>
-              <a:t>Rp 280.000.000</a:t>
+              <a:t>Rp 2.090.000.000</a:t>
             </a:r>
             <a:endParaRPr lang="en-US" sz="800" dirty="0"/>
           </a:p>
@@ -24257,13 +24257,13 @@
             <a:r>
               <a:rPr lang="en-US" sz="700" b="1" dirty="0">
                 <a:solidFill>
-                  <a:srgbClr val="2FBF71"/>
-                </a:solidFill>
-                <a:latin typeface="Arial" pitchFamily="34" charset="0"/>
-                <a:ea typeface="Arial" pitchFamily="34" charset="-122"/>
-                <a:cs typeface="Arial" pitchFamily="34" charset="-120"/>
-              </a:rPr>
-              <a:t>78% cheaper</a:t>
+                  <a:srgbClr val="FF8A8F"/>
+                </a:solidFill>
+                <a:latin typeface="Arial" pitchFamily="34" charset="0"/>
+                <a:ea typeface="Arial" pitchFamily="34" charset="-122"/>
+                <a:cs typeface="Arial" pitchFamily="34" charset="-120"/>
+              </a:rPr>
+              <a:t>59% higher</a:t>
             </a:r>
             <a:endParaRPr lang="en-US" sz="800" dirty="0"/>
           </a:p>
@@ -24389,6 +24389,127 @@
           <a:xfrm>
             <a:off x="10055352" y="5228844"/>
             <a:ext cx="1658112" cy="541020"/>
+          </a:xfrm>
+          <a:prstGeom prst="rect">
+            <a:avLst/>
+          </a:prstGeom>
+          <a:solidFill>
+            <a:srgbClr val="3A0E14"/>
+          </a:solidFill>
+          <a:ln w="12700">
+            <a:solidFill>
+              <a:srgbClr val="3A0E14"/>
+            </a:solidFill>
+            <a:prstDash val="solid"/>
+          </a:ln>
+        </p:spPr>
+      </p:sp>
+      <p:pic>
+        <p:nvPicPr>
+          <p:cNvPr id="88" name="Image 16" descr="assets/photo_fbr660r.jpg">    </p:cNvPr>
+          <p:cNvPicPr>
+            <a:picLocks noChangeAspect="1"/>
+          </p:cNvPicPr>
+          <p:nvPr/>
+        </p:nvPicPr>
+        <p:blipFill>
+          <a:blip r:embed="rId17"/>
+          <a:srcRect l="0" r="0" t="0" b="0"/>
+          <a:stretch/>
+        </p:blipFill>
+        <p:spPr>
+          <a:xfrm>
+            <a:off x="10101072" y="5256276"/>
+            <a:ext cx="524866" cy="522732"/>
+          </a:xfrm>
+          <a:prstGeom prst="rect">
+            <a:avLst/>
+          </a:prstGeom>
+        </p:spPr>
+      </p:pic>
+      <p:sp>
+        <p:nvSpPr>
+          <p:cNvPr id="89" name="Text 70"/>
+          <p:cNvSpPr txBox="1"/>
+          <p:nvPr/>
+        </p:nvSpPr>
+        <p:spPr>
+          <a:xfrm>
+            <a:off x="10680802" y="5228844"/>
+            <a:ext cx="1041806" cy="577596"/>
+          </a:xfrm>
+          <a:prstGeom prst="rect">
+            <a:avLst/>
+          </a:prstGeom>
+          <a:noFill/>
+          <a:ln/>
+        </p:spPr>
+        <p:txBody>
+          <a:bodyPr wrap="square" lIns="0" tIns="0" rIns="0" bIns="0" rtlCol="0" anchor="ctr"/>
+          <a:lstStyle/>
+          <a:p>
+            <a:pPr indent="0" marL="0">
+              <a:buNone/>
+            </a:pPr>
+            <a:r>
+              <a:rPr lang="en-US" sz="800" b="1" dirty="0">
+                <a:solidFill>
+                  <a:srgbClr val="FFFFFF"/>
+                </a:solidFill>
+                <a:latin typeface="Arial" pitchFamily="34" charset="0"/>
+                <a:ea typeface="Arial" pitchFamily="34" charset="-122"/>
+                <a:cs typeface="Arial" pitchFamily="34" charset="-120"/>
+              </a:rPr>
+              <a:t>FBR660R A4</a:t>
+            </a:r>
+            <a:endParaRPr lang="en-US" sz="800" dirty="0"/>
+          </a:p>
+          <a:p>
+            <a:pPr indent="0" marL="0">
+              <a:buNone/>
+            </a:pPr>
+            <a:r>
+              <a:rPr lang="en-US" sz="700" dirty="0">
+                <a:solidFill>
+                  <a:srgbClr val="FFFFFF"/>
+                </a:solidFill>
+                <a:latin typeface="Arial" pitchFamily="34" charset="0"/>
+                <a:ea typeface="Arial" pitchFamily="34" charset="-122"/>
+                <a:cs typeface="Arial" pitchFamily="34" charset="-120"/>
+              </a:rPr>
+              <a:t>Rp 2.090.000.000</a:t>
+            </a:r>
+            <a:endParaRPr lang="en-US" sz="800" dirty="0"/>
+          </a:p>
+          <a:p>
+            <a:pPr indent="0" marL="0">
+              <a:buNone/>
+            </a:pPr>
+            <a:r>
+              <a:rPr lang="en-US" sz="700" b="1" dirty="0">
+                <a:solidFill>
+                  <a:srgbClr val="FF8A8F"/>
+                </a:solidFill>
+                <a:latin typeface="Arial" pitchFamily="34" charset="0"/>
+                <a:ea typeface="Arial" pitchFamily="34" charset="-122"/>
+                <a:cs typeface="Arial" pitchFamily="34" charset="-120"/>
+              </a:rPr>
+              <a:t>59% higher</a:t>
+            </a:r>
+            <a:endParaRPr lang="en-US" sz="800" dirty="0"/>
+          </a:p>
+        </p:txBody>
+      </p:sp>
+      <p:sp>
+        <p:nvSpPr>
+          <p:cNvPr id="90" name="Shape 71"/>
+          <p:cNvSpPr/>
+          <p:nvPr/>
+        </p:nvSpPr>
+        <p:spPr>
+          <a:xfrm>
+            <a:off x="411480" y="5943600"/>
+            <a:ext cx="182880" cy="128016"/>
           </a:xfrm>
           <a:prstGeom prst="rect">
             <a:avLst/>
@@ -24404,127 +24525,6 @@
           </a:ln>
         </p:spPr>
       </p:sp>
-      <p:pic>
-        <p:nvPicPr>
-          <p:cNvPr id="88" name="Image 16" descr="assets/photo_fbr660r.jpg">    </p:cNvPr>
-          <p:cNvPicPr>
-            <a:picLocks noChangeAspect="1"/>
-          </p:cNvPicPr>
-          <p:nvPr/>
-        </p:nvPicPr>
-        <p:blipFill>
-          <a:blip r:embed="rId17"/>
-          <a:srcRect l="0" r="0" t="0" b="0"/>
-          <a:stretch/>
-        </p:blipFill>
-        <p:spPr>
-          <a:xfrm>
-            <a:off x="10101072" y="5256276"/>
-            <a:ext cx="524866" cy="522732"/>
-          </a:xfrm>
-          <a:prstGeom prst="rect">
-            <a:avLst/>
-          </a:prstGeom>
-        </p:spPr>
-      </p:pic>
-      <p:sp>
-        <p:nvSpPr>
-          <p:cNvPr id="89" name="Text 70"/>
-          <p:cNvSpPr txBox="1"/>
-          <p:nvPr/>
-        </p:nvSpPr>
-        <p:spPr>
-          <a:xfrm>
-            <a:off x="10680802" y="5228844"/>
-            <a:ext cx="1041806" cy="577596"/>
-          </a:xfrm>
-          <a:prstGeom prst="rect">
-            <a:avLst/>
-          </a:prstGeom>
-          <a:noFill/>
-          <a:ln/>
-        </p:spPr>
-        <p:txBody>
-          <a:bodyPr wrap="square" lIns="0" tIns="0" rIns="0" bIns="0" rtlCol="0" anchor="ctr"/>
-          <a:lstStyle/>
-          <a:p>
-            <a:pPr indent="0" marL="0">
-              <a:buNone/>
-            </a:pPr>
-            <a:r>
-              <a:rPr lang="en-US" sz="800" b="1" dirty="0">
-                <a:solidFill>
-                  <a:srgbClr val="FFFFFF"/>
-                </a:solidFill>
-                <a:latin typeface="Arial" pitchFamily="34" charset="0"/>
-                <a:ea typeface="Arial" pitchFamily="34" charset="-122"/>
-                <a:cs typeface="Arial" pitchFamily="34" charset="-120"/>
-              </a:rPr>
-              <a:t>FBR660R A4</a:t>
-            </a:r>
-            <a:endParaRPr lang="en-US" sz="800" dirty="0"/>
-          </a:p>
-          <a:p>
-            <a:pPr indent="0" marL="0">
-              <a:buNone/>
-            </a:pPr>
-            <a:r>
-              <a:rPr lang="en-US" sz="700" dirty="0">
-                <a:solidFill>
-                  <a:srgbClr val="FFFFFF"/>
-                </a:solidFill>
-                <a:latin typeface="Arial" pitchFamily="34" charset="0"/>
-                <a:ea typeface="Arial" pitchFamily="34" charset="-122"/>
-                <a:cs typeface="Arial" pitchFamily="34" charset="-120"/>
-              </a:rPr>
-              <a:t>Rp 280.000.000</a:t>
-            </a:r>
-            <a:endParaRPr lang="en-US" sz="800" dirty="0"/>
-          </a:p>
-          <a:p>
-            <a:pPr indent="0" marL="0">
-              <a:buNone/>
-            </a:pPr>
-            <a:r>
-              <a:rPr lang="en-US" sz="700" b="1" dirty="0">
-                <a:solidFill>
-                  <a:srgbClr val="2FBF71"/>
-                </a:solidFill>
-                <a:latin typeface="Arial" pitchFamily="34" charset="0"/>
-                <a:ea typeface="Arial" pitchFamily="34" charset="-122"/>
-                <a:cs typeface="Arial" pitchFamily="34" charset="-120"/>
-              </a:rPr>
-              <a:t>78% cheaper</a:t>
-            </a:r>
-            <a:endParaRPr lang="en-US" sz="800" dirty="0"/>
-          </a:p>
-        </p:txBody>
-      </p:sp>
-      <p:sp>
-        <p:nvSpPr>
-          <p:cNvPr id="90" name="Shape 71"/>
-          <p:cNvSpPr/>
-          <p:nvPr/>
-        </p:nvSpPr>
-        <p:spPr>
-          <a:xfrm>
-            <a:off x="411480" y="5943600"/>
-            <a:ext cx="182880" cy="128016"/>
-          </a:xfrm>
-          <a:prstGeom prst="rect">
-            <a:avLst/>
-          </a:prstGeom>
-          <a:solidFill>
-            <a:srgbClr val="12301F"/>
-          </a:solidFill>
-          <a:ln w="12700">
-            <a:solidFill>
-              <a:srgbClr val="2FBF71"/>
-            </a:solidFill>
-            <a:prstDash val="solid"/>
-          </a:ln>
-        </p:spPr>
-      </p:sp>
       <p:sp>
         <p:nvSpPr>
           <p:cNvPr id="91" name="Text 72"/>
@@ -24700,7 +24700,7 @@
                 <a:ea typeface="Arial" pitchFamily="34" charset="-122"/>
                 <a:cs typeface="Arial" pitchFamily="34" charset="-120"/>
               </a:rPr>
-              <a:t>Source: Indonesia import records, HS 84269100 + 84264900, Jan 2023 – 14 Aug 2026; truck-mounted knuckle boom cranes only, Zoomlion and Hyva excluded. Competitors: average import unit price, Jan 2023 – 14 Aug 2026, × Rp 17.803/USD (JISDOR 23 Sep 2026) + import duty (0% China – ACFTA; 5% Europe, assumed) + PPN 11% + PPh 22 2.5% = import cost before distributor margin. F.lli Ferrari: crane price from the TSP price list (column K minus column J) less the TSP margin of 13.6%, so both sides are at import-cost level. 7441C = estimate. Prices rounded to Rp 10.000.000.</a:t>
+              <a:t>Source: Indonesia import records, HS 84269100 + 84264900, Jan 2023 – 14 Aug 2026; truck-mounted knuckle boom cranes only, Zoomlion and Hyva excluded. Competitors: average import unit price, Jan 2023 – 14 Aug 2026, × Rp 17.803/USD (JISDOR 23 Sep 2026) + import duty (0% China – ACFTA; 5% Europe, assumed) + PPN 11% + PPh 22 2.5% = import cost before distributor margin. F.lli Ferrari: crane price from the TSP price list Rev1, June 2026 (column K minus column J), less the TSP margin of 13.6%, so both sides are at import-cost level. 7441C = estimate between FBR350R A4 and 746 A4. Prices rounded to Rp 10.000.000.</a:t>
             </a:r>
             <a:endParaRPr lang="en-US" sz="750" dirty="0"/>
           </a:p>
@@ -24810,7 +24810,7 @@
                 <a:ea typeface="Arial" pitchFamily="34" charset="-122"/>
                 <a:cs typeface="Arial" pitchFamily="34" charset="-120"/>
               </a:rPr>
-              <a:t>Heavy (2/2): F.lli Ferrari costs less than all 4 top models of Hiab, Fassi and Sany Palfinger</a:t>
+              <a:t>Heavy: F.lli Ferrari costs less than 3 of 4 models from Hiab, Fassi and Sany Palfinger</a:t>
             </a:r>
             <a:endParaRPr lang="en-US" sz="1800" dirty="0"/>
           </a:p>
@@ -26034,7 +26034,7 @@
                 <a:ea typeface="Arial" pitchFamily="34" charset="-122"/>
                 <a:cs typeface="Arial" pitchFamily="34" charset="-120"/>
               </a:rPr>
-              <a:t>Rp 250.000.000</a:t>
+              <a:t>Rp 1.390.000.000</a:t>
             </a:r>
             <a:endParaRPr lang="en-US" sz="950" dirty="0"/>
           </a:p>
@@ -26051,7 +26051,7 @@
                 <a:ea typeface="Arial" pitchFamily="34" charset="-122"/>
                 <a:cs typeface="Arial" pitchFamily="34" charset="-120"/>
               </a:rPr>
-              <a:t>84% cheaper</a:t>
+              <a:t>8% cheaper</a:t>
             </a:r>
             <a:endParaRPr lang="en-US" sz="950" dirty="0"/>
           </a:p>
@@ -26332,7 +26332,7 @@
                 <a:ea typeface="Arial" pitchFamily="34" charset="-122"/>
                 <a:cs typeface="Arial" pitchFamily="34" charset="-120"/>
               </a:rPr>
-              <a:t>Rp 250.000.000</a:t>
+              <a:t>Rp 1.390.000.000</a:t>
             </a:r>
             <a:endParaRPr lang="en-US" sz="950" dirty="0"/>
           </a:p>
@@ -26349,7 +26349,7 @@
                 <a:ea typeface="Arial" pitchFamily="34" charset="-122"/>
                 <a:cs typeface="Arial" pitchFamily="34" charset="-120"/>
               </a:rPr>
-              <a:t>85% cheaper</a:t>
+              <a:t>13% cheaper</a:t>
             </a:r>
             <a:endParaRPr lang="en-US" sz="950" dirty="0"/>
           </a:p>
@@ -26761,7 +26761,7 @@
                 <a:ea typeface="Arial" pitchFamily="34" charset="-122"/>
                 <a:cs typeface="Arial" pitchFamily="34" charset="-120"/>
               </a:rPr>
-              <a:t>Rp 250.000.000</a:t>
+              <a:t>Rp 1.390.000.000</a:t>
             </a:r>
             <a:endParaRPr lang="en-US" sz="950" dirty="0"/>
           </a:p>
@@ -26778,7 +26778,7 @@
                 <a:ea typeface="Arial" pitchFamily="34" charset="-122"/>
                 <a:cs typeface="Arial" pitchFamily="34" charset="-120"/>
               </a:rPr>
-              <a:t>93% cheaper</a:t>
+              <a:t>59% cheaper</a:t>
             </a:r>
             <a:endParaRPr lang="en-US" sz="950" dirty="0"/>
           </a:p>
@@ -27240,11 +27240,11 @@
             <a:avLst/>
           </a:prstGeom>
           <a:solidFill>
-            <a:srgbClr val="12301F"/>
+            <a:srgbClr val="3A0E14"/>
           </a:solidFill>
           <a:ln w="12700">
             <a:solidFill>
-              <a:srgbClr val="2FBF71"/>
+              <a:srgbClr val="3A0E14"/>
             </a:solidFill>
             <a:prstDash val="solid"/>
           </a:ln>
@@ -27340,7 +27340,7 @@
                 <a:ea typeface="Arial" pitchFamily="34" charset="-122"/>
                 <a:cs typeface="Arial" pitchFamily="34" charset="-120"/>
               </a:rPr>
-              <a:t>Rp 280.000.000</a:t>
+              <a:t>Rp 2.090.000.000</a:t>
             </a:r>
             <a:endParaRPr lang="en-US" sz="950" dirty="0"/>
           </a:p>
@@ -27351,13 +27351,13 @@
             <a:r>
               <a:rPr lang="en-US" sz="850" b="1" dirty="0">
                 <a:solidFill>
-                  <a:srgbClr val="2FBF71"/>
-                </a:solidFill>
-                <a:latin typeface="Arial" pitchFamily="34" charset="0"/>
-                <a:ea typeface="Arial" pitchFamily="34" charset="-122"/>
-                <a:cs typeface="Arial" pitchFamily="34" charset="-120"/>
-              </a:rPr>
-              <a:t>80% cheaper</a:t>
+                  <a:srgbClr val="FF8A8F"/>
+                </a:solidFill>
+                <a:latin typeface="Arial" pitchFamily="34" charset="0"/>
+                <a:ea typeface="Arial" pitchFamily="34" charset="-122"/>
+                <a:cs typeface="Arial" pitchFamily="34" charset="-120"/>
+              </a:rPr>
+              <a:t>49% higher</a:t>
             </a:r>
             <a:endParaRPr lang="en-US" sz="950" dirty="0"/>
           </a:p>
@@ -27563,7 +27563,7 @@
                 <a:ea typeface="Arial" pitchFamily="34" charset="-122"/>
                 <a:cs typeface="Arial" pitchFamily="34" charset="-120"/>
               </a:rPr>
-              <a:t>Source: Indonesia import records, HS 84269100 + 84264900, Jan 2023 – 14 Aug 2026; truck-mounted knuckle boom cranes only, Zoomlion and Hyva excluded. Competitors: average import unit price, Jan 2023 – 14 Aug 2026, × Rp 17.803/USD (JISDOR 23 Sep 2026) + import duty (0% China – ACFTA; 5% Europe, assumed) + PPN 11% + PPh 22 2.5% = import cost before distributor margin. F.lli Ferrari: crane price from the TSP price list (column K minus column J) less the TSP margin of 13.6%, so both sides are at import-cost level. 7441C = estimate. Prices rounded to Rp 10.000.000.</a:t>
+              <a:t>Source: Indonesia import records, HS 84269100 + 84264900, Jan 2023 – 14 Aug 2026; truck-mounted knuckle boom cranes only, Zoomlion and Hyva excluded. Competitors: average import unit price, Jan 2023 – 14 Aug 2026, × Rp 17.803/USD (JISDOR 23 Sep 2026) + import duty (0% China – ACFTA; 5% Europe, assumed) + PPN 11% + PPh 22 2.5% = import cost before distributor margin. F.lli Ferrari: crane price from the TSP price list Rev1, June 2026 (column K minus column J), less the TSP margin of 13.6%, so both sides are at import-cost level. 7441C = estimate between FBR350R A4 and 746 A4. Prices rounded to Rp 10.000.000.</a:t>
             </a:r>
             <a:endParaRPr lang="en-US" sz="750" dirty="0"/>
           </a:p>
@@ -27673,7 +27673,7 @@
                 <a:ea typeface="Arial" pitchFamily="34" charset="-122"/>
                 <a:cs typeface="Arial" pitchFamily="34" charset="-120"/>
               </a:rPr>
-              <a:t>F.lli Ferrari costs less than every top model in all 7 tm classes, with EU build quality in each</a:t>
+              <a:t>F.lli Ferrari costs less than 9 of 25 top models, all of them European; against Chinese brands it competes on EU build quality</a:t>
             </a:r>
             <a:endParaRPr lang="en-US" sz="1800" dirty="0"/>
           </a:p>
@@ -27817,14 +27817,14 @@
               <a:tblPr/>
               <a:tblGrid>
                 <a:gridCol w="685800"/>
-                <a:gridCol w="777240"/>
-                <a:gridCol w="548640"/>
-                <a:gridCol w="1691640"/>
+                <a:gridCol w="731520"/>
+                <a:gridCol w="502920"/>
+                <a:gridCol w="1645920"/>
+                <a:gridCol w="1554480"/>
                 <a:gridCol w="1600200"/>
-                <a:gridCol w="1600200"/>
-                <a:gridCol w="1005840"/>
-                <a:gridCol w="2496312"/>
                 <a:gridCol w="960120"/>
+                <a:gridCol w="2313432"/>
+                <a:gridCol w="1371600"/>
               </a:tblGrid>
               <a:tr h="310896">
                 <a:tc>
@@ -28388,7 +28388,7 @@
                           <a:ea typeface="Arial" pitchFamily="34" charset="-122"/>
                           <a:cs typeface="Arial" pitchFamily="34" charset="-120"/>
                         </a:rPr>
-                        <a:t>Leadtime</a:t>
+                        <a:t>Leadtime · made in</a:t>
                       </a:r>
                       <a:endParaRPr lang="en-US" sz="850" dirty="0">
                         <a:latin typeface="Arial" charset="0"/>
@@ -28798,7 +28798,7 @@
                           <a:ea typeface="Arial" pitchFamily="34" charset="-122"/>
                           <a:cs typeface="Arial" pitchFamily="34" charset="-120"/>
                         </a:rPr>
-                        <a:t>Rp 200.000.000</a:t>
+                        <a:t>Rp 520.000.000</a:t>
                       </a:r>
                       <a:endParaRPr lang="en-US" sz="850" dirty="0">
                         <a:latin typeface="Arial" charset="0"/>
@@ -28866,7 +28866,7 @@
                           <a:ea typeface="Arial" pitchFamily="34" charset="-122"/>
                           <a:cs typeface="Arial" pitchFamily="34" charset="-120"/>
                         </a:rPr>
-                        <a:t>2 of 2</a:t>
+                        <a:t>1 of 2</a:t>
                       </a:r>
                       <a:endParaRPr lang="en-US" sz="850" dirty="0">
                         <a:latin typeface="Arial" charset="0"/>
@@ -29002,7 +29002,7 @@
                           <a:ea typeface="Arial" pitchFamily="34" charset="-122"/>
                           <a:cs typeface="Arial" pitchFamily="34" charset="-120"/>
                         </a:rPr>
-                        <a:t>14 wk</a:t>
+                        <a:t>14 wk · China</a:t>
                       </a:r>
                       <a:endParaRPr lang="en-US" sz="850" dirty="0">
                         <a:latin typeface="Arial" charset="0"/>
@@ -29412,7 +29412,7 @@
                           <a:ea typeface="Arial" pitchFamily="34" charset="-122"/>
                           <a:cs typeface="Arial" pitchFamily="34" charset="-120"/>
                         </a:rPr>
-                        <a:t>Rp 230.000.000</a:t>
+                        <a:t>Rp 1.120.000.000</a:t>
                       </a:r>
                       <a:endParaRPr lang="en-US" sz="850" dirty="0">
                         <a:latin typeface="Arial" charset="0"/>
@@ -29472,15 +29472,15 @@
                         <a:buNone/>
                       </a:pPr>
                       <a:r>
-                        <a:rPr lang="en-US" sz="850" b="1" dirty="0">
+                        <a:rPr lang="en-US" sz="850" dirty="0">
                           <a:solidFill>
-                            <a:srgbClr val="2FBF71"/>
+                            <a:srgbClr val="EEF1F4"/>
                           </a:solidFill>
                           <a:latin typeface="Arial" pitchFamily="34" charset="0"/>
                           <a:ea typeface="Arial" pitchFamily="34" charset="-122"/>
                           <a:cs typeface="Arial" pitchFamily="34" charset="-120"/>
                         </a:rPr>
-                        <a:t>7 of 7</a:t>
+                        <a:t>0 of 7</a:t>
                       </a:r>
                       <a:endParaRPr lang="en-US" sz="850" dirty="0">
                         <a:latin typeface="Arial" charset="0"/>
@@ -29527,7 +29527,7 @@
                       <a:tailEnd type="none" w="med" len="med"/>
                     </a:lnB>
                     <a:solidFill>
-                      <a:srgbClr val="12301F"/>
+                      <a:srgbClr val="161D25"/>
                     </a:solidFill>
                   </a:tcPr>
                 </a:tc>
@@ -29616,7 +29616,7 @@
                           <a:ea typeface="Arial" pitchFamily="34" charset="-122"/>
                           <a:cs typeface="Arial" pitchFamily="34" charset="-120"/>
                         </a:rPr>
-                        <a:t>27 wk</a:t>
+                        <a:t>27 wk · Brazil</a:t>
                       </a:r>
                       <a:endParaRPr lang="en-US" sz="850" dirty="0">
                         <a:latin typeface="Arial" charset="0"/>
@@ -30026,7 +30026,7 @@
                           <a:ea typeface="Arial" pitchFamily="34" charset="-122"/>
                           <a:cs typeface="Arial" pitchFamily="34" charset="-120"/>
                         </a:rPr>
-                        <a:t>Rp 240.000.000 (est.)</a:t>
+                        <a:t>Rp 1.280.000.000 (est.)</a:t>
                       </a:r>
                       <a:endParaRPr lang="en-US" sz="850" dirty="0">
                         <a:latin typeface="Arial" charset="0"/>
@@ -30094,7 +30094,7 @@
                           <a:ea typeface="Arial" pitchFamily="34" charset="-122"/>
                           <a:cs typeface="Arial" pitchFamily="34" charset="-120"/>
                         </a:rPr>
-                        <a:t>2 of 2</a:t>
+                        <a:t>1 of 2</a:t>
                       </a:r>
                       <a:endParaRPr lang="en-US" sz="850" dirty="0">
                         <a:latin typeface="Arial" charset="0"/>
@@ -30640,7 +30640,7 @@
                           <a:ea typeface="Arial" pitchFamily="34" charset="-122"/>
                           <a:cs typeface="Arial" pitchFamily="34" charset="-120"/>
                         </a:rPr>
-                        <a:t>Rp 250.000.000 / Rp 260.000.000</a:t>
+                        <a:t>Rp 1.460.000.000 / Rp 1.740.000.000</a:t>
                       </a:r>
                       <a:endParaRPr lang="en-US" sz="850" dirty="0">
                         <a:latin typeface="Arial" charset="0"/>
@@ -30700,15 +30700,15 @@
                         <a:buNone/>
                       </a:pPr>
                       <a:r>
-                        <a:rPr lang="en-US" sz="850" b="1" dirty="0">
+                        <a:rPr lang="en-US" sz="850" dirty="0">
                           <a:solidFill>
-                            <a:srgbClr val="2FBF71"/>
+                            <a:srgbClr val="EEF1F4"/>
                           </a:solidFill>
                           <a:latin typeface="Arial" pitchFamily="34" charset="0"/>
                           <a:ea typeface="Arial" pitchFamily="34" charset="-122"/>
                           <a:cs typeface="Arial" pitchFamily="34" charset="-120"/>
                         </a:rPr>
-                        <a:t>3 of 3</a:t>
+                        <a:t>0 of 3</a:t>
                       </a:r>
                       <a:endParaRPr lang="en-US" sz="850" dirty="0">
                         <a:latin typeface="Arial" charset="0"/>
@@ -30755,7 +30755,7 @@
                       <a:tailEnd type="none" w="med" len="med"/>
                     </a:lnB>
                     <a:solidFill>
-                      <a:srgbClr val="12301F"/>
+                      <a:srgbClr val="161D25"/>
                     </a:solidFill>
                   </a:tcPr>
                 </a:tc>
@@ -30844,7 +30844,7 @@
                           <a:ea typeface="Arial" pitchFamily="34" charset="-122"/>
                           <a:cs typeface="Arial" pitchFamily="34" charset="-120"/>
                         </a:rPr>
-                        <a:t>25 wk / 25 wk</a:t>
+                        <a:t>25 wk · Italy</a:t>
                       </a:r>
                       <a:endParaRPr lang="en-US" sz="850" dirty="0">
                         <a:latin typeface="Arial" charset="0"/>
@@ -31254,7 +31254,7 @@
                           <a:ea typeface="Arial" pitchFamily="34" charset="-122"/>
                           <a:cs typeface="Arial" pitchFamily="34" charset="-120"/>
                         </a:rPr>
-                        <a:t>Rp 250.000.000</a:t>
+                        <a:t>Rp 1.390.000.000</a:t>
                       </a:r>
                       <a:endParaRPr lang="en-US" sz="850" dirty="0">
                         <a:latin typeface="Arial" charset="0"/>
@@ -31322,7 +31322,7 @@
                           <a:ea typeface="Arial" pitchFamily="34" charset="-122"/>
                           <a:cs typeface="Arial" pitchFamily="34" charset="-120"/>
                         </a:rPr>
-                        <a:t>4 of 4</a:t>
+                        <a:t>3 of 4</a:t>
                       </a:r>
                       <a:endParaRPr lang="en-US" sz="850" dirty="0">
                         <a:latin typeface="Arial" charset="0"/>
@@ -31458,7 +31458,7 @@
                           <a:ea typeface="Arial" pitchFamily="34" charset="-122"/>
                           <a:cs typeface="Arial" pitchFamily="34" charset="-120"/>
                         </a:rPr>
-                        <a:t>27 wk</a:t>
+                        <a:t>27 wk · Brazil</a:t>
                       </a:r>
                       <a:endParaRPr lang="en-US" sz="850" dirty="0">
                         <a:latin typeface="Arial" charset="0"/>
@@ -31868,7 +31868,7 @@
                           <a:ea typeface="Arial" pitchFamily="34" charset="-122"/>
                           <a:cs typeface="Arial" pitchFamily="34" charset="-120"/>
                         </a:rPr>
-                        <a:t>Rp 250.000.000</a:t>
+                        <a:t>Rp 1.390.000.000</a:t>
                       </a:r>
                       <a:endParaRPr lang="en-US" sz="850" dirty="0">
                         <a:latin typeface="Arial" charset="0"/>
@@ -32072,7 +32072,7 @@
                           <a:ea typeface="Arial" pitchFamily="34" charset="-122"/>
                           <a:cs typeface="Arial" pitchFamily="34" charset="-120"/>
                         </a:rPr>
-                        <a:t>27 wk</a:t>
+                        <a:t>27 wk · Brazil</a:t>
                       </a:r>
                       <a:endParaRPr lang="en-US" sz="850" dirty="0">
                         <a:latin typeface="Arial" charset="0"/>
@@ -32482,7 +32482,7 @@
                           <a:ea typeface="Arial" pitchFamily="34" charset="-122"/>
                           <a:cs typeface="Arial" pitchFamily="34" charset="-120"/>
                         </a:rPr>
-                        <a:t>Rp 280.000.000</a:t>
+                        <a:t>Rp 2.090.000.000</a:t>
                       </a:r>
                       <a:endParaRPr lang="en-US" sz="850" dirty="0">
                         <a:latin typeface="Arial" charset="0"/>
@@ -32550,7 +32550,7 @@
                           <a:ea typeface="Arial" pitchFamily="34" charset="-122"/>
                           <a:cs typeface="Arial" pitchFamily="34" charset="-120"/>
                         </a:rPr>
-                        <a:t>5 of 5</a:t>
+                        <a:t>2 of 5</a:t>
                       </a:r>
                       <a:endParaRPr lang="en-US" sz="850" dirty="0">
                         <a:latin typeface="Arial" charset="0"/>
@@ -32686,7 +32686,7 @@
                           <a:ea typeface="Arial" pitchFamily="34" charset="-122"/>
                           <a:cs typeface="Arial" pitchFamily="34" charset="-120"/>
                         </a:rPr>
-                        <a:t>27 wk</a:t>
+                        <a:t>27 wk · Brazil</a:t>
                       </a:r>
                       <a:endParaRPr lang="en-US" sz="850" dirty="0">
                         <a:latin typeface="Arial" charset="0"/>
@@ -33063,7 +33063,7 @@
                 <a:ea typeface="Arial" pitchFamily="34" charset="-122"/>
                 <a:cs typeface="Arial" pitchFamily="34" charset="-120"/>
               </a:rPr>
-              <a:t>Green = F.lli Ferrari costs less than every top model in the class (pages 4 – 7). Competitors: average import unit price, Jan 2023 – 14 Aug 2026, × Rp 17.803/USD (JISDOR 23 Sep 2026) + import duty (0% China – ACFTA; 5% Europe, assumed) + PPN 11% + PPh 22 2.5% = import cost before distributor margin. F.lli Ferrari: crane price from the TSP price list (column K minus column J) less the TSP margin of 13.6%, so both sides are at import-cost level. 7441C = estimate. Prices rounded to Rp 10.000.000.</a:t>
+              <a:t>Green = F.lli Ferrari costs less than at least one top model in the class (pages 4 – 7). Competitors: average import unit price, Jan 2023 – 14 Aug 2026, × Rp 17.803/USD (JISDOR 23 Sep 2026) + import duty (0% China – ACFTA; 5% Europe, assumed) + PPN 11% + PPh 22 2.5% = import cost before distributor margin. F.lli Ferrari: crane price from the TSP price list Rev1, June 2026 (column K minus column J), less the TSP margin of 13.6%, so both sides are at import-cost level. 7441C = estimate between FBR350R A4 and 746 A4. Prices rounded to Rp 10.000.000.</a:t>
             </a:r>
             <a:endParaRPr lang="en-US" sz="750" dirty="0"/>
           </a:p>

--- a/slides/Flli_Ferrari_Market_Strategy_v5.pptx
+++ b/slides/Flli_Ferrari_Market_Strategy_v5.pptx
@@ -28410,13 +28410,13 @@
             <a:tbl>
               <a:tblPr/>
               <a:tblGrid>
-                <a:gridCol w="868680"/>
-                <a:gridCol w="1463040"/>
-                <a:gridCol w="1806854"/>
-                <a:gridCol w="1806854"/>
-                <a:gridCol w="1806854"/>
-                <a:gridCol w="1806854"/>
-                <a:gridCol w="1806854"/>
+                <a:gridCol w="960120"/>
+                <a:gridCol w="1600200"/>
+                <a:gridCol w="1761134"/>
+                <a:gridCol w="1761134"/>
+                <a:gridCol w="1761134"/>
+                <a:gridCol w="1761134"/>
+                <a:gridCol w="1761134"/>
               </a:tblGrid>
               <a:tr h="457200">
                 <a:tc>
@@ -28564,7 +28564,7 @@
                         <a:buNone/>
                       </a:pPr>
                       <a:r>
-                        <a:rPr lang="en-US" sz="850" dirty="0">
+                        <a:rPr lang="en-US" sz="1050" dirty="0">
                           <a:solidFill>
                             <a:srgbClr val="9AA6B2"/>
                           </a:solidFill>
@@ -28572,16 +28572,16 @@
                           <a:ea typeface="Calibri" pitchFamily="34" charset="-122"/>
                           <a:cs typeface="Calibri" pitchFamily="34" charset="-120"/>
                         </a:rPr>
-                        <a:t>88 units · Rp 41.270.000.000</a:t>
+                        <a:t>88 units</a:t>
                       </a:r>
-                      <a:endParaRPr lang="en-US" sz="850" dirty="0">
+                      <a:endParaRPr lang="en-US" sz="1050" dirty="0">
                         <a:latin typeface="Calibri" charset="0"/>
                         <a:ea typeface="Calibri" charset="0"/>
                         <a:cs typeface="Calibri" charset="0"/>
                       </a:endParaRPr>
                     </a:p>
                   </a:txBody>
-                  <a:tcPr marL="36576" marR="36576" marT="0" marB="45720" anchor="b">
+                  <a:tcPr marL="36576" marR="36576" marT="0" marB="36576" anchor="b">
                     <a:lnL w="19050" cap="flat" cmpd="sng" algn="ctr">
                       <a:solidFill>
                         <a:srgbClr val="0F141A"/>
@@ -28632,7 +28632,7 @@
                         <a:buNone/>
                       </a:pPr>
                       <a:r>
-                        <a:rPr lang="en-US" sz="850" dirty="0">
+                        <a:rPr lang="en-US" sz="1050" dirty="0">
                           <a:solidFill>
                             <a:srgbClr val="9AA6B2"/>
                           </a:solidFill>
@@ -28640,16 +28640,16 @@
                           <a:ea typeface="Calibri" pitchFamily="34" charset="-122"/>
                           <a:cs typeface="Calibri" pitchFamily="34" charset="-120"/>
                         </a:rPr>
-                        <a:t>36 units · Rp 19.890.000.000</a:t>
+                        <a:t>36 units</a:t>
                       </a:r>
-                      <a:endParaRPr lang="en-US" sz="850" dirty="0">
+                      <a:endParaRPr lang="en-US" sz="1050" dirty="0">
                         <a:latin typeface="Calibri" charset="0"/>
                         <a:ea typeface="Calibri" charset="0"/>
                         <a:cs typeface="Calibri" charset="0"/>
                       </a:endParaRPr>
                     </a:p>
                   </a:txBody>
-                  <a:tcPr marL="36576" marR="36576" marT="0" marB="45720" anchor="b">
+                  <a:tcPr marL="36576" marR="36576" marT="0" marB="36576" anchor="b">
                     <a:lnL w="19050" cap="flat" cmpd="sng" algn="ctr">
                       <a:solidFill>
                         <a:srgbClr val="0F141A"/>
@@ -28700,7 +28700,7 @@
                         <a:buNone/>
                       </a:pPr>
                       <a:r>
-                        <a:rPr lang="en-US" sz="850" dirty="0">
+                        <a:rPr lang="en-US" sz="1050" dirty="0">
                           <a:solidFill>
                             <a:srgbClr val="9AA6B2"/>
                           </a:solidFill>
@@ -28708,16 +28708,16 @@
                           <a:ea typeface="Calibri" pitchFamily="34" charset="-122"/>
                           <a:cs typeface="Calibri" pitchFamily="34" charset="-120"/>
                         </a:rPr>
-                        <a:t>33 units · Rp 16.240.000.000</a:t>
+                        <a:t>33 units</a:t>
                       </a:r>
-                      <a:endParaRPr lang="en-US" sz="850" dirty="0">
+                      <a:endParaRPr lang="en-US" sz="1050" dirty="0">
                         <a:latin typeface="Calibri" charset="0"/>
                         <a:ea typeface="Calibri" charset="0"/>
                         <a:cs typeface="Calibri" charset="0"/>
                       </a:endParaRPr>
                     </a:p>
                   </a:txBody>
-                  <a:tcPr marL="36576" marR="36576" marT="0" marB="45720" anchor="b">
+                  <a:tcPr marL="36576" marR="36576" marT="0" marB="36576" anchor="b">
                     <a:lnL w="19050" cap="flat" cmpd="sng" algn="ctr">
                       <a:solidFill>
                         <a:srgbClr val="0F141A"/>
@@ -28768,7 +28768,7 @@
                         <a:buNone/>
                       </a:pPr>
                       <a:r>
-                        <a:rPr lang="en-US" sz="850" dirty="0">
+                        <a:rPr lang="en-US" sz="1050" dirty="0">
                           <a:solidFill>
                             <a:srgbClr val="9AA6B2"/>
                           </a:solidFill>
@@ -28776,16 +28776,16 @@
                           <a:ea typeface="Calibri" pitchFamily="34" charset="-122"/>
                           <a:cs typeface="Calibri" pitchFamily="34" charset="-120"/>
                         </a:rPr>
-                        <a:t>29 units · Rp 30.210.000.000</a:t>
+                        <a:t>29 units</a:t>
                       </a:r>
-                      <a:endParaRPr lang="en-US" sz="850" dirty="0">
+                      <a:endParaRPr lang="en-US" sz="1050" dirty="0">
                         <a:latin typeface="Calibri" charset="0"/>
                         <a:ea typeface="Calibri" charset="0"/>
                         <a:cs typeface="Calibri" charset="0"/>
                       </a:endParaRPr>
                     </a:p>
                   </a:txBody>
-                  <a:tcPr marL="36576" marR="36576" marT="0" marB="45720" anchor="b">
+                  <a:tcPr marL="36576" marR="36576" marT="0" marB="36576" anchor="b">
                     <a:lnL w="19050" cap="flat" cmpd="sng" algn="ctr">
                       <a:solidFill>
                         <a:srgbClr val="0F141A"/>
@@ -28836,7 +28836,7 @@
                         <a:buNone/>
                       </a:pPr>
                       <a:r>
-                        <a:rPr lang="en-US" sz="850" dirty="0">
+                        <a:rPr lang="en-US" sz="1050" dirty="0">
                           <a:solidFill>
                             <a:srgbClr val="9AA6B2"/>
                           </a:solidFill>
@@ -28844,16 +28844,16 @@
                           <a:ea typeface="Calibri" pitchFamily="34" charset="-122"/>
                           <a:cs typeface="Calibri" pitchFamily="34" charset="-120"/>
                         </a:rPr>
-                        <a:t>25 units · Rp 18.720.000.000</a:t>
+                        <a:t>25 units</a:t>
                       </a:r>
-                      <a:endParaRPr lang="en-US" sz="850" dirty="0">
+                      <a:endParaRPr lang="en-US" sz="1050" dirty="0">
                         <a:latin typeface="Calibri" charset="0"/>
                         <a:ea typeface="Calibri" charset="0"/>
                         <a:cs typeface="Calibri" charset="0"/>
                       </a:endParaRPr>
                     </a:p>
                   </a:txBody>
-                  <a:tcPr marL="36576" marR="36576" marT="0" marB="45720" anchor="b">
+                  <a:tcPr marL="36576" marR="36576" marT="0" marB="36576" anchor="b">
                     <a:lnL w="19050" cap="flat" cmpd="sng" algn="ctr">
                       <a:solidFill>
                         <a:srgbClr val="0F141A"/>
@@ -28896,7 +28896,7 @@
                   </a:tcPr>
                 </a:tc>
               </a:tr>
-              <a:tr h="765556">
+              <a:tr h="757428">
                 <a:tc rowSpan="3">
                   <a:txBody>
                     <a:bodyPr/>
@@ -28906,7 +28906,7 @@
                         <a:buNone/>
                       </a:pPr>
                       <a:r>
-                        <a:rPr lang="en-US" sz="1150" b="1" dirty="0">
+                        <a:rPr lang="en-US" sz="1400" b="1" dirty="0">
                           <a:solidFill>
                             <a:srgbClr val="F2A33A"/>
                           </a:solidFill>
@@ -28916,7 +28916,7 @@
                         </a:rPr>
                         <a:t>&gt;25–30 tm</a:t>
                       </a:r>
-                      <a:endParaRPr lang="en-US" sz="1000" dirty="0">
+                      <a:endParaRPr lang="en-US" sz="1250" dirty="0">
                         <a:latin typeface="Calibri" charset="0"/>
                         <a:ea typeface="Calibri" charset="0"/>
                         <a:cs typeface="Calibri" charset="0"/>
@@ -28927,7 +28927,7 @@
                         <a:buNone/>
                       </a:pPr>
                       <a:r>
-                        <a:rPr lang="en-US" sz="900" dirty="0">
+                        <a:rPr lang="en-US" sz="1150" dirty="0">
                           <a:solidFill>
                             <a:srgbClr val="9AA6B2"/>
                           </a:solidFill>
@@ -28937,7 +28937,7 @@
                         </a:rPr>
                         <a:t>49 units</a:t>
                       </a:r>
-                      <a:endParaRPr lang="en-US" sz="1000" dirty="0">
+                      <a:endParaRPr lang="en-US" sz="1250" dirty="0">
                         <a:latin typeface="Calibri" charset="0"/>
                         <a:ea typeface="Calibri" charset="0"/>
                         <a:cs typeface="Calibri" charset="0"/>
@@ -28995,7 +28995,7 @@
                         <a:buNone/>
                       </a:pPr>
                       <a:r>
-                        <a:rPr lang="en-US" sz="1150" b="1" dirty="0">
+                        <a:rPr lang="en-US" sz="1400" b="1" dirty="0">
                           <a:solidFill>
                             <a:srgbClr val="EEF1F4"/>
                           </a:solidFill>
@@ -29005,7 +29005,7 @@
                         </a:rPr>
                         <a:t>268 A4</a:t>
                       </a:r>
-                      <a:endParaRPr lang="en-US" sz="1000" dirty="0">
+                      <a:endParaRPr lang="en-US" sz="1250" dirty="0">
                         <a:latin typeface="Calibri" charset="0"/>
                         <a:ea typeface="Calibri" charset="0"/>
                         <a:cs typeface="Calibri" charset="0"/>
@@ -29016,7 +29016,7 @@
                         <a:buNone/>
                       </a:pPr>
                       <a:r>
-                        <a:rPr lang="en-US" sz="900" dirty="0">
+                        <a:rPr lang="en-US" sz="1150" dirty="0">
                           <a:solidFill>
                             <a:srgbClr val="C9A9AC"/>
                           </a:solidFill>
@@ -29026,7 +29026,7 @@
                         </a:rPr>
                         <a:t>25.4 tm</a:t>
                       </a:r>
-                      <a:endParaRPr lang="en-US" sz="1000" dirty="0">
+                      <a:endParaRPr lang="en-US" sz="1250" dirty="0">
                         <a:latin typeface="Calibri" charset="0"/>
                         <a:ea typeface="Calibri" charset="0"/>
                         <a:cs typeface="Calibri" charset="0"/>
@@ -29037,7 +29037,7 @@
                         <a:buNone/>
                       </a:pPr>
                       <a:r>
-                        <a:rPr lang="en-US" sz="1000" b="1" dirty="0">
+                        <a:rPr lang="en-US" sz="1250" b="1" dirty="0">
                           <a:solidFill>
                             <a:srgbClr val="EEF1F4"/>
                           </a:solidFill>
@@ -29047,7 +29047,7 @@
                         </a:rPr>
                         <a:t>Rp 500.000.000</a:t>
                       </a:r>
-                      <a:endParaRPr lang="en-US" sz="1000" dirty="0">
+                      <a:endParaRPr lang="en-US" sz="1250" dirty="0">
                         <a:latin typeface="Calibri" charset="0"/>
                         <a:ea typeface="Calibri" charset="0"/>
                         <a:cs typeface="Calibri" charset="0"/>
@@ -29104,7 +29104,7 @@
                       <a:pPr indent="0" marL="0">
                         <a:buNone/>
                       </a:pPr>
-                      <a:endParaRPr lang="en-US" sz="1000" dirty="0">
+                      <a:endParaRPr lang="en-US" sz="1250" dirty="0">
                         <a:latin typeface="Calibri" charset="0"/>
                         <a:ea typeface="Calibri" charset="0"/>
                         <a:cs typeface="Calibri" charset="0"/>
@@ -29162,7 +29162,7 @@
                         <a:buNone/>
                       </a:pPr>
                       <a:r>
-                        <a:rPr lang="en-US" sz="1050" b="1" dirty="0">
+                        <a:rPr lang="en-US" sz="1300" b="1" dirty="0">
                           <a:solidFill>
                             <a:srgbClr val="EEF1F4"/>
                           </a:solidFill>
@@ -29170,27 +29170,13 @@
                           <a:ea typeface="Calibri" pitchFamily="34" charset="-122"/>
                           <a:cs typeface="Calibri" pitchFamily="34" charset="-120"/>
                         </a:rPr>
-                        <a:t>V825</a:t>
+                        <a:t>V825  </a:t>
                       </a:r>
                       <a:pPr indent="0" marL="0">
                         <a:buNone/>
                       </a:pPr>
                       <a:r>
-                        <a:rPr lang="en-US" sz="1000" dirty="0">
-                          <a:solidFill>
-                            <a:srgbClr val="9AA6B2"/>
-                          </a:solidFill>
-                          <a:latin typeface="Calibri" pitchFamily="34" charset="0"/>
-                          <a:ea typeface="Calibri" pitchFamily="34" charset="-122"/>
-                          <a:cs typeface="Calibri" pitchFamily="34" charset="-120"/>
-                        </a:rPr>
-                        <a:t>  25.6 tm   </a:t>
-                      </a:r>
-                      <a:pPr indent="0" marL="0">
-                        <a:buNone/>
-                      </a:pPr>
-                      <a:r>
-                        <a:rPr lang="en-US" sz="1000" b="1" dirty="0">
+                        <a:rPr lang="en-US" sz="1300" b="1" dirty="0">
                           <a:solidFill>
                             <a:srgbClr val="2FBF71"/>
                           </a:solidFill>
@@ -29200,7 +29186,7 @@
                         </a:rPr>
                         <a:t>−19%</a:t>
                       </a:r>
-                      <a:endParaRPr lang="en-US" sz="1000" dirty="0">
+                      <a:endParaRPr lang="en-US" sz="1250" dirty="0">
                         <a:latin typeface="Calibri" charset="0"/>
                         <a:ea typeface="Calibri" charset="0"/>
                         <a:cs typeface="Calibri" charset="0"/>
@@ -29211,7 +29197,7 @@
                         <a:buNone/>
                       </a:pPr>
                       <a:r>
-                        <a:rPr lang="en-US" sz="1000" dirty="0">
+                        <a:rPr lang="en-US" sz="1250" dirty="0">
                           <a:solidFill>
                             <a:srgbClr val="9AA6B2"/>
                           </a:solidFill>
@@ -29219,9 +29205,9 @@
                           <a:ea typeface="Calibri" pitchFamily="34" charset="-122"/>
                           <a:cs typeface="Calibri" pitchFamily="34" charset="-120"/>
                         </a:rPr>
-                        <a:t>31 units · Rp 16.030.000.000</a:t>
+                        <a:t>25.6 tm · 31 units</a:t>
                       </a:r>
-                      <a:endParaRPr lang="en-US" sz="1000" dirty="0">
+                      <a:endParaRPr lang="en-US" sz="1250" dirty="0">
                         <a:latin typeface="Calibri" charset="0"/>
                         <a:ea typeface="Calibri" charset="0"/>
                         <a:cs typeface="Calibri" charset="0"/>
@@ -29232,7 +29218,7 @@
                         <a:buNone/>
                       </a:pPr>
                       <a:r>
-                        <a:rPr lang="en-US" sz="1000" dirty="0">
+                        <a:rPr lang="en-US" sz="1250" dirty="0">
                           <a:solidFill>
                             <a:srgbClr val="9AA6B2"/>
                           </a:solidFill>
@@ -29240,9 +29226,9 @@
                           <a:ea typeface="Calibri" pitchFamily="34" charset="-122"/>
                           <a:cs typeface="Calibri" pitchFamily="34" charset="-120"/>
                         </a:rPr>
-                        <a:t>Rp 620.000.000 per unit</a:t>
+                        <a:t>Rp 620.000.000</a:t>
                       </a:r>
-                      <a:endParaRPr lang="en-US" sz="1000" dirty="0">
+                      <a:endParaRPr lang="en-US" sz="1250" dirty="0">
                         <a:latin typeface="Calibri" charset="0"/>
                         <a:ea typeface="Calibri" charset="0"/>
                         <a:cs typeface="Calibri" charset="0"/>
@@ -29300,7 +29286,7 @@
                         <a:buNone/>
                       </a:pPr>
                       <a:r>
-                        <a:rPr lang="en-US" sz="1050" b="1" dirty="0">
+                        <a:rPr lang="en-US" sz="1300" b="1" dirty="0">
                           <a:solidFill>
                             <a:srgbClr val="EEF1F4"/>
                           </a:solidFill>
@@ -29308,27 +29294,13 @@
                           <a:ea typeface="Calibri" pitchFamily="34" charset="-122"/>
                           <a:cs typeface="Calibri" pitchFamily="34" charset="-120"/>
                         </a:rPr>
-                        <a:t>KSQZ300.3</a:t>
+                        <a:t>KSQZ300.3  </a:t>
                       </a:r>
                       <a:pPr indent="0" marL="0">
                         <a:buNone/>
                       </a:pPr>
                       <a:r>
-                        <a:rPr lang="en-US" sz="1000" dirty="0">
-                          <a:solidFill>
-                            <a:srgbClr val="9AA6B2"/>
-                          </a:solidFill>
-                          <a:latin typeface="Calibri" pitchFamily="34" charset="0"/>
-                          <a:ea typeface="Calibri" pitchFamily="34" charset="-122"/>
-                          <a:cs typeface="Calibri" pitchFamily="34" charset="-120"/>
-                        </a:rPr>
-                        <a:t>  30 tm   </a:t>
-                      </a:r>
-                      <a:pPr indent="0" marL="0">
-                        <a:buNone/>
-                      </a:pPr>
-                      <a:r>
-                        <a:rPr lang="en-US" sz="1000" b="1" dirty="0">
+                        <a:rPr lang="en-US" sz="1300" b="1" dirty="0">
                           <a:solidFill>
                             <a:srgbClr val="FF8A8F"/>
                           </a:solidFill>
@@ -29338,7 +29310,7 @@
                         </a:rPr>
                         <a:t>+2%</a:t>
                       </a:r>
-                      <a:endParaRPr lang="en-US" sz="1000" dirty="0">
+                      <a:endParaRPr lang="en-US" sz="1250" dirty="0">
                         <a:latin typeface="Calibri" charset="0"/>
                         <a:ea typeface="Calibri" charset="0"/>
                         <a:cs typeface="Calibri" charset="0"/>
@@ -29349,7 +29321,7 @@
                         <a:buNone/>
                       </a:pPr>
                       <a:r>
-                        <a:rPr lang="en-US" sz="1000" dirty="0">
+                        <a:rPr lang="en-US" sz="1250" dirty="0">
                           <a:solidFill>
                             <a:srgbClr val="9AA6B2"/>
                           </a:solidFill>
@@ -29357,9 +29329,9 @@
                           <a:ea typeface="Calibri" pitchFamily="34" charset="-122"/>
                           <a:cs typeface="Calibri" pitchFamily="34" charset="-120"/>
                         </a:rPr>
-                        <a:t>15 units · Rp 6.470.000.000</a:t>
+                        <a:t>30 tm · 15 units</a:t>
                       </a:r>
-                      <a:endParaRPr lang="en-US" sz="1000" dirty="0">
+                      <a:endParaRPr lang="en-US" sz="1250" dirty="0">
                         <a:latin typeface="Calibri" charset="0"/>
                         <a:ea typeface="Calibri" charset="0"/>
                         <a:cs typeface="Calibri" charset="0"/>
@@ -29370,7 +29342,7 @@
                         <a:buNone/>
                       </a:pPr>
                       <a:r>
-                        <a:rPr lang="en-US" sz="1000" dirty="0">
+                        <a:rPr lang="en-US" sz="1250" dirty="0">
                           <a:solidFill>
                             <a:srgbClr val="9AA6B2"/>
                           </a:solidFill>
@@ -29378,9 +29350,9 @@
                           <a:ea typeface="Calibri" pitchFamily="34" charset="-122"/>
                           <a:cs typeface="Calibri" pitchFamily="34" charset="-120"/>
                         </a:rPr>
-                        <a:t>Rp 490.000.000 per unit</a:t>
+                        <a:t>Rp 490.000.000</a:t>
                       </a:r>
-                      <a:endParaRPr lang="en-US" sz="1000" dirty="0">
+                      <a:endParaRPr lang="en-US" sz="1250" dirty="0">
                         <a:latin typeface="Calibri" charset="0"/>
                         <a:ea typeface="Calibri" charset="0"/>
                         <a:cs typeface="Calibri" charset="0"/>
@@ -29437,7 +29409,7 @@
                       <a:pPr indent="0" marL="0">
                         <a:buNone/>
                       </a:pPr>
-                      <a:endParaRPr lang="en-US" sz="1000" dirty="0">
+                      <a:endParaRPr lang="en-US" sz="1250" dirty="0">
                         <a:latin typeface="Calibri" charset="0"/>
                         <a:ea typeface="Calibri" charset="0"/>
                         <a:cs typeface="Calibri" charset="0"/>
@@ -29494,7 +29466,7 @@
                       <a:pPr indent="0" marL="0">
                         <a:buNone/>
                       </a:pPr>
-                      <a:endParaRPr lang="en-US" sz="1000" dirty="0">
+                      <a:endParaRPr lang="en-US" sz="1250" dirty="0">
                         <a:latin typeface="Calibri" charset="0"/>
                         <a:ea typeface="Calibri" charset="0"/>
                         <a:cs typeface="Calibri" charset="0"/>
@@ -29544,7 +29516,7 @@
                   </a:tcPr>
                 </a:tc>
               </a:tr>
-              <a:tr h="765556">
+              <a:tr h="757428">
                 <a:tc vMerge="1">
                   <a:tcPr/>
                 </a:tc>
@@ -29562,7 +29534,7 @@
                       <a:pPr indent="0" marL="0">
                         <a:buNone/>
                       </a:pPr>
-                      <a:endParaRPr lang="en-US" sz="1000" dirty="0">
+                      <a:endParaRPr lang="en-US" sz="1250" dirty="0">
                         <a:latin typeface="Calibri" charset="0"/>
                         <a:ea typeface="Calibri" charset="0"/>
                         <a:cs typeface="Calibri" charset="0"/>
@@ -29620,7 +29592,7 @@
                         <a:buNone/>
                       </a:pPr>
                       <a:r>
-                        <a:rPr lang="en-US" sz="1050" b="1" dirty="0">
+                        <a:rPr lang="en-US" sz="1300" b="1" dirty="0">
                           <a:solidFill>
                             <a:srgbClr val="EEF1F4"/>
                           </a:solidFill>
@@ -29628,27 +29600,13 @@
                           <a:ea typeface="Calibri" pitchFamily="34" charset="-122"/>
                           <a:cs typeface="Calibri" pitchFamily="34" charset="-120"/>
                         </a:rPr>
-                        <a:t>SQ12ZK3Q</a:t>
+                        <a:t>SQ12ZK3Q  </a:t>
                       </a:r>
                       <a:pPr indent="0" marL="0">
                         <a:buNone/>
                       </a:pPr>
                       <a:r>
-                        <a:rPr lang="en-US" sz="1000" dirty="0">
-                          <a:solidFill>
-                            <a:srgbClr val="9AA6B2"/>
-                          </a:solidFill>
-                          <a:latin typeface="Calibri" pitchFamily="34" charset="0"/>
-                          <a:ea typeface="Calibri" pitchFamily="34" charset="-122"/>
-                          <a:cs typeface="Calibri" pitchFamily="34" charset="-120"/>
-                        </a:rPr>
-                        <a:t>  30 tm   </a:t>
-                      </a:r>
-                      <a:pPr indent="0" marL="0">
-                        <a:buNone/>
-                      </a:pPr>
-                      <a:r>
-                        <a:rPr lang="en-US" sz="1000" b="1" dirty="0">
+                        <a:rPr lang="en-US" sz="1300" b="1" dirty="0">
                           <a:solidFill>
                             <a:srgbClr val="FF8A8F"/>
                           </a:solidFill>
@@ -29658,7 +29616,7 @@
                         </a:rPr>
                         <a:t>±0%</a:t>
                       </a:r>
-                      <a:endParaRPr lang="en-US" sz="1000" dirty="0">
+                      <a:endParaRPr lang="en-US" sz="1250" dirty="0">
                         <a:latin typeface="Calibri" charset="0"/>
                         <a:ea typeface="Calibri" charset="0"/>
                         <a:cs typeface="Calibri" charset="0"/>
@@ -29669,7 +29627,7 @@
                         <a:buNone/>
                       </a:pPr>
                       <a:r>
-                        <a:rPr lang="en-US" sz="1000" dirty="0">
+                        <a:rPr lang="en-US" sz="1250" dirty="0">
                           <a:solidFill>
                             <a:srgbClr val="9AA6B2"/>
                           </a:solidFill>
@@ -29677,9 +29635,9 @@
                           <a:ea typeface="Calibri" pitchFamily="34" charset="-122"/>
                           <a:cs typeface="Calibri" pitchFamily="34" charset="-120"/>
                         </a:rPr>
-                        <a:t>2 units · Rp 880.000.000</a:t>
+                        <a:t>30 tm · 2 units</a:t>
                       </a:r>
-                      <a:endParaRPr lang="en-US" sz="1000" dirty="0">
+                      <a:endParaRPr lang="en-US" sz="1250" dirty="0">
                         <a:latin typeface="Calibri" charset="0"/>
                         <a:ea typeface="Calibri" charset="0"/>
                         <a:cs typeface="Calibri" charset="0"/>
@@ -29690,7 +29648,7 @@
                         <a:buNone/>
                       </a:pPr>
                       <a:r>
-                        <a:rPr lang="en-US" sz="1000" dirty="0">
+                        <a:rPr lang="en-US" sz="1250" dirty="0">
                           <a:solidFill>
                             <a:srgbClr val="9AA6B2"/>
                           </a:solidFill>
@@ -29698,9 +29656,9 @@
                           <a:ea typeface="Calibri" pitchFamily="34" charset="-122"/>
                           <a:cs typeface="Calibri" pitchFamily="34" charset="-120"/>
                         </a:rPr>
-                        <a:t>Rp 500.000.000 per unit</a:t>
+                        <a:t>Rp 500.000.000</a:t>
                       </a:r>
-                      <a:endParaRPr lang="en-US" sz="1000" dirty="0">
+                      <a:endParaRPr lang="en-US" sz="1250" dirty="0">
                         <a:latin typeface="Calibri" charset="0"/>
                         <a:ea typeface="Calibri" charset="0"/>
                         <a:cs typeface="Calibri" charset="0"/>
@@ -29756,7 +29714,7 @@
                   <a:tcPr/>
                 </a:tc>
               </a:tr>
-              <a:tr h="915416">
+              <a:tr h="947928">
                 <a:tc vMerge="1">
                   <a:tcPr/>
                 </a:tc>
@@ -29778,7 +29736,7 @@
                         <a:buNone/>
                       </a:pPr>
                       <a:r>
-                        <a:rPr lang="en-US" sz="1050" b="1" dirty="0">
+                        <a:rPr lang="en-US" sz="1300" b="1" dirty="0">
                           <a:solidFill>
                             <a:srgbClr val="EEF1F4"/>
                           </a:solidFill>
@@ -29786,27 +29744,13 @@
                           <a:ea typeface="Calibri" pitchFamily="34" charset="-122"/>
                           <a:cs typeface="Calibri" pitchFamily="34" charset="-120"/>
                         </a:rPr>
-                        <a:t>KSQZ300.4</a:t>
+                        <a:t>KSQZ300.4  </a:t>
                       </a:r>
                       <a:pPr indent="0" marL="0">
                         <a:buNone/>
                       </a:pPr>
                       <a:r>
-                        <a:rPr lang="en-US" sz="1000" dirty="0">
-                          <a:solidFill>
-                            <a:srgbClr val="9AA6B2"/>
-                          </a:solidFill>
-                          <a:latin typeface="Calibri" pitchFamily="34" charset="0"/>
-                          <a:ea typeface="Calibri" pitchFamily="34" charset="-122"/>
-                          <a:cs typeface="Calibri" pitchFamily="34" charset="-120"/>
-                        </a:rPr>
-                        <a:t>  30 tm   </a:t>
-                      </a:r>
-                      <a:pPr indent="0" marL="0">
-                        <a:buNone/>
-                      </a:pPr>
-                      <a:r>
-                        <a:rPr lang="en-US" sz="1000" b="1" dirty="0">
+                        <a:rPr lang="en-US" sz="1300" b="1" dirty="0">
                           <a:solidFill>
                             <a:srgbClr val="2FBF71"/>
                           </a:solidFill>
@@ -29816,7 +29760,7 @@
                         </a:rPr>
                         <a:t>−12%</a:t>
                       </a:r>
-                      <a:endParaRPr lang="en-US" sz="1000" dirty="0">
+                      <a:endParaRPr lang="en-US" sz="1250" dirty="0">
                         <a:latin typeface="Calibri" charset="0"/>
                         <a:ea typeface="Calibri" charset="0"/>
                         <a:cs typeface="Calibri" charset="0"/>
@@ -29827,7 +29771,7 @@
                         <a:buNone/>
                       </a:pPr>
                       <a:r>
-                        <a:rPr lang="en-US" sz="1000" dirty="0">
+                        <a:rPr lang="en-US" sz="1250" dirty="0">
                           <a:solidFill>
                             <a:srgbClr val="9AA6B2"/>
                           </a:solidFill>
@@ -29835,9 +29779,9 @@
                           <a:ea typeface="Calibri" pitchFamily="34" charset="-122"/>
                           <a:cs typeface="Calibri" pitchFamily="34" charset="-120"/>
                         </a:rPr>
-                        <a:t>1 unit · Rp 500.000.000</a:t>
+                        <a:t>30 tm · 1 unit</a:t>
                       </a:r>
-                      <a:endParaRPr lang="en-US" sz="1000" dirty="0">
+                      <a:endParaRPr lang="en-US" sz="1250" dirty="0">
                         <a:latin typeface="Calibri" charset="0"/>
                         <a:ea typeface="Calibri" charset="0"/>
                         <a:cs typeface="Calibri" charset="0"/>
@@ -29848,7 +29792,7 @@
                         <a:buNone/>
                       </a:pPr>
                       <a:r>
-                        <a:rPr lang="en-US" sz="1000" dirty="0">
+                        <a:rPr lang="en-US" sz="1250" dirty="0">
                           <a:solidFill>
                             <a:srgbClr val="9AA6B2"/>
                           </a:solidFill>
@@ -29856,9 +29800,9 @@
                           <a:ea typeface="Calibri" pitchFamily="34" charset="-122"/>
                           <a:cs typeface="Calibri" pitchFamily="34" charset="-120"/>
                         </a:rPr>
-                        <a:t>Rp 570.000.000 per unit</a:t>
+                        <a:t>Rp 570.000.000</a:t>
                       </a:r>
-                      <a:endParaRPr lang="en-US" sz="1000" dirty="0">
+                      <a:endParaRPr lang="en-US" sz="1250" dirty="0">
                         <a:latin typeface="Calibri" charset="0"/>
                         <a:ea typeface="Calibri" charset="0"/>
                         <a:cs typeface="Calibri" charset="0"/>
@@ -29869,7 +29813,7 @@
                         <a:buNone/>
                       </a:pPr>
                       <a:r>
-                        <a:rPr lang="en-US" sz="900" dirty="0">
+                        <a:rPr lang="en-US" sz="1150" dirty="0">
                           <a:solidFill>
                             <a:srgbClr val="F5C26B"/>
                           </a:solidFill>
@@ -29879,7 +29823,7 @@
                         </a:rPr>
                         <a:t>smaller crane</a:t>
                       </a:r>
-                      <a:endParaRPr lang="en-US" sz="1000" dirty="0">
+                      <a:endParaRPr lang="en-US" sz="1250" dirty="0">
                         <a:latin typeface="Calibri" charset="0"/>
                         <a:ea typeface="Calibri" charset="0"/>
                         <a:cs typeface="Calibri" charset="0"/>
@@ -29935,7 +29879,7 @@
                   <a:tcPr/>
                 </a:tc>
               </a:tr>
-              <a:tr h="765556">
+              <a:tr h="757428">
                 <a:tc rowSpan="2">
                   <a:txBody>
                     <a:bodyPr/>
@@ -29945,7 +29889,7 @@
                         <a:buNone/>
                       </a:pPr>
                       <a:r>
-                        <a:rPr lang="en-US" sz="1150" b="1" dirty="0">
+                        <a:rPr lang="en-US" sz="1400" b="1" dirty="0">
                           <a:solidFill>
                             <a:srgbClr val="F2A33A"/>
                           </a:solidFill>
@@ -29955,7 +29899,7 @@
                         </a:rPr>
                         <a:t>&gt;30–35 tm</a:t>
                       </a:r>
-                      <a:endParaRPr lang="en-US" sz="1000" dirty="0">
+                      <a:endParaRPr lang="en-US" sz="1250" dirty="0">
                         <a:latin typeface="Calibri" charset="0"/>
                         <a:ea typeface="Calibri" charset="0"/>
                         <a:cs typeface="Calibri" charset="0"/>
@@ -29966,7 +29910,7 @@
                         <a:buNone/>
                       </a:pPr>
                       <a:r>
-                        <a:rPr lang="en-US" sz="900" dirty="0">
+                        <a:rPr lang="en-US" sz="1150" dirty="0">
                           <a:solidFill>
                             <a:srgbClr val="9AA6B2"/>
                           </a:solidFill>
@@ -29976,7 +29920,7 @@
                         </a:rPr>
                         <a:t>73 units</a:t>
                       </a:r>
-                      <a:endParaRPr lang="en-US" sz="1000" dirty="0">
+                      <a:endParaRPr lang="en-US" sz="1250" dirty="0">
                         <a:latin typeface="Calibri" charset="0"/>
                         <a:ea typeface="Calibri" charset="0"/>
                         <a:cs typeface="Calibri" charset="0"/>
@@ -30034,7 +29978,7 @@
                         <a:buNone/>
                       </a:pPr>
                       <a:r>
-                        <a:rPr lang="en-US" sz="1150" b="1" dirty="0">
+                        <a:rPr lang="en-US" sz="1400" b="1" dirty="0">
                           <a:solidFill>
                             <a:srgbClr val="EEF1F4"/>
                           </a:solidFill>
@@ -30044,7 +29988,7 @@
                         </a:rPr>
                         <a:t>FBR350R A4</a:t>
                       </a:r>
-                      <a:endParaRPr lang="en-US" sz="1000" dirty="0">
+                      <a:endParaRPr lang="en-US" sz="1250" dirty="0">
                         <a:latin typeface="Calibri" charset="0"/>
                         <a:ea typeface="Calibri" charset="0"/>
                         <a:cs typeface="Calibri" charset="0"/>
@@ -30055,7 +29999,7 @@
                         <a:buNone/>
                       </a:pPr>
                       <a:r>
-                        <a:rPr lang="en-US" sz="900" dirty="0">
+                        <a:rPr lang="en-US" sz="1150" dirty="0">
                           <a:solidFill>
                             <a:srgbClr val="C9A9AC"/>
                           </a:solidFill>
@@ -30065,7 +30009,7 @@
                         </a:rPr>
                         <a:t>32.8 tm</a:t>
                       </a:r>
-                      <a:endParaRPr lang="en-US" sz="1000" dirty="0">
+                      <a:endParaRPr lang="en-US" sz="1250" dirty="0">
                         <a:latin typeface="Calibri" charset="0"/>
                         <a:ea typeface="Calibri" charset="0"/>
                         <a:cs typeface="Calibri" charset="0"/>
@@ -30076,7 +30020,7 @@
                         <a:buNone/>
                       </a:pPr>
                       <a:r>
-                        <a:rPr lang="en-US" sz="1000" b="1" dirty="0">
+                        <a:rPr lang="en-US" sz="1250" b="1" dirty="0">
                           <a:solidFill>
                             <a:srgbClr val="EEF1F4"/>
                           </a:solidFill>
@@ -30086,7 +30030,7 @@
                         </a:rPr>
                         <a:t>Rp 1.090.000.000</a:t>
                       </a:r>
-                      <a:endParaRPr lang="en-US" sz="1000" dirty="0">
+                      <a:endParaRPr lang="en-US" sz="1250" dirty="0">
                         <a:latin typeface="Calibri" charset="0"/>
                         <a:ea typeface="Calibri" charset="0"/>
                         <a:cs typeface="Calibri" charset="0"/>
@@ -30144,7 +30088,7 @@
                         <a:buNone/>
                       </a:pPr>
                       <a:r>
-                        <a:rPr lang="en-US" sz="1050" b="1" dirty="0">
+                        <a:rPr lang="en-US" sz="1300" b="1" dirty="0">
                           <a:solidFill>
                             <a:srgbClr val="EEF1F4"/>
                           </a:solidFill>
@@ -30152,27 +30096,13 @@
                           <a:ea typeface="Calibri" pitchFamily="34" charset="-122"/>
                           <a:cs typeface="Calibri" pitchFamily="34" charset="-120"/>
                         </a:rPr>
-                        <a:t>SPK32080</a:t>
+                        <a:t>SPK32080  </a:t>
                       </a:r>
                       <a:pPr indent="0" marL="0">
                         <a:buNone/>
                       </a:pPr>
                       <a:r>
-                        <a:rPr lang="en-US" sz="1000" dirty="0">
-                          <a:solidFill>
-                            <a:srgbClr val="9AA6B2"/>
-                          </a:solidFill>
-                          <a:latin typeface="Calibri" pitchFamily="34" charset="0"/>
-                          <a:ea typeface="Calibri" pitchFamily="34" charset="-122"/>
-                          <a:cs typeface="Calibri" pitchFamily="34" charset="-120"/>
-                        </a:rPr>
-                        <a:t>  30.4 tm   </a:t>
-                      </a:r>
-                      <a:pPr indent="0" marL="0">
-                        <a:buNone/>
-                      </a:pPr>
-                      <a:r>
-                        <a:rPr lang="en-US" sz="1000" b="1" dirty="0">
+                        <a:rPr lang="en-US" sz="1300" b="1" dirty="0">
                           <a:solidFill>
                             <a:srgbClr val="FF8A8F"/>
                           </a:solidFill>
@@ -30182,7 +30112,7 @@
                         </a:rPr>
                         <a:t>+147%</a:t>
                       </a:r>
-                      <a:endParaRPr lang="en-US" sz="1000" dirty="0">
+                      <a:endParaRPr lang="en-US" sz="1250" dirty="0">
                         <a:latin typeface="Calibri" charset="0"/>
                         <a:ea typeface="Calibri" charset="0"/>
                         <a:cs typeface="Calibri" charset="0"/>
@@ -30193,7 +30123,7 @@
                         <a:buNone/>
                       </a:pPr>
                       <a:r>
-                        <a:rPr lang="en-US" sz="1000" dirty="0">
+                        <a:rPr lang="en-US" sz="1250" dirty="0">
                           <a:solidFill>
                             <a:srgbClr val="9AA6B2"/>
                           </a:solidFill>
@@ -30201,9 +30131,9 @@
                           <a:ea typeface="Calibri" pitchFamily="34" charset="-122"/>
                           <a:cs typeface="Calibri" pitchFamily="34" charset="-120"/>
                         </a:rPr>
-                        <a:t>33 units · Rp 12.860.000.000</a:t>
+                        <a:t>30.4 tm · 33 units</a:t>
                       </a:r>
-                      <a:endParaRPr lang="en-US" sz="1000" dirty="0">
+                      <a:endParaRPr lang="en-US" sz="1250" dirty="0">
                         <a:latin typeface="Calibri" charset="0"/>
                         <a:ea typeface="Calibri" charset="0"/>
                         <a:cs typeface="Calibri" charset="0"/>
@@ -30214,7 +30144,7 @@
                         <a:buNone/>
                       </a:pPr>
                       <a:r>
-                        <a:rPr lang="en-US" sz="1000" dirty="0">
+                        <a:rPr lang="en-US" sz="1250" dirty="0">
                           <a:solidFill>
                             <a:srgbClr val="9AA6B2"/>
                           </a:solidFill>
@@ -30222,9 +30152,9 @@
                           <a:ea typeface="Calibri" pitchFamily="34" charset="-122"/>
                           <a:cs typeface="Calibri" pitchFamily="34" charset="-120"/>
                         </a:rPr>
-                        <a:t>Rp 440.000.000 per unit</a:t>
+                        <a:t>Rp 440.000.000</a:t>
                       </a:r>
-                      <a:endParaRPr lang="en-US" sz="1000" dirty="0">
+                      <a:endParaRPr lang="en-US" sz="1250" dirty="0">
                         <a:latin typeface="Calibri" charset="0"/>
                         <a:ea typeface="Calibri" charset="0"/>
                         <a:cs typeface="Calibri" charset="0"/>
@@ -30282,7 +30212,7 @@
                         <a:buNone/>
                       </a:pPr>
                       <a:r>
-                        <a:rPr lang="en-US" sz="1050" b="1" dirty="0">
+                        <a:rPr lang="en-US" sz="1300" b="1" dirty="0">
                           <a:solidFill>
                             <a:srgbClr val="EEF1F4"/>
                           </a:solidFill>
@@ -30290,27 +30220,13 @@
                           <a:ea typeface="Calibri" pitchFamily="34" charset="-122"/>
                           <a:cs typeface="Calibri" pitchFamily="34" charset="-120"/>
                         </a:rPr>
-                        <a:t>V933</a:t>
+                        <a:t>V933  </a:t>
                       </a:r>
                       <a:pPr indent="0" marL="0">
                         <a:buNone/>
                       </a:pPr>
                       <a:r>
-                        <a:rPr lang="en-US" sz="1000" dirty="0">
-                          <a:solidFill>
-                            <a:srgbClr val="9AA6B2"/>
-                          </a:solidFill>
-                          <a:latin typeface="Calibri" pitchFamily="34" charset="0"/>
-                          <a:ea typeface="Calibri" pitchFamily="34" charset="-122"/>
-                          <a:cs typeface="Calibri" pitchFamily="34" charset="-120"/>
-                        </a:rPr>
-                        <a:t>  31.9 tm   </a:t>
-                      </a:r>
-                      <a:pPr indent="0" marL="0">
-                        <a:buNone/>
-                      </a:pPr>
-                      <a:r>
-                        <a:rPr lang="en-US" sz="1000" b="1" dirty="0">
+                        <a:rPr lang="en-US" sz="1300" b="1" dirty="0">
                           <a:solidFill>
                             <a:srgbClr val="FF8A8F"/>
                           </a:solidFill>
@@ -30320,7 +30236,7 @@
                         </a:rPr>
                         <a:t>+31%</a:t>
                       </a:r>
-                      <a:endParaRPr lang="en-US" sz="1000" dirty="0">
+                      <a:endParaRPr lang="en-US" sz="1250" dirty="0">
                         <a:latin typeface="Calibri" charset="0"/>
                         <a:ea typeface="Calibri" charset="0"/>
                         <a:cs typeface="Calibri" charset="0"/>
@@ -30331,7 +30247,7 @@
                         <a:buNone/>
                       </a:pPr>
                       <a:r>
-                        <a:rPr lang="en-US" sz="1000" dirty="0">
+                        <a:rPr lang="en-US" sz="1250" dirty="0">
                           <a:solidFill>
                             <a:srgbClr val="9AA6B2"/>
                           </a:solidFill>
@@ -30339,9 +30255,9 @@
                           <a:ea typeface="Calibri" pitchFamily="34" charset="-122"/>
                           <a:cs typeface="Calibri" pitchFamily="34" charset="-120"/>
                         </a:rPr>
-                        <a:t>4 units · Rp 2.800.000.000</a:t>
+                        <a:t>31.9 tm · 4 units</a:t>
                       </a:r>
-                      <a:endParaRPr lang="en-US" sz="1000" dirty="0">
+                      <a:endParaRPr lang="en-US" sz="1250" dirty="0">
                         <a:latin typeface="Calibri" charset="0"/>
                         <a:ea typeface="Calibri" charset="0"/>
                         <a:cs typeface="Calibri" charset="0"/>
@@ -30352,7 +30268,7 @@
                         <a:buNone/>
                       </a:pPr>
                       <a:r>
-                        <a:rPr lang="en-US" sz="1000" dirty="0">
+                        <a:rPr lang="en-US" sz="1250" dirty="0">
                           <a:solidFill>
                             <a:srgbClr val="9AA6B2"/>
                           </a:solidFill>
@@ -30360,9 +30276,9 @@
                           <a:ea typeface="Calibri" pitchFamily="34" charset="-122"/>
                           <a:cs typeface="Calibri" pitchFamily="34" charset="-120"/>
                         </a:rPr>
-                        <a:t>Rp 830.000.000 per unit</a:t>
+                        <a:t>Rp 830.000.000</a:t>
                       </a:r>
-                      <a:endParaRPr lang="en-US" sz="1000" dirty="0">
+                      <a:endParaRPr lang="en-US" sz="1250" dirty="0">
                         <a:latin typeface="Calibri" charset="0"/>
                         <a:ea typeface="Calibri" charset="0"/>
                         <a:cs typeface="Calibri" charset="0"/>
@@ -30420,7 +30336,7 @@
                         <a:buNone/>
                       </a:pPr>
                       <a:r>
-                        <a:rPr lang="en-US" sz="1050" b="1" dirty="0">
+                        <a:rPr lang="en-US" sz="1300" b="1" dirty="0">
                           <a:solidFill>
                             <a:srgbClr val="EEF1F4"/>
                           </a:solidFill>
@@ -30428,27 +30344,13 @@
                           <a:ea typeface="Calibri" pitchFamily="34" charset="-122"/>
                           <a:cs typeface="Calibri" pitchFamily="34" charset="-120"/>
                         </a:rPr>
-                        <a:t>GSQZ330.4</a:t>
+                        <a:t>GSQZ330.4  </a:t>
                       </a:r>
                       <a:pPr indent="0" marL="0">
                         <a:buNone/>
                       </a:pPr>
                       <a:r>
-                        <a:rPr lang="en-US" sz="1000" dirty="0">
-                          <a:solidFill>
-                            <a:srgbClr val="9AA6B2"/>
-                          </a:solidFill>
-                          <a:latin typeface="Calibri" pitchFamily="34" charset="0"/>
-                          <a:ea typeface="Calibri" pitchFamily="34" charset="-122"/>
-                          <a:cs typeface="Calibri" pitchFamily="34" charset="-120"/>
-                        </a:rPr>
-                        <a:t>  33 tm   </a:t>
-                      </a:r>
-                      <a:pPr indent="0" marL="0">
-                        <a:buNone/>
-                      </a:pPr>
-                      <a:r>
-                        <a:rPr lang="en-US" sz="1000" b="1" dirty="0">
+                        <a:rPr lang="en-US" sz="1300" b="1" dirty="0">
                           <a:solidFill>
                             <a:srgbClr val="FF8A8F"/>
                           </a:solidFill>
@@ -30458,7 +30360,7 @@
                         </a:rPr>
                         <a:t>+57%</a:t>
                       </a:r>
-                      <a:endParaRPr lang="en-US" sz="1000" dirty="0">
+                      <a:endParaRPr lang="en-US" sz="1250" dirty="0">
                         <a:latin typeface="Calibri" charset="0"/>
                         <a:ea typeface="Calibri" charset="0"/>
                         <a:cs typeface="Calibri" charset="0"/>
@@ -30469,7 +30371,7 @@
                         <a:buNone/>
                       </a:pPr>
                       <a:r>
-                        <a:rPr lang="en-US" sz="1000" dirty="0">
+                        <a:rPr lang="en-US" sz="1250" dirty="0">
                           <a:solidFill>
                             <a:srgbClr val="9AA6B2"/>
                           </a:solidFill>
@@ -30477,9 +30379,9 @@
                           <a:ea typeface="Calibri" pitchFamily="34" charset="-122"/>
                           <a:cs typeface="Calibri" pitchFamily="34" charset="-120"/>
                         </a:rPr>
-                        <a:t>4 units · Rp 2.450.000.000</a:t>
+                        <a:t>33 tm · 4 units</a:t>
                       </a:r>
-                      <a:endParaRPr lang="en-US" sz="1000" dirty="0">
+                      <a:endParaRPr lang="en-US" sz="1250" dirty="0">
                         <a:latin typeface="Calibri" charset="0"/>
                         <a:ea typeface="Calibri" charset="0"/>
                         <a:cs typeface="Calibri" charset="0"/>
@@ -30490,7 +30392,7 @@
                         <a:buNone/>
                       </a:pPr>
                       <a:r>
-                        <a:rPr lang="en-US" sz="1000" dirty="0">
+                        <a:rPr lang="en-US" sz="1250" dirty="0">
                           <a:solidFill>
                             <a:srgbClr val="9AA6B2"/>
                           </a:solidFill>
@@ -30498,9 +30400,9 @@
                           <a:ea typeface="Calibri" pitchFamily="34" charset="-122"/>
                           <a:cs typeface="Calibri" pitchFamily="34" charset="-120"/>
                         </a:rPr>
-                        <a:t>Rp 700.000.000 per unit</a:t>
+                        <a:t>Rp 700.000.000</a:t>
                       </a:r>
-                      <a:endParaRPr lang="en-US" sz="1000" dirty="0">
+                      <a:endParaRPr lang="en-US" sz="1250" dirty="0">
                         <a:latin typeface="Calibri" charset="0"/>
                         <a:ea typeface="Calibri" charset="0"/>
                         <a:cs typeface="Calibri" charset="0"/>
@@ -30558,7 +30460,7 @@
                         <a:buNone/>
                       </a:pPr>
                       <a:r>
-                        <a:rPr lang="en-US" sz="1050" b="1" dirty="0">
+                        <a:rPr lang="en-US" sz="1300" b="1" dirty="0">
                           <a:solidFill>
                             <a:srgbClr val="EEF1F4"/>
                           </a:solidFill>
@@ -30566,27 +30468,13 @@
                           <a:ea typeface="Calibri" pitchFamily="34" charset="-122"/>
                           <a:cs typeface="Calibri" pitchFamily="34" charset="-120"/>
                         </a:rPr>
-                        <a:t>PK 32080 C</a:t>
+                        <a:t>PK 32080 C  </a:t>
                       </a:r>
                       <a:pPr indent="0" marL="0">
                         <a:buNone/>
                       </a:pPr>
                       <a:r>
-                        <a:rPr lang="en-US" sz="1000" dirty="0">
-                          <a:solidFill>
-                            <a:srgbClr val="9AA6B2"/>
-                          </a:solidFill>
-                          <a:latin typeface="Calibri" pitchFamily="34" charset="0"/>
-                          <a:ea typeface="Calibri" pitchFamily="34" charset="-122"/>
-                          <a:cs typeface="Calibri" pitchFamily="34" charset="-120"/>
-                        </a:rPr>
-                        <a:t>  30.4 tm   </a:t>
-                      </a:r>
-                      <a:pPr indent="0" marL="0">
-                        <a:buNone/>
-                      </a:pPr>
-                      <a:r>
-                        <a:rPr lang="en-US" sz="1000" b="1" dirty="0">
+                        <a:rPr lang="en-US" sz="1300" b="1" dirty="0">
                           <a:solidFill>
                             <a:srgbClr val="FF8A8F"/>
                           </a:solidFill>
@@ -30596,7 +30484,7 @@
                         </a:rPr>
                         <a:t>+4%</a:t>
                       </a:r>
-                      <a:endParaRPr lang="en-US" sz="1000" dirty="0">
+                      <a:endParaRPr lang="en-US" sz="1250" dirty="0">
                         <a:latin typeface="Calibri" charset="0"/>
                         <a:ea typeface="Calibri" charset="0"/>
                         <a:cs typeface="Calibri" charset="0"/>
@@ -30607,7 +30495,7 @@
                         <a:buNone/>
                       </a:pPr>
                       <a:r>
-                        <a:rPr lang="en-US" sz="1000" dirty="0">
+                        <a:rPr lang="en-US" sz="1250" dirty="0">
                           <a:solidFill>
                             <a:srgbClr val="9AA6B2"/>
                           </a:solidFill>
@@ -30615,9 +30503,9 @@
                           <a:ea typeface="Calibri" pitchFamily="34" charset="-122"/>
                           <a:cs typeface="Calibri" pitchFamily="34" charset="-120"/>
                         </a:rPr>
-                        <a:t>8 units · Rp 7.050.000.000</a:t>
+                        <a:t>30.4 tm · 8 units</a:t>
                       </a:r>
-                      <a:endParaRPr lang="en-US" sz="1000" dirty="0">
+                      <a:endParaRPr lang="en-US" sz="1250" dirty="0">
                         <a:latin typeface="Calibri" charset="0"/>
                         <a:ea typeface="Calibri" charset="0"/>
                         <a:cs typeface="Calibri" charset="0"/>
@@ -30628,7 +30516,7 @@
                         <a:buNone/>
                       </a:pPr>
                       <a:r>
-                        <a:rPr lang="en-US" sz="1000" dirty="0">
+                        <a:rPr lang="en-US" sz="1250" dirty="0">
                           <a:solidFill>
                             <a:srgbClr val="9AA6B2"/>
                           </a:solidFill>
@@ -30636,9 +30524,9 @@
                           <a:ea typeface="Calibri" pitchFamily="34" charset="-122"/>
                           <a:cs typeface="Calibri" pitchFamily="34" charset="-120"/>
                         </a:rPr>
-                        <a:t>Rp 1.050.000.000 per unit</a:t>
+                        <a:t>Rp 1.050.000.000</a:t>
                       </a:r>
-                      <a:endParaRPr lang="en-US" sz="1000" dirty="0">
+                      <a:endParaRPr lang="en-US" sz="1250" dirty="0">
                         <a:latin typeface="Calibri" charset="0"/>
                         <a:ea typeface="Calibri" charset="0"/>
                         <a:cs typeface="Calibri" charset="0"/>
@@ -30696,7 +30584,7 @@
                         <a:buNone/>
                       </a:pPr>
                       <a:r>
-                        <a:rPr lang="en-US" sz="1050" b="1" dirty="0">
+                        <a:rPr lang="en-US" sz="1300" b="1" dirty="0">
                           <a:solidFill>
                             <a:srgbClr val="EEF1F4"/>
                           </a:solidFill>
@@ -30704,27 +30592,13 @@
                           <a:ea typeface="Calibri" pitchFamily="34" charset="-122"/>
                           <a:cs typeface="Calibri" pitchFamily="34" charset="-120"/>
                         </a:rPr>
-                        <a:t>X-CLX 388</a:t>
+                        <a:t>X-CLX 388  </a:t>
                       </a:r>
                       <a:pPr indent="0" marL="0">
                         <a:buNone/>
                       </a:pPr>
                       <a:r>
-                        <a:rPr lang="en-US" sz="1000" dirty="0">
-                          <a:solidFill>
-                            <a:srgbClr val="9AA6B2"/>
-                          </a:solidFill>
-                          <a:latin typeface="Calibri" pitchFamily="34" charset="0"/>
-                          <a:ea typeface="Calibri" pitchFamily="34" charset="-122"/>
-                          <a:cs typeface="Calibri" pitchFamily="34" charset="-120"/>
-                        </a:rPr>
-                        <a:t>  34.3 tm   </a:t>
-                      </a:r>
-                      <a:pPr indent="0" marL="0">
-                        <a:buNone/>
-                      </a:pPr>
-                      <a:r>
-                        <a:rPr lang="en-US" sz="1000" b="1" dirty="0">
+                        <a:rPr lang="en-US" sz="1300" b="1" dirty="0">
                           <a:solidFill>
                             <a:srgbClr val="FF8A8F"/>
                           </a:solidFill>
@@ -30734,7 +30608,7 @@
                         </a:rPr>
                         <a:t>+15%</a:t>
                       </a:r>
-                      <a:endParaRPr lang="en-US" sz="1000" dirty="0">
+                      <a:endParaRPr lang="en-US" sz="1250" dirty="0">
                         <a:latin typeface="Calibri" charset="0"/>
                         <a:ea typeface="Calibri" charset="0"/>
                         <a:cs typeface="Calibri" charset="0"/>
@@ -30745,7 +30619,7 @@
                         <a:buNone/>
                       </a:pPr>
                       <a:r>
-                        <a:rPr lang="en-US" sz="1000" dirty="0">
+                        <a:rPr lang="en-US" sz="1250" dirty="0">
                           <a:solidFill>
                             <a:srgbClr val="9AA6B2"/>
                           </a:solidFill>
@@ -30753,9 +30627,9 @@
                           <a:ea typeface="Calibri" pitchFamily="34" charset="-122"/>
                           <a:cs typeface="Calibri" pitchFamily="34" charset="-120"/>
                         </a:rPr>
-                        <a:t>20 units · Rp 15.900.000.000</a:t>
+                        <a:t>34.3 tm · 20 units</a:t>
                       </a:r>
-                      <a:endParaRPr lang="en-US" sz="1000" dirty="0">
+                      <a:endParaRPr lang="en-US" sz="1250" dirty="0">
                         <a:latin typeface="Calibri" charset="0"/>
                         <a:ea typeface="Calibri" charset="0"/>
                         <a:cs typeface="Calibri" charset="0"/>
@@ -30766,7 +30640,7 @@
                         <a:buNone/>
                       </a:pPr>
                       <a:r>
-                        <a:rPr lang="en-US" sz="1000" dirty="0">
+                        <a:rPr lang="en-US" sz="1250" dirty="0">
                           <a:solidFill>
                             <a:srgbClr val="9AA6B2"/>
                           </a:solidFill>
@@ -30774,9 +30648,9 @@
                           <a:ea typeface="Calibri" pitchFamily="34" charset="-122"/>
                           <a:cs typeface="Calibri" pitchFamily="34" charset="-120"/>
                         </a:rPr>
-                        <a:t>Rp 950.000.000 per unit</a:t>
+                        <a:t>Rp 950.000.000</a:t>
                       </a:r>
-                      <a:endParaRPr lang="en-US" sz="1000" dirty="0">
+                      <a:endParaRPr lang="en-US" sz="1250" dirty="0">
                         <a:latin typeface="Calibri" charset="0"/>
                         <a:ea typeface="Calibri" charset="0"/>
                         <a:cs typeface="Calibri" charset="0"/>
@@ -30826,7 +30700,7 @@
                   </a:tcPr>
                 </a:tc>
               </a:tr>
-              <a:tr h="765556">
+              <a:tr h="757428">
                 <a:tc vMerge="1">
                   <a:tcPr/>
                 </a:tc>
@@ -30841,7 +30715,7 @@
                       <a:pPr indent="0" marL="0">
                         <a:buNone/>
                       </a:pPr>
-                      <a:endParaRPr lang="en-US" sz="1000" dirty="0">
+                      <a:endParaRPr lang="en-US" sz="1250" dirty="0">
                         <a:latin typeface="Calibri" charset="0"/>
                         <a:ea typeface="Calibri" charset="0"/>
                         <a:cs typeface="Calibri" charset="0"/>
@@ -30898,7 +30772,7 @@
                       <a:pPr indent="0" marL="0">
                         <a:buNone/>
                       </a:pPr>
-                      <a:endParaRPr lang="en-US" sz="1000" dirty="0">
+                      <a:endParaRPr lang="en-US" sz="1250" dirty="0">
                         <a:latin typeface="Calibri" charset="0"/>
                         <a:ea typeface="Calibri" charset="0"/>
                         <a:cs typeface="Calibri" charset="0"/>
@@ -30956,7 +30830,7 @@
                         <a:buNone/>
                       </a:pPr>
                       <a:r>
-                        <a:rPr lang="en-US" sz="1050" b="1" dirty="0">
+                        <a:rPr lang="en-US" sz="1300" b="1" dirty="0">
                           <a:solidFill>
                             <a:srgbClr val="EEF1F4"/>
                           </a:solidFill>
@@ -30964,27 +30838,13 @@
                           <a:ea typeface="Calibri" pitchFamily="34" charset="-122"/>
                           <a:cs typeface="Calibri" pitchFamily="34" charset="-120"/>
                         </a:rPr>
-                        <a:t>SQZ325.4</a:t>
+                        <a:t>SQZ325.4  </a:t>
                       </a:r>
                       <a:pPr indent="0" marL="0">
                         <a:buNone/>
                       </a:pPr>
                       <a:r>
-                        <a:rPr lang="en-US" sz="1000" dirty="0">
-                          <a:solidFill>
-                            <a:srgbClr val="9AA6B2"/>
-                          </a:solidFill>
-                          <a:latin typeface="Calibri" pitchFamily="34" charset="0"/>
-                          <a:ea typeface="Calibri" pitchFamily="34" charset="-122"/>
-                          <a:cs typeface="Calibri" pitchFamily="34" charset="-120"/>
-                        </a:rPr>
-                        <a:t>  32.5 tm   </a:t>
-                      </a:r>
-                      <a:pPr indent="0" marL="0">
-                        <a:buNone/>
-                      </a:pPr>
-                      <a:r>
-                        <a:rPr lang="en-US" sz="1000" b="1" dirty="0">
+                        <a:rPr lang="en-US" sz="1300" b="1" dirty="0">
                           <a:solidFill>
                             <a:srgbClr val="FF8A8F"/>
                           </a:solidFill>
@@ -30994,7 +30854,7 @@
                         </a:rPr>
                         <a:t>+99%</a:t>
                       </a:r>
-                      <a:endParaRPr lang="en-US" sz="1000" dirty="0">
+                      <a:endParaRPr lang="en-US" sz="1250" dirty="0">
                         <a:latin typeface="Calibri" charset="0"/>
                         <a:ea typeface="Calibri" charset="0"/>
                         <a:cs typeface="Calibri" charset="0"/>
@@ -31005,7 +30865,7 @@
                         <a:buNone/>
                       </a:pPr>
                       <a:r>
-                        <a:rPr lang="en-US" sz="1000" dirty="0">
+                        <a:rPr lang="en-US" sz="1250" dirty="0">
                           <a:solidFill>
                             <a:srgbClr val="9AA6B2"/>
                           </a:solidFill>
@@ -31013,9 +30873,9 @@
                           <a:ea typeface="Calibri" pitchFamily="34" charset="-122"/>
                           <a:cs typeface="Calibri" pitchFamily="34" charset="-120"/>
                         </a:rPr>
-                        <a:t>3 units · Rp 1.450.000.000</a:t>
+                        <a:t>32.5 tm · 3 units</a:t>
                       </a:r>
-                      <a:endParaRPr lang="en-US" sz="1000" dirty="0">
+                      <a:endParaRPr lang="en-US" sz="1250" dirty="0">
                         <a:latin typeface="Calibri" charset="0"/>
                         <a:ea typeface="Calibri" charset="0"/>
                         <a:cs typeface="Calibri" charset="0"/>
@@ -31026,7 +30886,7 @@
                         <a:buNone/>
                       </a:pPr>
                       <a:r>
-                        <a:rPr lang="en-US" sz="1000" dirty="0">
+                        <a:rPr lang="en-US" sz="1250" dirty="0">
                           <a:solidFill>
                             <a:srgbClr val="9AA6B2"/>
                           </a:solidFill>
@@ -31034,9 +30894,9 @@
                           <a:ea typeface="Calibri" pitchFamily="34" charset="-122"/>
                           <a:cs typeface="Calibri" pitchFamily="34" charset="-120"/>
                         </a:rPr>
-                        <a:t>Rp 550.000.000 per unit</a:t>
+                        <a:t>Rp 550.000.000</a:t>
                       </a:r>
-                      <a:endParaRPr lang="en-US" sz="1000" dirty="0">
+                      <a:endParaRPr lang="en-US" sz="1250" dirty="0">
                         <a:latin typeface="Calibri" charset="0"/>
                         <a:ea typeface="Calibri" charset="0"/>
                         <a:cs typeface="Calibri" charset="0"/>
@@ -31093,7 +30953,7 @@
                       <a:pPr indent="0" marL="0">
                         <a:buNone/>
                       </a:pPr>
-                      <a:endParaRPr lang="en-US" sz="1000" dirty="0">
+                      <a:endParaRPr lang="en-US" sz="1250" dirty="0">
                         <a:latin typeface="Calibri" charset="0"/>
                         <a:ea typeface="Calibri" charset="0"/>
                         <a:cs typeface="Calibri" charset="0"/>
@@ -31151,7 +31011,7 @@
                         <a:buNone/>
                       </a:pPr>
                       <a:r>
-                        <a:rPr lang="en-US" sz="1050" b="1" dirty="0">
+                        <a:rPr lang="en-US" sz="1300" b="1" dirty="0">
                           <a:solidFill>
                             <a:srgbClr val="EEF1F4"/>
                           </a:solidFill>
@@ -31159,27 +31019,13 @@
                           <a:ea typeface="Calibri" pitchFamily="34" charset="-122"/>
                           <a:cs typeface="Calibri" pitchFamily="34" charset="-120"/>
                         </a:rPr>
-                        <a:t>X-CLX 328</a:t>
+                        <a:t>X-CLX 328  </a:t>
                       </a:r>
                       <a:pPr indent="0" marL="0">
                         <a:buNone/>
                       </a:pPr>
                       <a:r>
-                        <a:rPr lang="en-US" sz="1000" dirty="0">
-                          <a:solidFill>
-                            <a:srgbClr val="9AA6B2"/>
-                          </a:solidFill>
-                          <a:latin typeface="Calibri" pitchFamily="34" charset="0"/>
-                          <a:ea typeface="Calibri" pitchFamily="34" charset="-122"/>
-                          <a:cs typeface="Calibri" pitchFamily="34" charset="-120"/>
-                        </a:rPr>
-                        <a:t>  30.3 tm   </a:t>
-                      </a:r>
-                      <a:pPr indent="0" marL="0">
-                        <a:buNone/>
-                      </a:pPr>
-                      <a:r>
-                        <a:rPr lang="en-US" sz="1000" b="1" dirty="0">
+                        <a:rPr lang="en-US" sz="1300" b="1" dirty="0">
                           <a:solidFill>
                             <a:srgbClr val="2FBF71"/>
                           </a:solidFill>
@@ -31189,7 +31035,7 @@
                         </a:rPr>
                         <a:t>−2%</a:t>
                       </a:r>
-                      <a:endParaRPr lang="en-US" sz="1000" dirty="0">
+                      <a:endParaRPr lang="en-US" sz="1250" dirty="0">
                         <a:latin typeface="Calibri" charset="0"/>
                         <a:ea typeface="Calibri" charset="0"/>
                         <a:cs typeface="Calibri" charset="0"/>
@@ -31200,7 +31046,7 @@
                         <a:buNone/>
                       </a:pPr>
                       <a:r>
-                        <a:rPr lang="en-US" sz="1000" dirty="0">
+                        <a:rPr lang="en-US" sz="1250" dirty="0">
                           <a:solidFill>
                             <a:srgbClr val="9AA6B2"/>
                           </a:solidFill>
@@ -31208,9 +31054,9 @@
                           <a:ea typeface="Calibri" pitchFamily="34" charset="-122"/>
                           <a:cs typeface="Calibri" pitchFamily="34" charset="-120"/>
                         </a:rPr>
-                        <a:t>1 unit · Rp 940.000.000</a:t>
+                        <a:t>30.3 tm · 1 unit</a:t>
                       </a:r>
-                      <a:endParaRPr lang="en-US" sz="1000" dirty="0">
+                      <a:endParaRPr lang="en-US" sz="1250" dirty="0">
                         <a:latin typeface="Calibri" charset="0"/>
                         <a:ea typeface="Calibri" charset="0"/>
                         <a:cs typeface="Calibri" charset="0"/>
@@ -31221,7 +31067,7 @@
                         <a:buNone/>
                       </a:pPr>
                       <a:r>
-                        <a:rPr lang="en-US" sz="1000" dirty="0">
+                        <a:rPr lang="en-US" sz="1250" dirty="0">
                           <a:solidFill>
                             <a:srgbClr val="9AA6B2"/>
                           </a:solidFill>
@@ -31229,9 +31075,9 @@
                           <a:ea typeface="Calibri" pitchFamily="34" charset="-122"/>
                           <a:cs typeface="Calibri" pitchFamily="34" charset="-120"/>
                         </a:rPr>
-                        <a:t>Rp 1.120.000.000 per unit</a:t>
+                        <a:t>Rp 1.120.000.000</a:t>
                       </a:r>
-                      <a:endParaRPr lang="en-US" sz="1000" dirty="0">
+                      <a:endParaRPr lang="en-US" sz="1250" dirty="0">
                         <a:latin typeface="Calibri" charset="0"/>
                         <a:ea typeface="Calibri" charset="0"/>
                         <a:cs typeface="Calibri" charset="0"/>
@@ -31293,7 +31139,7 @@
         </p:nvSpPr>
         <p:spPr>
           <a:xfrm>
-            <a:off x="3029407" y="1371600"/>
+            <a:off x="3235147" y="1371600"/>
             <a:ext cx="1234440" cy="237744"/>
           </a:xfrm>
           <a:prstGeom prst="roundRect">
@@ -31328,7 +31174,7 @@
         </p:blipFill>
         <p:spPr>
           <a:xfrm>
-            <a:off x="3238869" y="1403604"/>
+            <a:off x="3444609" y="1403604"/>
             <a:ext cx="815517" cy="173736"/>
           </a:xfrm>
           <a:prstGeom prst="rect">
@@ -31344,7 +31190,7 @@
         </p:nvSpPr>
         <p:spPr>
           <a:xfrm>
-            <a:off x="4836262" y="1371600"/>
+            <a:off x="4996282" y="1371600"/>
             <a:ext cx="1234440" cy="237744"/>
           </a:xfrm>
           <a:prstGeom prst="roundRect">
@@ -31379,7 +31225,7 @@
         </p:blipFill>
         <p:spPr>
           <a:xfrm>
-            <a:off x="5065269" y="1403604"/>
+            <a:off x="5225289" y="1403604"/>
             <a:ext cx="776426" cy="173736"/>
           </a:xfrm>
           <a:prstGeom prst="rect">
@@ -31395,7 +31241,7 @@
         </p:nvSpPr>
         <p:spPr>
           <a:xfrm>
-            <a:off x="6643116" y="1371600"/>
+            <a:off x="6757416" y="1371600"/>
             <a:ext cx="1234440" cy="237744"/>
           </a:xfrm>
           <a:prstGeom prst="roundRect">
@@ -31430,7 +31276,7 @@
         </p:blipFill>
         <p:spPr>
           <a:xfrm>
-            <a:off x="6861872" y="1403604"/>
+            <a:off x="6976172" y="1403604"/>
             <a:ext cx="796927" cy="173736"/>
           </a:xfrm>
           <a:prstGeom prst="rect">
@@ -31446,7 +31292,7 @@
         </p:nvSpPr>
         <p:spPr>
           <a:xfrm>
-            <a:off x="8449970" y="1371600"/>
+            <a:off x="8518550" y="1371600"/>
             <a:ext cx="1234440" cy="237744"/>
           </a:xfrm>
           <a:prstGeom prst="roundRect">
@@ -31481,7 +31327,7 @@
         </p:blipFill>
         <p:spPr>
           <a:xfrm>
-            <a:off x="8674895" y="1403604"/>
+            <a:off x="8743475" y="1403604"/>
             <a:ext cx="784592" cy="173736"/>
           </a:xfrm>
           <a:prstGeom prst="rect">
@@ -31497,7 +31343,7 @@
         </p:nvSpPr>
         <p:spPr>
           <a:xfrm>
-            <a:off x="10256825" y="1371600"/>
+            <a:off x="10279685" y="1371600"/>
             <a:ext cx="1234440" cy="237744"/>
           </a:xfrm>
           <a:prstGeom prst="roundRect">
@@ -31532,7 +31378,7 @@
         </p:blipFill>
         <p:spPr>
           <a:xfrm>
-            <a:off x="10622649" y="1403604"/>
+            <a:off x="10645509" y="1403604"/>
             <a:ext cx="502792" cy="173736"/>
           </a:xfrm>
           <a:prstGeom prst="rect">
@@ -31548,7 +31394,7 @@
         </p:nvSpPr>
         <p:spPr>
           <a:xfrm>
-            <a:off x="411480" y="5980176"/>
+            <a:off x="411480" y="6053328"/>
             <a:ext cx="146304" cy="118872"/>
           </a:xfrm>
           <a:prstGeom prst="rect">
@@ -31573,7 +31419,7 @@
         </p:nvSpPr>
         <p:spPr>
           <a:xfrm>
-            <a:off x="621792" y="5934456"/>
+            <a:off x="621792" y="6007608"/>
             <a:ext cx="1828800" cy="201168"/>
           </a:xfrm>
           <a:prstGeom prst="rect">
@@ -31612,7 +31458,7 @@
         </p:nvSpPr>
         <p:spPr>
           <a:xfrm>
-            <a:off x="2514600" y="5980176"/>
+            <a:off x="2514600" y="6053328"/>
             <a:ext cx="146304" cy="118872"/>
           </a:xfrm>
           <a:prstGeom prst="rect">
@@ -31637,7 +31483,7 @@
         </p:nvSpPr>
         <p:spPr>
           <a:xfrm>
-            <a:off x="2724912" y="5934456"/>
+            <a:off x="2724912" y="6007608"/>
             <a:ext cx="1828800" cy="201168"/>
           </a:xfrm>
           <a:prstGeom prst="rect">
@@ -31676,7 +31522,7 @@
         </p:nvSpPr>
         <p:spPr>
           <a:xfrm>
-            <a:off x="4663440" y="5934456"/>
+            <a:off x="4663440" y="6007608"/>
             <a:ext cx="7132320" cy="201168"/>
           </a:xfrm>
           <a:prstGeom prst="rect">
@@ -31754,7 +31600,7 @@
                 <a:ea typeface="Calibri" pitchFamily="34" charset="-122"/>
                 <a:cs typeface="Calibri" pitchFamily="34" charset="-120"/>
               </a:rPr>
-              <a:t>Units and import value (before tax): Jan 2023 – 14 Aug 2026; Zoomlion and Hyva excluded. Competitors: average import unit price, Jan 2023 – 14 Aug 2026, × Rp 17.803/USD (JISDOR 23 Sep 2026) + import duty (0% China – ACFTA; 5% Europe, assumed) + PPN 11% + PPh 22 2.5%, before distributor margin. F.lli Ferrari: crane price from the TSP price list Rev1, June 2026 (column K minus column J), less the 13.6% TSP margin and 3% warranty. 990R: TSP price less Rp 168.000.000 cargo deck and install, then the same deductions. 9601CR A8: UTPE quote of 15 Sep 2026, crane only, no deduction; 50.7 tm per its load chart. 7441C is an estimate. Prices rounded to Rp 10.000.000.</a:t>
+              <a:t>Each model: F.lli Ferrari price difference; tm and units Jan 2023 – 14 Aug 2026; price per unit. Zoomlion and Hyva excluded. Competitors: average import unit price, Jan 2023 – 14 Aug 2026, × Rp 17.803/USD (JISDOR 23 Sep 2026) + import duty (0% China – ACFTA; 5% Europe, assumed) + PPN 11% + PPh 22 2.5%, before distributor margin. F.lli Ferrari: crane price from the TSP price list Rev1, June 2026 (column K minus column J), less the 13.6% TSP margin and 3% warranty. 990R: TSP price less Rp 168.000.000 cargo deck and install, then the same deductions. 9601CR A8: UTPE quote of 15 Sep 2026, crane only, no deduction; 50.7 tm per its load chart. 7441C is an estimate. Prices rounded to Rp 10.000.000.</a:t>
             </a:r>
             <a:endParaRPr lang="en-US" sz="750" dirty="0"/>
           </a:p>
@@ -32007,13 +31853,13 @@
             <a:tbl>
               <a:tblPr/>
               <a:tblGrid>
-                <a:gridCol w="868680"/>
-                <a:gridCol w="1463040"/>
-                <a:gridCol w="1806854"/>
-                <a:gridCol w="1806854"/>
-                <a:gridCol w="1806854"/>
-                <a:gridCol w="1806854"/>
-                <a:gridCol w="1806854"/>
+                <a:gridCol w="960120"/>
+                <a:gridCol w="1600200"/>
+                <a:gridCol w="1761134"/>
+                <a:gridCol w="1761134"/>
+                <a:gridCol w="1761134"/>
+                <a:gridCol w="1761134"/>
+                <a:gridCol w="1761134"/>
               </a:tblGrid>
               <a:tr h="457200">
                 <a:tc>
@@ -32161,7 +32007,7 @@
                         <a:buNone/>
                       </a:pPr>
                       <a:r>
-                        <a:rPr lang="en-US" sz="850" dirty="0">
+                        <a:rPr lang="en-US" sz="1050" dirty="0">
                           <a:solidFill>
                             <a:srgbClr val="9AA6B2"/>
                           </a:solidFill>
@@ -32169,16 +32015,16 @@
                           <a:ea typeface="Calibri" pitchFamily="34" charset="-122"/>
                           <a:cs typeface="Calibri" pitchFamily="34" charset="-120"/>
                         </a:rPr>
-                        <a:t>88 units · Rp 41.270.000.000</a:t>
+                        <a:t>88 units</a:t>
                       </a:r>
-                      <a:endParaRPr lang="en-US" sz="850" dirty="0">
+                      <a:endParaRPr lang="en-US" sz="1050" dirty="0">
                         <a:latin typeface="Calibri" charset="0"/>
                         <a:ea typeface="Calibri" charset="0"/>
                         <a:cs typeface="Calibri" charset="0"/>
                       </a:endParaRPr>
                     </a:p>
                   </a:txBody>
-                  <a:tcPr marL="36576" marR="36576" marT="0" marB="45720" anchor="b">
+                  <a:tcPr marL="36576" marR="36576" marT="0" marB="36576" anchor="b">
                     <a:lnL w="19050" cap="flat" cmpd="sng" algn="ctr">
                       <a:solidFill>
                         <a:srgbClr val="0F141A"/>
@@ -32229,7 +32075,7 @@
                         <a:buNone/>
                       </a:pPr>
                       <a:r>
-                        <a:rPr lang="en-US" sz="850" dirty="0">
+                        <a:rPr lang="en-US" sz="1050" dirty="0">
                           <a:solidFill>
                             <a:srgbClr val="9AA6B2"/>
                           </a:solidFill>
@@ -32237,16 +32083,16 @@
                           <a:ea typeface="Calibri" pitchFamily="34" charset="-122"/>
                           <a:cs typeface="Calibri" pitchFamily="34" charset="-120"/>
                         </a:rPr>
-                        <a:t>36 units · Rp 19.890.000.000</a:t>
+                        <a:t>36 units</a:t>
                       </a:r>
-                      <a:endParaRPr lang="en-US" sz="850" dirty="0">
+                      <a:endParaRPr lang="en-US" sz="1050" dirty="0">
                         <a:latin typeface="Calibri" charset="0"/>
                         <a:ea typeface="Calibri" charset="0"/>
                         <a:cs typeface="Calibri" charset="0"/>
                       </a:endParaRPr>
                     </a:p>
                   </a:txBody>
-                  <a:tcPr marL="36576" marR="36576" marT="0" marB="45720" anchor="b">
+                  <a:tcPr marL="36576" marR="36576" marT="0" marB="36576" anchor="b">
                     <a:lnL w="19050" cap="flat" cmpd="sng" algn="ctr">
                       <a:solidFill>
                         <a:srgbClr val="0F141A"/>
@@ -32297,7 +32143,7 @@
                         <a:buNone/>
                       </a:pPr>
                       <a:r>
-                        <a:rPr lang="en-US" sz="850" dirty="0">
+                        <a:rPr lang="en-US" sz="1050" dirty="0">
                           <a:solidFill>
                             <a:srgbClr val="9AA6B2"/>
                           </a:solidFill>
@@ -32305,16 +32151,16 @@
                           <a:ea typeface="Calibri" pitchFamily="34" charset="-122"/>
                           <a:cs typeface="Calibri" pitchFamily="34" charset="-120"/>
                         </a:rPr>
-                        <a:t>33 units · Rp 16.240.000.000</a:t>
+                        <a:t>33 units</a:t>
                       </a:r>
-                      <a:endParaRPr lang="en-US" sz="850" dirty="0">
+                      <a:endParaRPr lang="en-US" sz="1050" dirty="0">
                         <a:latin typeface="Calibri" charset="0"/>
                         <a:ea typeface="Calibri" charset="0"/>
                         <a:cs typeface="Calibri" charset="0"/>
                       </a:endParaRPr>
                     </a:p>
                   </a:txBody>
-                  <a:tcPr marL="36576" marR="36576" marT="0" marB="45720" anchor="b">
+                  <a:tcPr marL="36576" marR="36576" marT="0" marB="36576" anchor="b">
                     <a:lnL w="19050" cap="flat" cmpd="sng" algn="ctr">
                       <a:solidFill>
                         <a:srgbClr val="0F141A"/>
@@ -32365,7 +32211,7 @@
                         <a:buNone/>
                       </a:pPr>
                       <a:r>
-                        <a:rPr lang="en-US" sz="850" dirty="0">
+                        <a:rPr lang="en-US" sz="1050" dirty="0">
                           <a:solidFill>
                             <a:srgbClr val="9AA6B2"/>
                           </a:solidFill>
@@ -32373,16 +32219,16 @@
                           <a:ea typeface="Calibri" pitchFamily="34" charset="-122"/>
                           <a:cs typeface="Calibri" pitchFamily="34" charset="-120"/>
                         </a:rPr>
-                        <a:t>29 units · Rp 30.210.000.000</a:t>
+                        <a:t>29 units</a:t>
                       </a:r>
-                      <a:endParaRPr lang="en-US" sz="850" dirty="0">
+                      <a:endParaRPr lang="en-US" sz="1050" dirty="0">
                         <a:latin typeface="Calibri" charset="0"/>
                         <a:ea typeface="Calibri" charset="0"/>
                         <a:cs typeface="Calibri" charset="0"/>
                       </a:endParaRPr>
                     </a:p>
                   </a:txBody>
-                  <a:tcPr marL="36576" marR="36576" marT="0" marB="45720" anchor="b">
+                  <a:tcPr marL="36576" marR="36576" marT="0" marB="36576" anchor="b">
                     <a:lnL w="19050" cap="flat" cmpd="sng" algn="ctr">
                       <a:solidFill>
                         <a:srgbClr val="0F141A"/>
@@ -32433,7 +32279,7 @@
                         <a:buNone/>
                       </a:pPr>
                       <a:r>
-                        <a:rPr lang="en-US" sz="850" dirty="0">
+                        <a:rPr lang="en-US" sz="1050" dirty="0">
                           <a:solidFill>
                             <a:srgbClr val="9AA6B2"/>
                           </a:solidFill>
@@ -32441,16 +32287,16 @@
                           <a:ea typeface="Calibri" pitchFamily="34" charset="-122"/>
                           <a:cs typeface="Calibri" pitchFamily="34" charset="-120"/>
                         </a:rPr>
-                        <a:t>25 units · Rp 18.720.000.000</a:t>
+                        <a:t>25 units</a:t>
                       </a:r>
-                      <a:endParaRPr lang="en-US" sz="850" dirty="0">
+                      <a:endParaRPr lang="en-US" sz="1050" dirty="0">
                         <a:latin typeface="Calibri" charset="0"/>
                         <a:ea typeface="Calibri" charset="0"/>
                         <a:cs typeface="Calibri" charset="0"/>
                       </a:endParaRPr>
                     </a:p>
                   </a:txBody>
-                  <a:tcPr marL="36576" marR="36576" marT="0" marB="45720" anchor="b">
+                  <a:tcPr marL="36576" marR="36576" marT="0" marB="36576" anchor="b">
                     <a:lnL w="19050" cap="flat" cmpd="sng" algn="ctr">
                       <a:solidFill>
                         <a:srgbClr val="0F141A"/>
@@ -32503,7 +32349,7 @@
                         <a:buNone/>
                       </a:pPr>
                       <a:r>
-                        <a:rPr lang="en-US" sz="1150" b="1" dirty="0">
+                        <a:rPr lang="en-US" sz="1400" b="1" dirty="0">
                           <a:solidFill>
                             <a:srgbClr val="F2A33A"/>
                           </a:solidFill>
@@ -32513,7 +32359,7 @@
                         </a:rPr>
                         <a:t>&gt;35–40 tm</a:t>
                       </a:r>
-                      <a:endParaRPr lang="en-US" sz="1000" dirty="0">
+                      <a:endParaRPr lang="en-US" sz="1250" dirty="0">
                         <a:latin typeface="Calibri" charset="0"/>
                         <a:ea typeface="Calibri" charset="0"/>
                         <a:cs typeface="Calibri" charset="0"/>
@@ -32524,7 +32370,7 @@
                         <a:buNone/>
                       </a:pPr>
                       <a:r>
-                        <a:rPr lang="en-US" sz="900" dirty="0">
+                        <a:rPr lang="en-US" sz="1150" dirty="0">
                           <a:solidFill>
                             <a:srgbClr val="9AA6B2"/>
                           </a:solidFill>
@@ -32534,7 +32380,7 @@
                         </a:rPr>
                         <a:t>66 units</a:t>
                       </a:r>
-                      <a:endParaRPr lang="en-US" sz="1000" dirty="0">
+                      <a:endParaRPr lang="en-US" sz="1250" dirty="0">
                         <a:latin typeface="Calibri" charset="0"/>
                         <a:ea typeface="Calibri" charset="0"/>
                         <a:cs typeface="Calibri" charset="0"/>
@@ -32592,7 +32438,7 @@
                         <a:buNone/>
                       </a:pPr>
                       <a:r>
-                        <a:rPr lang="en-US" sz="1150" b="1" dirty="0">
+                        <a:rPr lang="en-US" sz="1400" b="1" dirty="0">
                           <a:solidFill>
                             <a:srgbClr val="EEF1F4"/>
                           </a:solidFill>
@@ -32602,7 +32448,7 @@
                         </a:rPr>
                         <a:t>7441C</a:t>
                       </a:r>
-                      <a:endParaRPr lang="en-US" sz="1000" dirty="0">
+                      <a:endParaRPr lang="en-US" sz="1250" dirty="0">
                         <a:latin typeface="Calibri" charset="0"/>
                         <a:ea typeface="Calibri" charset="0"/>
                         <a:cs typeface="Calibri" charset="0"/>
@@ -32613,7 +32459,7 @@
                         <a:buNone/>
                       </a:pPr>
                       <a:r>
-                        <a:rPr lang="en-US" sz="900" dirty="0">
+                        <a:rPr lang="en-US" sz="1150" dirty="0">
                           <a:solidFill>
                             <a:srgbClr val="C9A9AC"/>
                           </a:solidFill>
@@ -32623,7 +32469,7 @@
                         </a:rPr>
                         <a:t>37.7 tm · estimate</a:t>
                       </a:r>
-                      <a:endParaRPr lang="en-US" sz="1000" dirty="0">
+                      <a:endParaRPr lang="en-US" sz="1250" dirty="0">
                         <a:latin typeface="Calibri" charset="0"/>
                         <a:ea typeface="Calibri" charset="0"/>
                         <a:cs typeface="Calibri" charset="0"/>
@@ -32634,7 +32480,7 @@
                         <a:buNone/>
                       </a:pPr>
                       <a:r>
-                        <a:rPr lang="en-US" sz="1000" b="1" dirty="0">
+                        <a:rPr lang="en-US" sz="1250" b="1" dirty="0">
                           <a:solidFill>
                             <a:srgbClr val="EEF1F4"/>
                           </a:solidFill>
@@ -32644,7 +32490,7 @@
                         </a:rPr>
                         <a:t>Rp 1.240.000.000</a:t>
                       </a:r>
-                      <a:endParaRPr lang="en-US" sz="1000" dirty="0">
+                      <a:endParaRPr lang="en-US" sz="1250" dirty="0">
                         <a:latin typeface="Calibri" charset="0"/>
                         <a:ea typeface="Calibri" charset="0"/>
                         <a:cs typeface="Calibri" charset="0"/>
@@ -32702,7 +32548,7 @@
                         <a:buNone/>
                       </a:pPr>
                       <a:r>
-                        <a:rPr lang="en-US" sz="1050" b="1" dirty="0">
+                        <a:rPr lang="en-US" sz="1300" b="1" dirty="0">
                           <a:solidFill>
                             <a:srgbClr val="EEF1F4"/>
                           </a:solidFill>
@@ -32710,27 +32556,13 @@
                           <a:ea typeface="Calibri" pitchFamily="34" charset="-122"/>
                           <a:cs typeface="Calibri" pitchFamily="34" charset="-120"/>
                         </a:rPr>
-                        <a:t>SPK36080</a:t>
+                        <a:t>SPK36080  </a:t>
                       </a:r>
                       <a:pPr indent="0" marL="0">
                         <a:buNone/>
                       </a:pPr>
                       <a:r>
-                        <a:rPr lang="en-US" sz="1000" dirty="0">
-                          <a:solidFill>
-                            <a:srgbClr val="9AA6B2"/>
-                          </a:solidFill>
-                          <a:latin typeface="Calibri" pitchFamily="34" charset="0"/>
-                          <a:ea typeface="Calibri" pitchFamily="34" charset="-122"/>
-                          <a:cs typeface="Calibri" pitchFamily="34" charset="-120"/>
-                        </a:rPr>
-                        <a:t>  36 tm   </a:t>
-                      </a:r>
-                      <a:pPr indent="0" marL="0">
-                        <a:buNone/>
-                      </a:pPr>
-                      <a:r>
-                        <a:rPr lang="en-US" sz="1000" b="1" dirty="0">
+                        <a:rPr lang="en-US" sz="1300" b="1" dirty="0">
                           <a:solidFill>
                             <a:srgbClr val="FF8A8F"/>
                           </a:solidFill>
@@ -32740,7 +32572,7 @@
                         </a:rPr>
                         <a:t>+154%</a:t>
                       </a:r>
-                      <a:endParaRPr lang="en-US" sz="1000" dirty="0">
+                      <a:endParaRPr lang="en-US" sz="1250" dirty="0">
                         <a:latin typeface="Calibri" charset="0"/>
                         <a:ea typeface="Calibri" charset="0"/>
                         <a:cs typeface="Calibri" charset="0"/>
@@ -32751,7 +32583,7 @@
                         <a:buNone/>
                       </a:pPr>
                       <a:r>
-                        <a:rPr lang="en-US" sz="1000" dirty="0">
+                        <a:rPr lang="en-US" sz="1250" dirty="0">
                           <a:solidFill>
                             <a:srgbClr val="9AA6B2"/>
                           </a:solidFill>
@@ -32759,9 +32591,9 @@
                           <a:ea typeface="Calibri" pitchFamily="34" charset="-122"/>
                           <a:cs typeface="Calibri" pitchFamily="34" charset="-120"/>
                         </a:rPr>
-                        <a:t>37 units · Rp 15.940.000.000</a:t>
+                        <a:t>36 tm · 37 units</a:t>
                       </a:r>
-                      <a:endParaRPr lang="en-US" sz="1000" dirty="0">
+                      <a:endParaRPr lang="en-US" sz="1250" dirty="0">
                         <a:latin typeface="Calibri" charset="0"/>
                         <a:ea typeface="Calibri" charset="0"/>
                         <a:cs typeface="Calibri" charset="0"/>
@@ -32772,7 +32604,7 @@
                         <a:buNone/>
                       </a:pPr>
                       <a:r>
-                        <a:rPr lang="en-US" sz="1000" dirty="0">
+                        <a:rPr lang="en-US" sz="1250" dirty="0">
                           <a:solidFill>
                             <a:srgbClr val="9AA6B2"/>
                           </a:solidFill>
@@ -32780,9 +32612,9 @@
                           <a:ea typeface="Calibri" pitchFamily="34" charset="-122"/>
                           <a:cs typeface="Calibri" pitchFamily="34" charset="-120"/>
                         </a:rPr>
-                        <a:t>Rp 490.000.000 per unit</a:t>
+                        <a:t>Rp 490.000.000</a:t>
                       </a:r>
-                      <a:endParaRPr lang="en-US" sz="1000" dirty="0">
+                      <a:endParaRPr lang="en-US" sz="1250" dirty="0">
                         <a:latin typeface="Calibri" charset="0"/>
                         <a:ea typeface="Calibri" charset="0"/>
                         <a:cs typeface="Calibri" charset="0"/>
@@ -32839,7 +32671,7 @@
                       <a:pPr indent="0" marL="0">
                         <a:buNone/>
                       </a:pPr>
-                      <a:endParaRPr lang="en-US" sz="1000" dirty="0">
+                      <a:endParaRPr lang="en-US" sz="1250" dirty="0">
                         <a:latin typeface="Calibri" charset="0"/>
                         <a:ea typeface="Calibri" charset="0"/>
                         <a:cs typeface="Calibri" charset="0"/>
@@ -32897,7 +32729,7 @@
                         <a:buNone/>
                       </a:pPr>
                       <a:r>
-                        <a:rPr lang="en-US" sz="1050" b="1" dirty="0">
+                        <a:rPr lang="en-US" sz="1300" b="1" dirty="0">
                           <a:solidFill>
                             <a:srgbClr val="EEF1F4"/>
                           </a:solidFill>
@@ -32905,27 +32737,13 @@
                           <a:ea typeface="Calibri" pitchFamily="34" charset="-122"/>
                           <a:cs typeface="Calibri" pitchFamily="34" charset="-120"/>
                         </a:rPr>
-                        <a:t>KSQZ400.4</a:t>
+                        <a:t>KSQZ400.4  </a:t>
                       </a:r>
                       <a:pPr indent="0" marL="0">
                         <a:buNone/>
                       </a:pPr>
                       <a:r>
-                        <a:rPr lang="en-US" sz="1000" dirty="0">
-                          <a:solidFill>
-                            <a:srgbClr val="9AA6B2"/>
-                          </a:solidFill>
-                          <a:latin typeface="Calibri" pitchFamily="34" charset="0"/>
-                          <a:ea typeface="Calibri" pitchFamily="34" charset="-122"/>
-                          <a:cs typeface="Calibri" pitchFamily="34" charset="-120"/>
-                        </a:rPr>
-                        <a:t>  40 tm   </a:t>
-                      </a:r>
-                      <a:pPr indent="0" marL="0">
-                        <a:buNone/>
-                      </a:pPr>
-                      <a:r>
-                        <a:rPr lang="en-US" sz="1000" b="1" dirty="0">
+                        <a:rPr lang="en-US" sz="1300" b="1" dirty="0">
                           <a:solidFill>
                             <a:srgbClr val="FF8A8F"/>
                           </a:solidFill>
@@ -32935,7 +32753,7 @@
                         </a:rPr>
                         <a:t>+76%</a:t>
                       </a:r>
-                      <a:endParaRPr lang="en-US" sz="1000" dirty="0">
+                      <a:endParaRPr lang="en-US" sz="1250" dirty="0">
                         <a:latin typeface="Calibri" charset="0"/>
                         <a:ea typeface="Calibri" charset="0"/>
                         <a:cs typeface="Calibri" charset="0"/>
@@ -32946,7 +32764,7 @@
                         <a:buNone/>
                       </a:pPr>
                       <a:r>
-                        <a:rPr lang="en-US" sz="1000" dirty="0">
+                        <a:rPr lang="en-US" sz="1250" dirty="0">
                           <a:solidFill>
                             <a:srgbClr val="9AA6B2"/>
                           </a:solidFill>
@@ -32954,9 +32772,9 @@
                           <a:ea typeface="Calibri" pitchFamily="34" charset="-122"/>
                           <a:cs typeface="Calibri" pitchFamily="34" charset="-120"/>
                         </a:rPr>
-                        <a:t>2 units · Rp 1.250.000.000</a:t>
+                        <a:t>40 tm · 2 units</a:t>
                       </a:r>
-                      <a:endParaRPr lang="en-US" sz="1000" dirty="0">
+                      <a:endParaRPr lang="en-US" sz="1250" dirty="0">
                         <a:latin typeface="Calibri" charset="0"/>
                         <a:ea typeface="Calibri" charset="0"/>
                         <a:cs typeface="Calibri" charset="0"/>
@@ -32967,7 +32785,7 @@
                         <a:buNone/>
                       </a:pPr>
                       <a:r>
-                        <a:rPr lang="en-US" sz="1000" dirty="0">
+                        <a:rPr lang="en-US" sz="1250" dirty="0">
                           <a:solidFill>
                             <a:srgbClr val="9AA6B2"/>
                           </a:solidFill>
@@ -32975,9 +32793,9 @@
                           <a:ea typeface="Calibri" pitchFamily="34" charset="-122"/>
                           <a:cs typeface="Calibri" pitchFamily="34" charset="-120"/>
                         </a:rPr>
-                        <a:t>Rp 710.000.000 per unit</a:t>
+                        <a:t>Rp 710.000.000</a:t>
                       </a:r>
-                      <a:endParaRPr lang="en-US" sz="1000" dirty="0">
+                      <a:endParaRPr lang="en-US" sz="1250" dirty="0">
                         <a:latin typeface="Calibri" charset="0"/>
                         <a:ea typeface="Calibri" charset="0"/>
                         <a:cs typeface="Calibri" charset="0"/>
@@ -33035,7 +32853,7 @@
                         <a:buNone/>
                       </a:pPr>
                       <a:r>
-                        <a:rPr lang="en-US" sz="1050" b="1" dirty="0">
+                        <a:rPr lang="en-US" sz="1300" b="1" dirty="0">
                           <a:solidFill>
                             <a:srgbClr val="EEF1F4"/>
                           </a:solidFill>
@@ -33043,27 +32861,13 @@
                           <a:ea typeface="Calibri" pitchFamily="34" charset="-122"/>
                           <a:cs typeface="Calibri" pitchFamily="34" charset="-120"/>
                         </a:rPr>
-                        <a:t>PK 41002</a:t>
+                        <a:t>PK 41002  </a:t>
                       </a:r>
                       <a:pPr indent="0" marL="0">
                         <a:buNone/>
                       </a:pPr>
                       <a:r>
-                        <a:rPr lang="en-US" sz="1000" dirty="0">
-                          <a:solidFill>
-                            <a:srgbClr val="9AA6B2"/>
-                          </a:solidFill>
-                          <a:latin typeface="Calibri" pitchFamily="34" charset="0"/>
-                          <a:ea typeface="Calibri" pitchFamily="34" charset="-122"/>
-                          <a:cs typeface="Calibri" pitchFamily="34" charset="-120"/>
-                        </a:rPr>
-                        <a:t>  38.4 tm   </a:t>
-                      </a:r>
-                      <a:pPr indent="0" marL="0">
-                        <a:buNone/>
-                      </a:pPr>
-                      <a:r>
-                        <a:rPr lang="en-US" sz="1000" b="1" dirty="0">
+                        <a:rPr lang="en-US" sz="1300" b="1" dirty="0">
                           <a:solidFill>
                             <a:srgbClr val="2FBF71"/>
                           </a:solidFill>
@@ -33073,7 +32877,7 @@
                         </a:rPr>
                         <a:t>−5%</a:t>
                       </a:r>
-                      <a:endParaRPr lang="en-US" sz="1000" dirty="0">
+                      <a:endParaRPr lang="en-US" sz="1250" dirty="0">
                         <a:latin typeface="Calibri" charset="0"/>
                         <a:ea typeface="Calibri" charset="0"/>
                         <a:cs typeface="Calibri" charset="0"/>
@@ -33084,7 +32888,7 @@
                         <a:buNone/>
                       </a:pPr>
                       <a:r>
-                        <a:rPr lang="en-US" sz="1000" dirty="0">
+                        <a:rPr lang="en-US" sz="1250" dirty="0">
                           <a:solidFill>
                             <a:srgbClr val="9AA6B2"/>
                           </a:solidFill>
@@ -33092,9 +32896,9 @@
                           <a:ea typeface="Calibri" pitchFamily="34" charset="-122"/>
                           <a:cs typeface="Calibri" pitchFamily="34" charset="-120"/>
                         </a:rPr>
-                        <a:t>21 units · Rp 23.170.000.000</a:t>
+                        <a:t>38.4 tm · 21 units</a:t>
                       </a:r>
-                      <a:endParaRPr lang="en-US" sz="1000" dirty="0">
+                      <a:endParaRPr lang="en-US" sz="1250" dirty="0">
                         <a:latin typeface="Calibri" charset="0"/>
                         <a:ea typeface="Calibri" charset="0"/>
                         <a:cs typeface="Calibri" charset="0"/>
@@ -33105,7 +32909,7 @@
                         <a:buNone/>
                       </a:pPr>
                       <a:r>
-                        <a:rPr lang="en-US" sz="1000" dirty="0">
+                        <a:rPr lang="en-US" sz="1250" dirty="0">
                           <a:solidFill>
                             <a:srgbClr val="9AA6B2"/>
                           </a:solidFill>
@@ -33113,9 +32917,9 @@
                           <a:ea typeface="Calibri" pitchFamily="34" charset="-122"/>
                           <a:cs typeface="Calibri" pitchFamily="34" charset="-120"/>
                         </a:rPr>
-                        <a:t>Rp 1.310.000.000 per unit</a:t>
+                        <a:t>Rp 1.310.000.000</a:t>
                       </a:r>
-                      <a:endParaRPr lang="en-US" sz="1000" dirty="0">
+                      <a:endParaRPr lang="en-US" sz="1250" dirty="0">
                         <a:latin typeface="Calibri" charset="0"/>
                         <a:ea typeface="Calibri" charset="0"/>
                         <a:cs typeface="Calibri" charset="0"/>
@@ -33172,7 +32976,7 @@
                       <a:pPr indent="0" marL="0">
                         <a:buNone/>
                       </a:pPr>
-                      <a:endParaRPr lang="en-US" sz="1000" dirty="0">
+                      <a:endParaRPr lang="en-US" sz="1250" dirty="0">
                         <a:latin typeface="Calibri" charset="0"/>
                         <a:ea typeface="Calibri" charset="0"/>
                         <a:cs typeface="Calibri" charset="0"/>
@@ -33237,7 +33041,7 @@
                       <a:pPr indent="0" marL="0">
                         <a:buNone/>
                       </a:pPr>
-                      <a:endParaRPr lang="en-US" sz="1000" dirty="0">
+                      <a:endParaRPr lang="en-US" sz="1250" dirty="0">
                         <a:latin typeface="Calibri" charset="0"/>
                         <a:ea typeface="Calibri" charset="0"/>
                         <a:cs typeface="Calibri" charset="0"/>
@@ -33298,7 +33102,7 @@
                         <a:buNone/>
                       </a:pPr>
                       <a:r>
-                        <a:rPr lang="en-US" sz="1050" b="1" dirty="0">
+                        <a:rPr lang="en-US" sz="1300" b="1" dirty="0">
                           <a:solidFill>
                             <a:srgbClr val="EEF1F4"/>
                           </a:solidFill>
@@ -33306,27 +33110,13 @@
                           <a:ea typeface="Calibri" pitchFamily="34" charset="-122"/>
                           <a:cs typeface="Calibri" pitchFamily="34" charset="-120"/>
                         </a:rPr>
-                        <a:t>GSQZ400.4</a:t>
+                        <a:t>GSQZ400.4  </a:t>
                       </a:r>
                       <a:pPr indent="0" marL="0">
                         <a:buNone/>
                       </a:pPr>
                       <a:r>
-                        <a:rPr lang="en-US" sz="1000" dirty="0">
-                          <a:solidFill>
-                            <a:srgbClr val="9AA6B2"/>
-                          </a:solidFill>
-                          <a:latin typeface="Calibri" pitchFamily="34" charset="0"/>
-                          <a:ea typeface="Calibri" pitchFamily="34" charset="-122"/>
-                          <a:cs typeface="Calibri" pitchFamily="34" charset="-120"/>
-                        </a:rPr>
-                        <a:t>  40 tm   </a:t>
-                      </a:r>
-                      <a:pPr indent="0" marL="0">
-                        <a:buNone/>
-                      </a:pPr>
-                      <a:r>
-                        <a:rPr lang="en-US" sz="1000" b="1" dirty="0">
+                        <a:rPr lang="en-US" sz="1300" b="1" dirty="0">
                           <a:solidFill>
                             <a:srgbClr val="FF8A8F"/>
                           </a:solidFill>
@@ -33336,7 +33126,7 @@
                         </a:rPr>
                         <a:t>+76%</a:t>
                       </a:r>
-                      <a:endParaRPr lang="en-US" sz="1000" dirty="0">
+                      <a:endParaRPr lang="en-US" sz="1250" dirty="0">
                         <a:latin typeface="Calibri" charset="0"/>
                         <a:ea typeface="Calibri" charset="0"/>
                         <a:cs typeface="Calibri" charset="0"/>
@@ -33347,7 +33137,7 @@
                         <a:buNone/>
                       </a:pPr>
                       <a:r>
-                        <a:rPr lang="en-US" sz="1000" dirty="0">
+                        <a:rPr lang="en-US" sz="1250" dirty="0">
                           <a:solidFill>
                             <a:srgbClr val="9AA6B2"/>
                           </a:solidFill>
@@ -33355,9 +33145,9 @@
                           <a:ea typeface="Calibri" pitchFamily="34" charset="-122"/>
                           <a:cs typeface="Calibri" pitchFamily="34" charset="-120"/>
                         </a:rPr>
-                        <a:t>2 units · Rp 1.240.000.000</a:t>
+                        <a:t>40 tm · 2 units</a:t>
                       </a:r>
-                      <a:endParaRPr lang="en-US" sz="1000" dirty="0">
+                      <a:endParaRPr lang="en-US" sz="1250" dirty="0">
                         <a:latin typeface="Calibri" charset="0"/>
                         <a:ea typeface="Calibri" charset="0"/>
                         <a:cs typeface="Calibri" charset="0"/>
@@ -33368,7 +33158,7 @@
                         <a:buNone/>
                       </a:pPr>
                       <a:r>
-                        <a:rPr lang="en-US" sz="1000" dirty="0">
+                        <a:rPr lang="en-US" sz="1250" dirty="0">
                           <a:solidFill>
                             <a:srgbClr val="9AA6B2"/>
                           </a:solidFill>
@@ -33376,9 +33166,9 @@
                           <a:ea typeface="Calibri" pitchFamily="34" charset="-122"/>
                           <a:cs typeface="Calibri" pitchFamily="34" charset="-120"/>
                         </a:rPr>
-                        <a:t>Rp 700.000.000 per unit</a:t>
+                        <a:t>Rp 700.000.000</a:t>
                       </a:r>
-                      <a:endParaRPr lang="en-US" sz="1000" dirty="0">
+                      <a:endParaRPr lang="en-US" sz="1250" dirty="0">
                         <a:latin typeface="Calibri" charset="0"/>
                         <a:ea typeface="Calibri" charset="0"/>
                         <a:cs typeface="Calibri" charset="0"/>
@@ -33435,7 +33225,7 @@
                       <a:pPr indent="0" marL="0">
                         <a:buNone/>
                       </a:pPr>
-                      <a:endParaRPr lang="en-US" sz="1000" dirty="0">
+                      <a:endParaRPr lang="en-US" sz="1250" dirty="0">
                         <a:latin typeface="Calibri" charset="0"/>
                         <a:ea typeface="Calibri" charset="0"/>
                         <a:cs typeface="Calibri" charset="0"/>
@@ -33510,7 +33300,7 @@
                         <a:buNone/>
                       </a:pPr>
                       <a:r>
-                        <a:rPr lang="en-US" sz="1050" b="1" dirty="0">
+                        <a:rPr lang="en-US" sz="1300" b="1" dirty="0">
                           <a:solidFill>
                             <a:srgbClr val="EEF1F4"/>
                           </a:solidFill>
@@ -33518,27 +33308,13 @@
                           <a:ea typeface="Calibri" pitchFamily="34" charset="-122"/>
                           <a:cs typeface="Calibri" pitchFamily="34" charset="-120"/>
                         </a:rPr>
-                        <a:t>SQZ365.4</a:t>
+                        <a:t>SQZ365.4  </a:t>
                       </a:r>
                       <a:pPr indent="0" marL="0">
                         <a:buNone/>
                       </a:pPr>
                       <a:r>
-                        <a:rPr lang="en-US" sz="1000" dirty="0">
-                          <a:solidFill>
-                            <a:srgbClr val="9AA6B2"/>
-                          </a:solidFill>
-                          <a:latin typeface="Calibri" pitchFamily="34" charset="0"/>
-                          <a:ea typeface="Calibri" pitchFamily="34" charset="-122"/>
-                          <a:cs typeface="Calibri" pitchFamily="34" charset="-120"/>
-                        </a:rPr>
-                        <a:t>  36.5 tm   </a:t>
-                      </a:r>
-                      <a:pPr indent="0" marL="0">
-                        <a:buNone/>
-                      </a:pPr>
-                      <a:r>
-                        <a:rPr lang="en-US" sz="1000" b="1" dirty="0">
+                        <a:rPr lang="en-US" sz="1300" b="1" dirty="0">
                           <a:solidFill>
                             <a:srgbClr val="FF8A8F"/>
                           </a:solidFill>
@@ -33548,7 +33324,7 @@
                         </a:rPr>
                         <a:t>+120%</a:t>
                       </a:r>
-                      <a:endParaRPr lang="en-US" sz="1000" dirty="0">
+                      <a:endParaRPr lang="en-US" sz="1250" dirty="0">
                         <a:latin typeface="Calibri" charset="0"/>
                         <a:ea typeface="Calibri" charset="0"/>
                         <a:cs typeface="Calibri" charset="0"/>
@@ -33559,7 +33335,7 @@
                         <a:buNone/>
                       </a:pPr>
                       <a:r>
-                        <a:rPr lang="en-US" sz="1000" dirty="0">
+                        <a:rPr lang="en-US" sz="1250" dirty="0">
                           <a:solidFill>
                             <a:srgbClr val="9AA6B2"/>
                           </a:solidFill>
@@ -33567,9 +33343,9 @@
                           <a:ea typeface="Calibri" pitchFamily="34" charset="-122"/>
                           <a:cs typeface="Calibri" pitchFamily="34" charset="-120"/>
                         </a:rPr>
-                        <a:t>2 units · Rp 1.000.000.000</a:t>
+                        <a:t>36.5 tm · 2 units</a:t>
                       </a:r>
-                      <a:endParaRPr lang="en-US" sz="1000" dirty="0">
+                      <a:endParaRPr lang="en-US" sz="1250" dirty="0">
                         <a:latin typeface="Calibri" charset="0"/>
                         <a:ea typeface="Calibri" charset="0"/>
                         <a:cs typeface="Calibri" charset="0"/>
@@ -33580,7 +33356,7 @@
                         <a:buNone/>
                       </a:pPr>
                       <a:r>
-                        <a:rPr lang="en-US" sz="1000" dirty="0">
+                        <a:rPr lang="en-US" sz="1250" dirty="0">
                           <a:solidFill>
                             <a:srgbClr val="9AA6B2"/>
                           </a:solidFill>
@@ -33588,9 +33364,9 @@
                           <a:ea typeface="Calibri" pitchFamily="34" charset="-122"/>
                           <a:cs typeface="Calibri" pitchFamily="34" charset="-120"/>
                         </a:rPr>
-                        <a:t>Rp 570.000.000 per unit</a:t>
+                        <a:t>Rp 570.000.000</a:t>
                       </a:r>
-                      <a:endParaRPr lang="en-US" sz="1000" dirty="0">
+                      <a:endParaRPr lang="en-US" sz="1250" dirty="0">
                         <a:latin typeface="Calibri" charset="0"/>
                         <a:ea typeface="Calibri" charset="0"/>
                         <a:cs typeface="Calibri" charset="0"/>
@@ -33668,7 +33444,7 @@
                         <a:buNone/>
                       </a:pPr>
                       <a:r>
-                        <a:rPr lang="en-US" sz="1050" b="1" dirty="0">
+                        <a:rPr lang="en-US" sz="1300" b="1" dirty="0">
                           <a:solidFill>
                             <a:srgbClr val="EEF1F4"/>
                           </a:solidFill>
@@ -33676,27 +33452,13 @@
                           <a:ea typeface="Calibri" pitchFamily="34" charset="-122"/>
                           <a:cs typeface="Calibri" pitchFamily="34" charset="-120"/>
                         </a:rPr>
-                        <a:t>SQZ400</a:t>
+                        <a:t>SQZ400  </a:t>
                       </a:r>
                       <a:pPr indent="0" marL="0">
                         <a:buNone/>
                       </a:pPr>
                       <a:r>
-                        <a:rPr lang="en-US" sz="1000" dirty="0">
-                          <a:solidFill>
-                            <a:srgbClr val="9AA6B2"/>
-                          </a:solidFill>
-                          <a:latin typeface="Calibri" pitchFamily="34" charset="0"/>
-                          <a:ea typeface="Calibri" pitchFamily="34" charset="-122"/>
-                          <a:cs typeface="Calibri" pitchFamily="34" charset="-120"/>
-                        </a:rPr>
-                        <a:t>  40 tm   </a:t>
-                      </a:r>
-                      <a:pPr indent="0" marL="0">
-                        <a:buNone/>
-                      </a:pPr>
-                      <a:r>
-                        <a:rPr lang="en-US" sz="1000" b="1" dirty="0">
+                        <a:rPr lang="en-US" sz="1300" b="1" dirty="0">
                           <a:solidFill>
                             <a:srgbClr val="FF8A8F"/>
                           </a:solidFill>
@@ -33706,7 +33468,7 @@
                         </a:rPr>
                         <a:t>+109%</a:t>
                       </a:r>
-                      <a:endParaRPr lang="en-US" sz="1000" dirty="0">
+                      <a:endParaRPr lang="en-US" sz="1250" dirty="0">
                         <a:latin typeface="Calibri" charset="0"/>
                         <a:ea typeface="Calibri" charset="0"/>
                         <a:cs typeface="Calibri" charset="0"/>
@@ -33717,7 +33479,7 @@
                         <a:buNone/>
                       </a:pPr>
                       <a:r>
-                        <a:rPr lang="en-US" sz="1000" dirty="0">
+                        <a:rPr lang="en-US" sz="1250" dirty="0">
                           <a:solidFill>
                             <a:srgbClr val="9AA6B2"/>
                           </a:solidFill>
@@ -33725,9 +33487,9 @@
                           <a:ea typeface="Calibri" pitchFamily="34" charset="-122"/>
                           <a:cs typeface="Calibri" pitchFamily="34" charset="-120"/>
                         </a:rPr>
-                        <a:t>1 unit · Rp 520.000.000</a:t>
+                        <a:t>40 tm · 1 unit</a:t>
                       </a:r>
-                      <a:endParaRPr lang="en-US" sz="1000" dirty="0">
+                      <a:endParaRPr lang="en-US" sz="1250" dirty="0">
                         <a:latin typeface="Calibri" charset="0"/>
                         <a:ea typeface="Calibri" charset="0"/>
                         <a:cs typeface="Calibri" charset="0"/>
@@ -33738,7 +33500,7 @@
                         <a:buNone/>
                       </a:pPr>
                       <a:r>
-                        <a:rPr lang="en-US" sz="1000" dirty="0">
+                        <a:rPr lang="en-US" sz="1250" dirty="0">
                           <a:solidFill>
                             <a:srgbClr val="9AA6B2"/>
                           </a:solidFill>
@@ -33746,9 +33508,9 @@
                           <a:ea typeface="Calibri" pitchFamily="34" charset="-122"/>
                           <a:cs typeface="Calibri" pitchFamily="34" charset="-120"/>
                         </a:rPr>
-                        <a:t>Rp 600.000.000 per unit</a:t>
+                        <a:t>Rp 600.000.000</a:t>
                       </a:r>
-                      <a:endParaRPr lang="en-US" sz="1000" dirty="0">
+                      <a:endParaRPr lang="en-US" sz="1250" dirty="0">
                         <a:latin typeface="Calibri" charset="0"/>
                         <a:ea typeface="Calibri" charset="0"/>
                         <a:cs typeface="Calibri" charset="0"/>
@@ -33826,7 +33588,7 @@
                         <a:buNone/>
                       </a:pPr>
                       <a:r>
-                        <a:rPr lang="en-US" sz="1050" b="1" dirty="0">
+                        <a:rPr lang="en-US" sz="1300" b="1" dirty="0">
                           <a:solidFill>
                             <a:srgbClr val="EEF1F4"/>
                           </a:solidFill>
@@ -33834,27 +33596,13 @@
                           <a:ea typeface="Calibri" pitchFamily="34" charset="-122"/>
                           <a:cs typeface="Calibri" pitchFamily="34" charset="-120"/>
                         </a:rPr>
-                        <a:t>KSQZ365.4</a:t>
+                        <a:t>KSQZ365.4  </a:t>
                       </a:r>
                       <a:pPr indent="0" marL="0">
                         <a:buNone/>
                       </a:pPr>
                       <a:r>
-                        <a:rPr lang="en-US" sz="1000" dirty="0">
-                          <a:solidFill>
-                            <a:srgbClr val="9AA6B2"/>
-                          </a:solidFill>
-                          <a:latin typeface="Calibri" pitchFamily="34" charset="0"/>
-                          <a:ea typeface="Calibri" pitchFamily="34" charset="-122"/>
-                          <a:cs typeface="Calibri" pitchFamily="34" charset="-120"/>
-                        </a:rPr>
-                        <a:t>  36.5 tm   </a:t>
-                      </a:r>
-                      <a:pPr indent="0" marL="0">
-                        <a:buNone/>
-                      </a:pPr>
-                      <a:r>
-                        <a:rPr lang="en-US" sz="1000" b="1" dirty="0">
+                        <a:rPr lang="en-US" sz="1300" b="1" dirty="0">
                           <a:solidFill>
                             <a:srgbClr val="FF8A8F"/>
                           </a:solidFill>
@@ -33864,7 +33612,7 @@
                         </a:rPr>
                         <a:t>+129%</a:t>
                       </a:r>
-                      <a:endParaRPr lang="en-US" sz="1000" dirty="0">
+                      <a:endParaRPr lang="en-US" sz="1250" dirty="0">
                         <a:latin typeface="Calibri" charset="0"/>
                         <a:ea typeface="Calibri" charset="0"/>
                         <a:cs typeface="Calibri" charset="0"/>
@@ -33875,7 +33623,7 @@
                         <a:buNone/>
                       </a:pPr>
                       <a:r>
-                        <a:rPr lang="en-US" sz="1000" dirty="0">
+                        <a:rPr lang="en-US" sz="1250" dirty="0">
                           <a:solidFill>
                             <a:srgbClr val="9AA6B2"/>
                           </a:solidFill>
@@ -33883,9 +33631,9 @@
                           <a:ea typeface="Calibri" pitchFamily="34" charset="-122"/>
                           <a:cs typeface="Calibri" pitchFamily="34" charset="-120"/>
                         </a:rPr>
-                        <a:t>1 unit · Rp 480.000.000</a:t>
+                        <a:t>36.5 tm · 1 unit</a:t>
                       </a:r>
-                      <a:endParaRPr lang="en-US" sz="1000" dirty="0">
+                      <a:endParaRPr lang="en-US" sz="1250" dirty="0">
                         <a:latin typeface="Calibri" charset="0"/>
                         <a:ea typeface="Calibri" charset="0"/>
                         <a:cs typeface="Calibri" charset="0"/>
@@ -33896,7 +33644,7 @@
                         <a:buNone/>
                       </a:pPr>
                       <a:r>
-                        <a:rPr lang="en-US" sz="1000" dirty="0">
+                        <a:rPr lang="en-US" sz="1250" dirty="0">
                           <a:solidFill>
                             <a:srgbClr val="9AA6B2"/>
                           </a:solidFill>
@@ -33904,9 +33652,9 @@
                           <a:ea typeface="Calibri" pitchFamily="34" charset="-122"/>
                           <a:cs typeface="Calibri" pitchFamily="34" charset="-120"/>
                         </a:rPr>
-                        <a:t>Rp 540.000.000 per unit</a:t>
+                        <a:t>Rp 540.000.000</a:t>
                       </a:r>
-                      <a:endParaRPr lang="en-US" sz="1000" dirty="0">
+                      <a:endParaRPr lang="en-US" sz="1250" dirty="0">
                         <a:latin typeface="Calibri" charset="0"/>
                         <a:ea typeface="Calibri" charset="0"/>
                         <a:cs typeface="Calibri" charset="0"/>
@@ -33972,7 +33720,7 @@
                         <a:buNone/>
                       </a:pPr>
                       <a:r>
-                        <a:rPr lang="en-US" sz="1150" b="1" dirty="0">
+                        <a:rPr lang="en-US" sz="1400" b="1" dirty="0">
                           <a:solidFill>
                             <a:srgbClr val="F2A33A"/>
                           </a:solidFill>
@@ -33982,7 +33730,7 @@
                         </a:rPr>
                         <a:t>&gt;40–45 tm</a:t>
                       </a:r>
-                      <a:endParaRPr lang="en-US" sz="1000" dirty="0">
+                      <a:endParaRPr lang="en-US" sz="1250" dirty="0">
                         <a:latin typeface="Calibri" charset="0"/>
                         <a:ea typeface="Calibri" charset="0"/>
                         <a:cs typeface="Calibri" charset="0"/>
@@ -33993,7 +33741,7 @@
                         <a:buNone/>
                       </a:pPr>
                       <a:r>
-                        <a:rPr lang="en-US" sz="900" dirty="0">
+                        <a:rPr lang="en-US" sz="1150" dirty="0">
                           <a:solidFill>
                             <a:srgbClr val="9AA6B2"/>
                           </a:solidFill>
@@ -34003,7 +33751,7 @@
                         </a:rPr>
                         <a:t>23 units</a:t>
                       </a:r>
-                      <a:endParaRPr lang="en-US" sz="1000" dirty="0">
+                      <a:endParaRPr lang="en-US" sz="1250" dirty="0">
                         <a:latin typeface="Calibri" charset="0"/>
                         <a:ea typeface="Calibri" charset="0"/>
                         <a:cs typeface="Calibri" charset="0"/>
@@ -34061,7 +33809,7 @@
                         <a:buNone/>
                       </a:pPr>
                       <a:r>
-                        <a:rPr lang="en-US" sz="1150" b="1" dirty="0">
+                        <a:rPr lang="en-US" sz="1400" b="1" dirty="0">
                           <a:solidFill>
                             <a:srgbClr val="EEF1F4"/>
                           </a:solidFill>
@@ -34071,7 +33819,7 @@
                         </a:rPr>
                         <a:t>746 A4</a:t>
                       </a:r>
-                      <a:endParaRPr lang="en-US" sz="1000" dirty="0">
+                      <a:endParaRPr lang="en-US" sz="1250" dirty="0">
                         <a:latin typeface="Calibri" charset="0"/>
                         <a:ea typeface="Calibri" charset="0"/>
                         <a:cs typeface="Calibri" charset="0"/>
@@ -34082,7 +33830,7 @@
                         <a:buNone/>
                       </a:pPr>
                       <a:r>
-                        <a:rPr lang="en-US" sz="900" dirty="0">
+                        <a:rPr lang="en-US" sz="1150" dirty="0">
                           <a:solidFill>
                             <a:srgbClr val="C9A9AC"/>
                           </a:solidFill>
@@ -34092,7 +33840,7 @@
                         </a:rPr>
                         <a:t>43.4 tm</a:t>
                       </a:r>
-                      <a:endParaRPr lang="en-US" sz="1000" dirty="0">
+                      <a:endParaRPr lang="en-US" sz="1250" dirty="0">
                         <a:latin typeface="Calibri" charset="0"/>
                         <a:ea typeface="Calibri" charset="0"/>
                         <a:cs typeface="Calibri" charset="0"/>
@@ -34103,7 +33851,7 @@
                         <a:buNone/>
                       </a:pPr>
                       <a:r>
-                        <a:rPr lang="en-US" sz="1000" b="1" dirty="0">
+                        <a:rPr lang="en-US" sz="1250" b="1" dirty="0">
                           <a:solidFill>
                             <a:srgbClr val="EEF1F4"/>
                           </a:solidFill>
@@ -34113,7 +33861,7 @@
                         </a:rPr>
                         <a:t>Rp 1.420.000.000</a:t>
                       </a:r>
-                      <a:endParaRPr lang="en-US" sz="1000" dirty="0">
+                      <a:endParaRPr lang="en-US" sz="1250" dirty="0">
                         <a:latin typeface="Calibri" charset="0"/>
                         <a:ea typeface="Calibri" charset="0"/>
                         <a:cs typeface="Calibri" charset="0"/>
@@ -34171,7 +33919,7 @@
                         <a:buNone/>
                       </a:pPr>
                       <a:r>
-                        <a:rPr lang="en-US" sz="1050" b="1" dirty="0">
+                        <a:rPr lang="en-US" sz="1300" b="1" dirty="0">
                           <a:solidFill>
                             <a:srgbClr val="EEF1F4"/>
                           </a:solidFill>
@@ -34179,27 +33927,13 @@
                           <a:ea typeface="Calibri" pitchFamily="34" charset="-122"/>
                           <a:cs typeface="Calibri" pitchFamily="34" charset="-120"/>
                         </a:rPr>
-                        <a:t>SPK42502</a:t>
+                        <a:t>SPK42502  </a:t>
                       </a:r>
                       <a:pPr indent="0" marL="0">
                         <a:buNone/>
                       </a:pPr>
                       <a:r>
-                        <a:rPr lang="en-US" sz="1000" dirty="0">
-                          <a:solidFill>
-                            <a:srgbClr val="9AA6B2"/>
-                          </a:solidFill>
-                          <a:latin typeface="Calibri" pitchFamily="34" charset="0"/>
-                          <a:ea typeface="Calibri" pitchFamily="34" charset="-122"/>
-                          <a:cs typeface="Calibri" pitchFamily="34" charset="-120"/>
-                        </a:rPr>
-                        <a:t>  42.5 tm   </a:t>
-                      </a:r>
-                      <a:pPr indent="0" marL="0">
-                        <a:buNone/>
-                      </a:pPr>
-                      <a:r>
-                        <a:rPr lang="en-US" sz="1000" b="1" dirty="0">
+                        <a:rPr lang="en-US" sz="1300" b="1" dirty="0">
                           <a:solidFill>
                             <a:srgbClr val="FF8A8F"/>
                           </a:solidFill>
@@ -34209,7 +33943,7 @@
                         </a:rPr>
                         <a:t>+81%</a:t>
                       </a:r>
-                      <a:endParaRPr lang="en-US" sz="1000" dirty="0">
+                      <a:endParaRPr lang="en-US" sz="1250" dirty="0">
                         <a:latin typeface="Calibri" charset="0"/>
                         <a:ea typeface="Calibri" charset="0"/>
                         <a:cs typeface="Calibri" charset="0"/>
@@ -34220,7 +33954,7 @@
                         <a:buNone/>
                       </a:pPr>
                       <a:r>
-                        <a:rPr lang="en-US" sz="1000" dirty="0">
+                        <a:rPr lang="en-US" sz="1250" dirty="0">
                           <a:solidFill>
                             <a:srgbClr val="9AA6B2"/>
                           </a:solidFill>
@@ -34228,9 +33962,9 @@
                           <a:ea typeface="Calibri" pitchFamily="34" charset="-122"/>
                           <a:cs typeface="Calibri" pitchFamily="34" charset="-120"/>
                         </a:rPr>
-                        <a:t>18 units · Rp 12.470.000.000</a:t>
+                        <a:t>42.5 tm · 18 units</a:t>
                       </a:r>
-                      <a:endParaRPr lang="en-US" sz="1000" dirty="0">
+                      <a:endParaRPr lang="en-US" sz="1250" dirty="0">
                         <a:latin typeface="Calibri" charset="0"/>
                         <a:ea typeface="Calibri" charset="0"/>
                         <a:cs typeface="Calibri" charset="0"/>
@@ -34241,7 +33975,7 @@
                         <a:buNone/>
                       </a:pPr>
                       <a:r>
-                        <a:rPr lang="en-US" sz="1000" dirty="0">
+                        <a:rPr lang="en-US" sz="1250" dirty="0">
                           <a:solidFill>
                             <a:srgbClr val="9AA6B2"/>
                           </a:solidFill>
@@ -34249,9 +33983,9 @@
                           <a:ea typeface="Calibri" pitchFamily="34" charset="-122"/>
                           <a:cs typeface="Calibri" pitchFamily="34" charset="-120"/>
                         </a:rPr>
-                        <a:t>Rp 790.000.000 per unit</a:t>
+                        <a:t>Rp 790.000.000</a:t>
                       </a:r>
-                      <a:endParaRPr lang="en-US" sz="1000" dirty="0">
+                      <a:endParaRPr lang="en-US" sz="1250" dirty="0">
                         <a:latin typeface="Calibri" charset="0"/>
                         <a:ea typeface="Calibri" charset="0"/>
                         <a:cs typeface="Calibri" charset="0"/>
@@ -34309,7 +34043,7 @@
                         <a:buNone/>
                       </a:pPr>
                       <a:r>
-                        <a:rPr lang="en-US" sz="1050" b="1" dirty="0">
+                        <a:rPr lang="en-US" sz="1300" b="1" dirty="0">
                           <a:solidFill>
                             <a:srgbClr val="EEF1F4"/>
                           </a:solidFill>
@@ -34317,27 +34051,13 @@
                           <a:ea typeface="Calibri" pitchFamily="34" charset="-122"/>
                           <a:cs typeface="Calibri" pitchFamily="34" charset="-120"/>
                         </a:rPr>
-                        <a:t>V946B</a:t>
+                        <a:t>V946B  </a:t>
                       </a:r>
                       <a:pPr indent="0" marL="0">
                         <a:buNone/>
                       </a:pPr>
                       <a:r>
-                        <a:rPr lang="en-US" sz="1000" dirty="0">
-                          <a:solidFill>
-                            <a:srgbClr val="9AA6B2"/>
-                          </a:solidFill>
-                          <a:latin typeface="Calibri" pitchFamily="34" charset="0"/>
-                          <a:ea typeface="Calibri" pitchFamily="34" charset="-122"/>
-                          <a:cs typeface="Calibri" pitchFamily="34" charset="-120"/>
-                        </a:rPr>
-                        <a:t>  44.2 tm   </a:t>
-                      </a:r>
-                      <a:pPr indent="0" marL="0">
-                        <a:buNone/>
-                      </a:pPr>
-                      <a:r>
-                        <a:rPr lang="en-US" sz="1000" b="1" dirty="0">
+                        <a:rPr lang="en-US" sz="1300" b="1" dirty="0">
                           <a:solidFill>
                             <a:srgbClr val="FF8A8F"/>
                           </a:solidFill>
@@ -34347,7 +34067,7 @@
                         </a:rPr>
                         <a:t>+12%</a:t>
                       </a:r>
-                      <a:endParaRPr lang="en-US" sz="1000" dirty="0">
+                      <a:endParaRPr lang="en-US" sz="1250" dirty="0">
                         <a:latin typeface="Calibri" charset="0"/>
                         <a:ea typeface="Calibri" charset="0"/>
                         <a:cs typeface="Calibri" charset="0"/>
@@ -34358,7 +34078,7 @@
                         <a:buNone/>
                       </a:pPr>
                       <a:r>
-                        <a:rPr lang="en-US" sz="1000" dirty="0">
+                        <a:rPr lang="en-US" sz="1250" dirty="0">
                           <a:solidFill>
                             <a:srgbClr val="9AA6B2"/>
                           </a:solidFill>
@@ -34366,9 +34086,9 @@
                           <a:ea typeface="Calibri" pitchFamily="34" charset="-122"/>
                           <a:cs typeface="Calibri" pitchFamily="34" charset="-120"/>
                         </a:rPr>
-                        <a:t>1 unit · Rp 1.070.000.000</a:t>
+                        <a:t>44.2 tm · 1 unit</a:t>
                       </a:r>
-                      <a:endParaRPr lang="en-US" sz="1000" dirty="0">
+                      <a:endParaRPr lang="en-US" sz="1250" dirty="0">
                         <a:latin typeface="Calibri" charset="0"/>
                         <a:ea typeface="Calibri" charset="0"/>
                         <a:cs typeface="Calibri" charset="0"/>
@@ -34379,7 +34099,7 @@
                         <a:buNone/>
                       </a:pPr>
                       <a:r>
-                        <a:rPr lang="en-US" sz="1000" dirty="0">
+                        <a:rPr lang="en-US" sz="1250" dirty="0">
                           <a:solidFill>
                             <a:srgbClr val="9AA6B2"/>
                           </a:solidFill>
@@ -34387,9 +34107,9 @@
                           <a:ea typeface="Calibri" pitchFamily="34" charset="-122"/>
                           <a:cs typeface="Calibri" pitchFamily="34" charset="-120"/>
                         </a:rPr>
-                        <a:t>Rp 1.270.000.000 per unit</a:t>
+                        <a:t>Rp 1.270.000.000</a:t>
                       </a:r>
-                      <a:endParaRPr lang="en-US" sz="1000" dirty="0">
+                      <a:endParaRPr lang="en-US" sz="1250" dirty="0">
                         <a:latin typeface="Calibri" charset="0"/>
                         <a:ea typeface="Calibri" charset="0"/>
                         <a:cs typeface="Calibri" charset="0"/>
@@ -34446,7 +34166,7 @@
                       <a:pPr indent="0" marL="0">
                         <a:buNone/>
                       </a:pPr>
-                      <a:endParaRPr lang="en-US" sz="1000" dirty="0">
+                      <a:endParaRPr lang="en-US" sz="1250" dirty="0">
                         <a:latin typeface="Calibri" charset="0"/>
                         <a:ea typeface="Calibri" charset="0"/>
                         <a:cs typeface="Calibri" charset="0"/>
@@ -34503,7 +34223,7 @@
                       <a:pPr indent="0" marL="0">
                         <a:buNone/>
                       </a:pPr>
-                      <a:endParaRPr lang="en-US" sz="1000" dirty="0">
+                      <a:endParaRPr lang="en-US" sz="1250" dirty="0">
                         <a:latin typeface="Calibri" charset="0"/>
                         <a:ea typeface="Calibri" charset="0"/>
                         <a:cs typeface="Calibri" charset="0"/>
@@ -34561,7 +34281,7 @@
                         <a:buNone/>
                       </a:pPr>
                       <a:r>
-                        <a:rPr lang="en-US" sz="1050" b="1" dirty="0">
+                        <a:rPr lang="en-US" sz="1300" b="1" dirty="0">
                           <a:solidFill>
                             <a:srgbClr val="EEF1F4"/>
                           </a:solidFill>
@@ -34569,27 +34289,13 @@
                           <a:ea typeface="Calibri" pitchFamily="34" charset="-122"/>
                           <a:cs typeface="Calibri" pitchFamily="34" charset="-120"/>
                         </a:rPr>
-                        <a:t>477 EP-5</a:t>
+                        <a:t>477 EP-5  </a:t>
                       </a:r>
                       <a:pPr indent="0" marL="0">
                         <a:buNone/>
                       </a:pPr>
                       <a:r>
-                        <a:rPr lang="en-US" sz="1000" dirty="0">
-                          <a:solidFill>
-                            <a:srgbClr val="9AA6B2"/>
-                          </a:solidFill>
-                          <a:latin typeface="Calibri" pitchFamily="34" charset="0"/>
-                          <a:ea typeface="Calibri" pitchFamily="34" charset="-122"/>
-                          <a:cs typeface="Calibri" pitchFamily="34" charset="-120"/>
-                        </a:rPr>
-                        <a:t>  42 tm   </a:t>
-                      </a:r>
-                      <a:pPr indent="0" marL="0">
-                        <a:buNone/>
-                      </a:pPr>
-                      <a:r>
-                        <a:rPr lang="en-US" sz="1000" b="1" dirty="0">
+                        <a:rPr lang="en-US" sz="1300" b="1" dirty="0">
                           <a:solidFill>
                             <a:srgbClr val="FF8A8F"/>
                           </a:solidFill>
@@ -34599,7 +34305,7 @@
                         </a:rPr>
                         <a:t>+152%</a:t>
                       </a:r>
-                      <a:endParaRPr lang="en-US" sz="1000" dirty="0">
+                      <a:endParaRPr lang="en-US" sz="1250" dirty="0">
                         <a:latin typeface="Calibri" charset="0"/>
                         <a:ea typeface="Calibri" charset="0"/>
                         <a:cs typeface="Calibri" charset="0"/>
@@ -34610,7 +34316,7 @@
                         <a:buNone/>
                       </a:pPr>
                       <a:r>
-                        <a:rPr lang="en-US" sz="1000" dirty="0">
+                        <a:rPr lang="en-US" sz="1250" dirty="0">
                           <a:solidFill>
                             <a:srgbClr val="9AA6B2"/>
                           </a:solidFill>
@@ -34618,9 +34324,9 @@
                           <a:ea typeface="Calibri" pitchFamily="34" charset="-122"/>
                           <a:cs typeface="Calibri" pitchFamily="34" charset="-120"/>
                         </a:rPr>
-                        <a:t>4 units · Rp 1.890.000.000</a:t>
+                        <a:t>42 tm · 4 units</a:t>
                       </a:r>
-                      <a:endParaRPr lang="en-US" sz="1000" dirty="0">
+                      <a:endParaRPr lang="en-US" sz="1250" dirty="0">
                         <a:latin typeface="Calibri" charset="0"/>
                         <a:ea typeface="Calibri" charset="0"/>
                         <a:cs typeface="Calibri" charset="0"/>
@@ -34631,7 +34337,7 @@
                         <a:buNone/>
                       </a:pPr>
                       <a:r>
-                        <a:rPr lang="en-US" sz="1000" dirty="0">
+                        <a:rPr lang="en-US" sz="1250" dirty="0">
                           <a:solidFill>
                             <a:srgbClr val="9AA6B2"/>
                           </a:solidFill>
@@ -34639,9 +34345,9 @@
                           <a:ea typeface="Calibri" pitchFamily="34" charset="-122"/>
                           <a:cs typeface="Calibri" pitchFamily="34" charset="-120"/>
                         </a:rPr>
-                        <a:t>Rp 560.000.000 per unit</a:t>
+                        <a:t>Rp 560.000.000</a:t>
                       </a:r>
-                      <a:endParaRPr lang="en-US" sz="1000" dirty="0">
+                      <a:endParaRPr lang="en-US" sz="1250" dirty="0">
                         <a:latin typeface="Calibri" charset="0"/>
                         <a:ea typeface="Calibri" charset="0"/>
                         <a:cs typeface="Calibri" charset="0"/>
@@ -34703,7 +34409,7 @@
         </p:nvSpPr>
         <p:spPr>
           <a:xfrm>
-            <a:off x="3029407" y="1371600"/>
+            <a:off x="3235147" y="1371600"/>
             <a:ext cx="1234440" cy="237744"/>
           </a:xfrm>
           <a:prstGeom prst="roundRect">
@@ -34738,7 +34444,7 @@
         </p:blipFill>
         <p:spPr>
           <a:xfrm>
-            <a:off x="3238869" y="1403604"/>
+            <a:off x="3444609" y="1403604"/>
             <a:ext cx="815517" cy="173736"/>
           </a:xfrm>
           <a:prstGeom prst="rect">
@@ -34754,7 +34460,7 @@
         </p:nvSpPr>
         <p:spPr>
           <a:xfrm>
-            <a:off x="4836262" y="1371600"/>
+            <a:off x="4996282" y="1371600"/>
             <a:ext cx="1234440" cy="237744"/>
           </a:xfrm>
           <a:prstGeom prst="roundRect">
@@ -34789,7 +34495,7 @@
         </p:blipFill>
         <p:spPr>
           <a:xfrm>
-            <a:off x="5065269" y="1403604"/>
+            <a:off x="5225289" y="1403604"/>
             <a:ext cx="776426" cy="173736"/>
           </a:xfrm>
           <a:prstGeom prst="rect">
@@ -34805,7 +34511,7 @@
         </p:nvSpPr>
         <p:spPr>
           <a:xfrm>
-            <a:off x="6643116" y="1371600"/>
+            <a:off x="6757416" y="1371600"/>
             <a:ext cx="1234440" cy="237744"/>
           </a:xfrm>
           <a:prstGeom prst="roundRect">
@@ -34840,7 +34546,7 @@
         </p:blipFill>
         <p:spPr>
           <a:xfrm>
-            <a:off x="6861872" y="1403604"/>
+            <a:off x="6976172" y="1403604"/>
             <a:ext cx="796927" cy="173736"/>
           </a:xfrm>
           <a:prstGeom prst="rect">
@@ -34856,7 +34562,7 @@
         </p:nvSpPr>
         <p:spPr>
           <a:xfrm>
-            <a:off x="8449970" y="1371600"/>
+            <a:off x="8518550" y="1371600"/>
             <a:ext cx="1234440" cy="237744"/>
           </a:xfrm>
           <a:prstGeom prst="roundRect">
@@ -34891,7 +34597,7 @@
         </p:blipFill>
         <p:spPr>
           <a:xfrm>
-            <a:off x="8674895" y="1403604"/>
+            <a:off x="8743475" y="1403604"/>
             <a:ext cx="784592" cy="173736"/>
           </a:xfrm>
           <a:prstGeom prst="rect">
@@ -34907,7 +34613,7 @@
         </p:nvSpPr>
         <p:spPr>
           <a:xfrm>
-            <a:off x="10256825" y="1371600"/>
+            <a:off x="10279685" y="1371600"/>
             <a:ext cx="1234440" cy="237744"/>
           </a:xfrm>
           <a:prstGeom prst="roundRect">
@@ -34942,7 +34648,7 @@
         </p:blipFill>
         <p:spPr>
           <a:xfrm>
-            <a:off x="10622649" y="1403604"/>
+            <a:off x="10645509" y="1403604"/>
             <a:ext cx="502792" cy="173736"/>
           </a:xfrm>
           <a:prstGeom prst="rect">
@@ -34958,7 +34664,7 @@
         </p:nvSpPr>
         <p:spPr>
           <a:xfrm>
-            <a:off x="411480" y="5980176"/>
+            <a:off x="411480" y="6053328"/>
             <a:ext cx="146304" cy="118872"/>
           </a:xfrm>
           <a:prstGeom prst="rect">
@@ -34983,7 +34689,7 @@
         </p:nvSpPr>
         <p:spPr>
           <a:xfrm>
-            <a:off x="621792" y="5934456"/>
+            <a:off x="621792" y="6007608"/>
             <a:ext cx="1828800" cy="201168"/>
           </a:xfrm>
           <a:prstGeom prst="rect">
@@ -35022,7 +34728,7 @@
         </p:nvSpPr>
         <p:spPr>
           <a:xfrm>
-            <a:off x="2514600" y="5980176"/>
+            <a:off x="2514600" y="6053328"/>
             <a:ext cx="146304" cy="118872"/>
           </a:xfrm>
           <a:prstGeom prst="rect">
@@ -35047,7 +34753,7 @@
         </p:nvSpPr>
         <p:spPr>
           <a:xfrm>
-            <a:off x="2724912" y="5934456"/>
+            <a:off x="2724912" y="6007608"/>
             <a:ext cx="1828800" cy="201168"/>
           </a:xfrm>
           <a:prstGeom prst="rect">
@@ -35086,7 +34792,7 @@
         </p:nvSpPr>
         <p:spPr>
           <a:xfrm>
-            <a:off x="4663440" y="5934456"/>
+            <a:off x="4663440" y="6007608"/>
             <a:ext cx="7132320" cy="201168"/>
           </a:xfrm>
           <a:prstGeom prst="rect">
@@ -35164,7 +34870,7 @@
                 <a:ea typeface="Calibri" pitchFamily="34" charset="-122"/>
                 <a:cs typeface="Calibri" pitchFamily="34" charset="-120"/>
               </a:rPr>
-              <a:t>Units and import value (before tax): Jan 2023 – 14 Aug 2026; Zoomlion and Hyva excluded. Competitors: average import unit price, Jan 2023 – 14 Aug 2026, × Rp 17.803/USD (JISDOR 23 Sep 2026) + import duty (0% China – ACFTA; 5% Europe, assumed) + PPN 11% + PPh 22 2.5%, before distributor margin. F.lli Ferrari: crane price from the TSP price list Rev1, June 2026 (column K minus column J), less the 13.6% TSP margin and 3% warranty. 990R: TSP price less Rp 168.000.000 cargo deck and install, then the same deductions. 9601CR A8: UTPE quote of 15 Sep 2026, crane only, no deduction; 50.7 tm per its load chart. 7441C is an estimate. Prices rounded to Rp 10.000.000.</a:t>
+              <a:t>Each model: F.lli Ferrari price difference; tm and units Jan 2023 – 14 Aug 2026; price per unit. Zoomlion and Hyva excluded. Competitors: average import unit price, Jan 2023 – 14 Aug 2026, × Rp 17.803/USD (JISDOR 23 Sep 2026) + import duty (0% China – ACFTA; 5% Europe, assumed) + PPN 11% + PPh 22 2.5%, before distributor margin. F.lli Ferrari: crane price from the TSP price list Rev1, June 2026 (column K minus column J), less the 13.6% TSP margin and 3% warranty. 990R: TSP price less Rp 168.000.000 cargo deck and install, then the same deductions. 9601CR A8: UTPE quote of 15 Sep 2026, crane only, no deduction; 50.7 tm per its load chart. 7441C is an estimate. Prices rounded to Rp 10.000.000.</a:t>
             </a:r>
             <a:endParaRPr lang="en-US" sz="750" dirty="0"/>
           </a:p>
@@ -35417,14 +35123,14 @@
             <a:tbl>
               <a:tblPr/>
               <a:tblGrid>
-                <a:gridCol w="777240"/>
-                <a:gridCol w="1325880"/>
-                <a:gridCol w="1543812"/>
-                <a:gridCol w="1543812"/>
-                <a:gridCol w="1543812"/>
-                <a:gridCol w="1543812"/>
-                <a:gridCol w="1543812"/>
-                <a:gridCol w="1543812"/>
+                <a:gridCol w="868680"/>
+                <a:gridCol w="1463040"/>
+                <a:gridCol w="1505712"/>
+                <a:gridCol w="1505712"/>
+                <a:gridCol w="1505712"/>
+                <a:gridCol w="1505712"/>
+                <a:gridCol w="1505712"/>
+                <a:gridCol w="1505712"/>
               </a:tblGrid>
               <a:tr h="457200">
                 <a:tc>
@@ -35572,7 +35278,7 @@
                         <a:buNone/>
                       </a:pPr>
                       <a:r>
-                        <a:rPr lang="en-US" sz="750" dirty="0">
+                        <a:rPr lang="en-US" sz="950" dirty="0">
                           <a:solidFill>
                             <a:srgbClr val="9AA6B2"/>
                           </a:solidFill>
@@ -35580,16 +35286,16 @@
                           <a:ea typeface="Calibri" pitchFamily="34" charset="-122"/>
                           <a:cs typeface="Calibri" pitchFamily="34" charset="-120"/>
                         </a:rPr>
-                        <a:t>42 units · Rp 58.780.000.000</a:t>
+                        <a:t>42 units</a:t>
                       </a:r>
-                      <a:endParaRPr lang="en-US" sz="750" dirty="0">
+                      <a:endParaRPr lang="en-US" sz="950" dirty="0">
                         <a:latin typeface="Calibri" charset="0"/>
                         <a:ea typeface="Calibri" charset="0"/>
                         <a:cs typeface="Calibri" charset="0"/>
                       </a:endParaRPr>
                     </a:p>
                   </a:txBody>
-                  <a:tcPr marL="36576" marR="36576" marT="0" marB="45720" anchor="b">
+                  <a:tcPr marL="36576" marR="36576" marT="0" marB="36576" anchor="b">
                     <a:lnL w="19050" cap="flat" cmpd="sng" algn="ctr">
                       <a:solidFill>
                         <a:srgbClr val="0F141A"/>
@@ -35640,7 +35346,7 @@
                         <a:buNone/>
                       </a:pPr>
                       <a:r>
-                        <a:rPr lang="en-US" sz="750" dirty="0">
+                        <a:rPr lang="en-US" sz="950" dirty="0">
                           <a:solidFill>
                             <a:srgbClr val="9AA6B2"/>
                           </a:solidFill>
@@ -35648,16 +35354,16 @@
                           <a:ea typeface="Calibri" pitchFamily="34" charset="-122"/>
                           <a:cs typeface="Calibri" pitchFamily="34" charset="-120"/>
                         </a:rPr>
-                        <a:t>12 units · Rp 18.900.000.000</a:t>
+                        <a:t>12 units</a:t>
                       </a:r>
-                      <a:endParaRPr lang="en-US" sz="750" dirty="0">
+                      <a:endParaRPr lang="en-US" sz="950" dirty="0">
                         <a:latin typeface="Calibri" charset="0"/>
                         <a:ea typeface="Calibri" charset="0"/>
                         <a:cs typeface="Calibri" charset="0"/>
                       </a:endParaRPr>
                     </a:p>
                   </a:txBody>
-                  <a:tcPr marL="36576" marR="36576" marT="0" marB="45720" anchor="b">
+                  <a:tcPr marL="36576" marR="36576" marT="0" marB="36576" anchor="b">
                     <a:lnL w="19050" cap="flat" cmpd="sng" algn="ctr">
                       <a:solidFill>
                         <a:srgbClr val="0F141A"/>
@@ -35708,7 +35414,7 @@
                         <a:buNone/>
                       </a:pPr>
                       <a:r>
-                        <a:rPr lang="en-US" sz="750" dirty="0">
+                        <a:rPr lang="en-US" sz="950" dirty="0">
                           <a:solidFill>
                             <a:srgbClr val="9AA6B2"/>
                           </a:solidFill>
@@ -35716,16 +35422,16 @@
                           <a:ea typeface="Calibri" pitchFamily="34" charset="-122"/>
                           <a:cs typeface="Calibri" pitchFamily="34" charset="-120"/>
                         </a:rPr>
-                        <a:t>7 units · Rp 6.790.000.000</a:t>
+                        <a:t>7 units</a:t>
                       </a:r>
-                      <a:endParaRPr lang="en-US" sz="750" dirty="0">
+                      <a:endParaRPr lang="en-US" sz="950" dirty="0">
                         <a:latin typeface="Calibri" charset="0"/>
                         <a:ea typeface="Calibri" charset="0"/>
                         <a:cs typeface="Calibri" charset="0"/>
                       </a:endParaRPr>
                     </a:p>
                   </a:txBody>
-                  <a:tcPr marL="36576" marR="36576" marT="0" marB="45720" anchor="b">
+                  <a:tcPr marL="36576" marR="36576" marT="0" marB="36576" anchor="b">
                     <a:lnL w="19050" cap="flat" cmpd="sng" algn="ctr">
                       <a:solidFill>
                         <a:srgbClr val="0F141A"/>
@@ -35776,7 +35482,7 @@
                         <a:buNone/>
                       </a:pPr>
                       <a:r>
-                        <a:rPr lang="en-US" sz="750" dirty="0">
+                        <a:rPr lang="en-US" sz="950" dirty="0">
                           <a:solidFill>
                             <a:srgbClr val="9AA6B2"/>
                           </a:solidFill>
@@ -35784,16 +35490,16 @@
                           <a:ea typeface="Calibri" pitchFamily="34" charset="-122"/>
                           <a:cs typeface="Calibri" pitchFamily="34" charset="-120"/>
                         </a:rPr>
-                        <a:t>2 units · Rp 4.090.000.000</a:t>
+                        <a:t>2 units</a:t>
                       </a:r>
-                      <a:endParaRPr lang="en-US" sz="750" dirty="0">
+                      <a:endParaRPr lang="en-US" sz="950" dirty="0">
                         <a:latin typeface="Calibri" charset="0"/>
                         <a:ea typeface="Calibri" charset="0"/>
                         <a:cs typeface="Calibri" charset="0"/>
                       </a:endParaRPr>
                     </a:p>
                   </a:txBody>
-                  <a:tcPr marL="36576" marR="36576" marT="0" marB="45720" anchor="b">
+                  <a:tcPr marL="36576" marR="36576" marT="0" marB="36576" anchor="b">
                     <a:lnL w="19050" cap="flat" cmpd="sng" algn="ctr">
                       <a:solidFill>
                         <a:srgbClr val="0F141A"/>
@@ -35844,7 +35550,7 @@
                         <a:buNone/>
                       </a:pPr>
                       <a:r>
-                        <a:rPr lang="en-US" sz="750" dirty="0">
+                        <a:rPr lang="en-US" sz="950" dirty="0">
                           <a:solidFill>
                             <a:srgbClr val="9AA6B2"/>
                           </a:solidFill>
@@ -35852,16 +35558,16 @@
                           <a:ea typeface="Calibri" pitchFamily="34" charset="-122"/>
                           <a:cs typeface="Calibri" pitchFamily="34" charset="-120"/>
                         </a:rPr>
-                        <a:t>1 unit · Rp 1.350.000.000</a:t>
+                        <a:t>1 unit</a:t>
                       </a:r>
-                      <a:endParaRPr lang="en-US" sz="750" dirty="0">
+                      <a:endParaRPr lang="en-US" sz="950" dirty="0">
                         <a:latin typeface="Calibri" charset="0"/>
                         <a:ea typeface="Calibri" charset="0"/>
                         <a:cs typeface="Calibri" charset="0"/>
                       </a:endParaRPr>
                     </a:p>
                   </a:txBody>
-                  <a:tcPr marL="36576" marR="36576" marT="0" marB="45720" anchor="b">
+                  <a:tcPr marL="36576" marR="36576" marT="0" marB="36576" anchor="b">
                     <a:lnL w="19050" cap="flat" cmpd="sng" algn="ctr">
                       <a:solidFill>
                         <a:srgbClr val="0F141A"/>
@@ -35912,7 +35618,7 @@
                         <a:buNone/>
                       </a:pPr>
                       <a:r>
-                        <a:rPr lang="en-US" sz="750" dirty="0">
+                        <a:rPr lang="en-US" sz="950" dirty="0">
                           <a:solidFill>
                             <a:srgbClr val="9AA6B2"/>
                           </a:solidFill>
@@ -35920,16 +35626,16 @@
                           <a:ea typeface="Calibri" pitchFamily="34" charset="-122"/>
                           <a:cs typeface="Calibri" pitchFamily="34" charset="-120"/>
                         </a:rPr>
-                        <a:t>1 unit · Rp 1.240.000.000</a:t>
+                        <a:t>1 unit</a:t>
                       </a:r>
-                      <a:endParaRPr lang="en-US" sz="750" dirty="0">
+                      <a:endParaRPr lang="en-US" sz="950" dirty="0">
                         <a:latin typeface="Calibri" charset="0"/>
                         <a:ea typeface="Calibri" charset="0"/>
                         <a:cs typeface="Calibri" charset="0"/>
                       </a:endParaRPr>
                     </a:p>
                   </a:txBody>
-                  <a:tcPr marL="36576" marR="36576" marT="0" marB="45720" anchor="b">
+                  <a:tcPr marL="36576" marR="36576" marT="0" marB="36576" anchor="b">
                     <a:lnL w="19050" cap="flat" cmpd="sng" algn="ctr">
                       <a:solidFill>
                         <a:srgbClr val="0F141A"/>
@@ -35972,7 +35678,7 @@
                   </a:tcPr>
                 </a:tc>
               </a:tr>
-              <a:tr h="633571">
+              <a:tr h="653034">
                 <a:tc>
                   <a:txBody>
                     <a:bodyPr/>
@@ -35982,7 +35688,7 @@
                         <a:buNone/>
                       </a:pPr>
                       <a:r>
-                        <a:rPr lang="en-US" sz="1000" b="1" dirty="0">
+                        <a:rPr lang="en-US" sz="1100" b="1" dirty="0">
                           <a:solidFill>
                             <a:srgbClr val="4F9CF9"/>
                           </a:solidFill>
@@ -35992,7 +35698,7 @@
                         </a:rPr>
                         <a:t>&gt;45–50 tm</a:t>
                       </a:r>
-                      <a:endParaRPr lang="en-US" sz="850" dirty="0">
+                      <a:endParaRPr lang="en-US" sz="950" dirty="0">
                         <a:latin typeface="Calibri" charset="0"/>
                         <a:ea typeface="Calibri" charset="0"/>
                         <a:cs typeface="Calibri" charset="0"/>
@@ -36003,7 +35709,7 @@
                         <a:buNone/>
                       </a:pPr>
                       <a:r>
-                        <a:rPr lang="en-US" sz="750" dirty="0">
+                        <a:rPr lang="en-US" sz="850" dirty="0">
                           <a:solidFill>
                             <a:srgbClr val="9AA6B2"/>
                           </a:solidFill>
@@ -36013,7 +35719,7 @@
                         </a:rPr>
                         <a:t>17 units</a:t>
                       </a:r>
-                      <a:endParaRPr lang="en-US" sz="850" dirty="0">
+                      <a:endParaRPr lang="en-US" sz="950" dirty="0">
                         <a:latin typeface="Calibri" charset="0"/>
                         <a:ea typeface="Calibri" charset="0"/>
                         <a:cs typeface="Calibri" charset="0"/>
@@ -36071,7 +35777,7 @@
                         <a:buNone/>
                       </a:pPr>
                       <a:r>
-                        <a:rPr lang="en-US" sz="1000" b="1" dirty="0">
+                        <a:rPr lang="en-US" sz="1100" b="1" dirty="0">
                           <a:solidFill>
                             <a:srgbClr val="EEF1F4"/>
                           </a:solidFill>
@@ -36081,7 +35787,7 @@
                         </a:rPr>
                         <a:t>FBR450R A4</a:t>
                       </a:r>
-                      <a:endParaRPr lang="en-US" sz="850" dirty="0">
+                      <a:endParaRPr lang="en-US" sz="950" dirty="0">
                         <a:latin typeface="Calibri" charset="0"/>
                         <a:ea typeface="Calibri" charset="0"/>
                         <a:cs typeface="Calibri" charset="0"/>
@@ -36092,7 +35798,7 @@
                         <a:buNone/>
                       </a:pPr>
                       <a:r>
-                        <a:rPr lang="en-US" sz="750" dirty="0">
+                        <a:rPr lang="en-US" sz="850" dirty="0">
                           <a:solidFill>
                             <a:srgbClr val="C9A9AC"/>
                           </a:solidFill>
@@ -36102,7 +35808,7 @@
                         </a:rPr>
                         <a:t>45.5 tm</a:t>
                       </a:r>
-                      <a:endParaRPr lang="en-US" sz="850" dirty="0">
+                      <a:endParaRPr lang="en-US" sz="950" dirty="0">
                         <a:latin typeface="Calibri" charset="0"/>
                         <a:ea typeface="Calibri" charset="0"/>
                         <a:cs typeface="Calibri" charset="0"/>
@@ -36113,7 +35819,7 @@
                         <a:buNone/>
                       </a:pPr>
                       <a:r>
-                        <a:rPr lang="en-US" sz="850" b="1" dirty="0">
+                        <a:rPr lang="en-US" sz="950" b="1" dirty="0">
                           <a:solidFill>
                             <a:srgbClr val="EEF1F4"/>
                           </a:solidFill>
@@ -36123,7 +35829,7 @@
                         </a:rPr>
                         <a:t>Rp 1.350.000.000</a:t>
                       </a:r>
-                      <a:endParaRPr lang="en-US" sz="850" dirty="0">
+                      <a:endParaRPr lang="en-US" sz="950" dirty="0">
                         <a:latin typeface="Calibri" charset="0"/>
                         <a:ea typeface="Calibri" charset="0"/>
                         <a:cs typeface="Calibri" charset="0"/>
@@ -36180,7 +35886,7 @@
                       <a:pPr indent="0" marL="0">
                         <a:buNone/>
                       </a:pPr>
-                      <a:endParaRPr lang="en-US" sz="850" dirty="0">
+                      <a:endParaRPr lang="en-US" sz="950" dirty="0">
                         <a:latin typeface="Calibri" charset="0"/>
                         <a:ea typeface="Calibri" charset="0"/>
                         <a:cs typeface="Calibri" charset="0"/>
@@ -36238,7 +35944,7 @@
                         <a:buNone/>
                       </a:pPr>
                       <a:r>
-                        <a:rPr lang="en-US" sz="900" b="1" dirty="0">
+                        <a:rPr lang="en-US" sz="1000" b="1" dirty="0">
                           <a:solidFill>
                             <a:srgbClr val="EEF1F4"/>
                           </a:solidFill>
@@ -36246,27 +35952,13 @@
                           <a:ea typeface="Calibri" pitchFamily="34" charset="-122"/>
                           <a:cs typeface="Calibri" pitchFamily="34" charset="-120"/>
                         </a:rPr>
-                        <a:t>V950</a:t>
+                        <a:t>V950  </a:t>
                       </a:r>
                       <a:pPr indent="0" marL="0">
                         <a:buNone/>
                       </a:pPr>
                       <a:r>
-                        <a:rPr lang="en-US" sz="850" dirty="0">
-                          <a:solidFill>
-                            <a:srgbClr val="9AA6B2"/>
-                          </a:solidFill>
-                          <a:latin typeface="Calibri" pitchFamily="34" charset="0"/>
-                          <a:ea typeface="Calibri" pitchFamily="34" charset="-122"/>
-                          <a:cs typeface="Calibri" pitchFamily="34" charset="-120"/>
-                        </a:rPr>
-                        <a:t>  45.9 tm   </a:t>
-                      </a:r>
-                      <a:pPr indent="0" marL="0">
-                        <a:buNone/>
-                      </a:pPr>
-                      <a:r>
-                        <a:rPr lang="en-US" sz="850" b="1" dirty="0">
+                        <a:rPr lang="en-US" sz="1000" b="1" dirty="0">
                           <a:solidFill>
                             <a:srgbClr val="2FBF71"/>
                           </a:solidFill>
@@ -36276,7 +35968,7 @@
                         </a:rPr>
                         <a:t>−28%</a:t>
                       </a:r>
-                      <a:endParaRPr lang="en-US" sz="850" dirty="0">
+                      <a:endParaRPr lang="en-US" sz="950" dirty="0">
                         <a:latin typeface="Calibri" charset="0"/>
                         <a:ea typeface="Calibri" charset="0"/>
                         <a:cs typeface="Calibri" charset="0"/>
@@ -36287,7 +35979,7 @@
                         <a:buNone/>
                       </a:pPr>
                       <a:r>
-                        <a:rPr lang="en-US" sz="850" dirty="0">
+                        <a:rPr lang="en-US" sz="950" dirty="0">
                           <a:solidFill>
                             <a:srgbClr val="9AA6B2"/>
                           </a:solidFill>
@@ -36295,9 +35987,9 @@
                           <a:ea typeface="Calibri" pitchFamily="34" charset="-122"/>
                           <a:cs typeface="Calibri" pitchFamily="34" charset="-120"/>
                         </a:rPr>
-                        <a:t>12 units · Rp 18.900.000.000</a:t>
+                        <a:t>45.9 tm · 12 units</a:t>
                       </a:r>
-                      <a:endParaRPr lang="en-US" sz="850" dirty="0">
+                      <a:endParaRPr lang="en-US" sz="950" dirty="0">
                         <a:latin typeface="Calibri" charset="0"/>
                         <a:ea typeface="Calibri" charset="0"/>
                         <a:cs typeface="Calibri" charset="0"/>
@@ -36308,7 +36000,7 @@
                         <a:buNone/>
                       </a:pPr>
                       <a:r>
-                        <a:rPr lang="en-US" sz="850" dirty="0">
+                        <a:rPr lang="en-US" sz="950" dirty="0">
                           <a:solidFill>
                             <a:srgbClr val="9AA6B2"/>
                           </a:solidFill>
@@ -36316,9 +36008,9 @@
                           <a:ea typeface="Calibri" pitchFamily="34" charset="-122"/>
                           <a:cs typeface="Calibri" pitchFamily="34" charset="-120"/>
                         </a:rPr>
-                        <a:t>Rp 1.880.000.000 per unit</a:t>
+                        <a:t>Rp 1.880.000.000</a:t>
                       </a:r>
-                      <a:endParaRPr lang="en-US" sz="850" dirty="0">
+                      <a:endParaRPr lang="en-US" sz="950" dirty="0">
                         <a:latin typeface="Calibri" charset="0"/>
                         <a:ea typeface="Calibri" charset="0"/>
                         <a:cs typeface="Calibri" charset="0"/>
@@ -36376,7 +36068,7 @@
                         <a:buNone/>
                       </a:pPr>
                       <a:r>
-                        <a:rPr lang="en-US" sz="900" b="1" dirty="0">
+                        <a:rPr lang="en-US" sz="1000" b="1" dirty="0">
                           <a:solidFill>
                             <a:srgbClr val="EEF1F4"/>
                           </a:solidFill>
@@ -36384,27 +36076,13 @@
                           <a:ea typeface="Calibri" pitchFamily="34" charset="-122"/>
                           <a:cs typeface="Calibri" pitchFamily="34" charset="-120"/>
                         </a:rPr>
-                        <a:t>GSQZ460.4</a:t>
+                        <a:t>GSQZ460.4  </a:t>
                       </a:r>
                       <a:pPr indent="0" marL="0">
                         <a:buNone/>
                       </a:pPr>
                       <a:r>
-                        <a:rPr lang="en-US" sz="850" dirty="0">
-                          <a:solidFill>
-                            <a:srgbClr val="9AA6B2"/>
-                          </a:solidFill>
-                          <a:latin typeface="Calibri" pitchFamily="34" charset="0"/>
-                          <a:ea typeface="Calibri" pitchFamily="34" charset="-122"/>
-                          <a:cs typeface="Calibri" pitchFamily="34" charset="-120"/>
-                        </a:rPr>
-                        <a:t>  46 tm   </a:t>
-                      </a:r>
-                      <a:pPr indent="0" marL="0">
-                        <a:buNone/>
-                      </a:pPr>
-                      <a:r>
-                        <a:rPr lang="en-US" sz="850" b="1" dirty="0">
+                        <a:rPr lang="en-US" sz="1000" b="1" dirty="0">
                           <a:solidFill>
                             <a:srgbClr val="FF8A8F"/>
                           </a:solidFill>
@@ -36414,7 +36092,7 @@
                         </a:rPr>
                         <a:t>+66%</a:t>
                       </a:r>
-                      <a:endParaRPr lang="en-US" sz="850" dirty="0">
+                      <a:endParaRPr lang="en-US" sz="950" dirty="0">
                         <a:latin typeface="Calibri" charset="0"/>
                         <a:ea typeface="Calibri" charset="0"/>
                         <a:cs typeface="Calibri" charset="0"/>
@@ -36425,7 +36103,7 @@
                         <a:buNone/>
                       </a:pPr>
                       <a:r>
-                        <a:rPr lang="en-US" sz="850" dirty="0">
+                        <a:rPr lang="en-US" sz="950" dirty="0">
                           <a:solidFill>
                             <a:srgbClr val="9AA6B2"/>
                           </a:solidFill>
@@ -36433,9 +36111,9 @@
                           <a:ea typeface="Calibri" pitchFamily="34" charset="-122"/>
                           <a:cs typeface="Calibri" pitchFamily="34" charset="-120"/>
                         </a:rPr>
-                        <a:t>3 units · Rp 2.150.000.000</a:t>
+                        <a:t>46 tm · 3 units</a:t>
                       </a:r>
-                      <a:endParaRPr lang="en-US" sz="850" dirty="0">
+                      <a:endParaRPr lang="en-US" sz="950" dirty="0">
                         <a:latin typeface="Calibri" charset="0"/>
                         <a:ea typeface="Calibri" charset="0"/>
                         <a:cs typeface="Calibri" charset="0"/>
@@ -36446,7 +36124,7 @@
                         <a:buNone/>
                       </a:pPr>
                       <a:r>
-                        <a:rPr lang="en-US" sz="850" dirty="0">
+                        <a:rPr lang="en-US" sz="950" dirty="0">
                           <a:solidFill>
                             <a:srgbClr val="9AA6B2"/>
                           </a:solidFill>
@@ -36454,9 +36132,9 @@
                           <a:ea typeface="Calibri" pitchFamily="34" charset="-122"/>
                           <a:cs typeface="Calibri" pitchFamily="34" charset="-120"/>
                         </a:rPr>
-                        <a:t>Rp 810.000.000 per unit</a:t>
+                        <a:t>Rp 810.000.000</a:t>
                       </a:r>
-                      <a:endParaRPr lang="en-US" sz="850" dirty="0">
+                      <a:endParaRPr lang="en-US" sz="950" dirty="0">
                         <a:latin typeface="Calibri" charset="0"/>
                         <a:ea typeface="Calibri" charset="0"/>
                         <a:cs typeface="Calibri" charset="0"/>
@@ -36514,7 +36192,7 @@
                         <a:buNone/>
                       </a:pPr>
                       <a:r>
-                        <a:rPr lang="en-US" sz="900" b="1" dirty="0">
+                        <a:rPr lang="en-US" sz="1000" b="1" dirty="0">
                           <a:solidFill>
                             <a:srgbClr val="EEF1F4"/>
                           </a:solidFill>
@@ -36522,27 +36200,13 @@
                           <a:ea typeface="Calibri" pitchFamily="34" charset="-122"/>
                           <a:cs typeface="Calibri" pitchFamily="34" charset="-120"/>
                         </a:rPr>
-                        <a:t>EFFER 525H</a:t>
+                        <a:t>EFFER 525H  </a:t>
                       </a:r>
                       <a:pPr indent="0" marL="0">
                         <a:buNone/>
                       </a:pPr>
                       <a:r>
-                        <a:rPr lang="en-US" sz="850" dirty="0">
-                          <a:solidFill>
-                            <a:srgbClr val="9AA6B2"/>
-                          </a:solidFill>
-                          <a:latin typeface="Calibri" pitchFamily="34" charset="0"/>
-                          <a:ea typeface="Calibri" pitchFamily="34" charset="-122"/>
-                          <a:cs typeface="Calibri" pitchFamily="34" charset="-120"/>
-                        </a:rPr>
-                        <a:t>  50 tm   </a:t>
-                      </a:r>
-                      <a:pPr indent="0" marL="0">
-                        <a:buNone/>
-                      </a:pPr>
-                      <a:r>
-                        <a:rPr lang="en-US" sz="850" b="1" dirty="0">
+                        <a:rPr lang="en-US" sz="1000" b="1" dirty="0">
                           <a:solidFill>
                             <a:srgbClr val="2FBF71"/>
                           </a:solidFill>
@@ -36552,7 +36216,7 @@
                         </a:rPr>
                         <a:t>−10%</a:t>
                       </a:r>
-                      <a:endParaRPr lang="en-US" sz="850" dirty="0">
+                      <a:endParaRPr lang="en-US" sz="950" dirty="0">
                         <a:latin typeface="Calibri" charset="0"/>
                         <a:ea typeface="Calibri" charset="0"/>
                         <a:cs typeface="Calibri" charset="0"/>
@@ -36563,7 +36227,7 @@
                         <a:buNone/>
                       </a:pPr>
                       <a:r>
-                        <a:rPr lang="en-US" sz="850" dirty="0">
+                        <a:rPr lang="en-US" sz="950" dirty="0">
                           <a:solidFill>
                             <a:srgbClr val="9AA6B2"/>
                           </a:solidFill>
@@ -36571,9 +36235,9 @@
                           <a:ea typeface="Calibri" pitchFamily="34" charset="-122"/>
                           <a:cs typeface="Calibri" pitchFamily="34" charset="-120"/>
                         </a:rPr>
-                        <a:t>1 unit · Rp 1.270.000.000</a:t>
+                        <a:t>50 tm · 1 unit</a:t>
                       </a:r>
-                      <a:endParaRPr lang="en-US" sz="850" dirty="0">
+                      <a:endParaRPr lang="en-US" sz="950" dirty="0">
                         <a:latin typeface="Calibri" charset="0"/>
                         <a:ea typeface="Calibri" charset="0"/>
                         <a:cs typeface="Calibri" charset="0"/>
@@ -36584,7 +36248,7 @@
                         <a:buNone/>
                       </a:pPr>
                       <a:r>
-                        <a:rPr lang="en-US" sz="850" dirty="0">
+                        <a:rPr lang="en-US" sz="950" dirty="0">
                           <a:solidFill>
                             <a:srgbClr val="9AA6B2"/>
                           </a:solidFill>
@@ -36592,9 +36256,9 @@
                           <a:ea typeface="Calibri" pitchFamily="34" charset="-122"/>
                           <a:cs typeface="Calibri" pitchFamily="34" charset="-120"/>
                         </a:rPr>
-                        <a:t>Rp 1.510.000.000 per unit</a:t>
+                        <a:t>Rp 1.510.000.000</a:t>
                       </a:r>
-                      <a:endParaRPr lang="en-US" sz="850" dirty="0">
+                      <a:endParaRPr lang="en-US" sz="950" dirty="0">
                         <a:latin typeface="Calibri" charset="0"/>
                         <a:ea typeface="Calibri" charset="0"/>
                         <a:cs typeface="Calibri" charset="0"/>
@@ -36605,7 +36269,7 @@
                         <a:buNone/>
                       </a:pPr>
                       <a:r>
-                        <a:rPr lang="en-US" sz="750" dirty="0">
+                        <a:rPr lang="en-US" sz="850" dirty="0">
                           <a:solidFill>
                             <a:srgbClr val="F5C26B"/>
                           </a:solidFill>
@@ -36615,7 +36279,7 @@
                         </a:rPr>
                         <a:t>smaller crane</a:t>
                       </a:r>
-                      <a:endParaRPr lang="en-US" sz="850" dirty="0">
+                      <a:endParaRPr lang="en-US" sz="950" dirty="0">
                         <a:latin typeface="Calibri" charset="0"/>
                         <a:ea typeface="Calibri" charset="0"/>
                         <a:cs typeface="Calibri" charset="0"/>
@@ -36673,7 +36337,7 @@
                         <a:buNone/>
                       </a:pPr>
                       <a:r>
-                        <a:rPr lang="en-US" sz="900" b="1" dirty="0">
+                        <a:rPr lang="en-US" sz="1000" b="1" dirty="0">
                           <a:solidFill>
                             <a:srgbClr val="EEF1F4"/>
                           </a:solidFill>
@@ -36681,27 +36345,13 @@
                           <a:ea typeface="Calibri" pitchFamily="34" charset="-122"/>
                           <a:cs typeface="Calibri" pitchFamily="34" charset="-120"/>
                         </a:rPr>
-                        <a:t>F485RA.2.23</a:t>
+                        <a:t>F485RA.2.23  </a:t>
                       </a:r>
                       <a:pPr indent="0" marL="0">
                         <a:buNone/>
                       </a:pPr>
                       <a:r>
-                        <a:rPr lang="en-US" sz="850" dirty="0">
-                          <a:solidFill>
-                            <a:srgbClr val="9AA6B2"/>
-                          </a:solidFill>
-                          <a:latin typeface="Calibri" pitchFamily="34" charset="0"/>
-                          <a:ea typeface="Calibri" pitchFamily="34" charset="-122"/>
-                          <a:cs typeface="Calibri" pitchFamily="34" charset="-120"/>
-                        </a:rPr>
-                        <a:t>  47 tm   </a:t>
-                      </a:r>
-                      <a:pPr indent="0" marL="0">
-                        <a:buNone/>
-                      </a:pPr>
-                      <a:r>
-                        <a:rPr lang="en-US" sz="850" b="1" dirty="0">
+                        <a:rPr lang="en-US" sz="1000" b="1" dirty="0">
                           <a:solidFill>
                             <a:srgbClr val="2FBF71"/>
                           </a:solidFill>
@@ -36711,7 +36361,7 @@
                         </a:rPr>
                         <a:t>−16%</a:t>
                       </a:r>
-                      <a:endParaRPr lang="en-US" sz="850" dirty="0">
+                      <a:endParaRPr lang="en-US" sz="950" dirty="0">
                         <a:latin typeface="Calibri" charset="0"/>
                         <a:ea typeface="Calibri" charset="0"/>
                         <a:cs typeface="Calibri" charset="0"/>
@@ -36722,7 +36372,7 @@
                         <a:buNone/>
                       </a:pPr>
                       <a:r>
-                        <a:rPr lang="en-US" sz="850" dirty="0">
+                        <a:rPr lang="en-US" sz="950" dirty="0">
                           <a:solidFill>
                             <a:srgbClr val="9AA6B2"/>
                           </a:solidFill>
@@ -36730,9 +36380,9 @@
                           <a:ea typeface="Calibri" pitchFamily="34" charset="-122"/>
                           <a:cs typeface="Calibri" pitchFamily="34" charset="-120"/>
                         </a:rPr>
-                        <a:t>1 unit · Rp 1.350.000.000</a:t>
+                        <a:t>47 tm · 1 unit</a:t>
                       </a:r>
-                      <a:endParaRPr lang="en-US" sz="850" dirty="0">
+                      <a:endParaRPr lang="en-US" sz="950" dirty="0">
                         <a:latin typeface="Calibri" charset="0"/>
                         <a:ea typeface="Calibri" charset="0"/>
                         <a:cs typeface="Calibri" charset="0"/>
@@ -36743,7 +36393,7 @@
                         <a:buNone/>
                       </a:pPr>
                       <a:r>
-                        <a:rPr lang="en-US" sz="850" dirty="0">
+                        <a:rPr lang="en-US" sz="950" dirty="0">
                           <a:solidFill>
                             <a:srgbClr val="9AA6B2"/>
                           </a:solidFill>
@@ -36751,9 +36401,9 @@
                           <a:ea typeface="Calibri" pitchFamily="34" charset="-122"/>
                           <a:cs typeface="Calibri" pitchFamily="34" charset="-120"/>
                         </a:rPr>
-                        <a:t>Rp 1.610.000.000 per unit</a:t>
+                        <a:t>Rp 1.610.000.000</a:t>
                       </a:r>
-                      <a:endParaRPr lang="en-US" sz="850" dirty="0">
+                      <a:endParaRPr lang="en-US" sz="950" dirty="0">
                         <a:latin typeface="Calibri" charset="0"/>
                         <a:ea typeface="Calibri" charset="0"/>
                         <a:cs typeface="Calibri" charset="0"/>
@@ -36810,7 +36460,7 @@
                       <a:pPr indent="0" marL="0">
                         <a:buNone/>
                       </a:pPr>
-                      <a:endParaRPr lang="en-US" sz="850" dirty="0">
+                      <a:endParaRPr lang="en-US" sz="950" dirty="0">
                         <a:latin typeface="Calibri" charset="0"/>
                         <a:ea typeface="Calibri" charset="0"/>
                         <a:cs typeface="Calibri" charset="0"/>
@@ -36860,7 +36510,7 @@
                   </a:tcPr>
                 </a:tc>
               </a:tr>
-              <a:tr h="506190">
+              <a:tr h="508254">
                 <a:tc>
                   <a:txBody>
                     <a:bodyPr/>
@@ -36870,7 +36520,7 @@
                         <a:buNone/>
                       </a:pPr>
                       <a:r>
-                        <a:rPr lang="en-US" sz="1000" b="1" dirty="0">
+                        <a:rPr lang="en-US" sz="1100" b="1" dirty="0">
                           <a:solidFill>
                             <a:srgbClr val="4F9CF9"/>
                           </a:solidFill>
@@ -36880,7 +36530,7 @@
                         </a:rPr>
                         <a:t>&gt;50–55 tm</a:t>
                       </a:r>
-                      <a:endParaRPr lang="en-US" sz="850" dirty="0">
+                      <a:endParaRPr lang="en-US" sz="950" dirty="0">
                         <a:latin typeface="Calibri" charset="0"/>
                         <a:ea typeface="Calibri" charset="0"/>
                         <a:cs typeface="Calibri" charset="0"/>
@@ -36891,7 +36541,7 @@
                         <a:buNone/>
                       </a:pPr>
                       <a:r>
-                        <a:rPr lang="en-US" sz="750" dirty="0">
+                        <a:rPr lang="en-US" sz="850" dirty="0">
                           <a:solidFill>
                             <a:srgbClr val="9AA6B2"/>
                           </a:solidFill>
@@ -36901,7 +36551,7 @@
                         </a:rPr>
                         <a:t>40 units</a:t>
                       </a:r>
-                      <a:endParaRPr lang="en-US" sz="850" dirty="0">
+                      <a:endParaRPr lang="en-US" sz="950" dirty="0">
                         <a:latin typeface="Calibri" charset="0"/>
                         <a:ea typeface="Calibri" charset="0"/>
                         <a:cs typeface="Calibri" charset="0"/>
@@ -36959,7 +36609,7 @@
                         <a:buNone/>
                       </a:pPr>
                       <a:r>
-                        <a:rPr lang="en-US" sz="1000" b="1" dirty="0">
+                        <a:rPr lang="en-US" sz="1100" b="1" dirty="0">
                           <a:solidFill>
                             <a:srgbClr val="EEF1F4"/>
                           </a:solidFill>
@@ -36969,7 +36619,7 @@
                         </a:rPr>
                         <a:t>9601CR A8</a:t>
                       </a:r>
-                      <a:endParaRPr lang="en-US" sz="850" dirty="0">
+                      <a:endParaRPr lang="en-US" sz="950" dirty="0">
                         <a:latin typeface="Calibri" charset="0"/>
                         <a:ea typeface="Calibri" charset="0"/>
                         <a:cs typeface="Calibri" charset="0"/>
@@ -36980,7 +36630,7 @@
                         <a:buNone/>
                       </a:pPr>
                       <a:r>
-                        <a:rPr lang="en-US" sz="750" dirty="0">
+                        <a:rPr lang="en-US" sz="850" dirty="0">
                           <a:solidFill>
                             <a:srgbClr val="C9A9AC"/>
                           </a:solidFill>
@@ -36990,7 +36640,7 @@
                         </a:rPr>
                         <a:t>50.7 tm</a:t>
                       </a:r>
-                      <a:endParaRPr lang="en-US" sz="850" dirty="0">
+                      <a:endParaRPr lang="en-US" sz="950" dirty="0">
                         <a:latin typeface="Calibri" charset="0"/>
                         <a:ea typeface="Calibri" charset="0"/>
                         <a:cs typeface="Calibri" charset="0"/>
@@ -37001,7 +36651,7 @@
                         <a:buNone/>
                       </a:pPr>
                       <a:r>
-                        <a:rPr lang="en-US" sz="850" b="1" dirty="0">
+                        <a:rPr lang="en-US" sz="950" b="1" dirty="0">
                           <a:solidFill>
                             <a:srgbClr val="EEF1F4"/>
                           </a:solidFill>
@@ -37011,7 +36661,7 @@
                         </a:rPr>
                         <a:t>Rp 3.260.000.000</a:t>
                       </a:r>
-                      <a:endParaRPr lang="en-US" sz="850" dirty="0">
+                      <a:endParaRPr lang="en-US" sz="950" dirty="0">
                         <a:latin typeface="Calibri" charset="0"/>
                         <a:ea typeface="Calibri" charset="0"/>
                         <a:cs typeface="Calibri" charset="0"/>
@@ -37069,7 +36719,7 @@
                         <a:buNone/>
                       </a:pPr>
                       <a:r>
-                        <a:rPr lang="en-US" sz="900" b="1" dirty="0">
+                        <a:rPr lang="en-US" sz="1000" b="1" dirty="0">
                           <a:solidFill>
                             <a:srgbClr val="EEF1F4"/>
                           </a:solidFill>
@@ -37077,27 +36727,13 @@
                           <a:ea typeface="Calibri" pitchFamily="34" charset="-122"/>
                           <a:cs typeface="Calibri" pitchFamily="34" charset="-120"/>
                         </a:rPr>
-                        <a:t>PK 53002</a:t>
+                        <a:t>PK 53002  </a:t>
                       </a:r>
                       <a:pPr indent="0" marL="0">
                         <a:buNone/>
                       </a:pPr>
                       <a:r>
-                        <a:rPr lang="en-US" sz="850" dirty="0">
-                          <a:solidFill>
-                            <a:srgbClr val="9AA6B2"/>
-                          </a:solidFill>
-                          <a:latin typeface="Calibri" pitchFamily="34" charset="0"/>
-                          <a:ea typeface="Calibri" pitchFamily="34" charset="-122"/>
-                          <a:cs typeface="Calibri" pitchFamily="34" charset="-120"/>
-                        </a:rPr>
-                        <a:t>  50.1 tm   </a:t>
-                      </a:r>
-                      <a:pPr indent="0" marL="0">
-                        <a:buNone/>
-                      </a:pPr>
-                      <a:r>
-                        <a:rPr lang="en-US" sz="850" b="1" dirty="0">
+                        <a:rPr lang="en-US" sz="1000" b="1" dirty="0">
                           <a:solidFill>
                             <a:srgbClr val="FF8A8F"/>
                           </a:solidFill>
@@ -37107,7 +36743,7 @@
                         </a:rPr>
                         <a:t>+101%</a:t>
                       </a:r>
-                      <a:endParaRPr lang="en-US" sz="850" dirty="0">
+                      <a:endParaRPr lang="en-US" sz="950" dirty="0">
                         <a:latin typeface="Calibri" charset="0"/>
                         <a:ea typeface="Calibri" charset="0"/>
                         <a:cs typeface="Calibri" charset="0"/>
@@ -37118,7 +36754,7 @@
                         <a:buNone/>
                       </a:pPr>
                       <a:r>
-                        <a:rPr lang="en-US" sz="850" dirty="0">
+                        <a:rPr lang="en-US" sz="950" dirty="0">
                           <a:solidFill>
                             <a:srgbClr val="9AA6B2"/>
                           </a:solidFill>
@@ -37126,9 +36762,9 @@
                           <a:ea typeface="Calibri" pitchFamily="34" charset="-122"/>
                           <a:cs typeface="Calibri" pitchFamily="34" charset="-120"/>
                         </a:rPr>
-                        <a:t>39 units · Rp 53.080.000.000</a:t>
+                        <a:t>50.1 tm · 39 units</a:t>
                       </a:r>
-                      <a:endParaRPr lang="en-US" sz="850" dirty="0">
+                      <a:endParaRPr lang="en-US" sz="950" dirty="0">
                         <a:latin typeface="Calibri" charset="0"/>
                         <a:ea typeface="Calibri" charset="0"/>
                         <a:cs typeface="Calibri" charset="0"/>
@@ -37139,7 +36775,7 @@
                         <a:buNone/>
                       </a:pPr>
                       <a:r>
-                        <a:rPr lang="en-US" sz="850" dirty="0">
+                        <a:rPr lang="en-US" sz="950" dirty="0">
                           <a:solidFill>
                             <a:srgbClr val="9AA6B2"/>
                           </a:solidFill>
@@ -37147,9 +36783,9 @@
                           <a:ea typeface="Calibri" pitchFamily="34" charset="-122"/>
                           <a:cs typeface="Calibri" pitchFamily="34" charset="-120"/>
                         </a:rPr>
-                        <a:t>Rp 1.620.000.000 per unit</a:t>
+                        <a:t>Rp 1.620.000.000</a:t>
                       </a:r>
-                      <a:endParaRPr lang="en-US" sz="850" dirty="0">
+                      <a:endParaRPr lang="en-US" sz="950" dirty="0">
                         <a:latin typeface="Calibri" charset="0"/>
                         <a:ea typeface="Calibri" charset="0"/>
                         <a:cs typeface="Calibri" charset="0"/>
@@ -37206,7 +36842,7 @@
                       <a:pPr indent="0" marL="0">
                         <a:buNone/>
                       </a:pPr>
-                      <a:endParaRPr lang="en-US" sz="850" dirty="0">
+                      <a:endParaRPr lang="en-US" sz="950" dirty="0">
                         <a:latin typeface="Calibri" charset="0"/>
                         <a:ea typeface="Calibri" charset="0"/>
                         <a:cs typeface="Calibri" charset="0"/>
@@ -37263,7 +36899,7 @@
                       <a:pPr indent="0" marL="0">
                         <a:buNone/>
                       </a:pPr>
-                      <a:endParaRPr lang="en-US" sz="850" dirty="0">
+                      <a:endParaRPr lang="en-US" sz="950" dirty="0">
                         <a:latin typeface="Calibri" charset="0"/>
                         <a:ea typeface="Calibri" charset="0"/>
                         <a:cs typeface="Calibri" charset="0"/>
@@ -37321,7 +36957,7 @@
                         <a:buNone/>
                       </a:pPr>
                       <a:r>
-                        <a:rPr lang="en-US" sz="900" b="1" dirty="0">
+                        <a:rPr lang="en-US" sz="1000" b="1" dirty="0">
                           <a:solidFill>
                             <a:srgbClr val="EEF1F4"/>
                           </a:solidFill>
@@ -37329,27 +36965,13 @@
                           <a:ea typeface="Calibri" pitchFamily="34" charset="-122"/>
                           <a:cs typeface="Calibri" pitchFamily="34" charset="-120"/>
                         </a:rPr>
-                        <a:t>X-HIPRO B58</a:t>
+                        <a:t>X-HIPRO B58  </a:t>
                       </a:r>
                       <a:pPr indent="0" marL="0">
                         <a:buNone/>
                       </a:pPr>
                       <a:r>
-                        <a:rPr lang="en-US" sz="850" dirty="0">
-                          <a:solidFill>
-                            <a:srgbClr val="9AA6B2"/>
-                          </a:solidFill>
-                          <a:latin typeface="Calibri" pitchFamily="34" charset="0"/>
-                          <a:ea typeface="Calibri" pitchFamily="34" charset="-122"/>
-                          <a:cs typeface="Calibri" pitchFamily="34" charset="-120"/>
-                        </a:rPr>
-                        <a:t>  50.93 tm   </a:t>
-                      </a:r>
-                      <a:pPr indent="0" marL="0">
-                        <a:buNone/>
-                      </a:pPr>
-                      <a:r>
-                        <a:rPr lang="en-US" sz="850" b="1" dirty="0">
+                        <a:rPr lang="en-US" sz="1000" b="1" dirty="0">
                           <a:solidFill>
                             <a:srgbClr val="2FBF71"/>
                           </a:solidFill>
@@ -37359,7 +36981,7 @@
                         </a:rPr>
                         <a:t>−3%</a:t>
                       </a:r>
-                      <a:endParaRPr lang="en-US" sz="850" dirty="0">
+                      <a:endParaRPr lang="en-US" sz="950" dirty="0">
                         <a:latin typeface="Calibri" charset="0"/>
                         <a:ea typeface="Calibri" charset="0"/>
                         <a:cs typeface="Calibri" charset="0"/>
@@ -37370,7 +36992,7 @@
                         <a:buNone/>
                       </a:pPr>
                       <a:r>
-                        <a:rPr lang="en-US" sz="850" dirty="0">
+                        <a:rPr lang="en-US" sz="950" dirty="0">
                           <a:solidFill>
                             <a:srgbClr val="9AA6B2"/>
                           </a:solidFill>
@@ -37378,9 +37000,9 @@
                           <a:ea typeface="Calibri" pitchFamily="34" charset="-122"/>
                           <a:cs typeface="Calibri" pitchFamily="34" charset="-120"/>
                         </a:rPr>
-                        <a:t>1 unit · Rp 2.820.000.000</a:t>
+                        <a:t>50.93 tm · 1 unit</a:t>
                       </a:r>
-                      <a:endParaRPr lang="en-US" sz="850" dirty="0">
+                      <a:endParaRPr lang="en-US" sz="950" dirty="0">
                         <a:latin typeface="Calibri" charset="0"/>
                         <a:ea typeface="Calibri" charset="0"/>
                         <a:cs typeface="Calibri" charset="0"/>
@@ -37391,7 +37013,7 @@
                         <a:buNone/>
                       </a:pPr>
                       <a:r>
-                        <a:rPr lang="en-US" sz="850" dirty="0">
+                        <a:rPr lang="en-US" sz="950" dirty="0">
                           <a:solidFill>
                             <a:srgbClr val="9AA6B2"/>
                           </a:solidFill>
@@ -37399,9 +37021,9 @@
                           <a:ea typeface="Calibri" pitchFamily="34" charset="-122"/>
                           <a:cs typeface="Calibri" pitchFamily="34" charset="-120"/>
                         </a:rPr>
-                        <a:t>Rp 3.370.000.000 per unit</a:t>
+                        <a:t>Rp 3.370.000.000</a:t>
                       </a:r>
-                      <a:endParaRPr lang="en-US" sz="850" dirty="0">
+                      <a:endParaRPr lang="en-US" sz="950" dirty="0">
                         <a:latin typeface="Calibri" charset="0"/>
                         <a:ea typeface="Calibri" charset="0"/>
                         <a:cs typeface="Calibri" charset="0"/>
@@ -37458,7 +37080,7 @@
                       <a:pPr indent="0" marL="0">
                         <a:buNone/>
                       </a:pPr>
-                      <a:endParaRPr lang="en-US" sz="850" dirty="0">
+                      <a:endParaRPr lang="en-US" sz="950" dirty="0">
                         <a:latin typeface="Calibri" charset="0"/>
                         <a:ea typeface="Calibri" charset="0"/>
                         <a:cs typeface="Calibri" charset="0"/>
@@ -37515,7 +37137,7 @@
                       <a:pPr indent="0" marL="0">
                         <a:buNone/>
                       </a:pPr>
-                      <a:endParaRPr lang="en-US" sz="850" dirty="0">
+                      <a:endParaRPr lang="en-US" sz="950" dirty="0">
                         <a:latin typeface="Calibri" charset="0"/>
                         <a:ea typeface="Calibri" charset="0"/>
                         <a:cs typeface="Calibri" charset="0"/>
@@ -37565,7 +37187,7 @@
                   </a:tcPr>
                 </a:tc>
               </a:tr>
-              <a:tr h="306927">
+              <a:tr h="275082">
                 <a:tc>
                   <a:txBody>
                     <a:bodyPr/>
@@ -37575,7 +37197,7 @@
                         <a:buNone/>
                       </a:pPr>
                       <a:r>
-                        <a:rPr lang="en-US" sz="1000" b="1" dirty="0">
+                        <a:rPr lang="en-US" sz="1100" b="1" dirty="0">
                           <a:solidFill>
                             <a:srgbClr val="4F9CF9"/>
                           </a:solidFill>
@@ -37585,7 +37207,7 @@
                         </a:rPr>
                         <a:t>&gt;55–60 tm</a:t>
                       </a:r>
-                      <a:endParaRPr lang="en-US" sz="850" dirty="0">
+                      <a:endParaRPr lang="en-US" sz="950" dirty="0">
                         <a:latin typeface="Calibri" charset="0"/>
                         <a:ea typeface="Calibri" charset="0"/>
                         <a:cs typeface="Calibri" charset="0"/>
@@ -37596,7 +37218,7 @@
                         <a:buNone/>
                       </a:pPr>
                       <a:r>
-                        <a:rPr lang="en-US" sz="750" dirty="0">
+                        <a:rPr lang="en-US" sz="850" dirty="0">
                           <a:solidFill>
                             <a:srgbClr val="9AA6B2"/>
                           </a:solidFill>
@@ -37606,7 +37228,7 @@
                         </a:rPr>
                         <a:t>0 units</a:t>
                       </a:r>
-                      <a:endParaRPr lang="en-US" sz="850" dirty="0">
+                      <a:endParaRPr lang="en-US" sz="950" dirty="0">
                         <a:latin typeface="Calibri" charset="0"/>
                         <a:ea typeface="Calibri" charset="0"/>
                         <a:cs typeface="Calibri" charset="0"/>
@@ -37664,7 +37286,7 @@
                         <a:buNone/>
                       </a:pPr>
                       <a:r>
-                        <a:rPr lang="en-US" sz="1000" b="1" dirty="0">
+                        <a:rPr lang="en-US" sz="1100" b="1" dirty="0">
                           <a:solidFill>
                             <a:srgbClr val="EEF1F4"/>
                           </a:solidFill>
@@ -37674,7 +37296,7 @@
                         </a:rPr>
                         <a:t>FBR660R A4</a:t>
                       </a:r>
-                      <a:endParaRPr lang="en-US" sz="850" dirty="0">
+                      <a:endParaRPr lang="en-US" sz="950" dirty="0">
                         <a:latin typeface="Calibri" charset="0"/>
                         <a:ea typeface="Calibri" charset="0"/>
                         <a:cs typeface="Calibri" charset="0"/>
@@ -37685,7 +37307,7 @@
                         <a:buNone/>
                       </a:pPr>
                       <a:r>
-                        <a:rPr lang="en-US" sz="750" dirty="0">
+                        <a:rPr lang="en-US" sz="850" dirty="0">
                           <a:solidFill>
                             <a:srgbClr val="C9A9AC"/>
                           </a:solidFill>
@@ -37695,7 +37317,7 @@
                         </a:rPr>
                         <a:t>58.8 tm</a:t>
                       </a:r>
-                      <a:endParaRPr lang="en-US" sz="850" dirty="0">
+                      <a:endParaRPr lang="en-US" sz="950" dirty="0">
                         <a:latin typeface="Calibri" charset="0"/>
                         <a:ea typeface="Calibri" charset="0"/>
                         <a:cs typeface="Calibri" charset="0"/>
@@ -37706,7 +37328,7 @@
                         <a:buNone/>
                       </a:pPr>
                       <a:r>
-                        <a:rPr lang="en-US" sz="850" b="1" dirty="0">
+                        <a:rPr lang="en-US" sz="950" b="1" dirty="0">
                           <a:solidFill>
                             <a:srgbClr val="EEF1F4"/>
                           </a:solidFill>
@@ -37716,7 +37338,7 @@
                         </a:rPr>
                         <a:t>Rp 2.030.000.000</a:t>
                       </a:r>
-                      <a:endParaRPr lang="en-US" sz="850" dirty="0">
+                      <a:endParaRPr lang="en-US" sz="950" dirty="0">
                         <a:latin typeface="Calibri" charset="0"/>
                         <a:ea typeface="Calibri" charset="0"/>
                         <a:cs typeface="Calibri" charset="0"/>
@@ -37774,7 +37396,7 @@
                         <a:buNone/>
                       </a:pPr>
                       <a:r>
-                        <a:rPr lang="en-US" sz="850" i="1" dirty="0">
+                        <a:rPr lang="en-US" sz="950" i="1" dirty="0">
                           <a:solidFill>
                             <a:srgbClr val="5C6773"/>
                           </a:solidFill>
@@ -37784,7 +37406,7 @@
                         </a:rPr>
                         <a:t>No imports of this size in 2023 – 2026</a:t>
                       </a:r>
-                      <a:endParaRPr lang="en-US" sz="850" dirty="0">
+                      <a:endParaRPr lang="en-US" sz="950" dirty="0">
                         <a:latin typeface="Calibri" charset="0"/>
                         <a:ea typeface="Calibri" charset="0"/>
                         <a:cs typeface="Calibri" charset="0"/>
@@ -37849,7 +37471,7 @@
                   <a:tcPr/>
                 </a:tc>
               </a:tr>
-              <a:tr h="506190">
+              <a:tr h="508254">
                 <a:tc>
                   <a:txBody>
                     <a:bodyPr/>
@@ -37859,7 +37481,7 @@
                         <a:buNone/>
                       </a:pPr>
                       <a:r>
-                        <a:rPr lang="en-US" sz="1000" b="1" dirty="0">
+                        <a:rPr lang="en-US" sz="1100" b="1" dirty="0">
                           <a:solidFill>
                             <a:srgbClr val="4F9CF9"/>
                           </a:solidFill>
@@ -37869,7 +37491,7 @@
                         </a:rPr>
                         <a:t>&gt;60–65 tm</a:t>
                       </a:r>
-                      <a:endParaRPr lang="en-US" sz="850" dirty="0">
+                      <a:endParaRPr lang="en-US" sz="950" dirty="0">
                         <a:latin typeface="Calibri" charset="0"/>
                         <a:ea typeface="Calibri" charset="0"/>
                         <a:cs typeface="Calibri" charset="0"/>
@@ -37880,7 +37502,7 @@
                         <a:buNone/>
                       </a:pPr>
                       <a:r>
-                        <a:rPr lang="en-US" sz="750" dirty="0">
+                        <a:rPr lang="en-US" sz="850" dirty="0">
                           <a:solidFill>
                             <a:srgbClr val="9AA6B2"/>
                           </a:solidFill>
@@ -37890,7 +37512,7 @@
                         </a:rPr>
                         <a:t>1 unit</a:t>
                       </a:r>
-                      <a:endParaRPr lang="en-US" sz="850" dirty="0">
+                      <a:endParaRPr lang="en-US" sz="950" dirty="0">
                         <a:latin typeface="Calibri" charset="0"/>
                         <a:ea typeface="Calibri" charset="0"/>
                         <a:cs typeface="Calibri" charset="0"/>
@@ -37948,7 +37570,7 @@
                         <a:buNone/>
                       </a:pPr>
                       <a:r>
-                        <a:rPr lang="en-US" sz="1000" b="1" dirty="0">
+                        <a:rPr lang="en-US" sz="1100" b="1" dirty="0">
                           <a:solidFill>
                             <a:srgbClr val="EEF1F4"/>
                           </a:solidFill>
@@ -37958,7 +37580,7 @@
                         </a:rPr>
                         <a:t>9661C</a:t>
                       </a:r>
-                      <a:endParaRPr lang="en-US" sz="850" dirty="0">
+                      <a:endParaRPr lang="en-US" sz="950" dirty="0">
                         <a:latin typeface="Calibri" charset="0"/>
                         <a:ea typeface="Calibri" charset="0"/>
                         <a:cs typeface="Calibri" charset="0"/>
@@ -37969,7 +37591,7 @@
                         <a:buNone/>
                       </a:pPr>
                       <a:r>
-                        <a:rPr lang="en-US" sz="750" dirty="0">
+                        <a:rPr lang="en-US" sz="850" dirty="0">
                           <a:solidFill>
                             <a:srgbClr val="C9A9AC"/>
                           </a:solidFill>
@@ -37979,7 +37601,7 @@
                         </a:rPr>
                         <a:t>63.2 tm</a:t>
                       </a:r>
-                      <a:endParaRPr lang="en-US" sz="850" dirty="0">
+                      <a:endParaRPr lang="en-US" sz="950" dirty="0">
                         <a:latin typeface="Calibri" charset="0"/>
                         <a:ea typeface="Calibri" charset="0"/>
                         <a:cs typeface="Calibri" charset="0"/>
@@ -37990,7 +37612,7 @@
                         <a:buNone/>
                       </a:pPr>
                       <a:r>
-                        <a:rPr lang="en-US" sz="850" i="1" dirty="0">
+                        <a:rPr lang="en-US" sz="950" i="1" dirty="0">
                           <a:solidFill>
                             <a:srgbClr val="9AA6B2"/>
                           </a:solidFill>
@@ -38000,7 +37622,7 @@
                         </a:rPr>
                         <a:t>Price not yet known</a:t>
                       </a:r>
-                      <a:endParaRPr lang="en-US" sz="850" dirty="0">
+                      <a:endParaRPr lang="en-US" sz="950" dirty="0">
                         <a:latin typeface="Calibri" charset="0"/>
                         <a:ea typeface="Calibri" charset="0"/>
                         <a:cs typeface="Calibri" charset="0"/>
@@ -38057,7 +37679,7 @@
                       <a:pPr indent="0" marL="0">
                         <a:buNone/>
                       </a:pPr>
-                      <a:endParaRPr lang="en-US" sz="850" dirty="0">
+                      <a:endParaRPr lang="en-US" sz="950" dirty="0">
                         <a:latin typeface="Calibri" charset="0"/>
                         <a:ea typeface="Calibri" charset="0"/>
                         <a:cs typeface="Calibri" charset="0"/>
@@ -38114,7 +37736,7 @@
                       <a:pPr indent="0" marL="0">
                         <a:buNone/>
                       </a:pPr>
-                      <a:endParaRPr lang="en-US" sz="850" dirty="0">
+                      <a:endParaRPr lang="en-US" sz="950" dirty="0">
                         <a:latin typeface="Calibri" charset="0"/>
                         <a:ea typeface="Calibri" charset="0"/>
                         <a:cs typeface="Calibri" charset="0"/>
@@ -38171,7 +37793,7 @@
                       <a:pPr indent="0" marL="0">
                         <a:buNone/>
                       </a:pPr>
-                      <a:endParaRPr lang="en-US" sz="850" dirty="0">
+                      <a:endParaRPr lang="en-US" sz="950" dirty="0">
                         <a:latin typeface="Calibri" charset="0"/>
                         <a:ea typeface="Calibri" charset="0"/>
                         <a:cs typeface="Calibri" charset="0"/>
@@ -38228,7 +37850,7 @@
                       <a:pPr indent="0" marL="0">
                         <a:buNone/>
                       </a:pPr>
-                      <a:endParaRPr lang="en-US" sz="850" dirty="0">
+                      <a:endParaRPr lang="en-US" sz="950" dirty="0">
                         <a:latin typeface="Calibri" charset="0"/>
                         <a:ea typeface="Calibri" charset="0"/>
                         <a:cs typeface="Calibri" charset="0"/>
@@ -38285,7 +37907,7 @@
                       <a:pPr indent="0" marL="0">
                         <a:buNone/>
                       </a:pPr>
-                      <a:endParaRPr lang="en-US" sz="850" dirty="0">
+                      <a:endParaRPr lang="en-US" sz="950" dirty="0">
                         <a:latin typeface="Calibri" charset="0"/>
                         <a:ea typeface="Calibri" charset="0"/>
                         <a:cs typeface="Calibri" charset="0"/>
@@ -38343,7 +37965,7 @@
                         <a:buNone/>
                       </a:pPr>
                       <a:r>
-                        <a:rPr lang="en-US" sz="900" b="1" dirty="0">
+                        <a:rPr lang="en-US" sz="1000" b="1" dirty="0">
                           <a:solidFill>
                             <a:srgbClr val="EEF1F4"/>
                           </a:solidFill>
@@ -38351,9 +37973,142 @@
                           <a:ea typeface="Calibri" pitchFamily="34" charset="-122"/>
                           <a:cs typeface="Calibri" pitchFamily="34" charset="-120"/>
                         </a:rPr>
-                        <a:t>SPK61502</a:t>
+                        <a:t>SPK61502  </a:t>
                       </a:r>
                       <a:pPr indent="0" marL="0">
+                        <a:buNone/>
+                      </a:pPr>
+                      <a:r>
+                        <a:rPr lang="en-US" sz="1000" i="1" dirty="0">
+                          <a:solidFill>
+                            <a:srgbClr val="9AA6B2"/>
+                          </a:solidFill>
+                          <a:latin typeface="Calibri" pitchFamily="34" charset="0"/>
+                          <a:ea typeface="Calibri" pitchFamily="34" charset="-122"/>
+                          <a:cs typeface="Calibri" pitchFamily="34" charset="-120"/>
+                        </a:rPr>
+                        <a:t>no price</a:t>
+                      </a:r>
+                      <a:endParaRPr lang="en-US" sz="950" dirty="0">
+                        <a:latin typeface="Calibri" charset="0"/>
+                        <a:ea typeface="Calibri" charset="0"/>
+                        <a:cs typeface="Calibri" charset="0"/>
+                      </a:endParaRPr>
+                    </a:p>
+                    <a:p>
+                      <a:pPr indent="0" marL="0">
+                        <a:buNone/>
+                      </a:pPr>
+                      <a:r>
+                        <a:rPr lang="en-US" sz="950" dirty="0">
+                          <a:solidFill>
+                            <a:srgbClr val="9AA6B2"/>
+                          </a:solidFill>
+                          <a:latin typeface="Calibri" pitchFamily="34" charset="0"/>
+                          <a:ea typeface="Calibri" pitchFamily="34" charset="-122"/>
+                          <a:cs typeface="Calibri" pitchFamily="34" charset="-120"/>
+                        </a:rPr>
+                        <a:t>61.5 tm · 1 unit</a:t>
+                      </a:r>
+                      <a:endParaRPr lang="en-US" sz="950" dirty="0">
+                        <a:latin typeface="Calibri" charset="0"/>
+                        <a:ea typeface="Calibri" charset="0"/>
+                        <a:cs typeface="Calibri" charset="0"/>
+                      </a:endParaRPr>
+                    </a:p>
+                    <a:p>
+                      <a:pPr indent="0" marL="0">
+                        <a:buNone/>
+                      </a:pPr>
+                      <a:r>
+                        <a:rPr lang="en-US" sz="950" dirty="0">
+                          <a:solidFill>
+                            <a:srgbClr val="9AA6B2"/>
+                          </a:solidFill>
+                          <a:latin typeface="Calibri" pitchFamily="34" charset="0"/>
+                          <a:ea typeface="Calibri" pitchFamily="34" charset="-122"/>
+                          <a:cs typeface="Calibri" pitchFamily="34" charset="-120"/>
+                        </a:rPr>
+                        <a:t>Rp 1.400.000.000</a:t>
+                      </a:r>
+                      <a:endParaRPr lang="en-US" sz="950" dirty="0">
+                        <a:latin typeface="Calibri" charset="0"/>
+                        <a:ea typeface="Calibri" charset="0"/>
+                        <a:cs typeface="Calibri" charset="0"/>
+                      </a:endParaRPr>
+                    </a:p>
+                  </a:txBody>
+                  <a:tcPr marL="64008" marR="64008" marT="18288" marB="18288" anchor="ctr">
+                    <a:lnL w="19050" cap="flat" cmpd="sng" algn="ctr">
+                      <a:solidFill>
+                        <a:srgbClr val="0F141A"/>
+                      </a:solidFill>
+                      <a:prstDash val="solid"/>
+                      <a:round/>
+                      <a:headEnd type="none" w="med" len="med"/>
+                      <a:tailEnd type="none" w="med" len="med"/>
+                    </a:lnL>
+                    <a:lnR w="19050" cap="flat" cmpd="sng" algn="ctr">
+                      <a:solidFill>
+                        <a:srgbClr val="0F141A"/>
+                      </a:solidFill>
+                      <a:prstDash val="solid"/>
+                      <a:round/>
+                      <a:headEnd type="none" w="med" len="med"/>
+                      <a:tailEnd type="none" w="med" len="med"/>
+                    </a:lnR>
+                    <a:lnT w="19050" cap="flat" cmpd="sng" algn="ctr">
+                      <a:solidFill>
+                        <a:srgbClr val="0F141A"/>
+                      </a:solidFill>
+                      <a:prstDash val="solid"/>
+                      <a:round/>
+                      <a:headEnd type="none" w="med" len="med"/>
+                      <a:tailEnd type="none" w="med" len="med"/>
+                    </a:lnT>
+                    <a:lnB w="19050" cap="flat" cmpd="sng" algn="ctr">
+                      <a:solidFill>
+                        <a:srgbClr val="0F141A"/>
+                      </a:solidFill>
+                      <a:prstDash val="solid"/>
+                      <a:round/>
+                      <a:headEnd type="none" w="med" len="med"/>
+                      <a:tailEnd type="none" w="med" len="med"/>
+                    </a:lnB>
+                    <a:solidFill>
+                      <a:srgbClr val="1B222B"/>
+                    </a:solidFill>
+                  </a:tcPr>
+                </a:tc>
+              </a:tr>
+              <a:tr h="508254">
+                <a:tc>
+                  <a:txBody>
+                    <a:bodyPr/>
+                    <a:lstStyle/>
+                    <a:p>
+                      <a:pPr algn="ctr" indent="0" marL="0">
+                        <a:buNone/>
+                      </a:pPr>
+                      <a:r>
+                        <a:rPr lang="en-US" sz="1100" b="1" dirty="0">
+                          <a:solidFill>
+                            <a:srgbClr val="4F9CF9"/>
+                          </a:solidFill>
+                          <a:latin typeface="Cambria" pitchFamily="34" charset="0"/>
+                          <a:ea typeface="Cambria" pitchFamily="34" charset="-122"/>
+                          <a:cs typeface="Cambria" pitchFamily="34" charset="-120"/>
+                        </a:rPr>
+                        <a:t>&gt;70–75 tm</a:t>
+                      </a:r>
+                      <a:endParaRPr lang="en-US" sz="950" dirty="0">
+                        <a:latin typeface="Calibri" charset="0"/>
+                        <a:ea typeface="Calibri" charset="0"/>
+                        <a:cs typeface="Calibri" charset="0"/>
+                      </a:endParaRPr>
+                    </a:p>
+                    <a:p>
+                      <a:pPr algn="ctr" indent="0" marL="0">
                         <a:buNone/>
                       </a:pPr>
                       <a:r>
@@ -38365,156 +38120,9 @@
                           <a:ea typeface="Calibri" pitchFamily="34" charset="-122"/>
                           <a:cs typeface="Calibri" pitchFamily="34" charset="-120"/>
                         </a:rPr>
-                        <a:t>  61.5 tm   </a:t>
-                      </a:r>
-                      <a:pPr indent="0" marL="0">
-                        <a:buNone/>
-                      </a:pPr>
-                      <a:r>
-                        <a:rPr lang="en-US" sz="850" i="1" dirty="0">
-                          <a:solidFill>
-                            <a:srgbClr val="9AA6B2"/>
-                          </a:solidFill>
-                          <a:latin typeface="Calibri" pitchFamily="34" charset="0"/>
-                          <a:ea typeface="Calibri" pitchFamily="34" charset="-122"/>
-                          <a:cs typeface="Calibri" pitchFamily="34" charset="-120"/>
-                        </a:rPr>
-                        <a:t>no price</a:t>
-                      </a:r>
-                      <a:endParaRPr lang="en-US" sz="850" dirty="0">
-                        <a:latin typeface="Calibri" charset="0"/>
-                        <a:ea typeface="Calibri" charset="0"/>
-                        <a:cs typeface="Calibri" charset="0"/>
-                      </a:endParaRPr>
-                    </a:p>
-                    <a:p>
-                      <a:pPr indent="0" marL="0">
-                        <a:buNone/>
-                      </a:pPr>
-                      <a:r>
-                        <a:rPr lang="en-US" sz="850" dirty="0">
-                          <a:solidFill>
-                            <a:srgbClr val="9AA6B2"/>
-                          </a:solidFill>
-                          <a:latin typeface="Calibri" pitchFamily="34" charset="0"/>
-                          <a:ea typeface="Calibri" pitchFamily="34" charset="-122"/>
-                          <a:cs typeface="Calibri" pitchFamily="34" charset="-120"/>
-                        </a:rPr>
-                        <a:t>1 unit · Rp 1.240.000.000</a:t>
-                      </a:r>
-                      <a:endParaRPr lang="en-US" sz="850" dirty="0">
-                        <a:latin typeface="Calibri" charset="0"/>
-                        <a:ea typeface="Calibri" charset="0"/>
-                        <a:cs typeface="Calibri" charset="0"/>
-                      </a:endParaRPr>
-                    </a:p>
-                    <a:p>
-                      <a:pPr indent="0" marL="0">
-                        <a:buNone/>
-                      </a:pPr>
-                      <a:r>
-                        <a:rPr lang="en-US" sz="850" dirty="0">
-                          <a:solidFill>
-                            <a:srgbClr val="9AA6B2"/>
-                          </a:solidFill>
-                          <a:latin typeface="Calibri" pitchFamily="34" charset="0"/>
-                          <a:ea typeface="Calibri" pitchFamily="34" charset="-122"/>
-                          <a:cs typeface="Calibri" pitchFamily="34" charset="-120"/>
-                        </a:rPr>
-                        <a:t>Rp 1.400.000.000 per unit</a:t>
-                      </a:r>
-                      <a:endParaRPr lang="en-US" sz="850" dirty="0">
-                        <a:latin typeface="Calibri" charset="0"/>
-                        <a:ea typeface="Calibri" charset="0"/>
-                        <a:cs typeface="Calibri" charset="0"/>
-                      </a:endParaRPr>
-                    </a:p>
-                  </a:txBody>
-                  <a:tcPr marL="64008" marR="64008" marT="18288" marB="18288" anchor="ctr">
-                    <a:lnL w="19050" cap="flat" cmpd="sng" algn="ctr">
-                      <a:solidFill>
-                        <a:srgbClr val="0F141A"/>
-                      </a:solidFill>
-                      <a:prstDash val="solid"/>
-                      <a:round/>
-                      <a:headEnd type="none" w="med" len="med"/>
-                      <a:tailEnd type="none" w="med" len="med"/>
-                    </a:lnL>
-                    <a:lnR w="19050" cap="flat" cmpd="sng" algn="ctr">
-                      <a:solidFill>
-                        <a:srgbClr val="0F141A"/>
-                      </a:solidFill>
-                      <a:prstDash val="solid"/>
-                      <a:round/>
-                      <a:headEnd type="none" w="med" len="med"/>
-                      <a:tailEnd type="none" w="med" len="med"/>
-                    </a:lnR>
-                    <a:lnT w="19050" cap="flat" cmpd="sng" algn="ctr">
-                      <a:solidFill>
-                        <a:srgbClr val="0F141A"/>
-                      </a:solidFill>
-                      <a:prstDash val="solid"/>
-                      <a:round/>
-                      <a:headEnd type="none" w="med" len="med"/>
-                      <a:tailEnd type="none" w="med" len="med"/>
-                    </a:lnT>
-                    <a:lnB w="19050" cap="flat" cmpd="sng" algn="ctr">
-                      <a:solidFill>
-                        <a:srgbClr val="0F141A"/>
-                      </a:solidFill>
-                      <a:prstDash val="solid"/>
-                      <a:round/>
-                      <a:headEnd type="none" w="med" len="med"/>
-                      <a:tailEnd type="none" w="med" len="med"/>
-                    </a:lnB>
-                    <a:solidFill>
-                      <a:srgbClr val="1B222B"/>
-                    </a:solidFill>
-                  </a:tcPr>
-                </a:tc>
-              </a:tr>
-              <a:tr h="506190">
-                <a:tc>
-                  <a:txBody>
-                    <a:bodyPr/>
-                    <a:lstStyle/>
-                    <a:p>
-                      <a:pPr algn="ctr" indent="0" marL="0">
-                        <a:buNone/>
-                      </a:pPr>
-                      <a:r>
-                        <a:rPr lang="en-US" sz="1000" b="1" dirty="0">
-                          <a:solidFill>
-                            <a:srgbClr val="4F9CF9"/>
-                          </a:solidFill>
-                          <a:latin typeface="Cambria" pitchFamily="34" charset="0"/>
-                          <a:ea typeface="Cambria" pitchFamily="34" charset="-122"/>
-                          <a:cs typeface="Cambria" pitchFamily="34" charset="-120"/>
-                        </a:rPr>
-                        <a:t>&gt;70–75 tm</a:t>
-                      </a:r>
-                      <a:endParaRPr lang="en-US" sz="850" dirty="0">
-                        <a:latin typeface="Calibri" charset="0"/>
-                        <a:ea typeface="Calibri" charset="0"/>
-                        <a:cs typeface="Calibri" charset="0"/>
-                      </a:endParaRPr>
-                    </a:p>
-                    <a:p>
-                      <a:pPr algn="ctr" indent="0" marL="0">
-                        <a:buNone/>
-                      </a:pPr>
-                      <a:r>
-                        <a:rPr lang="en-US" sz="750" dirty="0">
-                          <a:solidFill>
-                            <a:srgbClr val="9AA6B2"/>
-                          </a:solidFill>
-                          <a:latin typeface="Calibri" pitchFamily="34" charset="0"/>
-                          <a:ea typeface="Calibri" pitchFamily="34" charset="-122"/>
-                          <a:cs typeface="Calibri" pitchFamily="34" charset="-120"/>
-                        </a:rPr>
                         <a:t>2 units</a:t>
                       </a:r>
-                      <a:endParaRPr lang="en-US" sz="850" dirty="0">
+                      <a:endParaRPr lang="en-US" sz="950" dirty="0">
                         <a:latin typeface="Calibri" charset="0"/>
                         <a:ea typeface="Calibri" charset="0"/>
                         <a:cs typeface="Calibri" charset="0"/>
@@ -38572,7 +38180,7 @@
                         <a:buNone/>
                       </a:pPr>
                       <a:r>
-                        <a:rPr lang="en-US" sz="1000" b="1" dirty="0">
+                        <a:rPr lang="en-US" sz="1100" b="1" dirty="0">
                           <a:solidFill>
                             <a:srgbClr val="EEF1F4"/>
                           </a:solidFill>
@@ -38582,7 +38190,7 @@
                         </a:rPr>
                         <a:t>990R</a:t>
                       </a:r>
-                      <a:endParaRPr lang="en-US" sz="850" dirty="0">
+                      <a:endParaRPr lang="en-US" sz="950" dirty="0">
                         <a:latin typeface="Calibri" charset="0"/>
                         <a:ea typeface="Calibri" charset="0"/>
                         <a:cs typeface="Calibri" charset="0"/>
@@ -38593,7 +38201,7 @@
                         <a:buNone/>
                       </a:pPr>
                       <a:r>
-                        <a:rPr lang="en-US" sz="750" dirty="0">
+                        <a:rPr lang="en-US" sz="850" dirty="0">
                           <a:solidFill>
                             <a:srgbClr val="C9A9AC"/>
                           </a:solidFill>
@@ -38603,7 +38211,7 @@
                         </a:rPr>
                         <a:t>74 tm</a:t>
                       </a:r>
-                      <a:endParaRPr lang="en-US" sz="850" dirty="0">
+                      <a:endParaRPr lang="en-US" sz="950" dirty="0">
                         <a:latin typeface="Calibri" charset="0"/>
                         <a:ea typeface="Calibri" charset="0"/>
                         <a:cs typeface="Calibri" charset="0"/>
@@ -38614,7 +38222,7 @@
                         <a:buNone/>
                       </a:pPr>
                       <a:r>
-                        <a:rPr lang="en-US" sz="850" b="1" dirty="0">
+                        <a:rPr lang="en-US" sz="950" b="1" dirty="0">
                           <a:solidFill>
                             <a:srgbClr val="EEF1F4"/>
                           </a:solidFill>
@@ -38624,7 +38232,7 @@
                         </a:rPr>
                         <a:t>Rp 4.110.000.000</a:t>
                       </a:r>
-                      <a:endParaRPr lang="en-US" sz="850" dirty="0">
+                      <a:endParaRPr lang="en-US" sz="950" dirty="0">
                         <a:latin typeface="Calibri" charset="0"/>
                         <a:ea typeface="Calibri" charset="0"/>
                         <a:cs typeface="Calibri" charset="0"/>
@@ -38682,7 +38290,7 @@
                         <a:buNone/>
                       </a:pPr>
                       <a:r>
-                        <a:rPr lang="en-US" sz="900" b="1" dirty="0">
+                        <a:rPr lang="en-US" sz="1000" b="1" dirty="0">
                           <a:solidFill>
                             <a:srgbClr val="EEF1F4"/>
                           </a:solidFill>
@@ -38690,27 +38298,13 @@
                           <a:ea typeface="Calibri" pitchFamily="34" charset="-122"/>
                           <a:cs typeface="Calibri" pitchFamily="34" charset="-120"/>
                         </a:rPr>
-                        <a:t>PK 76002 EH D</a:t>
+                        <a:t>PK 76002 EH D  </a:t>
                       </a:r>
                       <a:pPr indent="0" marL="0">
                         <a:buNone/>
                       </a:pPr>
                       <a:r>
-                        <a:rPr lang="en-US" sz="850" dirty="0">
-                          <a:solidFill>
-                            <a:srgbClr val="9AA6B2"/>
-                          </a:solidFill>
-                          <a:latin typeface="Calibri" pitchFamily="34" charset="0"/>
-                          <a:ea typeface="Calibri" pitchFamily="34" charset="-122"/>
-                          <a:cs typeface="Calibri" pitchFamily="34" charset="-120"/>
-                        </a:rPr>
-                        <a:t>  71.6 tm   </a:t>
-                      </a:r>
-                      <a:pPr indent="0" marL="0">
-                        <a:buNone/>
-                      </a:pPr>
-                      <a:r>
-                        <a:rPr lang="en-US" sz="850" b="1" dirty="0">
+                        <a:rPr lang="en-US" sz="1000" b="1" dirty="0">
                           <a:solidFill>
                             <a:srgbClr val="FF8A8F"/>
                           </a:solidFill>
@@ -38720,7 +38314,7 @@
                         </a:rPr>
                         <a:t>+80%</a:t>
                       </a:r>
-                      <a:endParaRPr lang="en-US" sz="850" dirty="0">
+                      <a:endParaRPr lang="en-US" sz="950" dirty="0">
                         <a:latin typeface="Calibri" charset="0"/>
                         <a:ea typeface="Calibri" charset="0"/>
                         <a:cs typeface="Calibri" charset="0"/>
@@ -38731,7 +38325,7 @@
                         <a:buNone/>
                       </a:pPr>
                       <a:r>
-                        <a:rPr lang="en-US" sz="850" dirty="0">
+                        <a:rPr lang="en-US" sz="950" dirty="0">
                           <a:solidFill>
                             <a:srgbClr val="9AA6B2"/>
                           </a:solidFill>
@@ -38739,9 +38333,9 @@
                           <a:ea typeface="Calibri" pitchFamily="34" charset="-122"/>
                           <a:cs typeface="Calibri" pitchFamily="34" charset="-120"/>
                         </a:rPr>
-                        <a:t>2 units · Rp 3.840.000.000</a:t>
+                        <a:t>71.6 tm · 2 units</a:t>
                       </a:r>
-                      <a:endParaRPr lang="en-US" sz="850" dirty="0">
+                      <a:endParaRPr lang="en-US" sz="950" dirty="0">
                         <a:latin typeface="Calibri" charset="0"/>
                         <a:ea typeface="Calibri" charset="0"/>
                         <a:cs typeface="Calibri" charset="0"/>
@@ -38752,7 +38346,7 @@
                         <a:buNone/>
                       </a:pPr>
                       <a:r>
-                        <a:rPr lang="en-US" sz="850" dirty="0">
+                        <a:rPr lang="en-US" sz="950" dirty="0">
                           <a:solidFill>
                             <a:srgbClr val="9AA6B2"/>
                           </a:solidFill>
@@ -38760,9 +38354,9 @@
                           <a:ea typeface="Calibri" pitchFamily="34" charset="-122"/>
                           <a:cs typeface="Calibri" pitchFamily="34" charset="-120"/>
                         </a:rPr>
-                        <a:t>Rp 2.290.000.000 per unit</a:t>
+                        <a:t>Rp 2.290.000.000</a:t>
                       </a:r>
-                      <a:endParaRPr lang="en-US" sz="850" dirty="0">
+                      <a:endParaRPr lang="en-US" sz="950" dirty="0">
                         <a:latin typeface="Calibri" charset="0"/>
                         <a:ea typeface="Calibri" charset="0"/>
                         <a:cs typeface="Calibri" charset="0"/>
@@ -38819,7 +38413,7 @@
                       <a:pPr indent="0" marL="0">
                         <a:buNone/>
                       </a:pPr>
-                      <a:endParaRPr lang="en-US" sz="850" dirty="0">
+                      <a:endParaRPr lang="en-US" sz="950" dirty="0">
                         <a:latin typeface="Calibri" charset="0"/>
                         <a:ea typeface="Calibri" charset="0"/>
                         <a:cs typeface="Calibri" charset="0"/>
@@ -38876,7 +38470,7 @@
                       <a:pPr indent="0" marL="0">
                         <a:buNone/>
                       </a:pPr>
-                      <a:endParaRPr lang="en-US" sz="850" dirty="0">
+                      <a:endParaRPr lang="en-US" sz="950" dirty="0">
                         <a:latin typeface="Calibri" charset="0"/>
                         <a:ea typeface="Calibri" charset="0"/>
                         <a:cs typeface="Calibri" charset="0"/>
@@ -38933,7 +38527,7 @@
                       <a:pPr indent="0" marL="0">
                         <a:buNone/>
                       </a:pPr>
-                      <a:endParaRPr lang="en-US" sz="850" dirty="0">
+                      <a:endParaRPr lang="en-US" sz="950" dirty="0">
                         <a:latin typeface="Calibri" charset="0"/>
                         <a:ea typeface="Calibri" charset="0"/>
                         <a:cs typeface="Calibri" charset="0"/>
@@ -38990,7 +38584,7 @@
                       <a:pPr indent="0" marL="0">
                         <a:buNone/>
                       </a:pPr>
-                      <a:endParaRPr lang="en-US" sz="850" dirty="0">
+                      <a:endParaRPr lang="en-US" sz="950" dirty="0">
                         <a:latin typeface="Calibri" charset="0"/>
                         <a:ea typeface="Calibri" charset="0"/>
                         <a:cs typeface="Calibri" charset="0"/>
@@ -39047,7 +38641,7 @@
                       <a:pPr indent="0" marL="0">
                         <a:buNone/>
                       </a:pPr>
-                      <a:endParaRPr lang="en-US" sz="850" dirty="0">
+                      <a:endParaRPr lang="en-US" sz="950" dirty="0">
                         <a:latin typeface="Calibri" charset="0"/>
                         <a:ea typeface="Calibri" charset="0"/>
                         <a:cs typeface="Calibri" charset="0"/>
@@ -39097,7 +38691,7 @@
                   </a:tcPr>
                 </a:tc>
               </a:tr>
-              <a:tr h="506190">
+              <a:tr h="508254">
                 <a:tc>
                   <a:txBody>
                     <a:bodyPr/>
@@ -39107,7 +38701,7 @@
                         <a:buNone/>
                       </a:pPr>
                       <a:r>
-                        <a:rPr lang="en-US" sz="1000" b="1" dirty="0">
+                        <a:rPr lang="en-US" sz="1100" b="1" dirty="0">
                           <a:solidFill>
                             <a:srgbClr val="4F9CF9"/>
                           </a:solidFill>
@@ -39117,7 +38711,7 @@
                         </a:rPr>
                         <a:t>&gt;80–85 tm</a:t>
                       </a:r>
-                      <a:endParaRPr lang="en-US" sz="850" dirty="0">
+                      <a:endParaRPr lang="en-US" sz="950" dirty="0">
                         <a:latin typeface="Calibri" charset="0"/>
                         <a:ea typeface="Calibri" charset="0"/>
                         <a:cs typeface="Calibri" charset="0"/>
@@ -39128,7 +38722,7 @@
                         <a:buNone/>
                       </a:pPr>
                       <a:r>
-                        <a:rPr lang="en-US" sz="750" dirty="0">
+                        <a:rPr lang="en-US" sz="850" dirty="0">
                           <a:solidFill>
                             <a:srgbClr val="9AA6B2"/>
                           </a:solidFill>
@@ -39138,7 +38732,7 @@
                         </a:rPr>
                         <a:t>1 unit</a:t>
                       </a:r>
-                      <a:endParaRPr lang="en-US" sz="850" dirty="0">
+                      <a:endParaRPr lang="en-US" sz="950" dirty="0">
                         <a:latin typeface="Calibri" charset="0"/>
                         <a:ea typeface="Calibri" charset="0"/>
                         <a:cs typeface="Calibri" charset="0"/>
@@ -39196,7 +38790,7 @@
                         <a:buNone/>
                       </a:pPr>
                       <a:r>
-                        <a:rPr lang="en-US" sz="850" b="1" dirty="0">
+                        <a:rPr lang="en-US" sz="950" b="1" dirty="0">
                           <a:solidFill>
                             <a:srgbClr val="FF8A8F"/>
                           </a:solidFill>
@@ -39206,7 +38800,7 @@
                         </a:rPr>
                         <a:t>No F.lli Ferrari model</a:t>
                       </a:r>
-                      <a:endParaRPr lang="en-US" sz="850" dirty="0">
+                      <a:endParaRPr lang="en-US" sz="950" dirty="0">
                         <a:latin typeface="Calibri" charset="0"/>
                         <a:ea typeface="Calibri" charset="0"/>
                         <a:cs typeface="Calibri" charset="0"/>
@@ -39217,7 +38811,7 @@
                         <a:buNone/>
                       </a:pPr>
                       <a:r>
-                        <a:rPr lang="en-US" sz="750" dirty="0">
+                        <a:rPr lang="en-US" sz="850" dirty="0">
                           <a:solidFill>
                             <a:srgbClr val="9AA6B2"/>
                           </a:solidFill>
@@ -39227,7 +38821,7 @@
                         </a:rPr>
                         <a:t>largest is 990R, 74 tm</a:t>
                       </a:r>
-                      <a:endParaRPr lang="en-US" sz="850" dirty="0">
+                      <a:endParaRPr lang="en-US" sz="950" dirty="0">
                         <a:latin typeface="Calibri" charset="0"/>
                         <a:ea typeface="Calibri" charset="0"/>
                         <a:cs typeface="Calibri" charset="0"/>
@@ -39285,7 +38879,7 @@
                         <a:buNone/>
                       </a:pPr>
                       <a:r>
-                        <a:rPr lang="en-US" sz="900" b="1" dirty="0">
+                        <a:rPr lang="en-US" sz="1000" b="1" dirty="0">
                           <a:solidFill>
                             <a:srgbClr val="EEF1F4"/>
                           </a:solidFill>
@@ -39293,27 +38887,13 @@
                           <a:ea typeface="Calibri" pitchFamily="34" charset="-122"/>
                           <a:cs typeface="Calibri" pitchFamily="34" charset="-120"/>
                         </a:rPr>
-                        <a:t>PK 88002 EH C</a:t>
+                        <a:t>PK 88002 EH C  </a:t>
                       </a:r>
                       <a:pPr indent="0" marL="0">
                         <a:buNone/>
                       </a:pPr>
                       <a:r>
-                        <a:rPr lang="en-US" sz="850" dirty="0">
-                          <a:solidFill>
-                            <a:srgbClr val="9AA6B2"/>
-                          </a:solidFill>
-                          <a:latin typeface="Calibri" pitchFamily="34" charset="0"/>
-                          <a:ea typeface="Calibri" pitchFamily="34" charset="-122"/>
-                          <a:cs typeface="Calibri" pitchFamily="34" charset="-120"/>
-                        </a:rPr>
-                        <a:t>  81.6 tm   </a:t>
-                      </a:r>
-                      <a:pPr indent="0" marL="0">
-                        <a:buNone/>
-                      </a:pPr>
-                      <a:r>
-                        <a:rPr lang="en-US" sz="850" b="1" dirty="0">
+                        <a:rPr lang="en-US" sz="1000" b="1" dirty="0">
                           <a:solidFill>
                             <a:srgbClr val="FF8A8F"/>
                           </a:solidFill>
@@ -39323,7 +38903,7 @@
                         </a:rPr>
                         <a:t>+85%</a:t>
                       </a:r>
-                      <a:endParaRPr lang="en-US" sz="850" dirty="0">
+                      <a:endParaRPr lang="en-US" sz="950" dirty="0">
                         <a:latin typeface="Calibri" charset="0"/>
                         <a:ea typeface="Calibri" charset="0"/>
                         <a:cs typeface="Calibri" charset="0"/>
@@ -39334,7 +38914,7 @@
                         <a:buNone/>
                       </a:pPr>
                       <a:r>
-                        <a:rPr lang="en-US" sz="850" dirty="0">
+                        <a:rPr lang="en-US" sz="950" dirty="0">
                           <a:solidFill>
                             <a:srgbClr val="9AA6B2"/>
                           </a:solidFill>
@@ -39342,9 +38922,9 @@
                           <a:ea typeface="Calibri" pitchFamily="34" charset="-122"/>
                           <a:cs typeface="Calibri" pitchFamily="34" charset="-120"/>
                         </a:rPr>
-                        <a:t>1 unit · Rp 1.860.000.000</a:t>
+                        <a:t>81.6 tm · 1 unit</a:t>
                       </a:r>
-                      <a:endParaRPr lang="en-US" sz="850" dirty="0">
+                      <a:endParaRPr lang="en-US" sz="950" dirty="0">
                         <a:latin typeface="Calibri" charset="0"/>
                         <a:ea typeface="Calibri" charset="0"/>
                         <a:cs typeface="Calibri" charset="0"/>
@@ -39355,7 +38935,7 @@
                         <a:buNone/>
                       </a:pPr>
                       <a:r>
-                        <a:rPr lang="en-US" sz="850" dirty="0">
+                        <a:rPr lang="en-US" sz="950" dirty="0">
                           <a:solidFill>
                             <a:srgbClr val="9AA6B2"/>
                           </a:solidFill>
@@ -39363,9 +38943,9 @@
                           <a:ea typeface="Calibri" pitchFamily="34" charset="-122"/>
                           <a:cs typeface="Calibri" pitchFamily="34" charset="-120"/>
                         </a:rPr>
-                        <a:t>Rp 2.220.000.000 per unit</a:t>
+                        <a:t>Rp 2.220.000.000</a:t>
                       </a:r>
-                      <a:endParaRPr lang="en-US" sz="850" dirty="0">
+                      <a:endParaRPr lang="en-US" sz="950" dirty="0">
                         <a:latin typeface="Calibri" charset="0"/>
                         <a:ea typeface="Calibri" charset="0"/>
                         <a:cs typeface="Calibri" charset="0"/>
@@ -39422,7 +39002,7 @@
                       <a:pPr indent="0" marL="0">
                         <a:buNone/>
                       </a:pPr>
-                      <a:endParaRPr lang="en-US" sz="850" dirty="0">
+                      <a:endParaRPr lang="en-US" sz="950" dirty="0">
                         <a:latin typeface="Calibri" charset="0"/>
                         <a:ea typeface="Calibri" charset="0"/>
                         <a:cs typeface="Calibri" charset="0"/>
@@ -39479,7 +39059,7 @@
                       <a:pPr indent="0" marL="0">
                         <a:buNone/>
                       </a:pPr>
-                      <a:endParaRPr lang="en-US" sz="850" dirty="0">
+                      <a:endParaRPr lang="en-US" sz="950" dirty="0">
                         <a:latin typeface="Calibri" charset="0"/>
                         <a:ea typeface="Calibri" charset="0"/>
                         <a:cs typeface="Calibri" charset="0"/>
@@ -39536,7 +39116,7 @@
                       <a:pPr indent="0" marL="0">
                         <a:buNone/>
                       </a:pPr>
-                      <a:endParaRPr lang="en-US" sz="850" dirty="0">
+                      <a:endParaRPr lang="en-US" sz="950" dirty="0">
                         <a:latin typeface="Calibri" charset="0"/>
                         <a:ea typeface="Calibri" charset="0"/>
                         <a:cs typeface="Calibri" charset="0"/>
@@ -39593,7 +39173,7 @@
                       <a:pPr indent="0" marL="0">
                         <a:buNone/>
                       </a:pPr>
-                      <a:endParaRPr lang="en-US" sz="850" dirty="0">
+                      <a:endParaRPr lang="en-US" sz="950" dirty="0">
                         <a:latin typeface="Calibri" charset="0"/>
                         <a:ea typeface="Calibri" charset="0"/>
                         <a:cs typeface="Calibri" charset="0"/>
@@ -39650,7 +39230,7 @@
                       <a:pPr indent="0" marL="0">
                         <a:buNone/>
                       </a:pPr>
-                      <a:endParaRPr lang="en-US" sz="850" dirty="0">
+                      <a:endParaRPr lang="en-US" sz="950" dirty="0">
                         <a:latin typeface="Calibri" charset="0"/>
                         <a:ea typeface="Calibri" charset="0"/>
                         <a:cs typeface="Calibri" charset="0"/>
@@ -39700,7 +39280,7 @@
                   </a:tcPr>
                 </a:tc>
               </a:tr>
-              <a:tr h="506190">
+              <a:tr h="508254">
                 <a:tc rowSpan="2">
                   <a:txBody>
                     <a:bodyPr/>
@@ -39710,7 +39290,7 @@
                         <a:buNone/>
                       </a:pPr>
                       <a:r>
-                        <a:rPr lang="en-US" sz="1000" b="1" dirty="0">
+                        <a:rPr lang="en-US" sz="1100" b="1" dirty="0">
                           <a:solidFill>
                             <a:srgbClr val="4F9CF9"/>
                           </a:solidFill>
@@ -39720,7 +39300,7 @@
                         </a:rPr>
                         <a:t>&gt;85–90 tm</a:t>
                       </a:r>
-                      <a:endParaRPr lang="en-US" sz="850" dirty="0">
+                      <a:endParaRPr lang="en-US" sz="950" dirty="0">
                         <a:latin typeface="Calibri" charset="0"/>
                         <a:ea typeface="Calibri" charset="0"/>
                         <a:cs typeface="Calibri" charset="0"/>
@@ -39731,7 +39311,7 @@
                         <a:buNone/>
                       </a:pPr>
                       <a:r>
-                        <a:rPr lang="en-US" sz="750" dirty="0">
+                        <a:rPr lang="en-US" sz="850" dirty="0">
                           <a:solidFill>
                             <a:srgbClr val="9AA6B2"/>
                           </a:solidFill>
@@ -39741,7 +39321,7 @@
                         </a:rPr>
                         <a:t>4 units</a:t>
                       </a:r>
-                      <a:endParaRPr lang="en-US" sz="850" dirty="0">
+                      <a:endParaRPr lang="en-US" sz="950" dirty="0">
                         <a:latin typeface="Calibri" charset="0"/>
                         <a:ea typeface="Calibri" charset="0"/>
                         <a:cs typeface="Calibri" charset="0"/>
@@ -39799,7 +39379,7 @@
                         <a:buNone/>
                       </a:pPr>
                       <a:r>
-                        <a:rPr lang="en-US" sz="850" b="1" dirty="0">
+                        <a:rPr lang="en-US" sz="950" b="1" dirty="0">
                           <a:solidFill>
                             <a:srgbClr val="FF8A8F"/>
                           </a:solidFill>
@@ -39809,7 +39389,7 @@
                         </a:rPr>
                         <a:t>No F.lli Ferrari model</a:t>
                       </a:r>
-                      <a:endParaRPr lang="en-US" sz="850" dirty="0">
+                      <a:endParaRPr lang="en-US" sz="950" dirty="0">
                         <a:latin typeface="Calibri" charset="0"/>
                         <a:ea typeface="Calibri" charset="0"/>
                         <a:cs typeface="Calibri" charset="0"/>
@@ -39820,7 +39400,7 @@
                         <a:buNone/>
                       </a:pPr>
                       <a:r>
-                        <a:rPr lang="en-US" sz="750" dirty="0">
+                        <a:rPr lang="en-US" sz="850" dirty="0">
                           <a:solidFill>
                             <a:srgbClr val="9AA6B2"/>
                           </a:solidFill>
@@ -39830,7 +39410,7 @@
                         </a:rPr>
                         <a:t>largest is 990R, 74 tm</a:t>
                       </a:r>
-                      <a:endParaRPr lang="en-US" sz="850" dirty="0">
+                      <a:endParaRPr lang="en-US" sz="950" dirty="0">
                         <a:latin typeface="Calibri" charset="0"/>
                         <a:ea typeface="Calibri" charset="0"/>
                         <a:cs typeface="Calibri" charset="0"/>
@@ -39887,7 +39467,7 @@
                       <a:pPr indent="0" marL="0">
                         <a:buNone/>
                       </a:pPr>
-                      <a:endParaRPr lang="en-US" sz="850" dirty="0">
+                      <a:endParaRPr lang="en-US" sz="950" dirty="0">
                         <a:latin typeface="Calibri" charset="0"/>
                         <a:ea typeface="Calibri" charset="0"/>
                         <a:cs typeface="Calibri" charset="0"/>
@@ -39944,7 +39524,7 @@
                       <a:pPr indent="0" marL="0">
                         <a:buNone/>
                       </a:pPr>
-                      <a:endParaRPr lang="en-US" sz="850" dirty="0">
+                      <a:endParaRPr lang="en-US" sz="950" dirty="0">
                         <a:latin typeface="Calibri" charset="0"/>
                         <a:ea typeface="Calibri" charset="0"/>
                         <a:cs typeface="Calibri" charset="0"/>
@@ -40002,7 +39582,7 @@
                         <a:buNone/>
                       </a:pPr>
                       <a:r>
-                        <a:rPr lang="en-US" sz="900" b="1" dirty="0">
+                        <a:rPr lang="en-US" sz="1000" b="1" dirty="0">
                           <a:solidFill>
                             <a:srgbClr val="EEF1F4"/>
                           </a:solidFill>
@@ -40010,27 +39590,13 @@
                           <a:ea typeface="Calibri" pitchFamily="34" charset="-122"/>
                           <a:cs typeface="Calibri" pitchFamily="34" charset="-120"/>
                         </a:rPr>
-                        <a:t>GSQZ880.6</a:t>
+                        <a:t>GSQZ880.6  </a:t>
                       </a:r>
                       <a:pPr indent="0" marL="0">
                         <a:buNone/>
                       </a:pPr>
                       <a:r>
-                        <a:rPr lang="en-US" sz="850" dirty="0">
-                          <a:solidFill>
-                            <a:srgbClr val="9AA6B2"/>
-                          </a:solidFill>
-                          <a:latin typeface="Calibri" pitchFamily="34" charset="0"/>
-                          <a:ea typeface="Calibri" pitchFamily="34" charset="-122"/>
-                          <a:cs typeface="Calibri" pitchFamily="34" charset="-120"/>
-                        </a:rPr>
-                        <a:t>  88 tm   </a:t>
-                      </a:r>
-                      <a:pPr indent="0" marL="0">
-                        <a:buNone/>
-                      </a:pPr>
-                      <a:r>
-                        <a:rPr lang="en-US" sz="850" b="1" dirty="0">
+                        <a:rPr lang="en-US" sz="1000" b="1" dirty="0">
                           <a:solidFill>
                             <a:srgbClr val="FF8A8F"/>
                           </a:solidFill>
@@ -40040,7 +39606,7 @@
                         </a:rPr>
                         <a:t>+211%</a:t>
                       </a:r>
-                      <a:endParaRPr lang="en-US" sz="850" dirty="0">
+                      <a:endParaRPr lang="en-US" sz="950" dirty="0">
                         <a:latin typeface="Calibri" charset="0"/>
                         <a:ea typeface="Calibri" charset="0"/>
                         <a:cs typeface="Calibri" charset="0"/>
@@ -40051,7 +39617,7 @@
                         <a:buNone/>
                       </a:pPr>
                       <a:r>
-                        <a:rPr lang="en-US" sz="850" dirty="0">
+                        <a:rPr lang="en-US" sz="950" dirty="0">
                           <a:solidFill>
                             <a:srgbClr val="9AA6B2"/>
                           </a:solidFill>
@@ -40059,9 +39625,9 @@
                           <a:ea typeface="Calibri" pitchFamily="34" charset="-122"/>
                           <a:cs typeface="Calibri" pitchFamily="34" charset="-120"/>
                         </a:rPr>
-                        <a:t>2 units · Rp 2.320.000.000</a:t>
+                        <a:t>88 tm · 2 units</a:t>
                       </a:r>
-                      <a:endParaRPr lang="en-US" sz="850" dirty="0">
+                      <a:endParaRPr lang="en-US" sz="950" dirty="0">
                         <a:latin typeface="Calibri" charset="0"/>
                         <a:ea typeface="Calibri" charset="0"/>
                         <a:cs typeface="Calibri" charset="0"/>
@@ -40072,7 +39638,7 @@
                         <a:buNone/>
                       </a:pPr>
                       <a:r>
-                        <a:rPr lang="en-US" sz="850" dirty="0">
+                        <a:rPr lang="en-US" sz="950" dirty="0">
                           <a:solidFill>
                             <a:srgbClr val="9AA6B2"/>
                           </a:solidFill>
@@ -40080,9 +39646,9 @@
                           <a:ea typeface="Calibri" pitchFamily="34" charset="-122"/>
                           <a:cs typeface="Calibri" pitchFamily="34" charset="-120"/>
                         </a:rPr>
-                        <a:t>Rp 1.320.000.000 per unit</a:t>
+                        <a:t>Rp 1.320.000.000</a:t>
                       </a:r>
-                      <a:endParaRPr lang="en-US" sz="850" dirty="0">
+                      <a:endParaRPr lang="en-US" sz="950" dirty="0">
                         <a:latin typeface="Calibri" charset="0"/>
                         <a:ea typeface="Calibri" charset="0"/>
                         <a:cs typeface="Calibri" charset="0"/>
@@ -40139,7 +39705,7 @@
                       <a:pPr indent="0" marL="0">
                         <a:buNone/>
                       </a:pPr>
-                      <a:endParaRPr lang="en-US" sz="850" dirty="0">
+                      <a:endParaRPr lang="en-US" sz="950" dirty="0">
                         <a:latin typeface="Calibri" charset="0"/>
                         <a:ea typeface="Calibri" charset="0"/>
                         <a:cs typeface="Calibri" charset="0"/>
@@ -40196,7 +39762,7 @@
                       <a:pPr indent="0" marL="0">
                         <a:buNone/>
                       </a:pPr>
-                      <a:endParaRPr lang="en-US" sz="850" dirty="0">
+                      <a:endParaRPr lang="en-US" sz="950" dirty="0">
                         <a:latin typeface="Calibri" charset="0"/>
                         <a:ea typeface="Calibri" charset="0"/>
                         <a:cs typeface="Calibri" charset="0"/>
@@ -40253,7 +39819,7 @@
                       <a:pPr indent="0" marL="0">
                         <a:buNone/>
                       </a:pPr>
-                      <a:endParaRPr lang="en-US" sz="850" dirty="0">
+                      <a:endParaRPr lang="en-US" sz="950" dirty="0">
                         <a:latin typeface="Calibri" charset="0"/>
                         <a:ea typeface="Calibri" charset="0"/>
                         <a:cs typeface="Calibri" charset="0"/>
@@ -40303,7 +39869,7 @@
                   </a:tcPr>
                 </a:tc>
               </a:tr>
-              <a:tr h="506190">
+              <a:tr h="508254">
                 <a:tc vMerge="1">
                   <a:tcPr/>
                 </a:tc>
@@ -40325,7 +39891,7 @@
                         <a:buNone/>
                       </a:pPr>
                       <a:r>
-                        <a:rPr lang="en-US" sz="900" b="1" dirty="0">
+                        <a:rPr lang="en-US" sz="1000" b="1" dirty="0">
                           <a:solidFill>
                             <a:srgbClr val="EEF1F4"/>
                           </a:solidFill>
@@ -40333,27 +39899,13 @@
                           <a:ea typeface="Calibri" pitchFamily="34" charset="-122"/>
                           <a:cs typeface="Calibri" pitchFamily="34" charset="-120"/>
                         </a:rPr>
-                        <a:t>GSQZ860.6</a:t>
+                        <a:t>GSQZ860.6  </a:t>
                       </a:r>
                       <a:pPr indent="0" marL="0">
                         <a:buNone/>
                       </a:pPr>
                       <a:r>
-                        <a:rPr lang="en-US" sz="850" dirty="0">
-                          <a:solidFill>
-                            <a:srgbClr val="9AA6B2"/>
-                          </a:solidFill>
-                          <a:latin typeface="Calibri" pitchFamily="34" charset="0"/>
-                          <a:ea typeface="Calibri" pitchFamily="34" charset="-122"/>
-                          <a:cs typeface="Calibri" pitchFamily="34" charset="-120"/>
-                        </a:rPr>
-                        <a:t>  86 tm   </a:t>
-                      </a:r>
-                      <a:pPr indent="0" marL="0">
-                        <a:buNone/>
-                      </a:pPr>
-                      <a:r>
-                        <a:rPr lang="en-US" sz="850" b="1" dirty="0">
+                        <a:rPr lang="en-US" sz="1000" b="1" dirty="0">
                           <a:solidFill>
                             <a:srgbClr val="FF8A8F"/>
                           </a:solidFill>
@@ -40363,7 +39915,7 @@
                         </a:rPr>
                         <a:t>+212%</a:t>
                       </a:r>
-                      <a:endParaRPr lang="en-US" sz="850" dirty="0">
+                      <a:endParaRPr lang="en-US" sz="950" dirty="0">
                         <a:latin typeface="Calibri" charset="0"/>
                         <a:ea typeface="Calibri" charset="0"/>
                         <a:cs typeface="Calibri" charset="0"/>
@@ -40374,7 +39926,7 @@
                         <a:buNone/>
                       </a:pPr>
                       <a:r>
-                        <a:rPr lang="en-US" sz="850" dirty="0">
+                        <a:rPr lang="en-US" sz="950" dirty="0">
                           <a:solidFill>
                             <a:srgbClr val="9AA6B2"/>
                           </a:solidFill>
@@ -40382,9 +39934,9 @@
                           <a:ea typeface="Calibri" pitchFamily="34" charset="-122"/>
                           <a:cs typeface="Calibri" pitchFamily="34" charset="-120"/>
                         </a:rPr>
-                        <a:t>2 units · Rp 2.320.000.000</a:t>
+                        <a:t>86 tm · 2 units</a:t>
                       </a:r>
-                      <a:endParaRPr lang="en-US" sz="850" dirty="0">
+                      <a:endParaRPr lang="en-US" sz="950" dirty="0">
                         <a:latin typeface="Calibri" charset="0"/>
                         <a:ea typeface="Calibri" charset="0"/>
                         <a:cs typeface="Calibri" charset="0"/>
@@ -40395,7 +39947,7 @@
                         <a:buNone/>
                       </a:pPr>
                       <a:r>
-                        <a:rPr lang="en-US" sz="850" dirty="0">
+                        <a:rPr lang="en-US" sz="950" dirty="0">
                           <a:solidFill>
                             <a:srgbClr val="9AA6B2"/>
                           </a:solidFill>
@@ -40403,9 +39955,9 @@
                           <a:ea typeface="Calibri" pitchFamily="34" charset="-122"/>
                           <a:cs typeface="Calibri" pitchFamily="34" charset="-120"/>
                         </a:rPr>
-                        <a:t>Rp 1.320.000.000 per unit</a:t>
+                        <a:t>Rp 1.320.000.000</a:t>
                       </a:r>
-                      <a:endParaRPr lang="en-US" sz="850" dirty="0">
+                      <a:endParaRPr lang="en-US" sz="950" dirty="0">
                         <a:latin typeface="Calibri" charset="0"/>
                         <a:ea typeface="Calibri" charset="0"/>
                         <a:cs typeface="Calibri" charset="0"/>
@@ -40476,7 +40028,7 @@
         </p:nvSpPr>
         <p:spPr>
           <a:xfrm>
-            <a:off x="2669286" y="1371600"/>
+            <a:off x="2878836" y="1371600"/>
             <a:ext cx="1234440" cy="237744"/>
           </a:xfrm>
           <a:prstGeom prst="roundRect">
@@ -40511,7 +40063,7 @@
         </p:blipFill>
         <p:spPr>
           <a:xfrm>
-            <a:off x="2894210" y="1403604"/>
+            <a:off x="3103760" y="1403604"/>
             <a:ext cx="784592" cy="173736"/>
           </a:xfrm>
           <a:prstGeom prst="rect">
@@ -40527,7 +40079,7 @@
         </p:nvSpPr>
         <p:spPr>
           <a:xfrm>
-            <a:off x="4213098" y="1371600"/>
+            <a:off x="4384548" y="1371600"/>
             <a:ext cx="1234440" cy="237744"/>
           </a:xfrm>
           <a:prstGeom prst="roundRect">
@@ -40562,7 +40114,7 @@
         </p:blipFill>
         <p:spPr>
           <a:xfrm>
-            <a:off x="4442105" y="1403604"/>
+            <a:off x="4613555" y="1403604"/>
             <a:ext cx="776426" cy="173736"/>
           </a:xfrm>
           <a:prstGeom prst="rect">
@@ -40578,7 +40130,7 @@
         </p:nvSpPr>
         <p:spPr>
           <a:xfrm>
-            <a:off x="5756910" y="1371600"/>
+            <a:off x="5890260" y="1371600"/>
             <a:ext cx="1234440" cy="237744"/>
           </a:xfrm>
           <a:prstGeom prst="roundRect">
@@ -40613,7 +40165,7 @@
         </p:blipFill>
         <p:spPr>
           <a:xfrm>
-            <a:off x="5975666" y="1403604"/>
+            <a:off x="6109016" y="1403604"/>
             <a:ext cx="796927" cy="173736"/>
           </a:xfrm>
           <a:prstGeom prst="rect">
@@ -40629,7 +40181,7 @@
         </p:nvSpPr>
         <p:spPr>
           <a:xfrm>
-            <a:off x="7300722" y="1371600"/>
+            <a:off x="7395972" y="1371600"/>
             <a:ext cx="1234440" cy="237744"/>
           </a:xfrm>
           <a:prstGeom prst="roundRect">
@@ -40664,7 +40216,7 @@
         </p:blipFill>
         <p:spPr>
           <a:xfrm>
-            <a:off x="7666546" y="1403604"/>
+            <a:off x="7761796" y="1403604"/>
             <a:ext cx="502792" cy="173736"/>
           </a:xfrm>
           <a:prstGeom prst="rect">
@@ -40680,7 +40232,7 @@
         </p:nvSpPr>
         <p:spPr>
           <a:xfrm>
-            <a:off x="8844534" y="1371600"/>
+            <a:off x="8901684" y="1371600"/>
             <a:ext cx="1234440" cy="237744"/>
           </a:xfrm>
           <a:prstGeom prst="roundRect">
@@ -40715,7 +40267,7 @@
         </p:blipFill>
         <p:spPr>
           <a:xfrm>
-            <a:off x="9118886" y="1403604"/>
+            <a:off x="9176036" y="1403604"/>
             <a:ext cx="685736" cy="173736"/>
           </a:xfrm>
           <a:prstGeom prst="rect">
@@ -40731,7 +40283,7 @@
         </p:nvSpPr>
         <p:spPr>
           <a:xfrm>
-            <a:off x="10388346" y="1371600"/>
+            <a:off x="10407396" y="1371600"/>
             <a:ext cx="1234440" cy="237744"/>
           </a:xfrm>
           <a:prstGeom prst="roundRect">
@@ -40766,7 +40318,7 @@
         </p:blipFill>
         <p:spPr>
           <a:xfrm>
-            <a:off x="10597808" y="1403604"/>
+            <a:off x="10616858" y="1403604"/>
             <a:ext cx="815517" cy="173736"/>
           </a:xfrm>
           <a:prstGeom prst="rect">
@@ -40782,7 +40334,7 @@
         </p:nvSpPr>
         <p:spPr>
           <a:xfrm>
-            <a:off x="411480" y="5980176"/>
+            <a:off x="411480" y="6053328"/>
             <a:ext cx="146304" cy="118872"/>
           </a:xfrm>
           <a:prstGeom prst="rect">
@@ -40807,7 +40359,7 @@
         </p:nvSpPr>
         <p:spPr>
           <a:xfrm>
-            <a:off x="621792" y="5934456"/>
+            <a:off x="621792" y="6007608"/>
             <a:ext cx="1828800" cy="201168"/>
           </a:xfrm>
           <a:prstGeom prst="rect">
@@ -40846,7 +40398,7 @@
         </p:nvSpPr>
         <p:spPr>
           <a:xfrm>
-            <a:off x="2514600" y="5980176"/>
+            <a:off x="2514600" y="6053328"/>
             <a:ext cx="146304" cy="118872"/>
           </a:xfrm>
           <a:prstGeom prst="rect">
@@ -40871,7 +40423,7 @@
         </p:nvSpPr>
         <p:spPr>
           <a:xfrm>
-            <a:off x="2724912" y="5934456"/>
+            <a:off x="2724912" y="6007608"/>
             <a:ext cx="1828800" cy="201168"/>
           </a:xfrm>
           <a:prstGeom prst="rect">
@@ -40910,7 +40462,7 @@
         </p:nvSpPr>
         <p:spPr>
           <a:xfrm>
-            <a:off x="4663440" y="5934456"/>
+            <a:off x="4663440" y="6007608"/>
             <a:ext cx="7132320" cy="201168"/>
           </a:xfrm>
           <a:prstGeom prst="rect">
@@ -40988,7 +40540,7 @@
                 <a:ea typeface="Calibri" pitchFamily="34" charset="-122"/>
                 <a:cs typeface="Calibri" pitchFamily="34" charset="-120"/>
               </a:rPr>
-              <a:t>Units and import value (before tax): Jan 2023 – 14 Aug 2026; Zoomlion and Hyva excluded. Competitors: average import unit price, Jan 2023 – 14 Aug 2026, × Rp 17.803/USD (JISDOR 23 Sep 2026) + import duty (0% China – ACFTA; 5% Europe, assumed) + PPN 11% + PPh 22 2.5%, before distributor margin. F.lli Ferrari: crane price from the TSP price list Rev1, June 2026 (column K minus column J), less the 13.6% TSP margin and 3% warranty. 990R: TSP price less Rp 168.000.000 cargo deck and install, then the same deductions. 9601CR A8: UTPE quote of 15 Sep 2026, crane only, no deduction; 50.7 tm per its load chart. 7441C is an estimate. Prices rounded to Rp 10.000.000.</a:t>
+              <a:t>Each model: F.lli Ferrari price difference; tm and units Jan 2023 – 14 Aug 2026; price per unit. Zoomlion and Hyva excluded. Competitors: average import unit price, Jan 2023 – 14 Aug 2026, × Rp 17.803/USD (JISDOR 23 Sep 2026) + import duty (0% China – ACFTA; 5% Europe, assumed) + PPN 11% + PPh 22 2.5%, before distributor margin. F.lli Ferrari: crane price from the TSP price list Rev1, June 2026 (column K minus column J), less the 13.6% TSP margin and 3% warranty. 990R: TSP price less Rp 168.000.000 cargo deck and install, then the same deductions. 9601CR A8: UTPE quote of 15 Sep 2026, crane only, no deduction; 50.7 tm per its load chart. 7441C is an estimate. Prices rounded to Rp 10.000.000.</a:t>
             </a:r>
             <a:endParaRPr lang="en-US" sz="750" dirty="0"/>
           </a:p>

--- a/slides/Flli_Ferrari_Market_Strategy_v5.pptx
+++ b/slides/Flli_Ferrari_Market_Strategy_v5.pptx
@@ -28411,12 +28411,12 @@
               <a:tblPr/>
               <a:tblGrid>
                 <a:gridCol w="960120"/>
-                <a:gridCol w="1600200"/>
-                <a:gridCol w="1761134"/>
-                <a:gridCol w="1761134"/>
-                <a:gridCol w="1761134"/>
-                <a:gridCol w="1761134"/>
-                <a:gridCol w="1761134"/>
+                <a:gridCol w="1828800"/>
+                <a:gridCol w="1715414"/>
+                <a:gridCol w="1715414"/>
+                <a:gridCol w="1715414"/>
+                <a:gridCol w="1715414"/>
+                <a:gridCol w="1715414"/>
               </a:tblGrid>
               <a:tr h="457200">
                 <a:tc>
@@ -29045,7 +29045,7 @@
                           <a:ea typeface="Calibri" pitchFamily="34" charset="-122"/>
                           <a:cs typeface="Calibri" pitchFamily="34" charset="-120"/>
                         </a:rPr>
-                        <a:t>Rp 500.000.000</a:t>
+                        <a:t>Rp 500.000.000 /unit</a:t>
                       </a:r>
                       <a:endParaRPr lang="en-US" sz="1250" dirty="0">
                         <a:latin typeface="Calibri" charset="0"/>
@@ -29226,7 +29226,7 @@
                           <a:ea typeface="Calibri" pitchFamily="34" charset="-122"/>
                           <a:cs typeface="Calibri" pitchFamily="34" charset="-120"/>
                         </a:rPr>
-                        <a:t>Rp 620.000.000</a:t>
+                        <a:t>Rp 620.000.000 /unit</a:t>
                       </a:r>
                       <a:endParaRPr lang="en-US" sz="1250" dirty="0">
                         <a:latin typeface="Calibri" charset="0"/>
@@ -29350,7 +29350,7 @@
                           <a:ea typeface="Calibri" pitchFamily="34" charset="-122"/>
                           <a:cs typeface="Calibri" pitchFamily="34" charset="-120"/>
                         </a:rPr>
-                        <a:t>Rp 490.000.000</a:t>
+                        <a:t>Rp 490.000.000 /unit</a:t>
                       </a:r>
                       <a:endParaRPr lang="en-US" sz="1250" dirty="0">
                         <a:latin typeface="Calibri" charset="0"/>
@@ -29656,7 +29656,7 @@
                           <a:ea typeface="Calibri" pitchFamily="34" charset="-122"/>
                           <a:cs typeface="Calibri" pitchFamily="34" charset="-120"/>
                         </a:rPr>
-                        <a:t>Rp 500.000.000</a:t>
+                        <a:t>Rp 500.000.000 /unit</a:t>
                       </a:r>
                       <a:endParaRPr lang="en-US" sz="1250" dirty="0">
                         <a:latin typeface="Calibri" charset="0"/>
@@ -29800,7 +29800,7 @@
                           <a:ea typeface="Calibri" pitchFamily="34" charset="-122"/>
                           <a:cs typeface="Calibri" pitchFamily="34" charset="-120"/>
                         </a:rPr>
-                        <a:t>Rp 570.000.000</a:t>
+                        <a:t>Rp 570.000.000 /unit</a:t>
                       </a:r>
                       <a:endParaRPr lang="en-US" sz="1250" dirty="0">
                         <a:latin typeface="Calibri" charset="0"/>
@@ -30028,7 +30028,7 @@
                           <a:ea typeface="Calibri" pitchFamily="34" charset="-122"/>
                           <a:cs typeface="Calibri" pitchFamily="34" charset="-120"/>
                         </a:rPr>
-                        <a:t>Rp 1.090.000.000</a:t>
+                        <a:t>Rp 1.090.000.000 /unit</a:t>
                       </a:r>
                       <a:endParaRPr lang="en-US" sz="1250" dirty="0">
                         <a:latin typeface="Calibri" charset="0"/>
@@ -30152,7 +30152,7 @@
                           <a:ea typeface="Calibri" pitchFamily="34" charset="-122"/>
                           <a:cs typeface="Calibri" pitchFamily="34" charset="-120"/>
                         </a:rPr>
-                        <a:t>Rp 440.000.000</a:t>
+                        <a:t>Rp 440.000.000 /unit</a:t>
                       </a:r>
                       <a:endParaRPr lang="en-US" sz="1250" dirty="0">
                         <a:latin typeface="Calibri" charset="0"/>
@@ -30276,7 +30276,7 @@
                           <a:ea typeface="Calibri" pitchFamily="34" charset="-122"/>
                           <a:cs typeface="Calibri" pitchFamily="34" charset="-120"/>
                         </a:rPr>
-                        <a:t>Rp 830.000.000</a:t>
+                        <a:t>Rp 830.000.000 /unit</a:t>
                       </a:r>
                       <a:endParaRPr lang="en-US" sz="1250" dirty="0">
                         <a:latin typeface="Calibri" charset="0"/>
@@ -30400,7 +30400,7 @@
                           <a:ea typeface="Calibri" pitchFamily="34" charset="-122"/>
                           <a:cs typeface="Calibri" pitchFamily="34" charset="-120"/>
                         </a:rPr>
-                        <a:t>Rp 700.000.000</a:t>
+                        <a:t>Rp 700.000.000 /unit</a:t>
                       </a:r>
                       <a:endParaRPr lang="en-US" sz="1250" dirty="0">
                         <a:latin typeface="Calibri" charset="0"/>
@@ -30524,7 +30524,7 @@
                           <a:ea typeface="Calibri" pitchFamily="34" charset="-122"/>
                           <a:cs typeface="Calibri" pitchFamily="34" charset="-120"/>
                         </a:rPr>
-                        <a:t>Rp 1.050.000.000</a:t>
+                        <a:t>Rp 1.050.000.000 /unit</a:t>
                       </a:r>
                       <a:endParaRPr lang="en-US" sz="1250" dirty="0">
                         <a:latin typeface="Calibri" charset="0"/>
@@ -30648,7 +30648,7 @@
                           <a:ea typeface="Calibri" pitchFamily="34" charset="-122"/>
                           <a:cs typeface="Calibri" pitchFamily="34" charset="-120"/>
                         </a:rPr>
-                        <a:t>Rp 950.000.000</a:t>
+                        <a:t>Rp 950.000.000 /unit</a:t>
                       </a:r>
                       <a:endParaRPr lang="en-US" sz="1250" dirty="0">
                         <a:latin typeface="Calibri" charset="0"/>
@@ -30894,7 +30894,7 @@
                           <a:ea typeface="Calibri" pitchFamily="34" charset="-122"/>
                           <a:cs typeface="Calibri" pitchFamily="34" charset="-120"/>
                         </a:rPr>
-                        <a:t>Rp 550.000.000</a:t>
+                        <a:t>Rp 550.000.000 /unit</a:t>
                       </a:r>
                       <a:endParaRPr lang="en-US" sz="1250" dirty="0">
                         <a:latin typeface="Calibri" charset="0"/>
@@ -31075,7 +31075,7 @@
                           <a:ea typeface="Calibri" pitchFamily="34" charset="-122"/>
                           <a:cs typeface="Calibri" pitchFamily="34" charset="-120"/>
                         </a:rPr>
-                        <a:t>Rp 1.120.000.000</a:t>
+                        <a:t>Rp 1.120.000.000 /unit</a:t>
                       </a:r>
                       <a:endParaRPr lang="en-US" sz="1250" dirty="0">
                         <a:latin typeface="Calibri" charset="0"/>
@@ -31139,7 +31139,7 @@
         </p:nvSpPr>
         <p:spPr>
           <a:xfrm>
-            <a:off x="3235147" y="1371600"/>
+            <a:off x="3440887" y="1371600"/>
             <a:ext cx="1234440" cy="237744"/>
           </a:xfrm>
           <a:prstGeom prst="roundRect">
@@ -31174,7 +31174,7 @@
         </p:blipFill>
         <p:spPr>
           <a:xfrm>
-            <a:off x="3444609" y="1403604"/>
+            <a:off x="3650349" y="1403604"/>
             <a:ext cx="815517" cy="173736"/>
           </a:xfrm>
           <a:prstGeom prst="rect">
@@ -31190,7 +31190,7 @@
         </p:nvSpPr>
         <p:spPr>
           <a:xfrm>
-            <a:off x="4996282" y="1371600"/>
+            <a:off x="5156302" y="1371600"/>
             <a:ext cx="1234440" cy="237744"/>
           </a:xfrm>
           <a:prstGeom prst="roundRect">
@@ -31225,7 +31225,7 @@
         </p:blipFill>
         <p:spPr>
           <a:xfrm>
-            <a:off x="5225289" y="1403604"/>
+            <a:off x="5385309" y="1403604"/>
             <a:ext cx="776426" cy="173736"/>
           </a:xfrm>
           <a:prstGeom prst="rect">
@@ -31241,7 +31241,7 @@
         </p:nvSpPr>
         <p:spPr>
           <a:xfrm>
-            <a:off x="6757416" y="1371600"/>
+            <a:off x="6871716" y="1371600"/>
             <a:ext cx="1234440" cy="237744"/>
           </a:xfrm>
           <a:prstGeom prst="roundRect">
@@ -31276,7 +31276,7 @@
         </p:blipFill>
         <p:spPr>
           <a:xfrm>
-            <a:off x="6976172" y="1403604"/>
+            <a:off x="7090472" y="1403604"/>
             <a:ext cx="796927" cy="173736"/>
           </a:xfrm>
           <a:prstGeom prst="rect">
@@ -31292,7 +31292,7 @@
         </p:nvSpPr>
         <p:spPr>
           <a:xfrm>
-            <a:off x="8518550" y="1371600"/>
+            <a:off x="8587130" y="1371600"/>
             <a:ext cx="1234440" cy="237744"/>
           </a:xfrm>
           <a:prstGeom prst="roundRect">
@@ -31327,7 +31327,7 @@
         </p:blipFill>
         <p:spPr>
           <a:xfrm>
-            <a:off x="8743475" y="1403604"/>
+            <a:off x="8812055" y="1403604"/>
             <a:ext cx="784592" cy="173736"/>
           </a:xfrm>
           <a:prstGeom prst="rect">
@@ -31343,7 +31343,7 @@
         </p:nvSpPr>
         <p:spPr>
           <a:xfrm>
-            <a:off x="10279685" y="1371600"/>
+            <a:off x="10302545" y="1371600"/>
             <a:ext cx="1234440" cy="237744"/>
           </a:xfrm>
           <a:prstGeom prst="roundRect">
@@ -31378,7 +31378,7 @@
         </p:blipFill>
         <p:spPr>
           <a:xfrm>
-            <a:off x="10645509" y="1403604"/>
+            <a:off x="10668369" y="1403604"/>
             <a:ext cx="502792" cy="173736"/>
           </a:xfrm>
           <a:prstGeom prst="rect">
@@ -31854,12 +31854,12 @@
               <a:tblPr/>
               <a:tblGrid>
                 <a:gridCol w="960120"/>
-                <a:gridCol w="1600200"/>
-                <a:gridCol w="1761134"/>
-                <a:gridCol w="1761134"/>
-                <a:gridCol w="1761134"/>
-                <a:gridCol w="1761134"/>
-                <a:gridCol w="1761134"/>
+                <a:gridCol w="1828800"/>
+                <a:gridCol w="1715414"/>
+                <a:gridCol w="1715414"/>
+                <a:gridCol w="1715414"/>
+                <a:gridCol w="1715414"/>
+                <a:gridCol w="1715414"/>
               </a:tblGrid>
               <a:tr h="457200">
                 <a:tc>
@@ -32488,7 +32488,7 @@
                           <a:ea typeface="Calibri" pitchFamily="34" charset="-122"/>
                           <a:cs typeface="Calibri" pitchFamily="34" charset="-120"/>
                         </a:rPr>
-                        <a:t>Rp 1.240.000.000</a:t>
+                        <a:t>Rp 1.240.000.000 /unit</a:t>
                       </a:r>
                       <a:endParaRPr lang="en-US" sz="1250" dirty="0">
                         <a:latin typeface="Calibri" charset="0"/>
@@ -32612,7 +32612,7 @@
                           <a:ea typeface="Calibri" pitchFamily="34" charset="-122"/>
                           <a:cs typeface="Calibri" pitchFamily="34" charset="-120"/>
                         </a:rPr>
-                        <a:t>Rp 490.000.000</a:t>
+                        <a:t>Rp 490.000.000 /unit</a:t>
                       </a:r>
                       <a:endParaRPr lang="en-US" sz="1250" dirty="0">
                         <a:latin typeface="Calibri" charset="0"/>
@@ -32793,7 +32793,7 @@
                           <a:ea typeface="Calibri" pitchFamily="34" charset="-122"/>
                           <a:cs typeface="Calibri" pitchFamily="34" charset="-120"/>
                         </a:rPr>
-                        <a:t>Rp 710.000.000</a:t>
+                        <a:t>Rp 710.000.000 /unit</a:t>
                       </a:r>
                       <a:endParaRPr lang="en-US" sz="1250" dirty="0">
                         <a:latin typeface="Calibri" charset="0"/>
@@ -32917,7 +32917,7 @@
                           <a:ea typeface="Calibri" pitchFamily="34" charset="-122"/>
                           <a:cs typeface="Calibri" pitchFamily="34" charset="-120"/>
                         </a:rPr>
-                        <a:t>Rp 1.310.000.000</a:t>
+                        <a:t>Rp 1.310.000.000 /unit</a:t>
                       </a:r>
                       <a:endParaRPr lang="en-US" sz="1250" dirty="0">
                         <a:latin typeface="Calibri" charset="0"/>
@@ -33166,7 +33166,7 @@
                           <a:ea typeface="Calibri" pitchFamily="34" charset="-122"/>
                           <a:cs typeface="Calibri" pitchFamily="34" charset="-120"/>
                         </a:rPr>
-                        <a:t>Rp 700.000.000</a:t>
+                        <a:t>Rp 700.000.000 /unit</a:t>
                       </a:r>
                       <a:endParaRPr lang="en-US" sz="1250" dirty="0">
                         <a:latin typeface="Calibri" charset="0"/>
@@ -33364,7 +33364,7 @@
                           <a:ea typeface="Calibri" pitchFamily="34" charset="-122"/>
                           <a:cs typeface="Calibri" pitchFamily="34" charset="-120"/>
                         </a:rPr>
-                        <a:t>Rp 570.000.000</a:t>
+                        <a:t>Rp 570.000.000 /unit</a:t>
                       </a:r>
                       <a:endParaRPr lang="en-US" sz="1250" dirty="0">
                         <a:latin typeface="Calibri" charset="0"/>
@@ -33508,7 +33508,7 @@
                           <a:ea typeface="Calibri" pitchFamily="34" charset="-122"/>
                           <a:cs typeface="Calibri" pitchFamily="34" charset="-120"/>
                         </a:rPr>
-                        <a:t>Rp 600.000.000</a:t>
+                        <a:t>Rp 600.000.000 /unit</a:t>
                       </a:r>
                       <a:endParaRPr lang="en-US" sz="1250" dirty="0">
                         <a:latin typeface="Calibri" charset="0"/>
@@ -33652,7 +33652,7 @@
                           <a:ea typeface="Calibri" pitchFamily="34" charset="-122"/>
                           <a:cs typeface="Calibri" pitchFamily="34" charset="-120"/>
                         </a:rPr>
-                        <a:t>Rp 540.000.000</a:t>
+                        <a:t>Rp 540.000.000 /unit</a:t>
                       </a:r>
                       <a:endParaRPr lang="en-US" sz="1250" dirty="0">
                         <a:latin typeface="Calibri" charset="0"/>
@@ -33859,7 +33859,7 @@
                           <a:ea typeface="Calibri" pitchFamily="34" charset="-122"/>
                           <a:cs typeface="Calibri" pitchFamily="34" charset="-120"/>
                         </a:rPr>
-                        <a:t>Rp 1.420.000.000</a:t>
+                        <a:t>Rp 1.420.000.000 /unit</a:t>
                       </a:r>
                       <a:endParaRPr lang="en-US" sz="1250" dirty="0">
                         <a:latin typeface="Calibri" charset="0"/>
@@ -33983,7 +33983,7 @@
                           <a:ea typeface="Calibri" pitchFamily="34" charset="-122"/>
                           <a:cs typeface="Calibri" pitchFamily="34" charset="-120"/>
                         </a:rPr>
-                        <a:t>Rp 790.000.000</a:t>
+                        <a:t>Rp 790.000.000 /unit</a:t>
                       </a:r>
                       <a:endParaRPr lang="en-US" sz="1250" dirty="0">
                         <a:latin typeface="Calibri" charset="0"/>
@@ -34107,7 +34107,7 @@
                           <a:ea typeface="Calibri" pitchFamily="34" charset="-122"/>
                           <a:cs typeface="Calibri" pitchFamily="34" charset="-120"/>
                         </a:rPr>
-                        <a:t>Rp 1.270.000.000</a:t>
+                        <a:t>Rp 1.270.000.000 /unit</a:t>
                       </a:r>
                       <a:endParaRPr lang="en-US" sz="1250" dirty="0">
                         <a:latin typeface="Calibri" charset="0"/>
@@ -34345,7 +34345,7 @@
                           <a:ea typeface="Calibri" pitchFamily="34" charset="-122"/>
                           <a:cs typeface="Calibri" pitchFamily="34" charset="-120"/>
                         </a:rPr>
-                        <a:t>Rp 560.000.000</a:t>
+                        <a:t>Rp 560.000.000 /unit</a:t>
                       </a:r>
                       <a:endParaRPr lang="en-US" sz="1250" dirty="0">
                         <a:latin typeface="Calibri" charset="0"/>
@@ -34409,7 +34409,7 @@
         </p:nvSpPr>
         <p:spPr>
           <a:xfrm>
-            <a:off x="3235147" y="1371600"/>
+            <a:off x="3440887" y="1371600"/>
             <a:ext cx="1234440" cy="237744"/>
           </a:xfrm>
           <a:prstGeom prst="roundRect">
@@ -34444,7 +34444,7 @@
         </p:blipFill>
         <p:spPr>
           <a:xfrm>
-            <a:off x="3444609" y="1403604"/>
+            <a:off x="3650349" y="1403604"/>
             <a:ext cx="815517" cy="173736"/>
           </a:xfrm>
           <a:prstGeom prst="rect">
@@ -34460,7 +34460,7 @@
         </p:nvSpPr>
         <p:spPr>
           <a:xfrm>
-            <a:off x="4996282" y="1371600"/>
+            <a:off x="5156302" y="1371600"/>
             <a:ext cx="1234440" cy="237744"/>
           </a:xfrm>
           <a:prstGeom prst="roundRect">
@@ -34495,7 +34495,7 @@
         </p:blipFill>
         <p:spPr>
           <a:xfrm>
-            <a:off x="5225289" y="1403604"/>
+            <a:off x="5385309" y="1403604"/>
             <a:ext cx="776426" cy="173736"/>
           </a:xfrm>
           <a:prstGeom prst="rect">
@@ -34511,7 +34511,7 @@
         </p:nvSpPr>
         <p:spPr>
           <a:xfrm>
-            <a:off x="6757416" y="1371600"/>
+            <a:off x="6871716" y="1371600"/>
             <a:ext cx="1234440" cy="237744"/>
           </a:xfrm>
           <a:prstGeom prst="roundRect">
@@ -34546,7 +34546,7 @@
         </p:blipFill>
         <p:spPr>
           <a:xfrm>
-            <a:off x="6976172" y="1403604"/>
+            <a:off x="7090472" y="1403604"/>
             <a:ext cx="796927" cy="173736"/>
           </a:xfrm>
           <a:prstGeom prst="rect">
@@ -34562,7 +34562,7 @@
         </p:nvSpPr>
         <p:spPr>
           <a:xfrm>
-            <a:off x="8518550" y="1371600"/>
+            <a:off x="8587130" y="1371600"/>
             <a:ext cx="1234440" cy="237744"/>
           </a:xfrm>
           <a:prstGeom prst="roundRect">
@@ -34597,7 +34597,7 @@
         </p:blipFill>
         <p:spPr>
           <a:xfrm>
-            <a:off x="8743475" y="1403604"/>
+            <a:off x="8812055" y="1403604"/>
             <a:ext cx="784592" cy="173736"/>
           </a:xfrm>
           <a:prstGeom prst="rect">
@@ -34613,7 +34613,7 @@
         </p:nvSpPr>
         <p:spPr>
           <a:xfrm>
-            <a:off x="10279685" y="1371600"/>
+            <a:off x="10302545" y="1371600"/>
             <a:ext cx="1234440" cy="237744"/>
           </a:xfrm>
           <a:prstGeom prst="roundRect">
@@ -34648,7 +34648,7 @@
         </p:blipFill>
         <p:spPr>
           <a:xfrm>
-            <a:off x="10645509" y="1403604"/>
+            <a:off x="10668369" y="1403604"/>
             <a:ext cx="502792" cy="173736"/>
           </a:xfrm>
           <a:prstGeom prst="rect">
@@ -35827,7 +35827,7 @@
                           <a:ea typeface="Calibri" pitchFamily="34" charset="-122"/>
                           <a:cs typeface="Calibri" pitchFamily="34" charset="-120"/>
                         </a:rPr>
-                        <a:t>Rp 1.350.000.000</a:t>
+                        <a:t>Rp 1.350.000.000 /unit</a:t>
                       </a:r>
                       <a:endParaRPr lang="en-US" sz="950" dirty="0">
                         <a:latin typeface="Calibri" charset="0"/>
@@ -36008,7 +36008,7 @@
                           <a:ea typeface="Calibri" pitchFamily="34" charset="-122"/>
                           <a:cs typeface="Calibri" pitchFamily="34" charset="-120"/>
                         </a:rPr>
-                        <a:t>Rp 1.880.000.000</a:t>
+                        <a:t>Rp 1.880.000.000 /unit</a:t>
                       </a:r>
                       <a:endParaRPr lang="en-US" sz="950" dirty="0">
                         <a:latin typeface="Calibri" charset="0"/>
@@ -36132,7 +36132,7 @@
                           <a:ea typeface="Calibri" pitchFamily="34" charset="-122"/>
                           <a:cs typeface="Calibri" pitchFamily="34" charset="-120"/>
                         </a:rPr>
-                        <a:t>Rp 810.000.000</a:t>
+                        <a:t>Rp 810.000.000 /unit</a:t>
                       </a:r>
                       <a:endParaRPr lang="en-US" sz="950" dirty="0">
                         <a:latin typeface="Calibri" charset="0"/>
@@ -36256,7 +36256,7 @@
                           <a:ea typeface="Calibri" pitchFamily="34" charset="-122"/>
                           <a:cs typeface="Calibri" pitchFamily="34" charset="-120"/>
                         </a:rPr>
-                        <a:t>Rp 1.510.000.000</a:t>
+                        <a:t>Rp 1.510.000.000 /unit</a:t>
                       </a:r>
                       <a:endParaRPr lang="en-US" sz="950" dirty="0">
                         <a:latin typeface="Calibri" charset="0"/>
@@ -36401,7 +36401,7 @@
                           <a:ea typeface="Calibri" pitchFamily="34" charset="-122"/>
                           <a:cs typeface="Calibri" pitchFamily="34" charset="-120"/>
                         </a:rPr>
-                        <a:t>Rp 1.610.000.000</a:t>
+                        <a:t>Rp 1.610.000.000 /unit</a:t>
                       </a:r>
                       <a:endParaRPr lang="en-US" sz="950" dirty="0">
                         <a:latin typeface="Calibri" charset="0"/>
@@ -36659,7 +36659,7 @@
                           <a:ea typeface="Calibri" pitchFamily="34" charset="-122"/>
                           <a:cs typeface="Calibri" pitchFamily="34" charset="-120"/>
                         </a:rPr>
-                        <a:t>Rp 3.260.000.000</a:t>
+                        <a:t>Rp 3.260.000.000 /unit</a:t>
                       </a:r>
                       <a:endParaRPr lang="en-US" sz="950" dirty="0">
                         <a:latin typeface="Calibri" charset="0"/>
@@ -36783,7 +36783,7 @@
                           <a:ea typeface="Calibri" pitchFamily="34" charset="-122"/>
                           <a:cs typeface="Calibri" pitchFamily="34" charset="-120"/>
                         </a:rPr>
-                        <a:t>Rp 1.620.000.000</a:t>
+                        <a:t>Rp 1.620.000.000 /unit</a:t>
                       </a:r>
                       <a:endParaRPr lang="en-US" sz="950" dirty="0">
                         <a:latin typeface="Calibri" charset="0"/>
@@ -37021,7 +37021,7 @@
                           <a:ea typeface="Calibri" pitchFamily="34" charset="-122"/>
                           <a:cs typeface="Calibri" pitchFamily="34" charset="-120"/>
                         </a:rPr>
-                        <a:t>Rp 3.370.000.000</a:t>
+                        <a:t>Rp 3.370.000.000 /unit</a:t>
                       </a:r>
                       <a:endParaRPr lang="en-US" sz="950" dirty="0">
                         <a:latin typeface="Calibri" charset="0"/>
@@ -37336,7 +37336,7 @@
                           <a:ea typeface="Calibri" pitchFamily="34" charset="-122"/>
                           <a:cs typeface="Calibri" pitchFamily="34" charset="-120"/>
                         </a:rPr>
-                        <a:t>Rp 2.030.000.000</a:t>
+                        <a:t>Rp 2.030.000.000 /unit</a:t>
                       </a:r>
                       <a:endParaRPr lang="en-US" sz="950" dirty="0">
                         <a:latin typeface="Calibri" charset="0"/>
@@ -38029,7 +38029,7 @@
                           <a:ea typeface="Calibri" pitchFamily="34" charset="-122"/>
                           <a:cs typeface="Calibri" pitchFamily="34" charset="-120"/>
                         </a:rPr>
-                        <a:t>Rp 1.400.000.000</a:t>
+                        <a:t>Rp 1.400.000.000 /unit</a:t>
                       </a:r>
                       <a:endParaRPr lang="en-US" sz="950" dirty="0">
                         <a:latin typeface="Calibri" charset="0"/>
@@ -38230,7 +38230,7 @@
                           <a:ea typeface="Calibri" pitchFamily="34" charset="-122"/>
                           <a:cs typeface="Calibri" pitchFamily="34" charset="-120"/>
                         </a:rPr>
-                        <a:t>Rp 4.110.000.000</a:t>
+                        <a:t>Rp 4.110.000.000 /unit</a:t>
                       </a:r>
                       <a:endParaRPr lang="en-US" sz="950" dirty="0">
                         <a:latin typeface="Calibri" charset="0"/>
@@ -38354,7 +38354,7 @@
                           <a:ea typeface="Calibri" pitchFamily="34" charset="-122"/>
                           <a:cs typeface="Calibri" pitchFamily="34" charset="-120"/>
                         </a:rPr>
-                        <a:t>Rp 2.290.000.000</a:t>
+                        <a:t>Rp 2.290.000.000 /unit</a:t>
                       </a:r>
                       <a:endParaRPr lang="en-US" sz="950" dirty="0">
                         <a:latin typeface="Calibri" charset="0"/>
@@ -38943,7 +38943,7 @@
                           <a:ea typeface="Calibri" pitchFamily="34" charset="-122"/>
                           <a:cs typeface="Calibri" pitchFamily="34" charset="-120"/>
                         </a:rPr>
-                        <a:t>Rp 2.220.000.000</a:t>
+                        <a:t>Rp 2.220.000.000 /unit</a:t>
                       </a:r>
                       <a:endParaRPr lang="en-US" sz="950" dirty="0">
                         <a:latin typeface="Calibri" charset="0"/>
@@ -39646,7 +39646,7 @@
                           <a:ea typeface="Calibri" pitchFamily="34" charset="-122"/>
                           <a:cs typeface="Calibri" pitchFamily="34" charset="-120"/>
                         </a:rPr>
-                        <a:t>Rp 1.320.000.000</a:t>
+                        <a:t>Rp 1.320.000.000 /unit</a:t>
                       </a:r>
                       <a:endParaRPr lang="en-US" sz="950" dirty="0">
                         <a:latin typeface="Calibri" charset="0"/>
@@ -39955,7 +39955,7 @@
                           <a:ea typeface="Calibri" pitchFamily="34" charset="-122"/>
                           <a:cs typeface="Calibri" pitchFamily="34" charset="-120"/>
                         </a:rPr>
-                        <a:t>Rp 1.320.000.000</a:t>
+                        <a:t>Rp 1.320.000.000 /unit</a:t>
                       </a:r>
                       <a:endParaRPr lang="en-US" sz="950" dirty="0">
                         <a:latin typeface="Calibri" charset="0"/>

--- a/slides/Flli_Ferrari_Market_Strategy_v5.pptx
+++ b/slides/Flli_Ferrari_Market_Strategy_v5.pptx
@@ -294,7 +294,7 @@
                 <c:formatCode>General</c:formatCode>
                 <c:ptCount val="4"/>
                 <c:pt idx="0">
-                  <c:v>59</c:v>
+                  <c:v>56</c:v>
                 </c:pt>
                 <c:pt idx="1">
                   <c:v>51</c:v>
@@ -386,10 +386,10 @@
                   <c:v>71</c:v>
                 </c:pt>
                 <c:pt idx="1">
-                  <c:v>69</c:v>
+                  <c:v>59</c:v>
                 </c:pt>
                 <c:pt idx="2">
-                  <c:v>59</c:v>
+                  <c:v>58</c:v>
                 </c:pt>
                 <c:pt idx="3">
                   <c:v>19</c:v>
@@ -4708,7 +4708,7 @@
                 <a:ea typeface="Cambria" pitchFamily="34" charset="-122"/>
                 <a:cs typeface="Cambria" pitchFamily="34" charset="-120"/>
               </a:rPr>
-              <a:t>Head to head, F.lli Ferrari is cheaper on 67 of 276 units, all against European brands</a:t>
+              <a:t>Head to head, F.lli Ferrari is cheaper on 76 of 265 units, all against European brands</a:t>
             </a:r>
             <a:endParaRPr lang="en-US" sz="2100" dirty="0"/>
           </a:p>
@@ -6243,7 +6243,7 @@
                           <a:ea typeface="Calibri" pitchFamily="34" charset="-122"/>
                           <a:cs typeface="Calibri" pitchFamily="34" charset="-120"/>
                         </a:rPr>
-                        <a:t>73</a:t>
+                        <a:t>62</a:t>
                       </a:r>
                       <a:endParaRPr lang="en-US" sz="950" dirty="0">
                         <a:latin typeface="Calibri" charset="0"/>
@@ -6447,7 +6447,7 @@
                           <a:ea typeface="Calibri" pitchFamily="34" charset="-122"/>
                           <a:cs typeface="Calibri" pitchFamily="34" charset="-120"/>
                         </a:rPr>
-                        <a:t>1 of 73</a:t>
+                        <a:t>10 of 62</a:t>
                       </a:r>
                       <a:endParaRPr lang="en-US" sz="950" dirty="0">
                         <a:latin typeface="Calibri" charset="0"/>
@@ -6515,7 +6515,7 @@
                           <a:ea typeface="Calibri" pitchFamily="34" charset="-122"/>
                           <a:cs typeface="Calibri" pitchFamily="34" charset="-120"/>
                         </a:rPr>
-                        <a:t>X-CLX 328 −2%</a:t>
+                        <a:t>X-CLX 388 −16%, X-CLX 328 −2%</a:t>
                       </a:r>
                       <a:endParaRPr lang="en-US" sz="950" dirty="0">
                         <a:latin typeface="Calibri" charset="0"/>
@@ -12050,7 +12050,7 @@
                 <a:ea typeface="Cambria" pitchFamily="34" charset="-122"/>
                 <a:cs typeface="Cambria" pitchFamily="34" charset="-120"/>
               </a:rPr>
-              <a:t>Sell FBR450R A4 and 268 A4 against European cranes, lead with quality against Chinese brands, and rework the 9601CR A8 price</a:t>
+              <a:t>Sell 268 A4, FBR350R A4 and FBR450R A4 against European cranes, lead with quality against Chinese brands, and rework the 9601CR A8 price</a:t>
             </a:r>
             <a:endParaRPr lang="en-US" sz="2100" dirty="0"/>
           </a:p>
@@ -12398,6 +12398,27 @@
                 <a:ea typeface="Calibri" pitchFamily="34" charset="-122"/>
                 <a:cs typeface="Calibri" pitchFamily="34" charset="-120"/>
               </a:rPr>
+              <a:t>FBR350R A4 vs Hiab X-CLX 388: −16%, 9 units</a:t>
+            </a:r>
+            <a:endParaRPr lang="en-US" sz="1200" dirty="0"/>
+          </a:p>
+          <a:p>
+            <a:pPr marL="342900" indent="-342900">
+              <a:spcAft>
+                <a:spcPts val="800"/>
+              </a:spcAft>
+              <a:buSzPct val="100000"/>
+              <a:buChar char="•"/>
+            </a:pPr>
+            <a:r>
+              <a:rPr lang="en-US" sz="1200" dirty="0">
+                <a:solidFill>
+                  <a:srgbClr val="EEF1F4"/>
+                </a:solidFill>
+                <a:latin typeface="Calibri" pitchFamily="34" charset="0"/>
+                <a:ea typeface="Calibri" pitchFamily="34" charset="-122"/>
+                <a:cs typeface="Calibri" pitchFamily="34" charset="-120"/>
+              </a:rPr>
               <a:t>FBR350R A4 vs Hiab X-CLX 328: −2%, 1 unit</a:t>
             </a:r>
             <a:endParaRPr lang="en-US" sz="1200" dirty="0"/>
@@ -12632,7 +12653,7 @@
                 <a:ea typeface="Calibri" pitchFamily="34" charset="-122"/>
                 <a:cs typeface="Calibri" pitchFamily="34" charset="-120"/>
               </a:rPr>
-              <a:t>They hold 129 of 276 Medium and Heavy units (47%).</a:t>
+              <a:t>They hold 129 of 265 Medium and Heavy units (49%).</a:t>
             </a:r>
             <a:endParaRPr lang="en-US" sz="1200" dirty="0"/>
           </a:p>
@@ -15287,7 +15308,7 @@
                 <a:ea typeface="Calibri" pitchFamily="34" charset="-122"/>
                 <a:cs typeface="Calibri" pitchFamily="34" charset="-120"/>
               </a:rPr>
-              <a:t>34.3 tm · 20 units</a:t>
+              <a:t>34.3 tm · 9 units</a:t>
             </a:r>
             <a:endParaRPr lang="en-US" sz="850" dirty="0"/>
           </a:p>
@@ -17779,7 +17800,7 @@
                 <a:ea typeface="Cambria" pitchFamily="34" charset="-122"/>
                 <a:cs typeface="Cambria" pitchFamily="34" charset="-120"/>
               </a:rPr>
-              <a:t>Medium and Heavy cranes are 42% of units but 65% of import value</a:t>
+              <a:t>Medium and Heavy cranes are 41% of units but 64% of import value</a:t>
             </a:r>
             <a:endParaRPr lang="en-US" sz="2100" dirty="0"/>
           </a:p>
@@ -18860,7 +18881,7 @@
                           <a:ea typeface="Calibri" pitchFamily="34" charset="-122"/>
                           <a:cs typeface="Calibri" pitchFamily="34" charset="-120"/>
                         </a:rPr>
-                        <a:t>203</a:t>
+                        <a:t>200</a:t>
                       </a:r>
                       <a:endParaRPr lang="en-US" sz="950" dirty="0">
                         <a:latin typeface="Calibri" charset="0"/>
@@ -18928,7 +18949,7 @@
                           <a:ea typeface="Calibri" pitchFamily="34" charset="-122"/>
                           <a:cs typeface="Calibri" pitchFamily="34" charset="-120"/>
                         </a:rPr>
-                        <a:t>Rp 79.518.000.000</a:t>
+                        <a:t>Rp 77.241.000.000</a:t>
                       </a:r>
                       <a:endParaRPr lang="en-US" sz="950" dirty="0">
                         <a:latin typeface="Calibri" charset="0"/>
@@ -18996,7 +19017,7 @@
                           <a:ea typeface="Calibri" pitchFamily="34" charset="-122"/>
                           <a:cs typeface="Calibri" pitchFamily="34" charset="-120"/>
                         </a:rPr>
-                        <a:t>24%</a:t>
+                        <a:t>23%</a:t>
                       </a:r>
                       <a:endParaRPr lang="en-US" sz="950" dirty="0">
                         <a:latin typeface="Calibri" charset="0"/>
@@ -19202,7 +19223,7 @@
                           <a:ea typeface="Calibri" pitchFamily="34" charset="-122"/>
                           <a:cs typeface="Calibri" pitchFamily="34" charset="-120"/>
                         </a:rPr>
-                        <a:t>211</a:t>
+                        <a:t>200</a:t>
                       </a:r>
                       <a:endParaRPr lang="en-US" sz="950" dirty="0">
                         <a:latin typeface="Calibri" charset="0"/>
@@ -19270,7 +19291,7 @@
                           <a:ea typeface="Calibri" pitchFamily="34" charset="-122"/>
                           <a:cs typeface="Calibri" pitchFamily="34" charset="-120"/>
                         </a:rPr>
-                        <a:t>Rp 126.338.000.000</a:t>
+                        <a:t>Rp 120.217.000.000</a:t>
                       </a:r>
                       <a:endParaRPr lang="en-US" sz="950" dirty="0">
                         <a:latin typeface="Calibri" charset="0"/>
@@ -19680,7 +19701,7 @@
                           <a:ea typeface="Calibri" pitchFamily="34" charset="-122"/>
                           <a:cs typeface="Calibri" pitchFamily="34" charset="-120"/>
                         </a:rPr>
-                        <a:t>27%</a:t>
+                        <a:t>28%</a:t>
                       </a:r>
                       <a:endParaRPr lang="en-US" sz="950" dirty="0">
                         <a:latin typeface="Calibri" charset="0"/>
@@ -19875,7 +19896,7 @@
                           <a:ea typeface="Calibri" pitchFamily="34" charset="-122"/>
                           <a:cs typeface="Calibri" pitchFamily="34" charset="-120"/>
                         </a:rPr>
-                        <a:t>656</a:t>
+                        <a:t>642</a:t>
                       </a:r>
                       <a:endParaRPr lang="en-US" sz="950" dirty="0">
                         <a:latin typeface="Calibri" charset="0"/>
@@ -19943,7 +19964,7 @@
                           <a:ea typeface="Calibri" pitchFamily="34" charset="-122"/>
                           <a:cs typeface="Calibri" pitchFamily="34" charset="-120"/>
                         </a:rPr>
-                        <a:t>Rp 337.128.000.000</a:t>
+                        <a:t>Rp 328.730.000.000</a:t>
                       </a:r>
                       <a:endParaRPr lang="en-US" sz="950" dirty="0">
                         <a:latin typeface="Calibri" charset="0"/>
@@ -20164,7 +20185,7 @@
                 <a:ea typeface="Calibri" pitchFamily="34" charset="-122"/>
                 <a:cs typeface="Calibri" pitchFamily="34" charset="-120"/>
               </a:rPr>
-              <a:t>71</a:t>
+              <a:t>68</a:t>
             </a:r>
             <a:endParaRPr lang="en-US" sz="3200" dirty="0"/>
           </a:p>
@@ -20499,7 +20520,7 @@
                 <a:ea typeface="Calibri" pitchFamily="34" charset="-122"/>
                 <a:cs typeface="Calibri" pitchFamily="34" charset="-120"/>
               </a:rPr>
-              <a:t>Fewer units per year, but 65% of the money. Average import value per unit is Rp 788.000.000 vs Rp 315.000.000 for Light + Small.</a:t>
+              <a:t>Fewer units per year, but 64% of the money. Average import value per unit is Rp 798.000.000 vs Rp 311.000.000 for Light + Small.</a:t>
             </a:r>
             <a:endParaRPr lang="en-US" sz="1050" dirty="0"/>
           </a:p>
@@ -20550,7 +20571,7 @@
                 <a:ea typeface="Calibri" pitchFamily="34" charset="-122"/>
                 <a:cs typeface="Calibri" pitchFamily="34" charset="-120"/>
               </a:rPr>
-              <a:t>89% of Medium and Heavy cranes need a truck with GVW of 24 t or more. They work in mining, construction and heavy logistics.</a:t>
+              <a:t>88% of Medium and Heavy cranes need a truck with GVW of 24 t or more. They work in mining, construction and heavy logistics.</a:t>
             </a:r>
             <a:endParaRPr lang="en-US" sz="1050" dirty="0"/>
           </a:p>
@@ -21434,8 +21455,8 @@
         </p:nvSpPr>
         <p:spPr>
           <a:xfrm>
-            <a:off x="585216" y="4023050"/>
-            <a:ext cx="566928" cy="110038"/>
+            <a:off x="585216" y="4043540"/>
+            <a:ext cx="566928" cy="89548"/>
           </a:xfrm>
           <a:prstGeom prst="rect">
             <a:avLst/>
@@ -21459,7 +21480,7 @@
         </p:nvSpPr>
         <p:spPr>
           <a:xfrm>
-            <a:off x="1152144" y="4023050"/>
+            <a:off x="1152144" y="4043540"/>
             <a:ext cx="347472" cy="0"/>
           </a:xfrm>
           <a:prstGeom prst="line">
@@ -21482,7 +21503,7 @@
         </p:nvSpPr>
         <p:spPr>
           <a:xfrm>
-            <a:off x="411480" y="3639002"/>
+            <a:off x="411480" y="3659492"/>
             <a:ext cx="914400" cy="365760"/>
           </a:xfrm>
           <a:prstGeom prst="rect">
@@ -21507,7 +21528,7 @@
                 <a:ea typeface="Calibri" pitchFamily="34" charset="-122"/>
                 <a:cs typeface="Calibri" pitchFamily="34" charset="-120"/>
               </a:rPr>
-              <a:t>5 units</a:t>
+              <a:t>4 units</a:t>
             </a:r>
             <a:endParaRPr lang="en-US" sz="950" dirty="0"/>
           </a:p>
@@ -21524,7 +21545,7 @@
                 <a:ea typeface="Calibri" pitchFamily="34" charset="-122"/>
                 <a:cs typeface="Calibri" pitchFamily="34" charset="-120"/>
               </a:rPr>
-              <a:t>Rp 2.340.000.000</a:t>
+              <a:t>Rp 1.889.000.000</a:t>
             </a:r>
             <a:endParaRPr lang="en-US" sz="950" dirty="0"/>
           </a:p>
@@ -21577,8 +21598,8 @@
         </p:nvSpPr>
         <p:spPr>
           <a:xfrm>
-            <a:off x="1499616" y="3913012"/>
-            <a:ext cx="566928" cy="110038"/>
+            <a:off x="1499616" y="3931605"/>
+            <a:ext cx="566928" cy="111935"/>
           </a:xfrm>
           <a:prstGeom prst="rect">
             <a:avLst/>
@@ -21602,7 +21623,7 @@
         </p:nvSpPr>
         <p:spPr>
           <a:xfrm>
-            <a:off x="2066544" y="3913012"/>
+            <a:off x="2066544" y="3931605"/>
             <a:ext cx="347472" cy="0"/>
           </a:xfrm>
           <a:prstGeom prst="line">
@@ -21625,7 +21646,7 @@
         </p:nvSpPr>
         <p:spPr>
           <a:xfrm>
-            <a:off x="1325880" y="3528964"/>
+            <a:off x="1325880" y="3547557"/>
             <a:ext cx="914400" cy="365760"/>
           </a:xfrm>
           <a:prstGeom prst="rect">
@@ -21720,8 +21741,8 @@
         </p:nvSpPr>
         <p:spPr>
           <a:xfrm>
-            <a:off x="2414016" y="3802974"/>
-            <a:ext cx="566928" cy="110038"/>
+            <a:off x="2414016" y="3819670"/>
+            <a:ext cx="566928" cy="111935"/>
           </a:xfrm>
           <a:prstGeom prst="rect">
             <a:avLst/>
@@ -21745,7 +21766,7 @@
         </p:nvSpPr>
         <p:spPr>
           <a:xfrm>
-            <a:off x="2980944" y="3802974"/>
+            <a:off x="2980944" y="3819670"/>
             <a:ext cx="347472" cy="0"/>
           </a:xfrm>
           <a:prstGeom prst="line">
@@ -21768,7 +21789,7 @@
         </p:nvSpPr>
         <p:spPr>
           <a:xfrm>
-            <a:off x="2240280" y="3418926"/>
+            <a:off x="2240280" y="3435622"/>
             <a:ext cx="914400" cy="365760"/>
           </a:xfrm>
           <a:prstGeom prst="rect">
@@ -21863,8 +21884,8 @@
         </p:nvSpPr>
         <p:spPr>
           <a:xfrm>
-            <a:off x="3328416" y="3494868"/>
-            <a:ext cx="566928" cy="308106"/>
+            <a:off x="3328416" y="3506251"/>
+            <a:ext cx="566928" cy="313418"/>
           </a:xfrm>
           <a:prstGeom prst="rect">
             <a:avLst/>
@@ -21888,7 +21909,7 @@
         </p:nvSpPr>
         <p:spPr>
           <a:xfrm>
-            <a:off x="3895344" y="3494868"/>
+            <a:off x="3895344" y="3506251"/>
             <a:ext cx="347472" cy="0"/>
           </a:xfrm>
           <a:prstGeom prst="line">
@@ -21911,7 +21932,7 @@
         </p:nvSpPr>
         <p:spPr>
           <a:xfrm>
-            <a:off x="3154680" y="3110820"/>
+            <a:off x="3154680" y="3122203"/>
             <a:ext cx="914400" cy="365760"/>
           </a:xfrm>
           <a:prstGeom prst="rect">
@@ -22007,7 +22028,7 @@
         <p:spPr>
           <a:xfrm>
             <a:off x="4242816" y="2834640"/>
-            <a:ext cx="566928" cy="660228"/>
+            <a:ext cx="566928" cy="671611"/>
           </a:xfrm>
           <a:prstGeom prst="rect">
             <a:avLst/>
@@ -22176,7 +22197,7 @@
                 <a:ea typeface="Calibri" pitchFamily="34" charset="-122"/>
                 <a:cs typeface="Calibri" pitchFamily="34" charset="-120"/>
               </a:rPr>
-              <a:t>59 units</a:t>
+              <a:t>58 units</a:t>
             </a:r>
             <a:endParaRPr lang="en-US" sz="950" dirty="0"/>
           </a:p>
@@ -22193,7 +22214,7 @@
                 <a:ea typeface="Calibri" pitchFamily="34" charset="-122"/>
                 <a:cs typeface="Calibri" pitchFamily="34" charset="-120"/>
               </a:rPr>
-              <a:t>Rp 30.345.000.000</a:t>
+              <a:t>Rp 29.894.000.000</a:t>
             </a:r>
             <a:endParaRPr lang="en-US" sz="950" dirty="0"/>
           </a:p>
@@ -28267,7 +28288,7 @@
                 <a:ea typeface="Cambria" pitchFamily="34" charset="-122"/>
                 <a:cs typeface="Cambria" pitchFamily="34" charset="-120"/>
               </a:rPr>
-              <a:t>Medium, 25–35 tm: F.lli Ferrari is cheaper head to head on V825 and X-CLX 328, 32 of 122 units</a:t>
+              <a:t>Medium, 25–35 tm: F.lli Ferrari is cheaper head to head on V825, X-CLX 388 and X-CLX 328, 41 of 111 units</a:t>
             </a:r>
             <a:endParaRPr lang="en-US" sz="2100" dirty="0"/>
           </a:p>
@@ -28844,7 +28865,7 @@
                           <a:ea typeface="Calibri" pitchFamily="34" charset="-122"/>
                           <a:cs typeface="Calibri" pitchFamily="34" charset="-120"/>
                         </a:rPr>
-                        <a:t>25 units</a:t>
+                        <a:t>14 units</a:t>
                       </a:r>
                       <a:endParaRPr lang="en-US" sz="1050" dirty="0">
                         <a:latin typeface="Calibri" charset="0"/>
@@ -29918,7 +29939,7 @@
                           <a:ea typeface="Calibri" pitchFamily="34" charset="-122"/>
                           <a:cs typeface="Calibri" pitchFamily="34" charset="-120"/>
                         </a:rPr>
-                        <a:t>73 units</a:t>
+                        <a:t>62 units</a:t>
                       </a:r>
                       <a:endParaRPr lang="en-US" sz="1250" dirty="0">
                         <a:latin typeface="Calibri" charset="0"/>
@@ -30600,13 +30621,13 @@
                       <a:r>
                         <a:rPr lang="en-US" sz="1300" b="1" dirty="0">
                           <a:solidFill>
-                            <a:srgbClr val="FF8A8F"/>
+                            <a:srgbClr val="2FBF71"/>
                           </a:solidFill>
                           <a:latin typeface="Calibri" pitchFamily="34" charset="0"/>
                           <a:ea typeface="Calibri" pitchFamily="34" charset="-122"/>
                           <a:cs typeface="Calibri" pitchFamily="34" charset="-120"/>
                         </a:rPr>
-                        <a:t>+15%</a:t>
+                        <a:t>−16%</a:t>
                       </a:r>
                       <a:endParaRPr lang="en-US" sz="1250" dirty="0">
                         <a:latin typeface="Calibri" charset="0"/>
@@ -30627,7 +30648,7 @@
                           <a:ea typeface="Calibri" pitchFamily="34" charset="-122"/>
                           <a:cs typeface="Calibri" pitchFamily="34" charset="-120"/>
                         </a:rPr>
-                        <a:t>34.3 tm · 20 units</a:t>
+                        <a:t>34.3 tm · 9 units</a:t>
                       </a:r>
                       <a:endParaRPr lang="en-US" sz="1250" dirty="0">
                         <a:latin typeface="Calibri" charset="0"/>
@@ -30648,7 +30669,7 @@
                           <a:ea typeface="Calibri" pitchFamily="34" charset="-122"/>
                           <a:cs typeface="Calibri" pitchFamily="34" charset="-120"/>
                         </a:rPr>
-                        <a:t>Rp 950.000.000 /unit</a:t>
+                        <a:t>Rp 1.290.000.000 /unit</a:t>
                       </a:r>
                       <a:endParaRPr lang="en-US" sz="1250" dirty="0">
                         <a:latin typeface="Calibri" charset="0"/>
@@ -30695,7 +30716,7 @@
                       <a:tailEnd type="none" w="med" len="med"/>
                     </a:lnB>
                     <a:solidFill>
-                      <a:srgbClr val="24151A"/>
+                      <a:srgbClr val="12301F"/>
                     </a:solidFill>
                   </a:tcPr>
                 </a:tc>
@@ -32287,7 +32308,7 @@
                           <a:ea typeface="Calibri" pitchFamily="34" charset="-122"/>
                           <a:cs typeface="Calibri" pitchFamily="34" charset="-120"/>
                         </a:rPr>
-                        <a:t>25 units</a:t>
+                        <a:t>14 units</a:t>
                       </a:r>
                       <a:endParaRPr lang="en-US" sz="1050" dirty="0">
                         <a:latin typeface="Calibri" charset="0"/>

--- a/slides/Flli_Ferrari_Market_Strategy_v5.pptx
+++ b/slides/Flli_Ferrari_Market_Strategy_v5.pptx
@@ -4708,7 +4708,7 @@
                 <a:ea typeface="Cambria" pitchFamily="34" charset="-122"/>
                 <a:cs typeface="Cambria" pitchFamily="34" charset="-120"/>
               </a:rPr>
-              <a:t>Head to head, F.lli Ferrari is cheaper on 76 of 265 units, all against European brands</a:t>
+              <a:t>Head to head, F.lli Ferrari is cheaper on 84 of 265 units, all against European brands</a:t>
             </a:r>
             <a:endParaRPr lang="en-US" sz="2100" dirty="0"/>
           </a:p>
@@ -5901,7 +5901,7 @@
                           <a:ea typeface="Calibri" pitchFamily="34" charset="-122"/>
                           <a:cs typeface="Calibri" pitchFamily="34" charset="-120"/>
                         </a:rPr>
-                        <a:t>V825 −19%, KSQZ300.4 −12% (smaller crane)</a:t>
+                        <a:t>V825 −23%, KSQZ300.3 −3% (smaller crane), KSQZ300.4 −12% (smaller crane)</a:t>
                       </a:r>
                       <a:endParaRPr lang="en-US" sz="950" dirty="0">
                         <a:latin typeface="Calibri" charset="0"/>
@@ -6447,7 +6447,7 @@
                           <a:ea typeface="Calibri" pitchFamily="34" charset="-122"/>
                           <a:cs typeface="Calibri" pitchFamily="34" charset="-120"/>
                         </a:rPr>
-                        <a:t>10 of 62</a:t>
+                        <a:t>18 of 62</a:t>
                       </a:r>
                       <a:endParaRPr lang="en-US" sz="950" dirty="0">
                         <a:latin typeface="Calibri" charset="0"/>
@@ -6515,7 +6515,7 @@
                           <a:ea typeface="Calibri" pitchFamily="34" charset="-122"/>
                           <a:cs typeface="Calibri" pitchFamily="34" charset="-120"/>
                         </a:rPr>
-                        <a:t>X-CLX 388 −16%, X-CLX 328 −2%</a:t>
+                        <a:t>PK 32080 C ±0%, X-CLX 388 −25%, X-CLX 328 −2%</a:t>
                       </a:r>
                       <a:endParaRPr lang="en-US" sz="950" dirty="0">
                         <a:latin typeface="Calibri" charset="0"/>
@@ -7129,7 +7129,7 @@
                           <a:ea typeface="Calibri" pitchFamily="34" charset="-122"/>
                           <a:cs typeface="Calibri" pitchFamily="34" charset="-120"/>
                         </a:rPr>
-                        <a:t>PK 41002 −5%</a:t>
+                        <a:t>PK 41002 −14%</a:t>
                       </a:r>
                       <a:endParaRPr lang="en-US" sz="950" dirty="0">
                         <a:latin typeface="Calibri" charset="0"/>
@@ -8357,7 +8357,7 @@
                           <a:ea typeface="Calibri" pitchFamily="34" charset="-122"/>
                           <a:cs typeface="Calibri" pitchFamily="34" charset="-120"/>
                         </a:rPr>
-                        <a:t>V950 −28%, EFFER 525H −10% (smaller crane), F485RA.2.23 −16%</a:t>
+                        <a:t>V950 −32%, EFFER 525H −10% (smaller crane), F485RA.2.23 −16%</a:t>
                       </a:r>
                       <a:endParaRPr lang="en-US" sz="950" dirty="0">
                         <a:latin typeface="Calibri" charset="0"/>
@@ -11940,7 +11940,7 @@
                 <a:ea typeface="Calibri" pitchFamily="34" charset="-122"/>
                 <a:cs typeface="Calibri" pitchFamily="34" charset="-120"/>
               </a:rPr>
-              <a:t>Head to head = the F.lli Ferrari model is about the same size or bigger. Smaller crane = cheaper, but not counted. Competitors: average import unit price, Jan 2023 – 14 Aug 2026, × Rp 17.803/USD (JISDOR 23 Sep 2026) + import duty (0% China – ACFTA; 5% Europe, assumed) + PPN 11% + PPh 22 2.5%, before distributor margin. F.lli Ferrari: crane price from the TSP price list Rev1, June 2026 (column K minus column J), less the 13.6% TSP margin and 3% warranty. 990R: TSP price less Rp 168.000.000 cargo deck and install, then the same deductions. 9601CR A8: UTPE quote of 15 Sep 2026, crane only, no deduction; 50.7 tm per its load chart. 7441C is an estimate. Prices rounded to Rp 10.000.000.</a:t>
+              <a:t>Head to head = the F.lli Ferrari model is about the same size or bigger. Smaller crane = cheaper, but not counted. Competitors: highest import unit price of the model, Jan 2023 – 14 Aug 2026, × Rp 17.803/USD (JISDOR 23 Sep 2026) + import duty (0% China – ACFTA; 5% Europe, assumed) + PPN 11% + PPh 22 2.5%, before distributor margin. F.lli Ferrari: crane price from the TSP price list Rev1, June 2026 (column K minus column J), less the 13.6% TSP margin and 3% warranty. 990R: TSP price less Rp 168.000.000 cargo deck and install, then the same deductions. 9601CR A8: UTPE quote of 15 Sep 2026, crane only, no deduction; 50.7 tm per its load chart. 7441C is an estimate. Prices rounded to Rp 10.000.000.</a:t>
             </a:r>
             <a:endParaRPr lang="en-US" sz="750" dirty="0"/>
           </a:p>
@@ -12335,7 +12335,7 @@
                 <a:ea typeface="Calibri" pitchFamily="34" charset="-122"/>
                 <a:cs typeface="Calibri" pitchFamily="34" charset="-120"/>
               </a:rPr>
-              <a:t>268 A4 vs Amco Veba V825: −19%, 31 units</a:t>
+              <a:t>268 A4 vs Amco Veba V825: −23%, 31 units</a:t>
             </a:r>
             <a:endParaRPr lang="en-US" sz="1200" dirty="0"/>
           </a:p>
@@ -12356,7 +12356,7 @@
                 <a:ea typeface="Calibri" pitchFamily="34" charset="-122"/>
                 <a:cs typeface="Calibri" pitchFamily="34" charset="-120"/>
               </a:rPr>
-              <a:t>7441C (est.) vs Palfinger PK 41002: −5%, 21 units</a:t>
+              <a:t>7441C (est.) vs Palfinger PK 41002: −14%, 21 units</a:t>
             </a:r>
             <a:endParaRPr lang="en-US" sz="1200" dirty="0"/>
           </a:p>
@@ -12377,7 +12377,7 @@
                 <a:ea typeface="Calibri" pitchFamily="34" charset="-122"/>
                 <a:cs typeface="Calibri" pitchFamily="34" charset="-120"/>
               </a:rPr>
-              <a:t>FBR450R A4 vs Amco Veba V950: −28%, 12 units</a:t>
+              <a:t>FBR450R A4 vs Amco Veba V950: −32%, 12 units</a:t>
             </a:r>
             <a:endParaRPr lang="en-US" sz="1200" dirty="0"/>
           </a:p>
@@ -12398,7 +12398,28 @@
                 <a:ea typeface="Calibri" pitchFamily="34" charset="-122"/>
                 <a:cs typeface="Calibri" pitchFamily="34" charset="-120"/>
               </a:rPr>
-              <a:t>FBR350R A4 vs Hiab X-CLX 388: −16%, 9 units</a:t>
+              <a:t>FBR350R A4 vs Hiab X-CLX 388: −25%, 9 units</a:t>
+            </a:r>
+            <a:endParaRPr lang="en-US" sz="1200" dirty="0"/>
+          </a:p>
+          <a:p>
+            <a:pPr marL="342900" indent="-342900">
+              <a:spcAft>
+                <a:spcPts val="800"/>
+              </a:spcAft>
+              <a:buSzPct val="100000"/>
+              <a:buChar char="•"/>
+            </a:pPr>
+            <a:r>
+              <a:rPr lang="en-US" sz="1200" dirty="0">
+                <a:solidFill>
+                  <a:srgbClr val="EEF1F4"/>
+                </a:solidFill>
+                <a:latin typeface="Calibri" pitchFamily="34" charset="0"/>
+                <a:ea typeface="Calibri" pitchFamily="34" charset="-122"/>
+                <a:cs typeface="Calibri" pitchFamily="34" charset="-120"/>
+              </a:rPr>
+              <a:t>FBR350R A4 vs Palfinger PK 32080 C: ±0%, 8 units</a:t>
             </a:r>
             <a:endParaRPr lang="en-US" sz="1200" dirty="0"/>
           </a:p>
@@ -12632,7 +12653,7 @@
                 <a:ea typeface="Calibri" pitchFamily="34" charset="-122"/>
                 <a:cs typeface="Calibri" pitchFamily="34" charset="-120"/>
               </a:rPr>
-              <a:t>Sany Palfinger and XCMG sell for less on 15 of 16 models (F.lli Ferrari −12% to +212%).</a:t>
+              <a:t>Sany Palfinger and XCMG sell for less on 14 of 16 models (F.lli Ferrari −12% to +212%).</a:t>
             </a:r>
             <a:endParaRPr lang="en-US" sz="1200" dirty="0"/>
           </a:p>
@@ -12845,7 +12866,7 @@
                 <a:ea typeface="Calibri" pitchFamily="34" charset="-122"/>
                 <a:cs typeface="Calibri" pitchFamily="34" charset="-120"/>
               </a:rPr>
-              <a:t>9601CR A8 (50.7 tm) matches PK 53002 on size, but costs +101%. PK 53002 sold 39 units, the most of any Heavy model.</a:t>
+              <a:t>9601CR A8 (50.7 tm) matches PK 53002 on size, but costs +85%. PK 53002 sold 39 units, the most of any Heavy model.</a:t>
             </a:r>
             <a:endParaRPr lang="en-US" sz="1200" dirty="0"/>
           </a:p>
@@ -13004,7 +13025,7 @@
                 <a:ea typeface="Calibri" pitchFamily="34" charset="-122"/>
                 <a:cs typeface="Calibri" pitchFamily="34" charset="-120"/>
               </a:rPr>
-              <a:t>Units = Jan 2023 – 14 Aug 2026 imports, Medium + Heavy, all models. Competitors: average import unit price, Jan 2023 – 14 Aug 2026, × Rp 17.803/USD (JISDOR 23 Sep 2026) + import duty (0% China – ACFTA; 5% Europe, assumed) + PPN 11% + PPh 22 2.5%, before distributor margin. F.lli Ferrari: crane price from the TSP price list Rev1, June 2026 (column K minus column J), less the 13.6% TSP margin and 3% warranty. 990R: TSP price less Rp 168.000.000 cargo deck and install, then the same deductions. 9601CR A8: UTPE quote of 15 Sep 2026, crane only, no deduction; 50.7 tm per its load chart. 7441C is an estimate. Prices rounded to Rp 10.000.000.</a:t>
+              <a:t>Units = Jan 2023 – 14 Aug 2026 imports, Medium + Heavy, all models. Competitors: highest import unit price of the model, Jan 2023 – 14 Aug 2026, × Rp 17.803/USD (JISDOR 23 Sep 2026) + import duty (0% China – ACFTA; 5% Europe, assumed) + PPN 11% + PPh 22 2.5%, before distributor margin. F.lli Ferrari: crane price from the TSP price list Rev1, June 2026 (column K minus column J), less the 13.6% TSP margin and 3% warranty. 990R: TSP price less Rp 168.000.000 cargo deck and install, then the same deductions. 9601CR A8: UTPE quote of 15 Sep 2026, crane only, no deduction; 50.7 tm per its load chart. 7441C is an estimate. Prices rounded to Rp 10.000.000.</a:t>
             </a:r>
             <a:endParaRPr lang="en-US" sz="750" dirty="0"/>
           </a:p>
@@ -28288,7 +28309,7 @@
                 <a:ea typeface="Cambria" pitchFamily="34" charset="-122"/>
                 <a:cs typeface="Cambria" pitchFamily="34" charset="-120"/>
               </a:rPr>
-              <a:t>Medium, 25–35 tm: F.lli Ferrari is cheaper head to head on V825, X-CLX 388 and X-CLX 328, 41 of 111 units</a:t>
+              <a:t>Medium, 25–35 tm: F.lli Ferrari is cheaper head to head on V825, PK 32080 C, X-CLX 388 and X-CLX 328, 49 of 111 units</a:t>
             </a:r>
             <a:endParaRPr lang="en-US" sz="2100" dirty="0"/>
           </a:p>
@@ -28917,7 +28938,7 @@
                   </a:tcPr>
                 </a:tc>
               </a:tr>
-              <a:tr h="757428">
+              <a:tr h="909828">
                 <a:tc rowSpan="3">
                   <a:txBody>
                     <a:bodyPr/>
@@ -29205,7 +29226,7 @@
                           <a:ea typeface="Calibri" pitchFamily="34" charset="-122"/>
                           <a:cs typeface="Calibri" pitchFamily="34" charset="-120"/>
                         </a:rPr>
-                        <a:t>−19%</a:t>
+                        <a:t>−23%</a:t>
                       </a:r>
                       <a:endParaRPr lang="en-US" sz="1250" dirty="0">
                         <a:latin typeface="Calibri" charset="0"/>
@@ -29247,7 +29268,7 @@
                           <a:ea typeface="Calibri" pitchFamily="34" charset="-122"/>
                           <a:cs typeface="Calibri" pitchFamily="34" charset="-120"/>
                         </a:rPr>
-                        <a:t>Rp 620.000.000 /unit</a:t>
+                        <a:t>Rp 650.000.000 /unit</a:t>
                       </a:r>
                       <a:endParaRPr lang="en-US" sz="1250" dirty="0">
                         <a:latin typeface="Calibri" charset="0"/>
@@ -29323,13 +29344,13 @@
                       <a:r>
                         <a:rPr lang="en-US" sz="1300" b="1" dirty="0">
                           <a:solidFill>
-                            <a:srgbClr val="FF8A8F"/>
+                            <a:srgbClr val="2FBF71"/>
                           </a:solidFill>
                           <a:latin typeface="Calibri" pitchFamily="34" charset="0"/>
                           <a:ea typeface="Calibri" pitchFamily="34" charset="-122"/>
                           <a:cs typeface="Calibri" pitchFamily="34" charset="-120"/>
                         </a:rPr>
-                        <a:t>+2%</a:t>
+                        <a:t>−3%</a:t>
                       </a:r>
                       <a:endParaRPr lang="en-US" sz="1250" dirty="0">
                         <a:latin typeface="Calibri" charset="0"/>
@@ -29371,7 +29392,28 @@
                           <a:ea typeface="Calibri" pitchFamily="34" charset="-122"/>
                           <a:cs typeface="Calibri" pitchFamily="34" charset="-120"/>
                         </a:rPr>
-                        <a:t>Rp 490.000.000 /unit</a:t>
+                        <a:t>Rp 510.000.000 /unit</a:t>
+                      </a:r>
+                      <a:endParaRPr lang="en-US" sz="1250" dirty="0">
+                        <a:latin typeface="Calibri" charset="0"/>
+                        <a:ea typeface="Calibri" charset="0"/>
+                        <a:cs typeface="Calibri" charset="0"/>
+                      </a:endParaRPr>
+                    </a:p>
+                    <a:p>
+                      <a:pPr indent="0" marL="0">
+                        <a:buNone/>
+                      </a:pPr>
+                      <a:r>
+                        <a:rPr lang="en-US" sz="1150" dirty="0">
+                          <a:solidFill>
+                            <a:srgbClr val="F5C26B"/>
+                          </a:solidFill>
+                          <a:latin typeface="Calibri" pitchFamily="34" charset="0"/>
+                          <a:ea typeface="Calibri" pitchFamily="34" charset="-122"/>
+                          <a:cs typeface="Calibri" pitchFamily="34" charset="-120"/>
+                        </a:rPr>
+                        <a:t>smaller crane</a:t>
                       </a:r>
                       <a:endParaRPr lang="en-US" sz="1250" dirty="0">
                         <a:latin typeface="Calibri" charset="0"/>
@@ -29418,7 +29460,7 @@
                       <a:tailEnd type="none" w="med" len="med"/>
                     </a:lnB>
                     <a:solidFill>
-                      <a:srgbClr val="24151A"/>
+                      <a:srgbClr val="12301F"/>
                     </a:solidFill>
                   </a:tcPr>
                 </a:tc>
@@ -29537,7 +29579,7 @@
                   </a:tcPr>
                 </a:tc>
               </a:tr>
-              <a:tr h="757428">
+              <a:tr h="719328">
                 <a:tc vMerge="1">
                   <a:tcPr/>
                 </a:tc>
@@ -29735,7 +29777,7 @@
                   <a:tcPr/>
                 </a:tc>
               </a:tr>
-              <a:tr h="947928">
+              <a:tr h="909828">
                 <a:tc vMerge="1">
                   <a:tcPr/>
                 </a:tc>
@@ -29900,7 +29942,7 @@
                   <a:tcPr/>
                 </a:tc>
               </a:tr>
-              <a:tr h="757428">
+              <a:tr h="719328">
                 <a:tc rowSpan="2">
                   <a:txBody>
                     <a:bodyPr/>
@@ -30131,7 +30173,7 @@
                           <a:ea typeface="Calibri" pitchFamily="34" charset="-122"/>
                           <a:cs typeface="Calibri" pitchFamily="34" charset="-120"/>
                         </a:rPr>
-                        <a:t>+147%</a:t>
+                        <a:t>+107%</a:t>
                       </a:r>
                       <a:endParaRPr lang="en-US" sz="1250" dirty="0">
                         <a:latin typeface="Calibri" charset="0"/>
@@ -30173,7 +30215,7 @@
                           <a:ea typeface="Calibri" pitchFamily="34" charset="-122"/>
                           <a:cs typeface="Calibri" pitchFamily="34" charset="-120"/>
                         </a:rPr>
-                        <a:t>Rp 440.000.000 /unit</a:t>
+                        <a:t>Rp 530.000.000 /unit</a:t>
                       </a:r>
                       <a:endParaRPr lang="en-US" sz="1250" dirty="0">
                         <a:latin typeface="Calibri" charset="0"/>
@@ -30255,7 +30297,7 @@
                           <a:ea typeface="Calibri" pitchFamily="34" charset="-122"/>
                           <a:cs typeface="Calibri" pitchFamily="34" charset="-120"/>
                         </a:rPr>
-                        <a:t>+31%</a:t>
+                        <a:t>+30%</a:t>
                       </a:r>
                       <a:endParaRPr lang="en-US" sz="1250" dirty="0">
                         <a:latin typeface="Calibri" charset="0"/>
@@ -30297,7 +30339,7 @@
                           <a:ea typeface="Calibri" pitchFamily="34" charset="-122"/>
                           <a:cs typeface="Calibri" pitchFamily="34" charset="-120"/>
                         </a:rPr>
-                        <a:t>Rp 830.000.000 /unit</a:t>
+                        <a:t>Rp 840.000.000 /unit</a:t>
                       </a:r>
                       <a:endParaRPr lang="en-US" sz="1250" dirty="0">
                         <a:latin typeface="Calibri" charset="0"/>
@@ -30379,7 +30421,7 @@
                           <a:ea typeface="Calibri" pitchFamily="34" charset="-122"/>
                           <a:cs typeface="Calibri" pitchFamily="34" charset="-120"/>
                         </a:rPr>
-                        <a:t>+57%</a:t>
+                        <a:t>+40%</a:t>
                       </a:r>
                       <a:endParaRPr lang="en-US" sz="1250" dirty="0">
                         <a:latin typeface="Calibri" charset="0"/>
@@ -30421,7 +30463,7 @@
                           <a:ea typeface="Calibri" pitchFamily="34" charset="-122"/>
                           <a:cs typeface="Calibri" pitchFamily="34" charset="-120"/>
                         </a:rPr>
-                        <a:t>Rp 700.000.000 /unit</a:t>
+                        <a:t>Rp 780.000.000 /unit</a:t>
                       </a:r>
                       <a:endParaRPr lang="en-US" sz="1250" dirty="0">
                         <a:latin typeface="Calibri" charset="0"/>
@@ -30497,13 +30539,13 @@
                       <a:r>
                         <a:rPr lang="en-US" sz="1300" b="1" dirty="0">
                           <a:solidFill>
-                            <a:srgbClr val="FF8A8F"/>
+                            <a:srgbClr val="2FBF71"/>
                           </a:solidFill>
                           <a:latin typeface="Calibri" pitchFamily="34" charset="0"/>
                           <a:ea typeface="Calibri" pitchFamily="34" charset="-122"/>
                           <a:cs typeface="Calibri" pitchFamily="34" charset="-120"/>
                         </a:rPr>
-                        <a:t>+4%</a:t>
+                        <a:t>±0%</a:t>
                       </a:r>
                       <a:endParaRPr lang="en-US" sz="1250" dirty="0">
                         <a:latin typeface="Calibri" charset="0"/>
@@ -30545,7 +30587,7 @@
                           <a:ea typeface="Calibri" pitchFamily="34" charset="-122"/>
                           <a:cs typeface="Calibri" pitchFamily="34" charset="-120"/>
                         </a:rPr>
-                        <a:t>Rp 1.050.000.000 /unit</a:t>
+                        <a:t>Rp 1.090.000.000 /unit</a:t>
                       </a:r>
                       <a:endParaRPr lang="en-US" sz="1250" dirty="0">
                         <a:latin typeface="Calibri" charset="0"/>
@@ -30592,7 +30634,7 @@
                       <a:tailEnd type="none" w="med" len="med"/>
                     </a:lnB>
                     <a:solidFill>
-                      <a:srgbClr val="24151A"/>
+                      <a:srgbClr val="12301F"/>
                     </a:solidFill>
                   </a:tcPr>
                 </a:tc>
@@ -30627,7 +30669,7 @@
                           <a:ea typeface="Calibri" pitchFamily="34" charset="-122"/>
                           <a:cs typeface="Calibri" pitchFamily="34" charset="-120"/>
                         </a:rPr>
-                        <a:t>−16%</a:t>
+                        <a:t>−25%</a:t>
                       </a:r>
                       <a:endParaRPr lang="en-US" sz="1250" dirty="0">
                         <a:latin typeface="Calibri" charset="0"/>
@@ -30669,7 +30711,7 @@
                           <a:ea typeface="Calibri" pitchFamily="34" charset="-122"/>
                           <a:cs typeface="Calibri" pitchFamily="34" charset="-120"/>
                         </a:rPr>
-                        <a:t>Rp 1.290.000.000 /unit</a:t>
+                        <a:t>Rp 1.460.000.000 /unit</a:t>
                       </a:r>
                       <a:endParaRPr lang="en-US" sz="1250" dirty="0">
                         <a:latin typeface="Calibri" charset="0"/>
@@ -30721,7 +30763,7 @@
                   </a:tcPr>
                 </a:tc>
               </a:tr>
-              <a:tr h="757428">
+              <a:tr h="719328">
                 <a:tc vMerge="1">
                   <a:tcPr/>
                 </a:tc>
@@ -30873,7 +30915,7 @@
                           <a:ea typeface="Calibri" pitchFamily="34" charset="-122"/>
                           <a:cs typeface="Calibri" pitchFamily="34" charset="-120"/>
                         </a:rPr>
-                        <a:t>+99%</a:t>
+                        <a:t>+98%</a:t>
                       </a:r>
                       <a:endParaRPr lang="en-US" sz="1250" dirty="0">
                         <a:latin typeface="Calibri" charset="0"/>
@@ -31621,7 +31663,7 @@
                 <a:ea typeface="Calibri" pitchFamily="34" charset="-122"/>
                 <a:cs typeface="Calibri" pitchFamily="34" charset="-120"/>
               </a:rPr>
-              <a:t>Each model: F.lli Ferrari price difference; tm and units Jan 2023 – 14 Aug 2026; price per unit. Zoomlion and Hyva excluded. Competitors: average import unit price, Jan 2023 – 14 Aug 2026, × Rp 17.803/USD (JISDOR 23 Sep 2026) + import duty (0% China – ACFTA; 5% Europe, assumed) + PPN 11% + PPh 22 2.5%, before distributor margin. F.lli Ferrari: crane price from the TSP price list Rev1, June 2026 (column K minus column J), less the 13.6% TSP margin and 3% warranty. 990R: TSP price less Rp 168.000.000 cargo deck and install, then the same deductions. 9601CR A8: UTPE quote of 15 Sep 2026, crane only, no deduction; 50.7 tm per its load chart. 7441C is an estimate. Prices rounded to Rp 10.000.000.</a:t>
+              <a:t>Each model: F.lli Ferrari price difference; tm and units Jan 2023 – 14 Aug 2026; price per unit. Zoomlion and Hyva excluded. Competitors: highest import unit price of the model, Jan 2023 – 14 Aug 2026, × Rp 17.803/USD (JISDOR 23 Sep 2026) + import duty (0% China – ACFTA; 5% Europe, assumed) + PPN 11% + PPh 22 2.5%, before distributor margin. F.lli Ferrari: crane price from the TSP price list Rev1, June 2026 (column K minus column J), less the 13.6% TSP margin and 3% warranty. 990R: TSP price less Rp 168.000.000 cargo deck and install, then the same deductions. 9601CR A8: UTPE quote of 15 Sep 2026, crane only, no deduction; 50.7 tm per its load chart. 7441C is an estimate. Prices rounded to Rp 10.000.000.</a:t>
             </a:r>
             <a:endParaRPr lang="en-US" sz="750" dirty="0"/>
           </a:p>
@@ -32591,7 +32633,7 @@
                           <a:ea typeface="Calibri" pitchFamily="34" charset="-122"/>
                           <a:cs typeface="Calibri" pitchFamily="34" charset="-120"/>
                         </a:rPr>
-                        <a:t>+154%</a:t>
+                        <a:t>+88%</a:t>
                       </a:r>
                       <a:endParaRPr lang="en-US" sz="1250" dirty="0">
                         <a:latin typeface="Calibri" charset="0"/>
@@ -32633,7 +32675,7 @@
                           <a:ea typeface="Calibri" pitchFamily="34" charset="-122"/>
                           <a:cs typeface="Calibri" pitchFamily="34" charset="-120"/>
                         </a:rPr>
-                        <a:t>Rp 490.000.000 /unit</a:t>
+                        <a:t>Rp 660.000.000 /unit</a:t>
                       </a:r>
                       <a:endParaRPr lang="en-US" sz="1250" dirty="0">
                         <a:latin typeface="Calibri" charset="0"/>
@@ -32772,7 +32814,7 @@
                           <a:ea typeface="Calibri" pitchFamily="34" charset="-122"/>
                           <a:cs typeface="Calibri" pitchFamily="34" charset="-120"/>
                         </a:rPr>
-                        <a:t>+76%</a:t>
+                        <a:t>+66%</a:t>
                       </a:r>
                       <a:endParaRPr lang="en-US" sz="1250" dirty="0">
                         <a:latin typeface="Calibri" charset="0"/>
@@ -32814,7 +32856,7 @@
                           <a:ea typeface="Calibri" pitchFamily="34" charset="-122"/>
                           <a:cs typeface="Calibri" pitchFamily="34" charset="-120"/>
                         </a:rPr>
-                        <a:t>Rp 710.000.000 /unit</a:t>
+                        <a:t>Rp 750.000.000 /unit</a:t>
                       </a:r>
                       <a:endParaRPr lang="en-US" sz="1250" dirty="0">
                         <a:latin typeface="Calibri" charset="0"/>
@@ -32896,7 +32938,7 @@
                           <a:ea typeface="Calibri" pitchFamily="34" charset="-122"/>
                           <a:cs typeface="Calibri" pitchFamily="34" charset="-120"/>
                         </a:rPr>
-                        <a:t>−5%</a:t>
+                        <a:t>−14%</a:t>
                       </a:r>
                       <a:endParaRPr lang="en-US" sz="1250" dirty="0">
                         <a:latin typeface="Calibri" charset="0"/>
@@ -32938,7 +32980,7 @@
                           <a:ea typeface="Calibri" pitchFamily="34" charset="-122"/>
                           <a:cs typeface="Calibri" pitchFamily="34" charset="-120"/>
                         </a:rPr>
-                        <a:t>Rp 1.310.000.000 /unit</a:t>
+                        <a:t>Rp 1.440.000.000 /unit</a:t>
                       </a:r>
                       <a:endParaRPr lang="en-US" sz="1250" dirty="0">
                         <a:latin typeface="Calibri" charset="0"/>
@@ -33343,7 +33385,7 @@
                           <a:ea typeface="Calibri" pitchFamily="34" charset="-122"/>
                           <a:cs typeface="Calibri" pitchFamily="34" charset="-120"/>
                         </a:rPr>
-                        <a:t>+120%</a:t>
+                        <a:t>+107%</a:t>
                       </a:r>
                       <a:endParaRPr lang="en-US" sz="1250" dirty="0">
                         <a:latin typeface="Calibri" charset="0"/>
@@ -33385,7 +33427,7 @@
                           <a:ea typeface="Calibri" pitchFamily="34" charset="-122"/>
                           <a:cs typeface="Calibri" pitchFamily="34" charset="-120"/>
                         </a:rPr>
-                        <a:t>Rp 570.000.000 /unit</a:t>
+                        <a:t>Rp 600.000.000 /unit</a:t>
                       </a:r>
                       <a:endParaRPr lang="en-US" sz="1250" dirty="0">
                         <a:latin typeface="Calibri" charset="0"/>
@@ -33962,7 +34004,7 @@
                           <a:ea typeface="Calibri" pitchFamily="34" charset="-122"/>
                           <a:cs typeface="Calibri" pitchFamily="34" charset="-120"/>
                         </a:rPr>
-                        <a:t>+81%</a:t>
+                        <a:t>+48%</a:t>
                       </a:r>
                       <a:endParaRPr lang="en-US" sz="1250" dirty="0">
                         <a:latin typeface="Calibri" charset="0"/>
@@ -34004,7 +34046,7 @@
                           <a:ea typeface="Calibri" pitchFamily="34" charset="-122"/>
                           <a:cs typeface="Calibri" pitchFamily="34" charset="-120"/>
                         </a:rPr>
-                        <a:t>Rp 790.000.000 /unit</a:t>
+                        <a:t>Rp 960.000.000 /unit</a:t>
                       </a:r>
                       <a:endParaRPr lang="en-US" sz="1250" dirty="0">
                         <a:latin typeface="Calibri" charset="0"/>
@@ -34891,7 +34933,7 @@
                 <a:ea typeface="Calibri" pitchFamily="34" charset="-122"/>
                 <a:cs typeface="Calibri" pitchFamily="34" charset="-120"/>
               </a:rPr>
-              <a:t>Each model: F.lli Ferrari price difference; tm and units Jan 2023 – 14 Aug 2026; price per unit. Zoomlion and Hyva excluded. Competitors: average import unit price, Jan 2023 – 14 Aug 2026, × Rp 17.803/USD (JISDOR 23 Sep 2026) + import duty (0% China – ACFTA; 5% Europe, assumed) + PPN 11% + PPh 22 2.5%, before distributor margin. F.lli Ferrari: crane price from the TSP price list Rev1, June 2026 (column K minus column J), less the 13.6% TSP margin and 3% warranty. 990R: TSP price less Rp 168.000.000 cargo deck and install, then the same deductions. 9601CR A8: UTPE quote of 15 Sep 2026, crane only, no deduction; 50.7 tm per its load chart. 7441C is an estimate. Prices rounded to Rp 10.000.000.</a:t>
+              <a:t>Each model: F.lli Ferrari price difference; tm and units Jan 2023 – 14 Aug 2026; price per unit. Zoomlion and Hyva excluded. Competitors: highest import unit price of the model, Jan 2023 – 14 Aug 2026, × Rp 17.803/USD (JISDOR 23 Sep 2026) + import duty (0% China – ACFTA; 5% Europe, assumed) + PPN 11% + PPh 22 2.5%, before distributor margin. F.lli Ferrari: crane price from the TSP price list Rev1, June 2026 (column K minus column J), less the 13.6% TSP margin and 3% warranty. 990R: TSP price less Rp 168.000.000 cargo deck and install, then the same deductions. 9601CR A8: UTPE quote of 15 Sep 2026, crane only, no deduction; 50.7 tm per its load chart. 7441C is an estimate. Prices rounded to Rp 10.000.000.</a:t>
             </a:r>
             <a:endParaRPr lang="en-US" sz="750" dirty="0"/>
           </a:p>
@@ -35987,7 +36029,7 @@
                           <a:ea typeface="Calibri" pitchFamily="34" charset="-122"/>
                           <a:cs typeface="Calibri" pitchFamily="34" charset="-120"/>
                         </a:rPr>
-                        <a:t>−28%</a:t>
+                        <a:t>−32%</a:t>
                       </a:r>
                       <a:endParaRPr lang="en-US" sz="950" dirty="0">
                         <a:latin typeface="Calibri" charset="0"/>
@@ -36029,7 +36071,7 @@
                           <a:ea typeface="Calibri" pitchFamily="34" charset="-122"/>
                           <a:cs typeface="Calibri" pitchFamily="34" charset="-120"/>
                         </a:rPr>
-                        <a:t>Rp 1.880.000.000 /unit</a:t>
+                        <a:t>Rp 1.990.000.000 /unit</a:t>
                       </a:r>
                       <a:endParaRPr lang="en-US" sz="950" dirty="0">
                         <a:latin typeface="Calibri" charset="0"/>
@@ -36762,7 +36804,7 @@
                           <a:ea typeface="Calibri" pitchFamily="34" charset="-122"/>
                           <a:cs typeface="Calibri" pitchFamily="34" charset="-120"/>
                         </a:rPr>
-                        <a:t>+101%</a:t>
+                        <a:t>+85%</a:t>
                       </a:r>
                       <a:endParaRPr lang="en-US" sz="950" dirty="0">
                         <a:latin typeface="Calibri" charset="0"/>
@@ -36804,7 +36846,7 @@
                           <a:ea typeface="Calibri" pitchFamily="34" charset="-122"/>
                           <a:cs typeface="Calibri" pitchFamily="34" charset="-120"/>
                         </a:rPr>
-                        <a:t>Rp 1.620.000.000 /unit</a:t>
+                        <a:t>Rp 1.760.000.000 /unit</a:t>
                       </a:r>
                       <a:endParaRPr lang="en-US" sz="950" dirty="0">
                         <a:latin typeface="Calibri" charset="0"/>
@@ -40561,7 +40603,7 @@
                 <a:ea typeface="Calibri" pitchFamily="34" charset="-122"/>
                 <a:cs typeface="Calibri" pitchFamily="34" charset="-120"/>
               </a:rPr>
-              <a:t>Each model: F.lli Ferrari price difference; tm and units Jan 2023 – 14 Aug 2026; price per unit. Zoomlion and Hyva excluded. Competitors: average import unit price, Jan 2023 – 14 Aug 2026, × Rp 17.803/USD (JISDOR 23 Sep 2026) + import duty (0% China – ACFTA; 5% Europe, assumed) + PPN 11% + PPh 22 2.5%, before distributor margin. F.lli Ferrari: crane price from the TSP price list Rev1, June 2026 (column K minus column J), less the 13.6% TSP margin and 3% warranty. 990R: TSP price less Rp 168.000.000 cargo deck and install, then the same deductions. 9601CR A8: UTPE quote of 15 Sep 2026, crane only, no deduction; 50.7 tm per its load chart. 7441C is an estimate. Prices rounded to Rp 10.000.000.</a:t>
+              <a:t>Each model: F.lli Ferrari price difference; tm and units Jan 2023 – 14 Aug 2026; price per unit. Zoomlion and Hyva excluded. Competitors: highest import unit price of the model, Jan 2023 – 14 Aug 2026, × Rp 17.803/USD (JISDOR 23 Sep 2026) + import duty (0% China – ACFTA; 5% Europe, assumed) + PPN 11% + PPh 22 2.5%, before distributor margin. F.lli Ferrari: crane price from the TSP price list Rev1, June 2026 (column K minus column J), less the 13.6% TSP margin and 3% warranty. 990R: TSP price less Rp 168.000.000 cargo deck and install, then the same deductions. 9601CR A8: UTPE quote of 15 Sep 2026, crane only, no deduction; 50.7 tm per its load chart. 7441C is an estimate. Prices rounded to Rp 10.000.000.</a:t>
             </a:r>
             <a:endParaRPr lang="en-US" sz="750" dirty="0"/>
           </a:p>
